--- a/Borradores/Entrega 1/PRESENTACION_FASE_1_PROYECTO_ACE.pptx
+++ b/Borradores/Entrega 1/PRESENTACION_FASE_1_PROYECTO_ACE.pptx
@@ -6,12 +6,14 @@
   </p:sldMasterIdLst>
   <p:sldIdLst>
     <p:sldId id="256" r:id="rId7"/>
+    <p:sldId id="267" r:id="rId19"/>
     <p:sldId id="257" r:id="rId9"/>
     <p:sldId id="258" r:id="rId10"/>
     <p:sldId id="259" r:id="rId11"/>
     <p:sldId id="260" r:id="rId12"/>
     <p:sldId id="261" r:id="rId13"/>
     <p:sldId id="262" r:id="rId14"/>
+    <p:sldId id="268" r:id="rId20"/>
     <p:sldId id="263" r:id="rId15"/>
     <p:sldId id="264" r:id="rId16"/>
     <p:sldId id="265" r:id="rId17"/>
@@ -4443,7 +4445,7 @@
               </a:defRPr>
             </a:pPr>
             <a:r>
-              <a:t>Arquitectura &amp; Backend API</a:t>
+              <a:t>Arquitectura, Backend &amp; Base de Datos</a:t>
             </a:r>
           </a:p>
           <a:p>
@@ -4456,7 +4458,7 @@
               </a:defRPr>
             </a:pPr>
             <a:r>
-              <a:t>Lógica de servidor Laravel, Sincronización WebSockets, Resiliencia de red.</a:t>
+              <a:t>Lógica Laravel, WebSockets, Modelado ER y Resiliencia de red.</a:t>
             </a:r>
           </a:p>
         </p:txBody>
@@ -4530,7 +4532,7 @@
               </a:defRPr>
             </a:pPr>
             <a:r>
-              <a:t>Gestión Ágil &amp; Cliente</a:t>
+              <a:t>Gestión Ágil, Base de Datos &amp; Cliente</a:t>
             </a:r>
           </a:p>
           <a:p>
@@ -4543,7 +4545,7 @@
               </a:defRPr>
             </a:pPr>
             <a:r>
-              <a:t>Vinculación Lumina Motion, Gestión Scrum, Seguimiento de Gantt y Calidad.</a:t>
+              <a:t>Vinculación Lumina Motion, Migraciones MariaDB, Gestión Scrum y UAT.</a:t>
             </a:r>
           </a:p>
         </p:txBody>
@@ -4617,7 +4619,7 @@
               </a:defRPr>
             </a:pPr>
             <a:r>
-              <a:t>Frontend &amp; Base de Datos</a:t>
+              <a:t>Frontend, Base de Datos &amp; Documentación</a:t>
             </a:r>
           </a:p>
           <a:p>
@@ -4630,7 +4632,7 @@
               </a:defRPr>
             </a:pPr>
             <a:r>
-              <a:t>Modelado relacional MariaDB 3FN, Interfaces Blade/UI, Estandarización documental.</a:t>
+              <a:t>Interfaces Blade/UI, Consultas/Migraciones MariaDB, Estandarización documental.</a:t>
             </a:r>
           </a:p>
         </p:txBody>
@@ -4735,7 +4737,7 @@
               </a:defRPr>
             </a:pPr>
             <a:r>
-              <a:t>Glosario Técnico Disciplinar Indispensable</a:t>
+              <a:t>Plan de Trabajo y Carta Gantt — 18 Semanas</a:t>
             </a:r>
           </a:p>
           <a:p>
@@ -4751,7 +4753,7 @@
               </a:defRPr>
             </a:pPr>
             <a:r>
-              <a:t>Conceptos Clave para la Defensa Individual (Indicador 11 - 10 pts)</a:t>
+              <a:t>Ruta Crítica e Hitos Evaluativos Académicos (PTY4614)</a:t>
             </a:r>
           </a:p>
         </p:txBody>
@@ -4806,7 +4808,7 @@
               </a:defRPr>
             </a:pPr>
             <a:r>
-              <a:t>Todo el Equipo</a:t>
+              <a:t>Paulo Loyola | Bloque 3</a:t>
             </a:r>
           </a:p>
         </p:txBody>
@@ -4820,7 +4822,7 @@
         <p:spPr>
           <a:xfrm>
             <a:off x="731520" y="1645920"/>
-            <a:ext cx="5212080" cy="2103120"/>
+            <a:ext cx="2468880" cy="4572000"/>
           </a:xfrm>
           <a:prstGeom prst="roundRect">
             <a:avLst/>
@@ -4864,7 +4866,7 @@
               </a:defRPr>
             </a:pPr>
             <a:r>
-              <a:t>1. Resiliencia Offline / Fail-Safe</a:t>
+              <a:t>Fase 1: Definición (S1-S4)</a:t>
             </a:r>
           </a:p>
           <a:p>
@@ -4882,7 +4884,7 @@
                   <a:srgbClr val="1E3A8A"/>
                 </a:solidFill>
               </a:rPr>
-              <a:t>Definición: </a:t>
+              <a:t>S1-S2: </a:t>
             </a:r>
             <a:r>
               <a:rPr>
@@ -4890,7 +4892,59 @@
                   <a:srgbClr val="334155"/>
                 </a:solidFill>
               </a:rPr>
-              <a:t>Capacidad del nodo reproductor de continuar ejecutando la parrilla multimedia programada utilizando almacenamiento local cuando se interrumpe la conexión a internet.</a:t>
+              <a:t>Constitución y diagnóstico en terreno con Lumina.</a:t>
+            </a:r>
+          </a:p>
+          <a:p>
+            <a:pPr>
+              <a:spcAft>
+                <a:spcPts val="500"/>
+              </a:spcAft>
+              <a:defRPr sz="1100">
+                <a:latin typeface="Arial"/>
+              </a:defRPr>
+            </a:pPr>
+            <a:r>
+              <a:rPr b="1">
+                <a:solidFill>
+                  <a:srgbClr val="1E3A8A"/>
+                </a:solidFill>
+              </a:rPr>
+              <a:t>S3: </a:t>
+            </a:r>
+            <a:r>
+              <a:rPr>
+                <a:solidFill>
+                  <a:srgbClr val="334155"/>
+                </a:solidFill>
+              </a:rPr>
+              <a:t>Stack tecnológico y formalización de objetivos.</a:t>
+            </a:r>
+          </a:p>
+          <a:p>
+            <a:pPr>
+              <a:spcAft>
+                <a:spcPts val="500"/>
+              </a:spcAft>
+              <a:defRPr sz="1100">
+                <a:latin typeface="Arial"/>
+              </a:defRPr>
+            </a:pPr>
+            <a:r>
+              <a:rPr b="1">
+                <a:solidFill>
+                  <a:srgbClr val="1E3A8A"/>
+                </a:solidFill>
+              </a:rPr>
+              <a:t>S4 [HITO 1]: </a:t>
+            </a:r>
+            <a:r>
+              <a:rPr>
+                <a:solidFill>
+                  <a:srgbClr val="334155"/>
+                </a:solidFill>
+              </a:rPr>
+              <a:t>Entrega Informe Fase 1 y Exposición Grupal.</a:t>
             </a:r>
           </a:p>
         </p:txBody>
@@ -4904,7 +4958,7 @@
         <p:spPr>
           <a:xfrm>
             <a:off x="777240" y="1691640"/>
-            <a:ext cx="5120640" cy="73152"/>
+            <a:ext cx="2377440" cy="73152"/>
           </a:xfrm>
           <a:prstGeom prst="rect">
             <a:avLst/>
@@ -4946,8 +5000,8 @@
         </p:nvSpPr>
         <p:spPr>
           <a:xfrm>
-            <a:off x="6217920" y="1645920"/>
-            <a:ext cx="5212080" cy="2103120"/>
+            <a:off x="3474720" y="1645920"/>
+            <a:ext cx="2468880" cy="4572000"/>
           </a:xfrm>
           <a:prstGeom prst="roundRect">
             <a:avLst/>
@@ -4991,7 +5045,7 @@
               </a:defRPr>
             </a:pPr>
             <a:r>
-              <a:t>2. Integridad Criptográfica (SHA-256)</a:t>
+              <a:t>Fase 2: Core (S5-S10)</a:t>
             </a:r>
           </a:p>
           <a:p>
@@ -5009,7 +5063,7 @@
                   <a:srgbClr val="1E3A8A"/>
                 </a:solidFill>
               </a:rPr>
-              <a:t>Definición: </a:t>
+              <a:t>S5-S6: </a:t>
             </a:r>
             <a:r>
               <a:rPr>
@@ -5017,7 +5071,59 @@
                   <a:srgbClr val="334155"/>
                 </a:solidFill>
               </a:rPr>
-              <a:t>Mecanismo de validación por hash que garantiza que los archivos de video descargados en el reproductor no sufrieron corrupción durante la transferencia de red antes de ser emitidos.</a:t>
+              <a:t>Modelado MariaDB y migraciones Laravel.</a:t>
+            </a:r>
+          </a:p>
+          <a:p>
+            <a:pPr>
+              <a:spcAft>
+                <a:spcPts val="500"/>
+              </a:spcAft>
+              <a:defRPr sz="1100">
+                <a:latin typeface="Arial"/>
+              </a:defRPr>
+            </a:pPr>
+            <a:r>
+              <a:rPr b="1">
+                <a:solidFill>
+                  <a:srgbClr val="1E3A8A"/>
+                </a:solidFill>
+              </a:rPr>
+              <a:t>S7-S8: </a:t>
+            </a:r>
+            <a:r>
+              <a:rPr>
+                <a:solidFill>
+                  <a:srgbClr val="334155"/>
+                </a:solidFill>
+              </a:rPr>
+              <a:t>API RESTful, Auth JWT y carga con SHA-256.</a:t>
+            </a:r>
+          </a:p>
+          <a:p>
+            <a:pPr>
+              <a:spcAft>
+                <a:spcPts val="500"/>
+              </a:spcAft>
+              <a:defRPr sz="1100">
+                <a:latin typeface="Arial"/>
+              </a:defRPr>
+            </a:pPr>
+            <a:r>
+              <a:rPr b="1">
+                <a:solidFill>
+                  <a:srgbClr val="1E3A8A"/>
+                </a:solidFill>
+              </a:rPr>
+              <a:t>S9-S10 [HITO 2]: </a:t>
+            </a:r>
+            <a:r>
+              <a:rPr>
+                <a:solidFill>
+                  <a:srgbClr val="334155"/>
+                </a:solidFill>
+              </a:rPr>
+              <a:t>Playlists, UI de pautas y Demo Funcional.</a:t>
             </a:r>
           </a:p>
         </p:txBody>
@@ -5030,8 +5136,8 @@
         </p:nvSpPr>
         <p:spPr>
           <a:xfrm>
-            <a:off x="6263640" y="1691640"/>
-            <a:ext cx="5120640" cy="73152"/>
+            <a:off x="3520439" y="1691640"/>
+            <a:ext cx="2377440" cy="73152"/>
           </a:xfrm>
           <a:prstGeom prst="rect">
             <a:avLst/>
@@ -5073,8 +5179,8 @@
         </p:nvSpPr>
         <p:spPr>
           <a:xfrm>
-            <a:off x="731520" y="4023360"/>
-            <a:ext cx="3383280" cy="2194560"/>
+            <a:off x="6217920" y="1645920"/>
+            <a:ext cx="2468880" cy="4572000"/>
           </a:xfrm>
           <a:prstGeom prst="roundRect">
             <a:avLst/>
@@ -5118,7 +5224,7 @@
               </a:defRPr>
             </a:pPr>
             <a:r>
-              <a:t>3. Persistencia ACID (MariaDB)</a:t>
+              <a:t>Fase 3: Resiliencia (S11-S15)</a:t>
             </a:r>
           </a:p>
           <a:p>
@@ -5136,7 +5242,7 @@
                   <a:srgbClr val="1E3A8A"/>
                 </a:solidFill>
               </a:rPr>
-              <a:t>Definición: </a:t>
+              <a:t>S11-S12: </a:t>
             </a:r>
             <a:r>
               <a:rPr>
@@ -5144,7 +5250,59 @@
                   <a:srgbClr val="334155"/>
                 </a:solidFill>
               </a:rPr>
-              <a:t>Garantía de atomicidad, consistencia, aislamiento y durabilidad en operaciones relacionales que controlan la planificación horaria sin solapamientos.</a:t>
+              <a:t>Servidor WebSockets y Player local.</a:t>
+            </a:r>
+          </a:p>
+          <a:p>
+            <a:pPr>
+              <a:spcAft>
+                <a:spcPts val="500"/>
+              </a:spcAft>
+              <a:defRPr sz="1100">
+                <a:latin typeface="Arial"/>
+              </a:defRPr>
+            </a:pPr>
+            <a:r>
+              <a:rPr b="1">
+                <a:solidFill>
+                  <a:srgbClr val="1E3A8A"/>
+                </a:solidFill>
+              </a:rPr>
+              <a:t>S13-S14: </a:t>
+            </a:r>
+            <a:r>
+              <a:rPr>
+                <a:solidFill>
+                  <a:srgbClr val="334155"/>
+                </a:solidFill>
+              </a:rPr>
+              <a:t>Módulo Fail-Safe y panel web local.</a:t>
+            </a:r>
+          </a:p>
+          <a:p>
+            <a:pPr>
+              <a:spcAft>
+                <a:spcPts val="500"/>
+              </a:spcAft>
+              <a:defRPr sz="1100">
+                <a:latin typeface="Arial"/>
+              </a:defRPr>
+            </a:pPr>
+            <a:r>
+              <a:rPr b="1">
+                <a:solidFill>
+                  <a:srgbClr val="1E3A8A"/>
+                </a:solidFill>
+              </a:rPr>
+              <a:t>S15 [HITO 3]: </a:t>
+            </a:r>
+            <a:r>
+              <a:rPr>
+                <a:solidFill>
+                  <a:srgbClr val="334155"/>
+                </a:solidFill>
+              </a:rPr>
+              <a:t>Entrega software consolidado y manuales.</a:t>
             </a:r>
           </a:p>
         </p:txBody>
@@ -5157,8 +5315,8 @@
         </p:nvSpPr>
         <p:spPr>
           <a:xfrm>
-            <a:off x="777240" y="4069080"/>
-            <a:ext cx="3291840" cy="73152"/>
+            <a:off x="6263640" y="1691640"/>
+            <a:ext cx="2377440" cy="73152"/>
           </a:xfrm>
           <a:prstGeom prst="rect">
             <a:avLst/>
@@ -5200,8 +5358,8 @@
         </p:nvSpPr>
         <p:spPr>
           <a:xfrm>
-            <a:off x="4389120" y="4023360"/>
-            <a:ext cx="3383280" cy="2194560"/>
+            <a:off x="8961120" y="1645920"/>
+            <a:ext cx="2468880" cy="4572000"/>
           </a:xfrm>
           <a:prstGeom prst="roundRect">
             <a:avLst/>
@@ -5245,7 +5403,7 @@
               </a:defRPr>
             </a:pPr>
             <a:r>
-              <a:t>4. Protocolo Dual (API &amp; WebSockets)</a:t>
+              <a:t>Fase 4: Cierre (S16-S18)</a:t>
             </a:r>
           </a:p>
           <a:p>
@@ -5263,7 +5421,7 @@
                   <a:srgbClr val="1E3A8A"/>
                 </a:solidFill>
               </a:rPr>
-              <a:t>Definición: </a:t>
+              <a:t>S16: </a:t>
             </a:r>
             <a:r>
               <a:rPr>
@@ -5271,7 +5429,59 @@
                   <a:srgbClr val="334155"/>
                 </a:solidFill>
               </a:rPr>
-              <a:t>HTTP REST sin estado para administración CRUD y WebSockets para telemetría bidireccional (heartbeats) y control inmediato de pantallas.</a:t>
+              <a:t>Pruebas UAT en terreno con Cristóbal Manzo.</a:t>
+            </a:r>
+          </a:p>
+          <a:p>
+            <a:pPr>
+              <a:spcAft>
+                <a:spcPts val="500"/>
+              </a:spcAft>
+              <a:defRPr sz="1100">
+                <a:latin typeface="Arial"/>
+              </a:defRPr>
+            </a:pPr>
+            <a:r>
+              <a:rPr b="1">
+                <a:solidFill>
+                  <a:srgbClr val="1E3A8A"/>
+                </a:solidFill>
+              </a:rPr>
+              <a:t>S17 [HITO 4]: </a:t>
+            </a:r>
+            <a:r>
+              <a:rPr>
+                <a:solidFill>
+                  <a:srgbClr val="334155"/>
+                </a:solidFill>
+              </a:rPr>
+              <a:t>Ensayo y Defensa Presencial (Sesión 1).</a:t>
+            </a:r>
+          </a:p>
+          <a:p>
+            <a:pPr>
+              <a:spcAft>
+                <a:spcPts val="500"/>
+              </a:spcAft>
+              <a:defRPr sz="1100">
+                <a:latin typeface="Arial"/>
+              </a:defRPr>
+            </a:pPr>
+            <a:r>
+              <a:rPr b="1">
+                <a:solidFill>
+                  <a:srgbClr val="1E3A8A"/>
+                </a:solidFill>
+              </a:rPr>
+              <a:t>S18 [HITO 4]: </a:t>
+            </a:r>
+            <a:r>
+              <a:rPr>
+                <a:solidFill>
+                  <a:srgbClr val="334155"/>
+                </a:solidFill>
+              </a:rPr>
+              <a:t>Defensa Final de Titulación y Cierre de Actas.</a:t>
             </a:r>
           </a:p>
         </p:txBody>
@@ -5284,128 +5494,14 @@
         </p:nvSpPr>
         <p:spPr>
           <a:xfrm>
-            <a:off x="4434840" y="4069080"/>
-            <a:ext cx="3291840" cy="73152"/>
+            <a:off x="9006840" y="1691640"/>
+            <a:ext cx="2377440" cy="73152"/>
           </a:xfrm>
           <a:prstGeom prst="rect">
             <a:avLst/>
           </a:prstGeom>
           <a:solidFill>
-            <a:srgbClr val="2563EB"/>
-          </a:solidFill>
-          <a:ln>
-            <a:noFill/>
-          </a:ln>
-        </p:spPr>
-        <p:style>
-          <a:lnRef idx="1">
-            <a:schemeClr val="accent1"/>
-          </a:lnRef>
-          <a:fillRef idx="3">
-            <a:schemeClr val="accent1"/>
-          </a:fillRef>
-          <a:effectRef idx="2">
-            <a:schemeClr val="accent1"/>
-          </a:effectRef>
-          <a:fontRef idx="minor">
-            <a:schemeClr val="lt1"/>
-          </a:fontRef>
-        </p:style>
-        <p:txBody>
-          <a:bodyPr rtlCol="0" anchor="ctr"/>
-          <a:lstStyle/>
-          <a:p>
-            <a:pPr algn="ctr"/>
-          </a:p>
-        </p:txBody>
-      </p:sp>
-      <p:sp>
-        <p:nvSpPr>
-          <p:cNvPr id="13" name="Rounded Rectangle 12"/>
-          <p:cNvSpPr/>
-          <p:nvPr/>
-        </p:nvSpPr>
-        <p:spPr>
-          <a:xfrm>
-            <a:off x="8046720" y="4023360"/>
-            <a:ext cx="3383280" cy="2194560"/>
-          </a:xfrm>
-          <a:prstGeom prst="roundRect">
-            <a:avLst/>
-          </a:prstGeom>
-          <a:solidFill>
-            <a:srgbClr val="F8FAFC"/>
-          </a:solidFill>
-          <a:ln w="12700">
-            <a:solidFill>
-              <a:srgbClr val="E2E8F0"/>
-            </a:solidFill>
-          </a:ln>
-        </p:spPr>
-        <p:style>
-          <a:lnRef idx="1">
-            <a:schemeClr val="accent1"/>
-          </a:lnRef>
-          <a:fillRef idx="3">
-            <a:schemeClr val="accent1"/>
-          </a:fillRef>
-          <a:effectRef idx="2">
-            <a:schemeClr val="accent1"/>
-          </a:effectRef>
-          <a:fontRef idx="minor">
-            <a:schemeClr val="lt1"/>
-          </a:fontRef>
-        </p:style>
-        <p:txBody>
-          <a:bodyPr rtlCol="0" anchor="t" wrap="square" lIns="228600" rIns="228600" tIns="201168" bIns="182880"/>
-          <a:lstStyle/>
-          <a:p>
-            <a:pPr algn="ctr">
-              <a:spcAft>
-                <a:spcPts val="800"/>
-              </a:spcAft>
-              <a:defRPr sz="1500" b="1">
-                <a:solidFill>
-                  <a:srgbClr val="1E3A8A"/>
-                </a:solidFill>
-                <a:latin typeface="Arial"/>
-              </a:defRPr>
-            </a:pPr>
-            <a:r>
-              <a:t>5. Arquitectura Desacoplada</a:t>
-            </a:r>
-          </a:p>
-          <a:p>
-            <a:pPr>
-              <a:spcAft>
-                <a:spcPts val="500"/>
-              </a:spcAft>
-              <a:defRPr sz="1100">
-                <a:latin typeface="Arial"/>
-              </a:defRPr>
-            </a:pPr>
-            <a:r>
-              <a:t>Definición: Separación física y lógica entre la capa de administración centralizada en la nube y los nodos ejecutores autónomos desplegados en locaciones fijas (NUCs).</a:t>
-            </a:r>
-          </a:p>
-        </p:txBody>
-      </p:sp>
-      <p:sp>
-        <p:nvSpPr>
-          <p:cNvPr id="14" name="Rectangle 13"/>
-          <p:cNvSpPr/>
-          <p:nvPr/>
-        </p:nvSpPr>
-        <p:spPr>
-          <a:xfrm>
-            <a:off x="8092440" y="4069080"/>
-            <a:ext cx="3291840" cy="73152"/>
-          </a:xfrm>
-          <a:prstGeom prst="rect">
-            <a:avLst/>
-          </a:prstGeom>
-          <a:solidFill>
-            <a:srgbClr val="0D9488"/>
+            <a:srgbClr val="1E3A8A"/>
           </a:solidFill>
           <a:ln>
             <a:noFill/>
@@ -5533,7 +5629,7 @@
               </a:defRPr>
             </a:pPr>
             <a:r>
-              <a:t>Banco de Preguntas Típicas de la Comisión Docente</a:t>
+              <a:t>Evidencias del Proyecto y Conclusión</a:t>
             </a:r>
           </a:p>
           <a:p>
@@ -5549,7 +5645,7 @@
               </a:defRPr>
             </a:pPr>
             <a:r>
-              <a:t>Defensa de Decisiones Técnicas y Metodológicas de Ingeniería</a:t>
+              <a:t>Acreditación Rigurosa e Integración del Perfil de Egreso</a:t>
             </a:r>
           </a:p>
         </p:txBody>
@@ -5604,7 +5700,7 @@
               </a:defRPr>
             </a:pPr>
             <a:r>
-              <a:t>Todo el Equipo</a:t>
+              <a:t>Paulo Loyola | Bloque 3</a:t>
             </a:r>
           </a:p>
         </p:txBody>
@@ -5618,7 +5714,7 @@
         <p:spPr>
           <a:xfrm>
             <a:off x="731520" y="1645920"/>
-            <a:ext cx="5212080" cy="2194560"/>
+            <a:ext cx="5212080" cy="4572000"/>
           </a:xfrm>
           <a:prstGeom prst="roundRect">
             <a:avLst/>
@@ -5662,7 +5758,7 @@
               </a:defRPr>
             </a:pPr>
             <a:r>
-              <a:t>¿Por qué Laravel y MariaDB vs NoSQL?</a:t>
+              <a:t>Evidencias Objetivas de Acreditación</a:t>
             </a:r>
           </a:p>
           <a:p>
@@ -5675,7 +5771,150 @@
               </a:defRPr>
             </a:pPr>
             <a:r>
-              <a:t>Fundamento: El dominio de cartelería digital es estrictamente estructurado (Locaciones &gt; Sectores &gt; Pantallas &gt; Playlists). Las transacciones ACID y llaves foráneas de MariaDB previenen estados inconsistentes y solapamientos que en NoSQL exigirían validaciones manuales complejas.</a:t>
+              <a:rPr b="1">
+                <a:solidFill>
+                  <a:srgbClr val="1E3A8A"/>
+                </a:solidFill>
+              </a:rPr>
+              <a:t>EVID-01 (Gestión): </a:t>
+            </a:r>
+            <a:r>
+              <a:rPr>
+                <a:solidFill>
+                  <a:srgbClr val="334155"/>
+                </a:solidFill>
+              </a:rPr>
+              <a:t>Acta de levantamiento y alcance validada por Cristóbal Manzo (Lumina).</a:t>
+            </a:r>
+          </a:p>
+          <a:p>
+            <a:pPr>
+              <a:spcAft>
+                <a:spcPts val="500"/>
+              </a:spcAft>
+              <a:defRPr sz="1100">
+                <a:latin typeface="Arial"/>
+              </a:defRPr>
+            </a:pPr>
+            <a:r>
+              <a:rPr b="1">
+                <a:solidFill>
+                  <a:srgbClr val="1E3A8A"/>
+                </a:solidFill>
+              </a:rPr>
+              <a:t>EVID-02 (Ingeniería DB): </a:t>
+            </a:r>
+            <a:r>
+              <a:rPr>
+                <a:solidFill>
+                  <a:srgbClr val="334155"/>
+                </a:solidFill>
+              </a:rPr>
+              <a:t>Diagrama E-R, diccionario de datos y migraciones MariaDB ejecutables.</a:t>
+            </a:r>
+          </a:p>
+          <a:p>
+            <a:pPr>
+              <a:spcAft>
+                <a:spcPts val="500"/>
+              </a:spcAft>
+              <a:defRPr sz="1100">
+                <a:latin typeface="Arial"/>
+              </a:defRPr>
+            </a:pPr>
+            <a:r>
+              <a:rPr b="1">
+                <a:solidFill>
+                  <a:srgbClr val="1E3A8A"/>
+                </a:solidFill>
+              </a:rPr>
+              <a:t>EVID-03 (Desarrollo): </a:t>
+            </a:r>
+            <a:r>
+              <a:rPr>
+                <a:solidFill>
+                  <a:srgbClr val="334155"/>
+                </a:solidFill>
+              </a:rPr>
+              <a:t>Repositorio GitHub con commits trazables y Pull Requests cruzados.</a:t>
+            </a:r>
+          </a:p>
+          <a:p>
+            <a:pPr>
+              <a:spcAft>
+                <a:spcPts val="500"/>
+              </a:spcAft>
+              <a:defRPr sz="1100">
+                <a:latin typeface="Arial"/>
+              </a:defRPr>
+            </a:pPr>
+            <a:r>
+              <a:rPr b="1">
+                <a:solidFill>
+                  <a:srgbClr val="1E3A8A"/>
+                </a:solidFill>
+              </a:rPr>
+              <a:t>EVID-04 (Servicios): </a:t>
+            </a:r>
+            <a:r>
+              <a:rPr>
+                <a:solidFill>
+                  <a:srgbClr val="334155"/>
+                </a:solidFill>
+              </a:rPr>
+              <a:t>Colección Postman y especificación interactiva OpenAPI / Swagger.</a:t>
+            </a:r>
+          </a:p>
+          <a:p>
+            <a:pPr>
+              <a:spcAft>
+                <a:spcPts val="500"/>
+              </a:spcAft>
+              <a:defRPr sz="1100">
+                <a:latin typeface="Arial"/>
+              </a:defRPr>
+            </a:pPr>
+            <a:r>
+              <a:rPr b="1">
+                <a:solidFill>
+                  <a:srgbClr val="1E3A8A"/>
+                </a:solidFill>
+              </a:rPr>
+              <a:t>EVID-05 (Resiliencia): </a:t>
+            </a:r>
+            <a:r>
+              <a:rPr>
+                <a:solidFill>
+                  <a:srgbClr val="334155"/>
+                </a:solidFill>
+              </a:rPr>
+              <a:t>Matriz y video de prueba de desconexión forzada de red (Fail-Safe).</a:t>
+            </a:r>
+          </a:p>
+          <a:p>
+            <a:pPr>
+              <a:spcAft>
+                <a:spcPts val="500"/>
+              </a:spcAft>
+              <a:defRPr sz="1100">
+                <a:latin typeface="Arial"/>
+              </a:defRPr>
+            </a:pPr>
+            <a:r>
+              <a:rPr b="1">
+                <a:solidFill>
+                  <a:srgbClr val="1E3A8A"/>
+                </a:solidFill>
+              </a:rPr>
+              <a:t>EVID-06 (Validación): </a:t>
+            </a:r>
+            <a:r>
+              <a:rPr>
+                <a:solidFill>
+                  <a:srgbClr val="334155"/>
+                </a:solidFill>
+              </a:rPr>
+              <a:t>Acta formal de recepción y pruebas de usuario (UAT) de Lumina Motion.</a:t>
             </a:r>
           </a:p>
         </p:txBody>
@@ -5732,7 +5971,7 @@
         <p:spPr>
           <a:xfrm>
             <a:off x="6217920" y="1645920"/>
-            <a:ext cx="5212080" cy="2194560"/>
+            <a:ext cx="5212080" cy="4572000"/>
           </a:xfrm>
           <a:prstGeom prst="roundRect">
             <a:avLst/>
@@ -5776,7 +6015,7 @@
               </a:defRPr>
             </a:pPr>
             <a:r>
-              <a:t>¿Cómo evitan pantallas en negro en malls?</a:t>
+              <a:t>Conclusión y Valor Agregado</a:t>
             </a:r>
           </a:p>
           <a:p>
@@ -5794,7 +6033,7 @@
                   <a:srgbClr val="1E3A8A"/>
                 </a:solidFill>
               </a:rPr>
-              <a:t>Fundamento: </a:t>
+              <a:t>Solución Industrial Real: </a:t>
             </a:r>
             <a:r>
               <a:rPr>
@@ -5802,7 +6041,85 @@
                   <a:srgbClr val="334155"/>
                 </a:solidFill>
               </a:rPr>
-              <a:t>Arquitectura Cache-First: el reproductor nunca hace streaming directo. Descarga preventivamente los videos a disco local y verifica SHA-256. Ante caída de red, reproduce localmente y expone un panel web en la intranet para control manual de emergencia.</a:t>
+              <a:t>Resuelve el dolor logístico y los costos de licenciamiento de Lumina Motion.</a:t>
+            </a:r>
+          </a:p>
+          <a:p>
+            <a:pPr>
+              <a:spcAft>
+                <a:spcPts val="500"/>
+              </a:spcAft>
+              <a:defRPr sz="1100">
+                <a:latin typeface="Arial"/>
+              </a:defRPr>
+            </a:pPr>
+            <a:r>
+              <a:rPr b="1">
+                <a:solidFill>
+                  <a:srgbClr val="1E3A8A"/>
+                </a:solidFill>
+              </a:rPr>
+              <a:t>Autonomía sin Conexión: </a:t>
+            </a:r>
+            <a:r>
+              <a:rPr>
+                <a:solidFill>
+                  <a:srgbClr val="334155"/>
+                </a:solidFill>
+              </a:rPr>
+              <a:t>Garantía de continuidad operativa ante caídas de internet en eventos masivos.</a:t>
+            </a:r>
+          </a:p>
+          <a:p>
+            <a:pPr>
+              <a:spcAft>
+                <a:spcPts val="500"/>
+              </a:spcAft>
+              <a:defRPr sz="1100">
+                <a:latin typeface="Arial"/>
+              </a:defRPr>
+            </a:pPr>
+            <a:r>
+              <a:rPr b="1">
+                <a:solidFill>
+                  <a:srgbClr val="1E3A8A"/>
+                </a:solidFill>
+              </a:rPr>
+              <a:t>Integración Formativa: </a:t>
+            </a:r>
+            <a:r>
+              <a:rPr>
+                <a:solidFill>
+                  <a:srgbClr val="334155"/>
+                </a:solidFill>
+              </a:rPr>
+              <a:t>Articulación plena de las 4 competencias clave del perfil de egreso Duoc UC: Desarrollo Fullstack, Bases de Datos, Arquitectura y Gestión Ágil.</a:t>
+            </a:r>
+          </a:p>
+          <a:p>
+            <a:pPr>
+              <a:spcAft>
+                <a:spcPts val="500"/>
+              </a:spcAft>
+              <a:defRPr sz="1100">
+                <a:latin typeface="Arial"/>
+              </a:defRPr>
+            </a:pPr>
+            <a:r>
+              <a:rPr b="1">
+                <a:solidFill>
+                  <a:srgbClr val="1E3A8A"/>
+                </a:solidFill>
+              </a:rPr>
+              <a:t>Discurso de Cierre: </a:t>
+            </a:r>
+            <a:r>
+              <a:rPr>
+                <a:solidFill>
+                  <a:srgbClr val="334155"/>
+                </a:solidFill>
+              </a:rPr>
+              <a:t>'Con ACE no solo resolvemos un problema logístico de Lumina Motion, sino que demostramos la integración transversal de las competencias de nuestro perfil de egreso en Duoc UC. Quedamos atentos a sus preguntas.'</a:t>
             </a:r>
           </a:p>
         </p:txBody>
@@ -5850,260 +6167,6 @@
           </a:p>
         </p:txBody>
       </p:sp>
-      <p:sp>
-        <p:nvSpPr>
-          <p:cNvPr id="9" name="Rounded Rectangle 8"/>
-          <p:cNvSpPr/>
-          <p:nvPr/>
-        </p:nvSpPr>
-        <p:spPr>
-          <a:xfrm>
-            <a:off x="731520" y="4023360"/>
-            <a:ext cx="5212080" cy="2194560"/>
-          </a:xfrm>
-          <a:prstGeom prst="roundRect">
-            <a:avLst/>
-          </a:prstGeom>
-          <a:solidFill>
-            <a:srgbClr val="F8FAFC"/>
-          </a:solidFill>
-          <a:ln w="12700">
-            <a:solidFill>
-              <a:srgbClr val="E2E8F0"/>
-            </a:solidFill>
-          </a:ln>
-        </p:spPr>
-        <p:style>
-          <a:lnRef idx="1">
-            <a:schemeClr val="accent1"/>
-          </a:lnRef>
-          <a:fillRef idx="3">
-            <a:schemeClr val="accent1"/>
-          </a:fillRef>
-          <a:effectRef idx="2">
-            <a:schemeClr val="accent1"/>
-          </a:effectRef>
-          <a:fontRef idx="minor">
-            <a:schemeClr val="lt1"/>
-          </a:fontRef>
-        </p:style>
-        <p:txBody>
-          <a:bodyPr rtlCol="0" anchor="t" wrap="square" lIns="228600" rIns="228600" tIns="201168" bIns="182880"/>
-          <a:lstStyle/>
-          <a:p>
-            <a:pPr algn="ctr">
-              <a:spcAft>
-                <a:spcPts val="800"/>
-              </a:spcAft>
-              <a:defRPr sz="1500" b="1">
-                <a:solidFill>
-                  <a:srgbClr val="1E3A8A"/>
-                </a:solidFill>
-                <a:latin typeface="Arial"/>
-              </a:defRPr>
-            </a:pPr>
-            <a:r>
-              <a:t>¿Cómo aseguran terminar en 18 semanas?</a:t>
-            </a:r>
-          </a:p>
-          <a:p>
-            <a:pPr>
-              <a:spcAft>
-                <a:spcPts val="500"/>
-              </a:spcAft>
-              <a:defRPr sz="1100">
-                <a:latin typeface="Arial"/>
-              </a:defRPr>
-            </a:pPr>
-            <a:r>
-              <a:rPr b="1">
-                <a:solidFill>
-                  <a:srgbClr val="1E3A8A"/>
-                </a:solidFill>
-              </a:rPr>
-              <a:t>Fundamento: </a:t>
-            </a:r>
-            <a:r>
-              <a:rPr>
-                <a:solidFill>
-                  <a:srgbClr val="334155"/>
-                </a:solidFill>
-              </a:rPr>
-              <a:t>Delimitación estricta del alcance: ACE es distribución y programación (se excluye edición de video). Scrum bisemanal con hito crítico en S10 (core API y DB operativo), dejando semanas finales para pruebas de resiliencia y UAT con Lumina.</a:t>
-            </a:r>
-          </a:p>
-        </p:txBody>
-      </p:sp>
-      <p:sp>
-        <p:nvSpPr>
-          <p:cNvPr id="10" name="Rectangle 9"/>
-          <p:cNvSpPr/>
-          <p:nvPr/>
-        </p:nvSpPr>
-        <p:spPr>
-          <a:xfrm>
-            <a:off x="777240" y="4069080"/>
-            <a:ext cx="5120640" cy="73152"/>
-          </a:xfrm>
-          <a:prstGeom prst="rect">
-            <a:avLst/>
-          </a:prstGeom>
-          <a:solidFill>
-            <a:srgbClr val="D97706"/>
-          </a:solidFill>
-          <a:ln>
-            <a:noFill/>
-          </a:ln>
-        </p:spPr>
-        <p:style>
-          <a:lnRef idx="1">
-            <a:schemeClr val="accent1"/>
-          </a:lnRef>
-          <a:fillRef idx="3">
-            <a:schemeClr val="accent1"/>
-          </a:fillRef>
-          <a:effectRef idx="2">
-            <a:schemeClr val="accent1"/>
-          </a:effectRef>
-          <a:fontRef idx="minor">
-            <a:schemeClr val="lt1"/>
-          </a:fontRef>
-        </p:style>
-        <p:txBody>
-          <a:bodyPr rtlCol="0" anchor="ctr"/>
-          <a:lstStyle/>
-          <a:p>
-            <a:pPr algn="ctr"/>
-          </a:p>
-        </p:txBody>
-      </p:sp>
-      <p:sp>
-        <p:nvSpPr>
-          <p:cNvPr id="11" name="Rounded Rectangle 10"/>
-          <p:cNvSpPr/>
-          <p:nvPr/>
-        </p:nvSpPr>
-        <p:spPr>
-          <a:xfrm>
-            <a:off x="6217920" y="4023360"/>
-            <a:ext cx="5212080" cy="2194560"/>
-          </a:xfrm>
-          <a:prstGeom prst="roundRect">
-            <a:avLst/>
-          </a:prstGeom>
-          <a:solidFill>
-            <a:srgbClr val="F8FAFC"/>
-          </a:solidFill>
-          <a:ln w="12700">
-            <a:solidFill>
-              <a:srgbClr val="E2E8F0"/>
-            </a:solidFill>
-          </a:ln>
-        </p:spPr>
-        <p:style>
-          <a:lnRef idx="1">
-            <a:schemeClr val="accent1"/>
-          </a:lnRef>
-          <a:fillRef idx="3">
-            <a:schemeClr val="accent1"/>
-          </a:fillRef>
-          <a:effectRef idx="2">
-            <a:schemeClr val="accent1"/>
-          </a:effectRef>
-          <a:fontRef idx="minor">
-            <a:schemeClr val="lt1"/>
-          </a:fontRef>
-        </p:style>
-        <p:txBody>
-          <a:bodyPr rtlCol="0" anchor="t" wrap="square" lIns="228600" rIns="228600" tIns="201168" bIns="182880"/>
-          <a:lstStyle/>
-          <a:p>
-            <a:pPr algn="ctr">
-              <a:spcAft>
-                <a:spcPts val="800"/>
-              </a:spcAft>
-              <a:defRPr sz="1500" b="1">
-                <a:solidFill>
-                  <a:srgbClr val="1E3A8A"/>
-                </a:solidFill>
-                <a:latin typeface="Arial"/>
-              </a:defRPr>
-            </a:pPr>
-            <a:r>
-              <a:t>¿Cómo garantizan aporte equitativo?</a:t>
-            </a:r>
-          </a:p>
-          <a:p>
-            <a:pPr>
-              <a:spcAft>
-                <a:spcPts val="500"/>
-              </a:spcAft>
-              <a:defRPr sz="1100">
-                <a:latin typeface="Arial"/>
-              </a:defRPr>
-            </a:pPr>
-            <a:r>
-              <a:rPr b="1">
-                <a:solidFill>
-                  <a:srgbClr val="1E3A8A"/>
-                </a:solidFill>
-              </a:rPr>
-              <a:t>Fundamento: </a:t>
-            </a:r>
-            <a:r>
-              <a:rPr>
-                <a:solidFill>
-                  <a:srgbClr val="334155"/>
-                </a:solidFill>
-              </a:rPr>
-              <a:t>Distribución por dominios técnicos complementarios: Tomás (Arquitectura &amp; Backend), Matías (Gestión Ágil, Gantt &amp; Cliente) y Paulo (Frontend, MariaDB &amp; Documentación). Trazabilidad auditable mediante Pull Requests cruzados en GitHub.</a:t>
-            </a:r>
-          </a:p>
-        </p:txBody>
-      </p:sp>
-      <p:sp>
-        <p:nvSpPr>
-          <p:cNvPr id="12" name="Rectangle 11"/>
-          <p:cNvSpPr/>
-          <p:nvPr/>
-        </p:nvSpPr>
-        <p:spPr>
-          <a:xfrm>
-            <a:off x="6263640" y="4069080"/>
-            <a:ext cx="5120640" cy="73152"/>
-          </a:xfrm>
-          <a:prstGeom prst="rect">
-            <a:avLst/>
-          </a:prstGeom>
-          <a:solidFill>
-            <a:srgbClr val="1E3A8A"/>
-          </a:solidFill>
-          <a:ln>
-            <a:noFill/>
-          </a:ln>
-        </p:spPr>
-        <p:style>
-          <a:lnRef idx="1">
-            <a:schemeClr val="accent1"/>
-          </a:lnRef>
-          <a:fillRef idx="3">
-            <a:schemeClr val="accent1"/>
-          </a:fillRef>
-          <a:effectRef idx="2">
-            <a:schemeClr val="accent1"/>
-          </a:effectRef>
-          <a:fontRef idx="minor">
-            <a:schemeClr val="lt1"/>
-          </a:fontRef>
-        </p:style>
-        <p:txBody>
-          <a:bodyPr rtlCol="0" anchor="ctr"/>
-          <a:lstStyle/>
-          <a:p>
-            <a:pPr algn="ctr"/>
-          </a:p>
-        </p:txBody>
-      </p:sp>
     </p:spTree>
   </p:cSld>
   <p:clrMapOvr>
@@ -6112,7 +6175,7 @@
 </p:sld>
 </file>
 
-<file path=ppt/slides/slide2.xml><?xml version="1.0" encoding="utf-8"?>
+<file path=ppt/slides/slide12.xml><?xml version="1.0" encoding="utf-8"?>
 <p:sld xmlns:a="http://schemas.openxmlformats.org/drawingml/2006/main" xmlns:p="http://schemas.openxmlformats.org/presentationml/2006/main" xmlns:r="http://schemas.openxmlformats.org/officeDocument/2006/relationships">
   <p:cSld>
     <p:bg>
@@ -6204,7 +6267,7 @@
               </a:defRPr>
             </a:pPr>
             <a:r>
-              <a:t>El Dolor del Negocio: Lumina Motion Studio</a:t>
+              <a:t>Glosario Técnico Disciplinar Indispensable</a:t>
             </a:r>
           </a:p>
           <a:p>
@@ -6220,7 +6283,7 @@
               </a:defRPr>
             </a:pPr>
             <a:r>
-              <a:t>Diagnóstico Operativo de la Infraestructura de Cartelería Digital</a:t>
+              <a:t>Conceptos Clave para la Defensa Individual (Indicador 11 - 10 pts)</a:t>
             </a:r>
           </a:p>
         </p:txBody>
@@ -6275,7 +6338,7 @@
               </a:defRPr>
             </a:pPr>
             <a:r>
-              <a:t>Tomás Escalante | Bloque 1</a:t>
+              <a:t>Todo el Equipo</a:t>
             </a:r>
           </a:p>
         </p:txBody>
@@ -6289,7 +6352,7 @@
         <p:spPr>
           <a:xfrm>
             <a:off x="731520" y="1645920"/>
-            <a:ext cx="3383280" cy="4572000"/>
+            <a:ext cx="5212080" cy="2103120"/>
           </a:xfrm>
           <a:prstGeom prst="roundRect">
             <a:avLst/>
@@ -6333,7 +6396,7 @@
               </a:defRPr>
             </a:pPr>
             <a:r>
-              <a:t>1. Operativa Fragmentada</a:t>
+              <a:t>1. Resiliencia Offline / Fail-Safe</a:t>
             </a:r>
           </a:p>
           <a:p>
@@ -6351,7 +6414,7 @@
                   <a:srgbClr val="1E3A8A"/>
                 </a:solidFill>
               </a:rPr>
-              <a:t>Actualización manual: </a:t>
+              <a:t>Definición: </a:t>
             </a:r>
             <a:r>
               <a:rPr>
@@ -6359,59 +6422,7 @@
                   <a:srgbClr val="334155"/>
                 </a:solidFill>
               </a:rPr>
-              <a:t>Gran parte del parque de pantallas se actualiza físicamente vía pendrives USB in situ.</a:t>
-            </a:r>
-          </a:p>
-          <a:p>
-            <a:pPr>
-              <a:spcAft>
-                <a:spcPts val="500"/>
-              </a:spcAft>
-              <a:defRPr sz="1100">
-                <a:latin typeface="Arial"/>
-              </a:defRPr>
-            </a:pPr>
-            <a:r>
-              <a:rPr b="1">
-                <a:solidFill>
-                  <a:srgbClr val="1E3A8A"/>
-                </a:solidFill>
-              </a:rPr>
-              <a:t>Costos logísticos: </a:t>
-            </a:r>
-            <a:r>
-              <a:rPr>
-                <a:solidFill>
-                  <a:srgbClr val="334155"/>
-                </a:solidFill>
-              </a:rPr>
-              <a:t>Traslados continuos de técnicos ante cambios de pauta publicitaria en recintos comerciales.</a:t>
-            </a:r>
-          </a:p>
-          <a:p>
-            <a:pPr>
-              <a:spcAft>
-                <a:spcPts val="500"/>
-              </a:spcAft>
-              <a:defRPr sz="1100">
-                <a:latin typeface="Arial"/>
-              </a:defRPr>
-            </a:pPr>
-            <a:r>
-              <a:rPr b="1">
-                <a:solidFill>
-                  <a:srgbClr val="1E3A8A"/>
-                </a:solidFill>
-              </a:rPr>
-              <a:t>Tiempo de respuesta lento: </a:t>
-            </a:r>
-            <a:r>
-              <a:rPr>
-                <a:solidFill>
-                  <a:srgbClr val="334155"/>
-                </a:solidFill>
-              </a:rPr>
-              <a:t>Horas o días para actualizar un anuncio comercial en múltiples sedes.</a:t>
+              <a:t>Capacidad del nodo reproductor de continuar ejecutando la parrilla multimedia programada utilizando almacenamiento local cuando se interrumpe la conexión a internet.</a:t>
             </a:r>
           </a:p>
         </p:txBody>
@@ -6425,13 +6436,13 @@
         <p:spPr>
           <a:xfrm>
             <a:off x="777240" y="1691640"/>
-            <a:ext cx="3291840" cy="73152"/>
+            <a:ext cx="5120640" cy="73152"/>
           </a:xfrm>
           <a:prstGeom prst="rect">
             <a:avLst/>
           </a:prstGeom>
           <a:solidFill>
-            <a:srgbClr val="D97706"/>
+            <a:srgbClr val="2563EB"/>
           </a:solidFill>
           <a:ln>
             <a:noFill/>
@@ -6467,8 +6478,8 @@
         </p:nvSpPr>
         <p:spPr>
           <a:xfrm>
-            <a:off x="4389120" y="1645920"/>
-            <a:ext cx="3383280" cy="4572000"/>
+            <a:off x="6217920" y="1645920"/>
+            <a:ext cx="5212080" cy="2103120"/>
           </a:xfrm>
           <a:prstGeom prst="roundRect">
             <a:avLst/>
@@ -6512,7 +6523,7 @@
               </a:defRPr>
             </a:pPr>
             <a:r>
-              <a:t>2. Licenciamiento Propietario</a:t>
+              <a:t>2. Integridad Criptográfica (SHA-256)</a:t>
             </a:r>
           </a:p>
           <a:p>
@@ -6530,7 +6541,7 @@
                   <a:srgbClr val="1E3A8A"/>
                 </a:solidFill>
               </a:rPr>
-              <a:t>Herramientas dispares: </a:t>
+              <a:t>Definición: </a:t>
             </a:r>
             <a:r>
               <a:rPr>
@@ -6538,59 +6549,7 @@
                   <a:srgbClr val="334155"/>
                 </a:solidFill>
               </a:rPr>
-              <a:t>Uso fragmentado de software comercial (MadMapper, Arena.im) sin integración entre sí.</a:t>
-            </a:r>
-          </a:p>
-          <a:p>
-            <a:pPr>
-              <a:spcAft>
-                <a:spcPts val="500"/>
-              </a:spcAft>
-              <a:defRPr sz="1100">
-                <a:latin typeface="Arial"/>
-              </a:defRPr>
-            </a:pPr>
-            <a:r>
-              <a:rPr b="1">
-                <a:solidFill>
-                  <a:srgbClr val="1E3A8A"/>
-                </a:solidFill>
-              </a:rPr>
-              <a:t>Sin panel central: </a:t>
-            </a:r>
-            <a:r>
-              <a:rPr>
-                <a:solidFill>
-                  <a:srgbClr val="334155"/>
-                </a:solidFill>
-              </a:rPr>
-              <a:t>Imposibilidad de gestionar un catálogo unificado de medios y pantallas por sectores.</a:t>
-            </a:r>
-          </a:p>
-          <a:p>
-            <a:pPr>
-              <a:spcAft>
-                <a:spcPts val="500"/>
-              </a:spcAft>
-              <a:defRPr sz="1100">
-                <a:latin typeface="Arial"/>
-              </a:defRPr>
-            </a:pPr>
-            <a:r>
-              <a:rPr b="1">
-                <a:solidFill>
-                  <a:srgbClr val="1E3A8A"/>
-                </a:solidFill>
-              </a:rPr>
-              <a:t>Costos recurrentes: </a:t>
-            </a:r>
-            <a:r>
-              <a:rPr>
-                <a:solidFill>
-                  <a:srgbClr val="334155"/>
-                </a:solidFill>
-              </a:rPr>
-              <a:t>Alto gasto en licencias externas que no resuelven la automatización de horarios.</a:t>
+              <a:t>Mecanismo de validación por hash que garantiza que los archivos de video descargados en el reproductor no sufrieron corrupción durante la transferencia de red antes de ser emitidos.</a:t>
             </a:r>
           </a:p>
         </p:txBody>
@@ -6603,14 +6562,14 @@
         </p:nvSpPr>
         <p:spPr>
           <a:xfrm>
-            <a:off x="4434840" y="1691640"/>
-            <a:ext cx="3291840" cy="73152"/>
+            <a:off x="6263640" y="1691640"/>
+            <a:ext cx="5120640" cy="73152"/>
           </a:xfrm>
           <a:prstGeom prst="rect">
             <a:avLst/>
           </a:prstGeom>
           <a:solidFill>
-            <a:srgbClr val="2563EB"/>
+            <a:srgbClr val="0D9488"/>
           </a:solidFill>
           <a:ln>
             <a:noFill/>
@@ -6646,8 +6605,8 @@
         </p:nvSpPr>
         <p:spPr>
           <a:xfrm>
-            <a:off x="8046720" y="1645920"/>
-            <a:ext cx="3383280" cy="4572000"/>
+            <a:off x="731520" y="4023360"/>
+            <a:ext cx="3383280" cy="2194560"/>
           </a:xfrm>
           <a:prstGeom prst="roundRect">
             <a:avLst/>
@@ -6691,7 +6650,7 @@
               </a:defRPr>
             </a:pPr>
             <a:r>
-              <a:t>3. Falla Crítica de Red</a:t>
+              <a:t>3. Persistencia ACID (MariaDB)</a:t>
             </a:r>
           </a:p>
           <a:p>
@@ -6709,7 +6668,7 @@
                   <a:srgbClr val="1E3A8A"/>
                 </a:solidFill>
               </a:rPr>
-              <a:t>Vulnerabilidad WAN: </a:t>
+              <a:t>Definición: </a:t>
             </a:r>
             <a:r>
               <a:rPr>
@@ -6717,59 +6676,7 @@
                   <a:srgbClr val="334155"/>
                 </a:solidFill>
               </a:rPr>
-              <a:t>La conectividad a internet en recintos masivos (malls, eventos) es inestable y propensa a caídas.</a:t>
-            </a:r>
-          </a:p>
-          <a:p>
-            <a:pPr>
-              <a:spcAft>
-                <a:spcPts val="500"/>
-              </a:spcAft>
-              <a:defRPr sz="1100">
-                <a:latin typeface="Arial"/>
-              </a:defRPr>
-            </a:pPr>
-            <a:r>
-              <a:rPr b="1">
-                <a:solidFill>
-                  <a:srgbClr val="1E3A8A"/>
-                </a:solidFill>
-              </a:rPr>
-              <a:t>Riesgo de pantalla en negro: </a:t>
-            </a:r>
-            <a:r>
-              <a:rPr>
-                <a:solidFill>
-                  <a:srgbClr val="334155"/>
-                </a:solidFill>
-              </a:rPr>
-              <a:t>Soluciones basadas en streaming colapsan ante interrupciones de red.</a:t>
-            </a:r>
-          </a:p>
-          <a:p>
-            <a:pPr>
-              <a:spcAft>
-                <a:spcPts val="500"/>
-              </a:spcAft>
-              <a:defRPr sz="1100">
-                <a:latin typeface="Arial"/>
-              </a:defRPr>
-            </a:pPr>
-            <a:r>
-              <a:rPr b="1">
-                <a:solidFill>
-                  <a:srgbClr val="1E3A8A"/>
-                </a:solidFill>
-              </a:rPr>
-              <a:t>Penalizaciones comerciales: </a:t>
-            </a:r>
-            <a:r>
-              <a:rPr>
-                <a:solidFill>
-                  <a:srgbClr val="334155"/>
-                </a:solidFill>
-              </a:rPr>
-              <a:t>Pérdida de ingresos y sanciones contractuales por indisponibilidad de anuncios.</a:t>
+              <a:t>Garantía de atomicidad, consistencia, aislamiento y durabilidad en operaciones relacionales que controlan la planificación horaria sin solapamientos.</a:t>
             </a:r>
           </a:p>
         </p:txBody>
@@ -6782,14 +6689,14 @@
         </p:nvSpPr>
         <p:spPr>
           <a:xfrm>
-            <a:off x="8092440" y="1691640"/>
+            <a:off x="777240" y="4069080"/>
             <a:ext cx="3291840" cy="73152"/>
           </a:xfrm>
           <a:prstGeom prst="rect">
             <a:avLst/>
           </a:prstGeom>
           <a:solidFill>
-            <a:srgbClr val="DC2626"/>
+            <a:srgbClr val="D97706"/>
           </a:solidFill>
           <a:ln>
             <a:noFill/>
@@ -6814,6 +6721,1095 @@
           <a:lstStyle/>
           <a:p>
             <a:pPr algn="ctr"/>
+          </a:p>
+        </p:txBody>
+      </p:sp>
+      <p:sp>
+        <p:nvSpPr>
+          <p:cNvPr id="11" name="Rounded Rectangle 10"/>
+          <p:cNvSpPr/>
+          <p:nvPr/>
+        </p:nvSpPr>
+        <p:spPr>
+          <a:xfrm>
+            <a:off x="4389120" y="4023360"/>
+            <a:ext cx="3383280" cy="2194560"/>
+          </a:xfrm>
+          <a:prstGeom prst="roundRect">
+            <a:avLst/>
+          </a:prstGeom>
+          <a:solidFill>
+            <a:srgbClr val="F8FAFC"/>
+          </a:solidFill>
+          <a:ln w="12700">
+            <a:solidFill>
+              <a:srgbClr val="E2E8F0"/>
+            </a:solidFill>
+          </a:ln>
+        </p:spPr>
+        <p:style>
+          <a:lnRef idx="1">
+            <a:schemeClr val="accent1"/>
+          </a:lnRef>
+          <a:fillRef idx="3">
+            <a:schemeClr val="accent1"/>
+          </a:fillRef>
+          <a:effectRef idx="2">
+            <a:schemeClr val="accent1"/>
+          </a:effectRef>
+          <a:fontRef idx="minor">
+            <a:schemeClr val="lt1"/>
+          </a:fontRef>
+        </p:style>
+        <p:txBody>
+          <a:bodyPr rtlCol="0" anchor="t" wrap="square" lIns="228600" rIns="228600" tIns="201168" bIns="182880"/>
+          <a:lstStyle/>
+          <a:p>
+            <a:pPr algn="ctr">
+              <a:spcAft>
+                <a:spcPts val="800"/>
+              </a:spcAft>
+              <a:defRPr sz="1500" b="1">
+                <a:solidFill>
+                  <a:srgbClr val="1E3A8A"/>
+                </a:solidFill>
+                <a:latin typeface="Arial"/>
+              </a:defRPr>
+            </a:pPr>
+            <a:r>
+              <a:t>4. Protocolo Dual (API &amp; WebSockets)</a:t>
+            </a:r>
+          </a:p>
+          <a:p>
+            <a:pPr>
+              <a:spcAft>
+                <a:spcPts val="500"/>
+              </a:spcAft>
+              <a:defRPr sz="1100">
+                <a:latin typeface="Arial"/>
+              </a:defRPr>
+            </a:pPr>
+            <a:r>
+              <a:rPr b="1">
+                <a:solidFill>
+                  <a:srgbClr val="1E3A8A"/>
+                </a:solidFill>
+              </a:rPr>
+              <a:t>Definición: </a:t>
+            </a:r>
+            <a:r>
+              <a:rPr>
+                <a:solidFill>
+                  <a:srgbClr val="334155"/>
+                </a:solidFill>
+              </a:rPr>
+              <a:t>HTTP REST sin estado para administración CRUD y WebSockets para telemetría bidireccional (heartbeats) y control inmediato de pantallas.</a:t>
+            </a:r>
+          </a:p>
+        </p:txBody>
+      </p:sp>
+      <p:sp>
+        <p:nvSpPr>
+          <p:cNvPr id="12" name="Rectangle 11"/>
+          <p:cNvSpPr/>
+          <p:nvPr/>
+        </p:nvSpPr>
+        <p:spPr>
+          <a:xfrm>
+            <a:off x="4434840" y="4069080"/>
+            <a:ext cx="3291840" cy="73152"/>
+          </a:xfrm>
+          <a:prstGeom prst="rect">
+            <a:avLst/>
+          </a:prstGeom>
+          <a:solidFill>
+            <a:srgbClr val="2563EB"/>
+          </a:solidFill>
+          <a:ln>
+            <a:noFill/>
+          </a:ln>
+        </p:spPr>
+        <p:style>
+          <a:lnRef idx="1">
+            <a:schemeClr val="accent1"/>
+          </a:lnRef>
+          <a:fillRef idx="3">
+            <a:schemeClr val="accent1"/>
+          </a:fillRef>
+          <a:effectRef idx="2">
+            <a:schemeClr val="accent1"/>
+          </a:effectRef>
+          <a:fontRef idx="minor">
+            <a:schemeClr val="lt1"/>
+          </a:fontRef>
+        </p:style>
+        <p:txBody>
+          <a:bodyPr rtlCol="0" anchor="ctr"/>
+          <a:lstStyle/>
+          <a:p>
+            <a:pPr algn="ctr"/>
+          </a:p>
+        </p:txBody>
+      </p:sp>
+      <p:sp>
+        <p:nvSpPr>
+          <p:cNvPr id="13" name="Rounded Rectangle 12"/>
+          <p:cNvSpPr/>
+          <p:nvPr/>
+        </p:nvSpPr>
+        <p:spPr>
+          <a:xfrm>
+            <a:off x="8046720" y="4023360"/>
+            <a:ext cx="3383280" cy="2194560"/>
+          </a:xfrm>
+          <a:prstGeom prst="roundRect">
+            <a:avLst/>
+          </a:prstGeom>
+          <a:solidFill>
+            <a:srgbClr val="F8FAFC"/>
+          </a:solidFill>
+          <a:ln w="12700">
+            <a:solidFill>
+              <a:srgbClr val="E2E8F0"/>
+            </a:solidFill>
+          </a:ln>
+        </p:spPr>
+        <p:style>
+          <a:lnRef idx="1">
+            <a:schemeClr val="accent1"/>
+          </a:lnRef>
+          <a:fillRef idx="3">
+            <a:schemeClr val="accent1"/>
+          </a:fillRef>
+          <a:effectRef idx="2">
+            <a:schemeClr val="accent1"/>
+          </a:effectRef>
+          <a:fontRef idx="minor">
+            <a:schemeClr val="lt1"/>
+          </a:fontRef>
+        </p:style>
+        <p:txBody>
+          <a:bodyPr rtlCol="0" anchor="t" wrap="square" lIns="228600" rIns="228600" tIns="201168" bIns="182880"/>
+          <a:lstStyle/>
+          <a:p>
+            <a:pPr algn="ctr">
+              <a:spcAft>
+                <a:spcPts val="800"/>
+              </a:spcAft>
+              <a:defRPr sz="1500" b="1">
+                <a:solidFill>
+                  <a:srgbClr val="1E3A8A"/>
+                </a:solidFill>
+                <a:latin typeface="Arial"/>
+              </a:defRPr>
+            </a:pPr>
+            <a:r>
+              <a:t>5. Arquitectura Desacoplada</a:t>
+            </a:r>
+          </a:p>
+          <a:p>
+            <a:pPr>
+              <a:spcAft>
+                <a:spcPts val="500"/>
+              </a:spcAft>
+              <a:defRPr sz="1100">
+                <a:latin typeface="Arial"/>
+              </a:defRPr>
+            </a:pPr>
+            <a:r>
+              <a:t>Definición: Separación física y lógica entre la capa de administración centralizada en la nube y los nodos ejecutores autónomos desplegados en locaciones fijas (NUCs).</a:t>
+            </a:r>
+          </a:p>
+        </p:txBody>
+      </p:sp>
+      <p:sp>
+        <p:nvSpPr>
+          <p:cNvPr id="14" name="Rectangle 13"/>
+          <p:cNvSpPr/>
+          <p:nvPr/>
+        </p:nvSpPr>
+        <p:spPr>
+          <a:xfrm>
+            <a:off x="8092440" y="4069080"/>
+            <a:ext cx="3291840" cy="73152"/>
+          </a:xfrm>
+          <a:prstGeom prst="rect">
+            <a:avLst/>
+          </a:prstGeom>
+          <a:solidFill>
+            <a:srgbClr val="0D9488"/>
+          </a:solidFill>
+          <a:ln>
+            <a:noFill/>
+          </a:ln>
+        </p:spPr>
+        <p:style>
+          <a:lnRef idx="1">
+            <a:schemeClr val="accent1"/>
+          </a:lnRef>
+          <a:fillRef idx="3">
+            <a:schemeClr val="accent1"/>
+          </a:fillRef>
+          <a:effectRef idx="2">
+            <a:schemeClr val="accent1"/>
+          </a:effectRef>
+          <a:fontRef idx="minor">
+            <a:schemeClr val="lt1"/>
+          </a:fontRef>
+        </p:style>
+        <p:txBody>
+          <a:bodyPr rtlCol="0" anchor="ctr"/>
+          <a:lstStyle/>
+          <a:p>
+            <a:pPr algn="ctr"/>
+          </a:p>
+        </p:txBody>
+      </p:sp>
+    </p:spTree>
+  </p:cSld>
+  <p:clrMapOvr>
+    <a:masterClrMapping/>
+  </p:clrMapOvr>
+</p:sld>
+</file>
+
+<file path=ppt/slides/slide13.xml><?xml version="1.0" encoding="utf-8"?>
+<p:sld xmlns:a="http://schemas.openxmlformats.org/drawingml/2006/main" xmlns:p="http://schemas.openxmlformats.org/presentationml/2006/main" xmlns:r="http://schemas.openxmlformats.org/officeDocument/2006/relationships">
+  <p:cSld>
+    <p:spTree>
+      <p:nvGrpSpPr>
+        <p:cNvPr id="1" name=""/>
+        <p:cNvGrpSpPr/>
+        <p:nvPr/>
+      </p:nvGrpSpPr>
+      <p:grpSpPr/>
+      <p:sp>
+        <p:nvSpPr>
+          <p:cNvPr id="2" name="Rectangle 1"/>
+          <p:cNvSpPr/>
+          <p:nvPr/>
+        </p:nvSpPr>
+        <p:spPr>
+          <a:xfrm>
+            <a:off x="731520" y="457200"/>
+            <a:ext cx="10725912" cy="45720"/>
+          </a:xfrm>
+          <a:prstGeom prst="rect">
+            <a:avLst/>
+          </a:prstGeom>
+          <a:solidFill>
+            <a:srgbClr val="003366"/>
+          </a:solidFill>
+          <a:ln>
+            <a:noFill/>
+          </a:ln>
+        </p:spPr>
+        <p:style>
+          <a:lnRef idx="1">
+            <a:schemeClr val="accent1"/>
+          </a:lnRef>
+          <a:fillRef idx="3">
+            <a:schemeClr val="accent1"/>
+          </a:fillRef>
+          <a:effectRef idx="2">
+            <a:schemeClr val="accent1"/>
+          </a:effectRef>
+          <a:fontRef idx="minor">
+            <a:schemeClr val="lt1"/>
+          </a:fontRef>
+        </p:style>
+        <p:txBody>
+          <a:bodyPr rtlCol="0" anchor="ctr"/>
+          <a:lstStyle/>
+          <a:p>
+            <a:pPr algn="ctr"/>
+          </a:p>
+        </p:txBody>
+      </p:sp>
+      <p:sp>
+        <p:nvSpPr>
+          <p:cNvPr id="3" name="TextBox 2"/>
+          <p:cNvSpPr txBox="1"/>
+          <p:nvPr/>
+        </p:nvSpPr>
+        <p:spPr>
+          <a:xfrm>
+            <a:off x="731520" y="594360"/>
+            <a:ext cx="8412480" cy="822960"/>
+          </a:xfrm>
+          <a:prstGeom prst="rect">
+            <a:avLst/>
+          </a:prstGeom>
+          <a:noFill/>
+        </p:spPr>
+        <p:txBody>
+          <a:bodyPr wrap="square">
+            <a:spAutoFit/>
+          </a:bodyPr>
+          <a:lstStyle/>
+          <a:p>
+            <a:pPr>
+              <a:defRPr b="1" sz="2200">
+                <a:solidFill>
+                  <a:srgbClr val="003366"/>
+                </a:solidFill>
+              </a:defRPr>
+            </a:pPr>
+            <a:r>
+              <a:t>Prototipos Visuales de Interfaz (Mockups Figma)</a:t>
+            </a:r>
+          </a:p>
+          <a:p>
+            <a:pPr>
+              <a:defRPr sz="1300">
+                <a:solidFill>
+                  <a:srgbClr val="646464"/>
+                </a:solidFill>
+              </a:defRPr>
+            </a:pPr>
+            <a:r>
+              <a:t>Diseño UI/UX del Panel Administrativo Centralizado y Monitoreo de Pantallas</a:t>
+            </a:r>
+          </a:p>
+        </p:txBody>
+      </p:sp>
+      <p:sp>
+        <p:nvSpPr>
+          <p:cNvPr id="4" name="Rounded Rectangle 3"/>
+          <p:cNvSpPr/>
+          <p:nvPr/>
+        </p:nvSpPr>
+        <p:spPr>
+          <a:xfrm>
+            <a:off x="9144000" y="640080"/>
+            <a:ext cx="2313432" cy="411480"/>
+          </a:xfrm>
+          <a:prstGeom prst="roundRect">
+            <a:avLst/>
+          </a:prstGeom>
+          <a:solidFill>
+            <a:srgbClr val="F0F3F6"/>
+          </a:solidFill>
+          <a:ln>
+            <a:solidFill>
+              <a:srgbClr val="C8D2DC"/>
+            </a:solidFill>
+          </a:ln>
+        </p:spPr>
+        <p:style>
+          <a:lnRef idx="1">
+            <a:schemeClr val="accent1"/>
+          </a:lnRef>
+          <a:fillRef idx="3">
+            <a:schemeClr val="accent1"/>
+          </a:fillRef>
+          <a:effectRef idx="2">
+            <a:schemeClr val="accent1"/>
+          </a:effectRef>
+          <a:fontRef idx="minor">
+            <a:schemeClr val="lt1"/>
+          </a:fontRef>
+        </p:style>
+        <p:txBody>
+          <a:bodyPr rtlCol="0" anchor="ctr"/>
+          <a:lstStyle/>
+          <a:p>
+            <a:pPr algn="ctr">
+              <a:defRPr sz="1100" b="1">
+                <a:solidFill>
+                  <a:srgbClr val="003366"/>
+                </a:solidFill>
+              </a:defRPr>
+            </a:pPr>
+            <a:r>
+              <a:t>Paulo Loyola | Bloque 3</a:t>
+            </a:r>
+          </a:p>
+        </p:txBody>
+      </p:sp>
+      <p:sp>
+        <p:nvSpPr>
+          <p:cNvPr id="5" name="Rounded Rectangle 4"/>
+          <p:cNvSpPr/>
+          <p:nvPr/>
+        </p:nvSpPr>
+        <p:spPr>
+          <a:xfrm>
+            <a:off x="731520" y="1645920"/>
+            <a:ext cx="3474720" cy="4389120"/>
+          </a:xfrm>
+          <a:prstGeom prst="roundRect">
+            <a:avLst/>
+          </a:prstGeom>
+          <a:solidFill>
+            <a:srgbClr val="F8FAFC"/>
+          </a:solidFill>
+          <a:ln>
+            <a:solidFill>
+              <a:srgbClr val="DAE1E9"/>
+            </a:solidFill>
+          </a:ln>
+        </p:spPr>
+        <p:style>
+          <a:lnRef idx="1">
+            <a:schemeClr val="accent1"/>
+          </a:lnRef>
+          <a:fillRef idx="3">
+            <a:schemeClr val="accent1"/>
+          </a:fillRef>
+          <a:effectRef idx="2">
+            <a:schemeClr val="accent1"/>
+          </a:effectRef>
+          <a:fontRef idx="minor">
+            <a:schemeClr val="lt1"/>
+          </a:fontRef>
+        </p:style>
+        <p:txBody>
+          <a:bodyPr rtlCol="0" anchor="ctr" wrap="square"/>
+          <a:lstStyle/>
+          <a:p>
+            <a:pPr algn="ctr">
+              <a:defRPr b="1" sz="1300">
+                <a:solidFill>
+                  <a:srgbClr val="003366"/>
+                </a:solidFill>
+              </a:defRPr>
+            </a:pPr>
+            <a:r>
+              <a:t>Componentes de Interfaz UI/UX</a:t>
+            </a:r>
+          </a:p>
+          <a:p>
+            <a:pPr>
+              <a:defRPr b="1" sz="1050">
+                <a:solidFill>
+                  <a:srgbClr val="141E2D"/>
+                </a:solidFill>
+              </a:defRPr>
+            </a:pPr>
+            <a:r>
+              <a:t>• 1. Monitoreo NUC en Vivo</a:t>
+            </a:r>
+          </a:p>
+          <a:p>
+            <a:pPr>
+              <a:defRPr sz="950">
+                <a:solidFill>
+                  <a:srgbClr val="5A646E"/>
+                </a:solidFill>
+              </a:defRPr>
+            </a:pPr>
+            <a:r>
+              <a:t>   Panel de pantallas con semáforo de conectividad (Online / Offline) y última comunicación.</a:t>
+            </a:r>
+          </a:p>
+          <a:p>
+            <a:pPr>
+              <a:defRPr b="1" sz="1050">
+                <a:solidFill>
+                  <a:srgbClr val="141E2D"/>
+                </a:solidFill>
+              </a:defRPr>
+            </a:pPr>
+            <a:r>
+              <a:t>• 2. Catálogo de Medios</a:t>
+            </a:r>
+          </a:p>
+          <a:p>
+            <a:pPr>
+              <a:defRPr sz="950">
+                <a:solidFill>
+                  <a:srgbClr val="5A646E"/>
+                </a:solidFill>
+              </a:defRPr>
+            </a:pPr>
+            <a:r>
+              <a:t>   Carga de videos MP4/imágenes, cálculo SHA-256 automático y metadatos de peso/resolución.</a:t>
+            </a:r>
+          </a:p>
+          <a:p>
+            <a:pPr>
+              <a:defRPr b="1" sz="1050">
+                <a:solidFill>
+                  <a:srgbClr val="141E2D"/>
+                </a:solidFill>
+              </a:defRPr>
+            </a:pPr>
+            <a:r>
+              <a:t>• 3. Parrilla de Horarios</a:t>
+            </a:r>
+          </a:p>
+          <a:p>
+            <a:pPr>
+              <a:defRPr sz="950">
+                <a:solidFill>
+                  <a:srgbClr val="5A646E"/>
+                </a:solidFill>
+              </a:defRPr>
+            </a:pPr>
+            <a:r>
+              <a:t>   Timeline visual para programar listas de reproducción por locación y sector sin solapamientos.</a:t>
+            </a:r>
+          </a:p>
+          <a:p>
+            <a:pPr>
+              <a:defRPr b="1" sz="1050">
+                <a:solidFill>
+                  <a:srgbClr val="141E2D"/>
+                </a:solidFill>
+              </a:defRPr>
+            </a:pPr>
+            <a:r>
+              <a:t>• 4. Vistas por Rol</a:t>
+            </a:r>
+          </a:p>
+          <a:p>
+            <a:pPr>
+              <a:defRPr sz="950">
+                <a:solidFill>
+                  <a:srgbClr val="5A646E"/>
+                </a:solidFill>
+              </a:defRPr>
+            </a:pPr>
+            <a:r>
+              <a:t>   Acceso global para Administrador y vistas restringidas a locaciones asignadas para Operador.</a:t>
+            </a:r>
+          </a:p>
+        </p:txBody>
+      </p:sp>
+      <p:sp>
+        <p:nvSpPr>
+          <p:cNvPr id="6" name="Rounded Rectangle 5"/>
+          <p:cNvSpPr/>
+          <p:nvPr/>
+        </p:nvSpPr>
+        <p:spPr>
+          <a:xfrm>
+            <a:off x="4389120" y="1645920"/>
+            <a:ext cx="7068312" cy="4389120"/>
+          </a:xfrm>
+          <a:prstGeom prst="roundRect">
+            <a:avLst/>
+          </a:prstGeom>
+          <a:solidFill>
+            <a:srgbClr val="F0F4F8"/>
+          </a:solidFill>
+          <a:ln w="25400">
+            <a:solidFill>
+              <a:srgbClr val="003366"/>
+            </a:solidFill>
+          </a:ln>
+        </p:spPr>
+        <p:style>
+          <a:lnRef idx="1">
+            <a:schemeClr val="accent1"/>
+          </a:lnRef>
+          <a:fillRef idx="3">
+            <a:schemeClr val="accent1"/>
+          </a:fillRef>
+          <a:effectRef idx="2">
+            <a:schemeClr val="accent1"/>
+          </a:effectRef>
+          <a:fontRef idx="minor">
+            <a:schemeClr val="lt1"/>
+          </a:fontRef>
+        </p:style>
+        <p:txBody>
+          <a:bodyPr rtlCol="0" anchor="ctr" wrap="square"/>
+          <a:lstStyle/>
+          <a:p>
+            <a:pPr algn="ctr">
+              <a:defRPr b="1" sz="1500">
+                <a:solidFill>
+                  <a:srgbClr val="003366"/>
+                </a:solidFill>
+              </a:defRPr>
+            </a:pPr>
+            <a:br/>
+            <a:br/>
+            <a:br/>
+            <a:r>
+              <a:t>🖼️ [ESPACIO RESERVADO PARA WIREFRAME / MOCKUP DE FIGMA]</a:t>
+            </a:r>
+          </a:p>
+          <a:p>
+            <a:pPr algn="ctr">
+              <a:defRPr sz="1100">
+                <a:solidFill>
+                  <a:srgbClr val="6E7882"/>
+                </a:solidFill>
+              </a:defRPr>
+            </a:pPr>
+            <a:br/>
+            <a:r>
+              <a:t>Pegue o inserte aquí la captura de pantalla del prototipo de alta fidelidad diseñado en Figma.</a:t>
+            </a:r>
+            <a:br/>
+            <a:r>
+              <a:t>(Panel Web Reactivo Blade • Parrilla de Programación • Telemetría NUC en Vivo)</a:t>
+            </a:r>
+          </a:p>
+        </p:txBody>
+      </p:sp>
+    </p:spTree>
+  </p:cSld>
+  <p:clrMapOvr>
+    <a:masterClrMapping/>
+  </p:clrMapOvr>
+</p:sld>
+</file>
+
+<file path=ppt/slides/slide2.xml><?xml version="1.0" encoding="utf-8"?>
+<p:sld xmlns:a="http://schemas.openxmlformats.org/drawingml/2006/main" xmlns:p="http://schemas.openxmlformats.org/presentationml/2006/main" xmlns:r="http://schemas.openxmlformats.org/officeDocument/2006/relationships">
+  <p:cSld>
+    <p:spTree>
+      <p:nvGrpSpPr>
+        <p:cNvPr id="1" name=""/>
+        <p:cNvGrpSpPr/>
+        <p:nvPr/>
+      </p:nvGrpSpPr>
+      <p:grpSpPr/>
+      <p:sp>
+        <p:nvSpPr>
+          <p:cNvPr id="2" name="Rectangle 1"/>
+          <p:cNvSpPr/>
+          <p:nvPr/>
+        </p:nvSpPr>
+        <p:spPr>
+          <a:xfrm>
+            <a:off x="731520" y="457200"/>
+            <a:ext cx="10725912" cy="45720"/>
+          </a:xfrm>
+          <a:prstGeom prst="rect">
+            <a:avLst/>
+          </a:prstGeom>
+          <a:solidFill>
+            <a:srgbClr val="003366"/>
+          </a:solidFill>
+          <a:ln>
+            <a:noFill/>
+          </a:ln>
+        </p:spPr>
+        <p:style>
+          <a:lnRef idx="1">
+            <a:schemeClr val="accent1"/>
+          </a:lnRef>
+          <a:fillRef idx="3">
+            <a:schemeClr val="accent1"/>
+          </a:fillRef>
+          <a:effectRef idx="2">
+            <a:schemeClr val="accent1"/>
+          </a:effectRef>
+          <a:fontRef idx="minor">
+            <a:schemeClr val="lt1"/>
+          </a:fontRef>
+        </p:style>
+        <p:txBody>
+          <a:bodyPr rtlCol="0" anchor="ctr"/>
+          <a:lstStyle/>
+          <a:p>
+            <a:pPr algn="ctr"/>
+          </a:p>
+        </p:txBody>
+      </p:sp>
+      <p:sp>
+        <p:nvSpPr>
+          <p:cNvPr id="3" name="TextBox 2"/>
+          <p:cNvSpPr txBox="1"/>
+          <p:nvPr/>
+        </p:nvSpPr>
+        <p:spPr>
+          <a:xfrm>
+            <a:off x="731520" y="594360"/>
+            <a:ext cx="8412480" cy="822960"/>
+          </a:xfrm>
+          <a:prstGeom prst="rect">
+            <a:avLst/>
+          </a:prstGeom>
+          <a:noFill/>
+        </p:spPr>
+        <p:txBody>
+          <a:bodyPr wrap="square">
+            <a:spAutoFit/>
+          </a:bodyPr>
+          <a:lstStyle/>
+          <a:p>
+            <a:pPr>
+              <a:defRPr b="1" sz="2200">
+                <a:solidFill>
+                  <a:srgbClr val="003366"/>
+                </a:solidFill>
+              </a:defRPr>
+            </a:pPr>
+            <a:r>
+              <a:t>Estructura de la Defensa y Agenda</a:t>
+            </a:r>
+          </a:p>
+          <a:p>
+            <a:pPr>
+              <a:defRPr sz="1300">
+                <a:solidFill>
+                  <a:srgbClr val="646464"/>
+                </a:solidFill>
+              </a:defRPr>
+            </a:pPr>
+            <a:r>
+              <a:t>Hoja de Ruta de la Exposición Fase 1 — Proyecto ACE (PTY4614)</a:t>
+            </a:r>
+          </a:p>
+        </p:txBody>
+      </p:sp>
+      <p:sp>
+        <p:nvSpPr>
+          <p:cNvPr id="4" name="Rounded Rectangle 3"/>
+          <p:cNvSpPr/>
+          <p:nvPr/>
+        </p:nvSpPr>
+        <p:spPr>
+          <a:xfrm>
+            <a:off x="9326880" y="640080"/>
+            <a:ext cx="2130552" cy="411480"/>
+          </a:xfrm>
+          <a:prstGeom prst="roundRect">
+            <a:avLst/>
+          </a:prstGeom>
+          <a:solidFill>
+            <a:srgbClr val="F0F3F6"/>
+          </a:solidFill>
+          <a:ln>
+            <a:solidFill>
+              <a:srgbClr val="C8D2DC"/>
+            </a:solidFill>
+          </a:ln>
+        </p:spPr>
+        <p:style>
+          <a:lnRef idx="1">
+            <a:schemeClr val="accent1"/>
+          </a:lnRef>
+          <a:fillRef idx="3">
+            <a:schemeClr val="accent1"/>
+          </a:fillRef>
+          <a:effectRef idx="2">
+            <a:schemeClr val="accent1"/>
+          </a:effectRef>
+          <a:fontRef idx="minor">
+            <a:schemeClr val="lt1"/>
+          </a:fontRef>
+        </p:style>
+        <p:txBody>
+          <a:bodyPr rtlCol="0" anchor="ctr"/>
+          <a:lstStyle/>
+          <a:p>
+            <a:pPr algn="ctr">
+              <a:defRPr sz="1100" b="1">
+                <a:solidFill>
+                  <a:srgbClr val="003366"/>
+                </a:solidFill>
+              </a:defRPr>
+            </a:pPr>
+            <a:r>
+              <a:t>Todo el Equipo</a:t>
+            </a:r>
+          </a:p>
+        </p:txBody>
+      </p:sp>
+      <p:sp>
+        <p:nvSpPr>
+          <p:cNvPr id="5" name="Rounded Rectangle 4"/>
+          <p:cNvSpPr/>
+          <p:nvPr/>
+        </p:nvSpPr>
+        <p:spPr>
+          <a:xfrm>
+            <a:off x="731520" y="1645920"/>
+            <a:ext cx="5212080" cy="4389120"/>
+          </a:xfrm>
+          <a:prstGeom prst="roundRect">
+            <a:avLst/>
+          </a:prstGeom>
+          <a:solidFill>
+            <a:srgbClr val="F8FAFC"/>
+          </a:solidFill>
+          <a:ln>
+            <a:solidFill>
+              <a:srgbClr val="DAE1E9"/>
+            </a:solidFill>
+          </a:ln>
+        </p:spPr>
+        <p:style>
+          <a:lnRef idx="1">
+            <a:schemeClr val="accent1"/>
+          </a:lnRef>
+          <a:fillRef idx="3">
+            <a:schemeClr val="accent1"/>
+          </a:fillRef>
+          <a:effectRef idx="2">
+            <a:schemeClr val="accent1"/>
+          </a:effectRef>
+          <a:fontRef idx="minor">
+            <a:schemeClr val="lt1"/>
+          </a:fontRef>
+        </p:style>
+        <p:txBody>
+          <a:bodyPr rtlCol="0" anchor="ctr" wrap="square"/>
+          <a:lstStyle/>
+          <a:p>
+            <a:pPr algn="ctr">
+              <a:defRPr b="1" sz="1400">
+                <a:solidFill>
+                  <a:srgbClr val="003366"/>
+                </a:solidFill>
+              </a:defRPr>
+            </a:pPr>
+            <a:r>
+              <a:t>Bloque I: Fundamentación y Estrategia</a:t>
+            </a:r>
+          </a:p>
+          <a:p>
+            <a:pPr>
+              <a:defRPr b="1" sz="1150">
+                <a:solidFill>
+                  <a:srgbClr val="141E2D"/>
+                </a:solidFill>
+              </a:defRPr>
+            </a:pPr>
+            <a:r>
+              <a:t>• I. Contexto y Diagnóstico del Negocio</a:t>
+            </a:r>
+          </a:p>
+          <a:p>
+            <a:pPr>
+              <a:defRPr sz="1000">
+                <a:solidFill>
+                  <a:srgbClr val="5A646E"/>
+                </a:solidFill>
+              </a:defRPr>
+            </a:pPr>
+            <a:r>
+              <a:t>   Problemática de Lumina Motion: pendrives, licencias externas y caídas WAN.</a:t>
+            </a:r>
+          </a:p>
+          <a:p>
+            <a:pPr>
+              <a:defRPr b="1" sz="1150">
+                <a:solidFill>
+                  <a:srgbClr val="141E2D"/>
+                </a:solidFill>
+              </a:defRPr>
+            </a:pPr>
+            <a:r>
+              <a:t>• II. Solución y Arquitectura Desacoplada</a:t>
+            </a:r>
+          </a:p>
+          <a:p>
+            <a:pPr>
+              <a:defRPr sz="1000">
+                <a:solidFill>
+                  <a:srgbClr val="5A646E"/>
+                </a:solidFill>
+              </a:defRPr>
+            </a:pPr>
+            <a:r>
+              <a:t>   Estructura Cliente-Servidor Cache-First y resiliencia offline ante cortes.</a:t>
+            </a:r>
+          </a:p>
+          <a:p>
+            <a:pPr>
+              <a:defRPr b="1" sz="1150">
+                <a:solidFill>
+                  <a:srgbClr val="141E2D"/>
+                </a:solidFill>
+              </a:defRPr>
+            </a:pPr>
+            <a:r>
+              <a:t>• III. Formulación de Objetivos de Ingeniería</a:t>
+            </a:r>
+          </a:p>
+          <a:p>
+            <a:pPr>
+              <a:defRPr sz="1000">
+                <a:solidFill>
+                  <a:srgbClr val="5A646E"/>
+                </a:solidFill>
+              </a:defRPr>
+            </a:pPr>
+            <a:r>
+              <a:t>   Meta General y 6 Objetivos Específicos alineados a la industria.</a:t>
+            </a:r>
+          </a:p>
+          <a:p>
+            <a:pPr>
+              <a:defRPr b="1" sz="1150">
+                <a:solidFill>
+                  <a:srgbClr val="141E2D"/>
+                </a:solidFill>
+              </a:defRPr>
+            </a:pPr>
+            <a:r>
+              <a:t>• IV. Metodología Ágil y Roles Disciplinares</a:t>
+            </a:r>
+          </a:p>
+          <a:p>
+            <a:pPr>
+              <a:defRPr sz="1000">
+                <a:solidFill>
+                  <a:srgbClr val="5A646E"/>
+                </a:solidFill>
+              </a:defRPr>
+            </a:pPr>
+            <a:r>
+              <a:t>   Scrum adaptado, flujos de integración en GitHub y corresponsabilidad técnica.</a:t>
+            </a:r>
+          </a:p>
+        </p:txBody>
+      </p:sp>
+      <p:sp>
+        <p:nvSpPr>
+          <p:cNvPr id="6" name="Rounded Rectangle 5"/>
+          <p:cNvSpPr/>
+          <p:nvPr/>
+        </p:nvSpPr>
+        <p:spPr>
+          <a:xfrm>
+            <a:off x="6217920" y="1645920"/>
+            <a:ext cx="5212080" cy="4389120"/>
+          </a:xfrm>
+          <a:prstGeom prst="roundRect">
+            <a:avLst/>
+          </a:prstGeom>
+          <a:solidFill>
+            <a:srgbClr val="F8FAFC"/>
+          </a:solidFill>
+          <a:ln>
+            <a:solidFill>
+              <a:srgbClr val="DAE1E9"/>
+            </a:solidFill>
+          </a:ln>
+        </p:spPr>
+        <p:style>
+          <a:lnRef idx="1">
+            <a:schemeClr val="accent1"/>
+          </a:lnRef>
+          <a:fillRef idx="3">
+            <a:schemeClr val="accent1"/>
+          </a:fillRef>
+          <a:effectRef idx="2">
+            <a:schemeClr val="accent1"/>
+          </a:effectRef>
+          <a:fontRef idx="minor">
+            <a:schemeClr val="lt1"/>
+          </a:fontRef>
+        </p:style>
+        <p:txBody>
+          <a:bodyPr rtlCol="0" anchor="ctr" wrap="square"/>
+          <a:lstStyle/>
+          <a:p>
+            <a:pPr algn="ctr">
+              <a:defRPr b="1" sz="1400">
+                <a:solidFill>
+                  <a:srgbClr val="003366"/>
+                </a:solidFill>
+              </a:defRPr>
+            </a:pPr>
+            <a:r>
+              <a:t>Bloque II: Planificación e Ingeniería</a:t>
+            </a:r>
+          </a:p>
+          <a:p>
+            <a:pPr>
+              <a:defRPr b="1" sz="1150">
+                <a:solidFill>
+                  <a:srgbClr val="141E2D"/>
+                </a:solidFill>
+              </a:defRPr>
+            </a:pPr>
+            <a:r>
+              <a:t>• V. Factibilidad, Matriz de Riesgos y Seguridad</a:t>
+            </a:r>
+          </a:p>
+          <a:p>
+            <a:pPr>
+              <a:defRPr sz="1000">
+                <a:solidFill>
+                  <a:srgbClr val="5A646E"/>
+                </a:solidFill>
+              </a:defRPr>
+            </a:pPr>
+            <a:r>
+              <a:t>   Viabilidad en 18 semanas, mitigaciones, JWT y validación SHA-256.</a:t>
+            </a:r>
+          </a:p>
+          <a:p>
+            <a:pPr>
+              <a:defRPr b="1" sz="1150">
+                <a:solidFill>
+                  <a:srgbClr val="141E2D"/>
+                </a:solidFill>
+              </a:defRPr>
+            </a:pPr>
+            <a:r>
+              <a:t>• VI. Modelo de Datos y Prototipos UI/UX (Mockups)</a:t>
+            </a:r>
+          </a:p>
+          <a:p>
+            <a:pPr>
+              <a:defRPr sz="1000">
+                <a:solidFill>
+                  <a:srgbClr val="5A646E"/>
+                </a:solidFill>
+              </a:defRPr>
+            </a:pPr>
+            <a:r>
+              <a:t>   Esquema MariaDB 3FN, roles de acceso y wireframes de interfaces Figma.</a:t>
+            </a:r>
+          </a:p>
+          <a:p>
+            <a:pPr>
+              <a:defRPr b="1" sz="1150">
+                <a:solidFill>
+                  <a:srgbClr val="141E2D"/>
+                </a:solidFill>
+              </a:defRPr>
+            </a:pPr>
+            <a:r>
+              <a:t>• VII. Plan de Trabajo y Carta Gantt Detallada</a:t>
+            </a:r>
+          </a:p>
+          <a:p>
+            <a:pPr>
+              <a:defRPr sz="1000">
+                <a:solidFill>
+                  <a:srgbClr val="5A646E"/>
+                </a:solidFill>
+              </a:defRPr>
+            </a:pPr>
+            <a:r>
+              <a:t>   Desglose de 22 actividades de ingeniería e hitos evaluativos Duoc.</a:t>
+            </a:r>
+          </a:p>
+          <a:p>
+            <a:pPr>
+              <a:defRPr b="1" sz="1150">
+                <a:solidFill>
+                  <a:srgbClr val="141E2D"/>
+                </a:solidFill>
+              </a:defRPr>
+            </a:pPr>
+            <a:r>
+              <a:t>• VIII. Evidencias, Glosario Técnico y Defensa</a:t>
+            </a:r>
+          </a:p>
+          <a:p>
+            <a:pPr>
+              <a:defRPr sz="1000">
+                <a:solidFill>
+                  <a:srgbClr val="5A646E"/>
+                </a:solidFill>
+              </a:defRPr>
+            </a:pPr>
+            <a:r>
+              <a:t>   Acreditación del perfil de egreso y preparación rigurosa de preguntas.</a:t>
+            </a:r>
           </a:p>
         </p:txBody>
       </p:sp>
@@ -6917,7 +7913,7 @@
               </a:defRPr>
             </a:pPr>
             <a:r>
-              <a:t>La Solución ACE y Arquitectura Híbrida Desacoplada</a:t>
+              <a:t>El Dolor del Negocio: Lumina Motion Studio</a:t>
             </a:r>
           </a:p>
           <a:p>
@@ -6933,7 +7929,7 @@
               </a:defRPr>
             </a:pPr>
             <a:r>
-              <a:t>Estructura Cliente-Servidor con Enfoque Cache-First y Fail-Safe</a:t>
+              <a:t>Diagnóstico Operativo de la Infraestructura de Cartelería Digital</a:t>
             </a:r>
           </a:p>
         </p:txBody>
@@ -7046,7 +8042,7 @@
               </a:defRPr>
             </a:pPr>
             <a:r>
-              <a:t>Servidor Central (Cloud)</a:t>
+              <a:t>1. Operativa Fragmentada</a:t>
             </a:r>
           </a:p>
           <a:p>
@@ -7064,7 +8060,7 @@
                   <a:srgbClr val="1E3A8A"/>
                 </a:solidFill>
               </a:rPr>
-              <a:t>Backend Robusto: </a:t>
+              <a:t>Actualización manual: </a:t>
             </a:r>
             <a:r>
               <a:rPr>
@@ -7072,7 +8068,7 @@
                   <a:srgbClr val="334155"/>
                 </a:solidFill>
               </a:rPr>
-              <a:t>Desarrollado en PHP 8.2+ con Laravel 11 y arquitectura MVC / API RESTful.</a:t>
+              <a:t>Gran parte del parque de pantallas se actualiza físicamente vía pendrives USB in situ.</a:t>
             </a:r>
           </a:p>
           <a:p>
@@ -7090,7 +8086,7 @@
                   <a:srgbClr val="1E3A8A"/>
                 </a:solidFill>
               </a:rPr>
-              <a:t>Persistencia Relacional: </a:t>
+              <a:t>Costos logísticos: </a:t>
             </a:r>
             <a:r>
               <a:rPr>
@@ -7098,7 +8094,7 @@
                   <a:srgbClr val="334155"/>
                 </a:solidFill>
               </a:rPr>
-              <a:t>MariaDB normalizada en 3FN con transacciones ACID para evitar colisiones horarias.</a:t>
+              <a:t>Traslados continuos de técnicos ante cambios de pauta publicitaria en recintos comerciales.</a:t>
             </a:r>
           </a:p>
           <a:p>
@@ -7116,7 +8112,7 @@
                   <a:srgbClr val="1E3A8A"/>
                 </a:solidFill>
               </a:rPr>
-              <a:t>Catálogo Multimedia: </a:t>
+              <a:t>Tiempo de respuesta lento: </a:t>
             </a:r>
             <a:r>
               <a:rPr>
@@ -7124,20 +8120,7 @@
                   <a:srgbClr val="334155"/>
                 </a:solidFill>
               </a:rPr>
-              <a:t>Cálculo automático de hash SHA-256 para verificación criptográfica de archivos.</a:t>
-            </a:r>
-          </a:p>
-          <a:p>
-            <a:pPr>
-              <a:spcAft>
-                <a:spcPts val="500"/>
-              </a:spcAft>
-              <a:defRPr sz="1100">
-                <a:latin typeface="Arial"/>
-              </a:defRPr>
-            </a:pPr>
-            <a:r>
-              <a:t>Gestión de Pautas: Asignación jerárquica de listas de reproducción por Locación, Sector y Pantalla (roles Admin y Operador).</a:t>
+              <a:t>Horas o días para actualizar un anuncio comercial en múltiples sedes.</a:t>
             </a:r>
           </a:p>
         </p:txBody>
@@ -7157,7 +8140,7 @@
             <a:avLst/>
           </a:prstGeom>
           <a:solidFill>
-            <a:srgbClr val="2563EB"/>
+            <a:srgbClr val="D97706"/>
           </a:solidFill>
           <a:ln>
             <a:noFill/>
@@ -7238,7 +8221,7 @@
               </a:defRPr>
             </a:pPr>
             <a:r>
-              <a:t>Canal de Sincronización</a:t>
+              <a:t>2. Licenciamiento Propietario</a:t>
             </a:r>
           </a:p>
           <a:p>
@@ -7256,7 +8239,7 @@
                   <a:srgbClr val="1E3A8A"/>
                 </a:solidFill>
               </a:rPr>
-              <a:t>Protocolo Dual: </a:t>
+              <a:t>Herramientas dispares: </a:t>
             </a:r>
             <a:r>
               <a:rPr>
@@ -7264,7 +8247,7 @@
                   <a:srgbClr val="334155"/>
                 </a:solidFill>
               </a:rPr>
-              <a:t>REST HTTP para CRUD administrativo + WebSockets para tiempo real.</a:t>
+              <a:t>Uso fragmentado de software comercial (MadMapper, Arena.im) sin integración entre sí.</a:t>
             </a:r>
           </a:p>
           <a:p>
@@ -7282,7 +8265,7 @@
                   <a:srgbClr val="1E3A8A"/>
                 </a:solidFill>
               </a:rPr>
-              <a:t>Telemetría en Vivo: </a:t>
+              <a:t>Sin panel central: </a:t>
             </a:r>
             <a:r>
               <a:rPr>
@@ -7290,7 +8273,7 @@
                   <a:srgbClr val="334155"/>
                 </a:solidFill>
               </a:rPr>
-              <a:t>Latidos periódicos (Heartbeats) para monitoreo de salud de pantallas.</a:t>
+              <a:t>Imposibilidad de gestionar un catálogo unificado de medios y pantallas por sectores.</a:t>
             </a:r>
           </a:p>
           <a:p>
@@ -7308,7 +8291,7 @@
                   <a:srgbClr val="1E3A8A"/>
                 </a:solidFill>
               </a:rPr>
-              <a:t>Comandos Inmediatos: </a:t>
+              <a:t>Costos recurrentes: </a:t>
             </a:r>
             <a:r>
               <a:rPr>
@@ -7316,33 +8299,7 @@
                   <a:srgbClr val="334155"/>
                 </a:solidFill>
               </a:rPr>
-              <a:t>Publicación instantánea de cambios de parrilla a reproductores conectados.</a:t>
-            </a:r>
-          </a:p>
-          <a:p>
-            <a:pPr>
-              <a:spcAft>
-                <a:spcPts val="500"/>
-              </a:spcAft>
-              <a:defRPr sz="1100">
-                <a:latin typeface="Arial"/>
-              </a:defRPr>
-            </a:pPr>
-            <a:r>
-              <a:rPr b="1">
-                <a:solidFill>
-                  <a:srgbClr val="1E3A8A"/>
-                </a:solidFill>
-              </a:rPr>
-              <a:t>Fallback Automático: </a:t>
-            </a:r>
-            <a:r>
-              <a:rPr>
-                <a:solidFill>
-                  <a:srgbClr val="334155"/>
-                </a:solidFill>
-              </a:rPr>
-              <a:t>Sondeo HTTP periódico si los puertos de sockets están bloqueados por firewall.</a:t>
+              <a:t>Alto gasto en licencias externas que no resuelven la automatización de horarios.</a:t>
             </a:r>
           </a:p>
         </p:txBody>
@@ -7362,7 +8319,7 @@
             <a:avLst/>
           </a:prstGeom>
           <a:solidFill>
-            <a:srgbClr val="0D9488"/>
+            <a:srgbClr val="2563EB"/>
           </a:solidFill>
           <a:ln>
             <a:noFill/>
@@ -7443,7 +8400,7 @@
               </a:defRPr>
             </a:pPr>
             <a:r>
-              <a:t>Nodo Reproductor Local (NUC)</a:t>
+              <a:t>3. Falla Crítica de Red</a:t>
             </a:r>
           </a:p>
           <a:p>
@@ -7456,7 +8413,20 @@
               </a:defRPr>
             </a:pPr>
             <a:r>
-              <a:t>Arquitectura Cache-First en NUCs: Descarga preventiva de videos al almacenamiento local; sin streaming.</a:t>
+              <a:rPr b="1">
+                <a:solidFill>
+                  <a:srgbClr val="1E3A8A"/>
+                </a:solidFill>
+              </a:rPr>
+              <a:t>Vulnerabilidad WAN: </a:t>
+            </a:r>
+            <a:r>
+              <a:rPr>
+                <a:solidFill>
+                  <a:srgbClr val="334155"/>
+                </a:solidFill>
+              </a:rPr>
+              <a:t>La conectividad a internet en recintos masivos (malls, eventos) es inestable y propensa a caídas.</a:t>
             </a:r>
           </a:p>
           <a:p>
@@ -7474,7 +8444,7 @@
                   <a:srgbClr val="1E3A8A"/>
                 </a:solidFill>
               </a:rPr>
-              <a:t>Resiliencia Offline Total: </a:t>
+              <a:t>Riesgo de pantalla en negro: </a:t>
             </a:r>
             <a:r>
               <a:rPr>
@@ -7482,7 +8452,7 @@
                   <a:srgbClr val="334155"/>
                 </a:solidFill>
               </a:rPr>
-              <a:t>Si se cae internet, la reproducción continúa de forma indefinida y autónoma.</a:t>
+              <a:t>Soluciones basadas en streaming colapsan ante interrupciones de red.</a:t>
             </a:r>
           </a:p>
           <a:p>
@@ -7500,7 +8470,7 @@
                   <a:srgbClr val="1E3A8A"/>
                 </a:solidFill>
               </a:rPr>
-              <a:t>Integridad SHA-256: </a:t>
+              <a:t>Penalizaciones comerciales: </a:t>
             </a:r>
             <a:r>
               <a:rPr>
@@ -7508,33 +8478,7 @@
                   <a:srgbClr val="334155"/>
                 </a:solidFill>
               </a:rPr>
-              <a:t>Comprobación estricta de integridad antes de marcar un archivo como listo.</a:t>
-            </a:r>
-          </a:p>
-          <a:p>
-            <a:pPr>
-              <a:spcAft>
-                <a:spcPts val="500"/>
-              </a:spcAft>
-              <a:defRPr sz="1100">
-                <a:latin typeface="Arial"/>
-              </a:defRPr>
-            </a:pPr>
-            <a:r>
-              <a:rPr b="1">
-                <a:solidFill>
-                  <a:srgbClr val="1E3A8A"/>
-                </a:solidFill>
-              </a:rPr>
-              <a:t>Panel Local de Emergencia: </a:t>
-            </a:r>
-            <a:r>
-              <a:rPr>
-                <a:solidFill>
-                  <a:srgbClr val="334155"/>
-                </a:solidFill>
-              </a:rPr>
-              <a:t>Servidor web embebido en la intranet para conmutación manual presencial.</a:t>
+              <a:t>Pérdida de ingresos y sanciones contractuales por indisponibilidad de anuncios.</a:t>
             </a:r>
           </a:p>
         </p:txBody>
@@ -7554,7 +8498,7 @@
             <a:avLst/>
           </a:prstGeom>
           <a:solidFill>
-            <a:srgbClr val="D97706"/>
+            <a:srgbClr val="DC2626"/>
           </a:solidFill>
           <a:ln>
             <a:noFill/>
@@ -7682,7 +8626,7 @@
               </a:defRPr>
             </a:pPr>
             <a:r>
-              <a:t>Objetivos del Proyecto ACE (PTY4614)</a:t>
+              <a:t>La Solución ACE y Arquitectura Híbrida Desacoplada</a:t>
             </a:r>
           </a:p>
           <a:p>
@@ -7698,7 +8642,7 @@
               </a:defRPr>
             </a:pPr>
             <a:r>
-              <a:t>Meta General y 6 Objetivos Específicos Alineados al Perfil de Egreso</a:t>
+              <a:t>Estructura Cliente-Servidor con Enfoque Cache-First y Fail-Safe</a:t>
             </a:r>
           </a:p>
         </p:txBody>
@@ -7753,7 +8697,7 @@
               </a:defRPr>
             </a:pPr>
             <a:r>
-              <a:t>Matías Salas | Bloque 2</a:t>
+              <a:t>Tomás Escalante | Bloque 1</a:t>
             </a:r>
           </a:p>
         </p:txBody>
@@ -7766,8 +8710,8 @@
         </p:nvSpPr>
         <p:spPr>
           <a:xfrm>
-            <a:off x="731520" y="1554480"/>
-            <a:ext cx="10728655" cy="1463040"/>
+            <a:off x="731520" y="1645920"/>
+            <a:ext cx="3383280" cy="4572000"/>
           </a:xfrm>
           <a:prstGeom prst="roundRect">
             <a:avLst/>
@@ -7811,7 +8755,7 @@
               </a:defRPr>
             </a:pPr>
             <a:r>
-              <a:t>Objetivo General</a:t>
+              <a:t>Servidor Central (Cloud)</a:t>
             </a:r>
           </a:p>
           <a:p>
@@ -7824,7 +8768,85 @@
               </a:defRPr>
             </a:pPr>
             <a:r>
-              <a:t>Meta Principal: Desarrollar una plataforma de gestión de cartelería digital para Lumina Motion que permita administrar centralizada y remotamente pantallas, contenidos y programación en locaciones fijas, manteniendo la reproducción y permitiendo cambios locales sin internet.</a:t>
+              <a:rPr b="1">
+                <a:solidFill>
+                  <a:srgbClr val="1E3A8A"/>
+                </a:solidFill>
+              </a:rPr>
+              <a:t>Backend Robusto: </a:t>
+            </a:r>
+            <a:r>
+              <a:rPr>
+                <a:solidFill>
+                  <a:srgbClr val="334155"/>
+                </a:solidFill>
+              </a:rPr>
+              <a:t>Desarrollado en PHP 8.2+ con Laravel 11 y arquitectura MVC / API RESTful.</a:t>
+            </a:r>
+          </a:p>
+          <a:p>
+            <a:pPr>
+              <a:spcAft>
+                <a:spcPts val="500"/>
+              </a:spcAft>
+              <a:defRPr sz="1100">
+                <a:latin typeface="Arial"/>
+              </a:defRPr>
+            </a:pPr>
+            <a:r>
+              <a:rPr b="1">
+                <a:solidFill>
+                  <a:srgbClr val="1E3A8A"/>
+                </a:solidFill>
+              </a:rPr>
+              <a:t>Persistencia Relacional: </a:t>
+            </a:r>
+            <a:r>
+              <a:rPr>
+                <a:solidFill>
+                  <a:srgbClr val="334155"/>
+                </a:solidFill>
+              </a:rPr>
+              <a:t>MariaDB normalizada en 3FN con transacciones ACID para evitar colisiones horarias.</a:t>
+            </a:r>
+          </a:p>
+          <a:p>
+            <a:pPr>
+              <a:spcAft>
+                <a:spcPts val="500"/>
+              </a:spcAft>
+              <a:defRPr sz="1100">
+                <a:latin typeface="Arial"/>
+              </a:defRPr>
+            </a:pPr>
+            <a:r>
+              <a:rPr b="1">
+                <a:solidFill>
+                  <a:srgbClr val="1E3A8A"/>
+                </a:solidFill>
+              </a:rPr>
+              <a:t>Catálogo Multimedia: </a:t>
+            </a:r>
+            <a:r>
+              <a:rPr>
+                <a:solidFill>
+                  <a:srgbClr val="334155"/>
+                </a:solidFill>
+              </a:rPr>
+              <a:t>Cálculo automático de hash SHA-256 para verificación criptográfica de archivos.</a:t>
+            </a:r>
+          </a:p>
+          <a:p>
+            <a:pPr>
+              <a:spcAft>
+                <a:spcPts val="500"/>
+              </a:spcAft>
+              <a:defRPr sz="1100">
+                <a:latin typeface="Arial"/>
+              </a:defRPr>
+            </a:pPr>
+            <a:r>
+              <a:t>Gestión de Pautas: Asignación jerárquica de listas de reproducción por Locación, Sector y Pantalla (roles Admin y Operador).</a:t>
             </a:r>
           </a:p>
         </p:txBody>
@@ -7837,8 +8859,8 @@
         </p:nvSpPr>
         <p:spPr>
           <a:xfrm>
-            <a:off x="777240" y="1600200"/>
-            <a:ext cx="10637215" cy="73152"/>
+            <a:off x="777240" y="1691640"/>
+            <a:ext cx="3291840" cy="73152"/>
           </a:xfrm>
           <a:prstGeom prst="rect">
             <a:avLst/>
@@ -7880,8 +8902,8 @@
         </p:nvSpPr>
         <p:spPr>
           <a:xfrm>
-            <a:off x="731520" y="3200400"/>
-            <a:ext cx="5212080" cy="3108960"/>
+            <a:off x="4389120" y="1645920"/>
+            <a:ext cx="3383280" cy="4572000"/>
           </a:xfrm>
           <a:prstGeom prst="roundRect">
             <a:avLst/>
@@ -7917,7 +8939,7 @@
               <a:spcAft>
                 <a:spcPts val="800"/>
               </a:spcAft>
-              <a:defRPr sz="1400" b="1">
+              <a:defRPr sz="1500" b="1">
                 <a:solidFill>
                   <a:srgbClr val="1E3A8A"/>
                 </a:solidFill>
@@ -7925,31 +8947,111 @@
               </a:defRPr>
             </a:pPr>
             <a:r>
-              <a:t>Objetivos Específicos (Gestión y Programación)</a:t>
-            </a:r>
-          </a:p>
-          <a:p>
-            <a:pPr>
-              <a:defRPr sz="1100"/>
-            </a:pPr>
-            <a:r>
-              <a:t>OE1 (Administración y Permisos por Locación): Implementar la gestión remota de locaciones, sectores y pantallas, con acceso diferenciado (Admin y Operador por locación).</a:t>
-            </a:r>
-          </a:p>
-          <a:p>
-            <a:pPr>
-              <a:defRPr sz="1100"/>
-            </a:pPr>
-            <a:r>
-              <a:t>OE2 (Gestión de Contenidos y Playlists): Desarrollar gestión de medios y listas reutilizables con orden, tiempos de exhibición y acceso autorizado.</a:t>
-            </a:r>
-          </a:p>
-          <a:p>
-            <a:pPr>
-              <a:defRPr sz="1100"/>
-            </a:pPr>
-            <a:r>
-              <a:t>OE3 (Programación Horaria Segmentada): Implementar programación por fechas y horarios con asignación a pantallas o sectores.</a:t>
+              <a:t>Canal de Sincronización</a:t>
+            </a:r>
+          </a:p>
+          <a:p>
+            <a:pPr>
+              <a:spcAft>
+                <a:spcPts val="500"/>
+              </a:spcAft>
+              <a:defRPr sz="1100">
+                <a:latin typeface="Arial"/>
+              </a:defRPr>
+            </a:pPr>
+            <a:r>
+              <a:rPr b="1">
+                <a:solidFill>
+                  <a:srgbClr val="1E3A8A"/>
+                </a:solidFill>
+              </a:rPr>
+              <a:t>Protocolo Dual: </a:t>
+            </a:r>
+            <a:r>
+              <a:rPr>
+                <a:solidFill>
+                  <a:srgbClr val="334155"/>
+                </a:solidFill>
+              </a:rPr>
+              <a:t>REST HTTP para CRUD administrativo + WebSockets para tiempo real.</a:t>
+            </a:r>
+          </a:p>
+          <a:p>
+            <a:pPr>
+              <a:spcAft>
+                <a:spcPts val="500"/>
+              </a:spcAft>
+              <a:defRPr sz="1100">
+                <a:latin typeface="Arial"/>
+              </a:defRPr>
+            </a:pPr>
+            <a:r>
+              <a:rPr b="1">
+                <a:solidFill>
+                  <a:srgbClr val="1E3A8A"/>
+                </a:solidFill>
+              </a:rPr>
+              <a:t>Telemetría en Vivo: </a:t>
+            </a:r>
+            <a:r>
+              <a:rPr>
+                <a:solidFill>
+                  <a:srgbClr val="334155"/>
+                </a:solidFill>
+              </a:rPr>
+              <a:t>Latidos periódicos (Heartbeats) para monitoreo de salud de pantallas.</a:t>
+            </a:r>
+          </a:p>
+          <a:p>
+            <a:pPr>
+              <a:spcAft>
+                <a:spcPts val="500"/>
+              </a:spcAft>
+              <a:defRPr sz="1100">
+                <a:latin typeface="Arial"/>
+              </a:defRPr>
+            </a:pPr>
+            <a:r>
+              <a:rPr b="1">
+                <a:solidFill>
+                  <a:srgbClr val="1E3A8A"/>
+                </a:solidFill>
+              </a:rPr>
+              <a:t>Comandos Inmediatos: </a:t>
+            </a:r>
+            <a:r>
+              <a:rPr>
+                <a:solidFill>
+                  <a:srgbClr val="334155"/>
+                </a:solidFill>
+              </a:rPr>
+              <a:t>Publicación instantánea de cambios de parrilla a reproductores conectados.</a:t>
+            </a:r>
+          </a:p>
+          <a:p>
+            <a:pPr>
+              <a:spcAft>
+                <a:spcPts val="500"/>
+              </a:spcAft>
+              <a:defRPr sz="1100">
+                <a:latin typeface="Arial"/>
+              </a:defRPr>
+            </a:pPr>
+            <a:r>
+              <a:rPr b="1">
+                <a:solidFill>
+                  <a:srgbClr val="1E3A8A"/>
+                </a:solidFill>
+              </a:rPr>
+              <a:t>Fallback Automático: </a:t>
+            </a:r>
+            <a:r>
+              <a:rPr>
+                <a:solidFill>
+                  <a:srgbClr val="334155"/>
+                </a:solidFill>
+              </a:rPr>
+              <a:t>Sondeo HTTP periódico si los puertos de sockets están bloqueados por firewall.</a:t>
             </a:r>
           </a:p>
         </p:txBody>
@@ -7962,8 +9064,8 @@
         </p:nvSpPr>
         <p:spPr>
           <a:xfrm>
-            <a:off x="777240" y="3246120"/>
-            <a:ext cx="5120640" cy="73152"/>
+            <a:off x="4434840" y="1691640"/>
+            <a:ext cx="3291840" cy="73152"/>
           </a:xfrm>
           <a:prstGeom prst="rect">
             <a:avLst/>
@@ -8005,8 +9107,8 @@
         </p:nvSpPr>
         <p:spPr>
           <a:xfrm>
-            <a:off x="6217920" y="3200400"/>
-            <a:ext cx="5212080" cy="3108960"/>
+            <a:off x="8046720" y="1645920"/>
+            <a:ext cx="3383280" cy="4572000"/>
           </a:xfrm>
           <a:prstGeom prst="roundRect">
             <a:avLst/>
@@ -8042,7 +9144,7 @@
               <a:spcAft>
                 <a:spcPts val="800"/>
               </a:spcAft>
-              <a:defRPr sz="1400" b="1">
+              <a:defRPr sz="1500" b="1">
                 <a:solidFill>
                   <a:srgbClr val="1E3A8A"/>
                 </a:solidFill>
@@ -8050,31 +9152,98 @@
               </a:defRPr>
             </a:pPr>
             <a:r>
-              <a:t>Objetivos Específicos (Resiliencia, Telemetría y QA)</a:t>
-            </a:r>
-          </a:p>
-          <a:p>
-            <a:pPr>
-              <a:defRPr sz="1100"/>
-            </a:pPr>
-            <a:r>
-              <a:t>OE4 (Resiliencia y Edición Offline): Habilitar reproducción autónoma y modificación local de contenido y programación sin internet (con archivos en locación).</a:t>
-            </a:r>
-          </a:p>
-          <a:p>
-            <a:pPr>
-              <a:defRPr sz="1100"/>
-            </a:pPr>
-            <a:r>
-              <a:t>OE5 (Telemetría de Conectividad NUC): Incorporar consulta del estado básico de conectividad de los NUC y su última comunicación.</a:t>
-            </a:r>
-          </a:p>
-          <a:p>
-            <a:pPr>
-              <a:defRPr sz="1100"/>
-            </a:pPr>
-            <a:r>
-              <a:t>OE6 (Validación con Cliente y QA): Validar el sistema en entorno de pruebas con Lumina Motion (gestión remota, permisos y pruebas online/offline).</a:t>
+              <a:t>Nodo Reproductor Local (NUC)</a:t>
+            </a:r>
+          </a:p>
+          <a:p>
+            <a:pPr>
+              <a:spcAft>
+                <a:spcPts val="500"/>
+              </a:spcAft>
+              <a:defRPr sz="1100">
+                <a:latin typeface="Arial"/>
+              </a:defRPr>
+            </a:pPr>
+            <a:r>
+              <a:t>Arquitectura Cache-First en NUCs: Descarga preventiva de videos al almacenamiento local; sin streaming.</a:t>
+            </a:r>
+          </a:p>
+          <a:p>
+            <a:pPr>
+              <a:spcAft>
+                <a:spcPts val="500"/>
+              </a:spcAft>
+              <a:defRPr sz="1100">
+                <a:latin typeface="Arial"/>
+              </a:defRPr>
+            </a:pPr>
+            <a:r>
+              <a:rPr b="1">
+                <a:solidFill>
+                  <a:srgbClr val="1E3A8A"/>
+                </a:solidFill>
+              </a:rPr>
+              <a:t>Resiliencia Offline Total: </a:t>
+            </a:r>
+            <a:r>
+              <a:rPr>
+                <a:solidFill>
+                  <a:srgbClr val="334155"/>
+                </a:solidFill>
+              </a:rPr>
+              <a:t>Si se cae internet, la reproducción continúa de forma indefinida y autónoma.</a:t>
+            </a:r>
+          </a:p>
+          <a:p>
+            <a:pPr>
+              <a:spcAft>
+                <a:spcPts val="500"/>
+              </a:spcAft>
+              <a:defRPr sz="1100">
+                <a:latin typeface="Arial"/>
+              </a:defRPr>
+            </a:pPr>
+            <a:r>
+              <a:rPr b="1">
+                <a:solidFill>
+                  <a:srgbClr val="1E3A8A"/>
+                </a:solidFill>
+              </a:rPr>
+              <a:t>Integridad SHA-256: </a:t>
+            </a:r>
+            <a:r>
+              <a:rPr>
+                <a:solidFill>
+                  <a:srgbClr val="334155"/>
+                </a:solidFill>
+              </a:rPr>
+              <a:t>Comprobación estricta de integridad antes de marcar un archivo como listo.</a:t>
+            </a:r>
+          </a:p>
+          <a:p>
+            <a:pPr>
+              <a:spcAft>
+                <a:spcPts val="500"/>
+              </a:spcAft>
+              <a:defRPr sz="1100">
+                <a:latin typeface="Arial"/>
+              </a:defRPr>
+            </a:pPr>
+            <a:r>
+              <a:rPr b="1">
+                <a:solidFill>
+                  <a:srgbClr val="1E3A8A"/>
+                </a:solidFill>
+              </a:rPr>
+              <a:t>Panel Local de Emergencia: </a:t>
+            </a:r>
+            <a:r>
+              <a:rPr>
+                <a:solidFill>
+                  <a:srgbClr val="334155"/>
+                </a:solidFill>
+              </a:rPr>
+              <a:t>Servidor web embebido en la intranet para conmutación manual presencial.</a:t>
             </a:r>
           </a:p>
         </p:txBody>
@@ -8087,8 +9256,8 @@
         </p:nvSpPr>
         <p:spPr>
           <a:xfrm>
-            <a:off x="6263640" y="3246120"/>
-            <a:ext cx="5120640" cy="73152"/>
+            <a:off x="8092440" y="1691640"/>
+            <a:ext cx="3291840" cy="73152"/>
           </a:xfrm>
           <a:prstGeom prst="rect">
             <a:avLst/>
@@ -8222,7 +9391,7 @@
               </a:defRPr>
             </a:pPr>
             <a:r>
-              <a:t>Metodología de Trabajo y Roles Disciplinares</a:t>
+              <a:t>Objetivos del Proyecto ACE (PTY4614)</a:t>
             </a:r>
           </a:p>
           <a:p>
@@ -8238,7 +9407,7 @@
               </a:defRPr>
             </a:pPr>
             <a:r>
-              <a:t>Marco Ágil Scrum Adaptado con Integración Continua y Trazabilidad</a:t>
+              <a:t>Meta General y 6 Objetivos Específicos Alineados al Perfil de Egreso</a:t>
             </a:r>
           </a:p>
         </p:txBody>
@@ -8306,8 +9475,8 @@
         </p:nvSpPr>
         <p:spPr>
           <a:xfrm>
-            <a:off x="731520" y="1645920"/>
-            <a:ext cx="3383280" cy="4572000"/>
+            <a:off x="731520" y="1554480"/>
+            <a:ext cx="10728655" cy="1463040"/>
           </a:xfrm>
           <a:prstGeom prst="roundRect">
             <a:avLst/>
@@ -8351,7 +9520,7 @@
               </a:defRPr>
             </a:pPr>
             <a:r>
-              <a:t>Ciclo Ágil Scrum Adaptado</a:t>
+              <a:t>Objetivo General</a:t>
             </a:r>
           </a:p>
           <a:p>
@@ -8364,98 +9533,7 @@
               </a:defRPr>
             </a:pPr>
             <a:r>
-              <a:rPr b="1">
-                <a:solidFill>
-                  <a:srgbClr val="1E3A8A"/>
-                </a:solidFill>
-              </a:rPr>
-              <a:t>Sprints Bisemanales: </a:t>
-            </a:r>
-            <a:r>
-              <a:rPr>
-                <a:solidFill>
-                  <a:srgbClr val="334155"/>
-                </a:solidFill>
-              </a:rPr>
-              <a:t>Ciclos de 2 semanas con entregables funcionales e incrementales.</a:t>
-            </a:r>
-          </a:p>
-          <a:p>
-            <a:pPr>
-              <a:spcAft>
-                <a:spcPts val="500"/>
-              </a:spcAft>
-              <a:defRPr sz="1100">
-                <a:latin typeface="Arial"/>
-              </a:defRPr>
-            </a:pPr>
-            <a:r>
-              <a:rPr b="1">
-                <a:solidFill>
-                  <a:srgbClr val="1E3A8A"/>
-                </a:solidFill>
-              </a:rPr>
-              <a:t>Product Backlog: </a:t>
-            </a:r>
-            <a:r>
-              <a:rPr>
-                <a:solidFill>
-                  <a:srgbClr val="334155"/>
-                </a:solidFill>
-              </a:rPr>
-              <a:t>Priorizado según los dolores de Lumina Motion y los hitos Duoc UC.</a:t>
-            </a:r>
-          </a:p>
-          <a:p>
-            <a:pPr>
-              <a:spcAft>
-                <a:spcPts val="500"/>
-              </a:spcAft>
-              <a:defRPr sz="1100">
-                <a:latin typeface="Arial"/>
-              </a:defRPr>
-            </a:pPr>
-            <a:r>
-              <a:rPr b="1">
-                <a:solidFill>
-                  <a:srgbClr val="1E3A8A"/>
-                </a:solidFill>
-              </a:rPr>
-              <a:t>Reuniones de Equipo: </a:t>
-            </a:r>
-            <a:r>
-              <a:rPr>
-                <a:solidFill>
-                  <a:srgbClr val="334155"/>
-                </a:solidFill>
-              </a:rPr>
-              <a:t>Sincronización semanal presencial y virtual para remover impedimentos.</a:t>
-            </a:r>
-          </a:p>
-          <a:p>
-            <a:pPr>
-              <a:spcAft>
-                <a:spcPts val="500"/>
-              </a:spcAft>
-              <a:defRPr sz="1100">
-                <a:latin typeface="Arial"/>
-              </a:defRPr>
-            </a:pPr>
-            <a:r>
-              <a:rPr b="1">
-                <a:solidFill>
-                  <a:srgbClr val="1E3A8A"/>
-                </a:solidFill>
-              </a:rPr>
-              <a:t>Demo con Cliente: </a:t>
-            </a:r>
-            <a:r>
-              <a:rPr>
-                <a:solidFill>
-                  <a:srgbClr val="334155"/>
-                </a:solidFill>
-              </a:rPr>
-              <a:t>Validación continua de incrementos con la contraparte técnica.</a:t>
+              <a:t>Meta Principal: Desarrollar una plataforma de gestión de cartelería digital para Lumina Motion que permita administrar centralizada y remotamente pantallas, contenidos y programación en locaciones fijas, manteniendo la reproducción y permitiendo cambios locales sin internet.</a:t>
             </a:r>
           </a:p>
         </p:txBody>
@@ -8468,8 +9546,8 @@
         </p:nvSpPr>
         <p:spPr>
           <a:xfrm>
-            <a:off x="777240" y="1691640"/>
-            <a:ext cx="3291840" cy="73152"/>
+            <a:off x="777240" y="1600200"/>
+            <a:ext cx="10637215" cy="73152"/>
           </a:xfrm>
           <a:prstGeom prst="rect">
             <a:avLst/>
@@ -8511,8 +9589,8 @@
         </p:nvSpPr>
         <p:spPr>
           <a:xfrm>
-            <a:off x="4389120" y="1645920"/>
-            <a:ext cx="3383280" cy="4572000"/>
+            <a:off x="731520" y="3200400"/>
+            <a:ext cx="5212080" cy="3108960"/>
           </a:xfrm>
           <a:prstGeom prst="roundRect">
             <a:avLst/>
@@ -8548,7 +9626,7 @@
               <a:spcAft>
                 <a:spcPts val="800"/>
               </a:spcAft>
-              <a:defRPr sz="1500" b="1">
+              <a:defRPr sz="1400" b="1">
                 <a:solidFill>
                   <a:srgbClr val="1E3A8A"/>
                 </a:solidFill>
@@ -8556,111 +9634,31 @@
               </a:defRPr>
             </a:pPr>
             <a:r>
-              <a:t>Control de Calidad en GitHub</a:t>
-            </a:r>
-          </a:p>
-          <a:p>
-            <a:pPr>
-              <a:spcAft>
-                <a:spcPts val="500"/>
-              </a:spcAft>
-              <a:defRPr sz="1100">
-                <a:latin typeface="Arial"/>
-              </a:defRPr>
-            </a:pPr>
-            <a:r>
-              <a:rPr b="1">
-                <a:solidFill>
-                  <a:srgbClr val="1E3A8A"/>
-                </a:solidFill>
-              </a:rPr>
-              <a:t>Feature Branches: </a:t>
-            </a:r>
-            <a:r>
-              <a:rPr>
-                <a:solidFill>
-                  <a:srgbClr val="334155"/>
-                </a:solidFill>
-              </a:rPr>
-              <a:t>Desarrollo aislado de funcionalidades en ramas específicas.</a:t>
-            </a:r>
-          </a:p>
-          <a:p>
-            <a:pPr>
-              <a:spcAft>
-                <a:spcPts val="500"/>
-              </a:spcAft>
-              <a:defRPr sz="1100">
-                <a:latin typeface="Arial"/>
-              </a:defRPr>
-            </a:pPr>
-            <a:r>
-              <a:rPr b="1">
-                <a:solidFill>
-                  <a:srgbClr val="1E3A8A"/>
-                </a:solidFill>
-              </a:rPr>
-              <a:t>Pull Requests Cruzados: </a:t>
-            </a:r>
-            <a:r>
-              <a:rPr>
-                <a:solidFill>
-                  <a:srgbClr val="334155"/>
-                </a:solidFill>
-              </a:rPr>
-              <a:t>Revisión obligatoria de código (Peer Review) antes de integrar a main.</a:t>
-            </a:r>
-          </a:p>
-          <a:p>
-            <a:pPr>
-              <a:spcAft>
-                <a:spcPts val="500"/>
-              </a:spcAft>
-              <a:defRPr sz="1100">
-                <a:latin typeface="Arial"/>
-              </a:defRPr>
-            </a:pPr>
-            <a:r>
-              <a:rPr b="1">
-                <a:solidFill>
-                  <a:srgbClr val="1E3A8A"/>
-                </a:solidFill>
-              </a:rPr>
-              <a:t>Trazabilidad Total: </a:t>
-            </a:r>
-            <a:r>
-              <a:rPr>
-                <a:solidFill>
-                  <a:srgbClr val="334155"/>
-                </a:solidFill>
-              </a:rPr>
-              <a:t>Historial transparente de aportes individuales y commits auditables.</a:t>
-            </a:r>
-          </a:p>
-          <a:p>
-            <a:pPr>
-              <a:spcAft>
-                <a:spcPts val="500"/>
-              </a:spcAft>
-              <a:defRPr sz="1100">
-                <a:latin typeface="Arial"/>
-              </a:defRPr>
-            </a:pPr>
-            <a:r>
-              <a:rPr b="1">
-                <a:solidFill>
-                  <a:srgbClr val="1E3A8A"/>
-                </a:solidFill>
-              </a:rPr>
-              <a:t>Estándar Documental: </a:t>
-            </a:r>
-            <a:r>
-              <a:rPr>
-                <a:solidFill>
-                  <a:srgbClr val="334155"/>
-                </a:solidFill>
-              </a:rPr>
-              <a:t>Control de cambios riguroso en Markdown y repositorios de entrega.</a:t>
+              <a:t>Objetivos Específicos (Gestión y Programación)</a:t>
+            </a:r>
+          </a:p>
+          <a:p>
+            <a:pPr>
+              <a:defRPr sz="1100"/>
+            </a:pPr>
+            <a:r>
+              <a:t>OE1 (Administración y Permisos por Locación): Implementar la gestión remota de locaciones, sectores y pantallas, con acceso diferenciado (Admin y Operador por locación).</a:t>
+            </a:r>
+          </a:p>
+          <a:p>
+            <a:pPr>
+              <a:defRPr sz="1100"/>
+            </a:pPr>
+            <a:r>
+              <a:t>OE2 (Gestión de Contenidos y Playlists): Desarrollar gestión de medios y listas reutilizables con orden, tiempos de exhibición y acceso autorizado.</a:t>
+            </a:r>
+          </a:p>
+          <a:p>
+            <a:pPr>
+              <a:defRPr sz="1100"/>
+            </a:pPr>
+            <a:r>
+              <a:t>OE3 (Programación Horaria Segmentada): Implementar programación por fechas y horarios con asignación a pantallas o sectores.</a:t>
             </a:r>
           </a:p>
         </p:txBody>
@@ -8673,8 +9671,8 @@
         </p:nvSpPr>
         <p:spPr>
           <a:xfrm>
-            <a:off x="4434840" y="1691640"/>
-            <a:ext cx="3291840" cy="73152"/>
+            <a:off x="777240" y="3246120"/>
+            <a:ext cx="5120640" cy="73152"/>
           </a:xfrm>
           <a:prstGeom prst="rect">
             <a:avLst/>
@@ -8716,8 +9714,8 @@
         </p:nvSpPr>
         <p:spPr>
           <a:xfrm>
-            <a:off x="8046720" y="1645920"/>
-            <a:ext cx="3383280" cy="4572000"/>
+            <a:off x="6217920" y="3200400"/>
+            <a:ext cx="5212080" cy="3108960"/>
           </a:xfrm>
           <a:prstGeom prst="roundRect">
             <a:avLst/>
@@ -8753,7 +9751,7 @@
               <a:spcAft>
                 <a:spcPts val="800"/>
               </a:spcAft>
-              <a:defRPr sz="1500" b="1">
+              <a:defRPr sz="1400" b="1">
                 <a:solidFill>
                   <a:srgbClr val="1E3A8A"/>
                 </a:solidFill>
@@ -8761,85 +9759,31 @@
               </a:defRPr>
             </a:pPr>
             <a:r>
-              <a:t>Especialización de Roles</a:t>
-            </a:r>
-          </a:p>
-          <a:p>
-            <a:pPr>
-              <a:spcAft>
-                <a:spcPts val="500"/>
-              </a:spcAft>
-              <a:defRPr sz="1100">
-                <a:latin typeface="Arial"/>
-              </a:defRPr>
-            </a:pPr>
-            <a:r>
-              <a:rPr b="1">
-                <a:solidFill>
-                  <a:srgbClr val="1E3A8A"/>
-                </a:solidFill>
-              </a:rPr>
-              <a:t>Tomás Escalante: </a:t>
-            </a:r>
-            <a:r>
-              <a:rPr>
-                <a:solidFill>
-                  <a:srgbClr val="334155"/>
-                </a:solidFill>
-              </a:rPr>
-              <a:t>Arquitectura de software, backend API Laravel, WebSockets y sincronización.</a:t>
-            </a:r>
-          </a:p>
-          <a:p>
-            <a:pPr>
-              <a:spcAft>
-                <a:spcPts val="500"/>
-              </a:spcAft>
-              <a:defRPr sz="1100">
-                <a:latin typeface="Arial"/>
-              </a:defRPr>
-            </a:pPr>
-            <a:r>
-              <a:rPr b="1">
-                <a:solidFill>
-                  <a:srgbClr val="1E3A8A"/>
-                </a:solidFill>
-              </a:rPr>
-              <a:t>Matías Salas: </a:t>
-            </a:r>
-            <a:r>
-              <a:rPr>
-                <a:solidFill>
-                  <a:srgbClr val="334155"/>
-                </a:solidFill>
-              </a:rPr>
-              <a:t>Gestión ágil Scrum, backlog, Carta Gantt y vinculación directa con Lumina Motion.</a:t>
-            </a:r>
-          </a:p>
-          <a:p>
-            <a:pPr>
-              <a:spcAft>
-                <a:spcPts val="500"/>
-              </a:spcAft>
-              <a:defRPr sz="1100">
-                <a:latin typeface="Arial"/>
-              </a:defRPr>
-            </a:pPr>
-            <a:r>
-              <a:rPr b="1">
-                <a:solidFill>
-                  <a:srgbClr val="1E3A8A"/>
-                </a:solidFill>
-              </a:rPr>
-              <a:t>Paulo Loyola: </a:t>
-            </a:r>
-            <a:r>
-              <a:rPr>
-                <a:solidFill>
-                  <a:srgbClr val="334155"/>
-                </a:solidFill>
-              </a:rPr>
-              <a:t>Modelamiento relacional MariaDB, interfaces frontend Blade/UI y documentación técnica.</a:t>
+              <a:t>Objetivos Específicos (Resiliencia, Telemetría y QA)</a:t>
+            </a:r>
+          </a:p>
+          <a:p>
+            <a:pPr>
+              <a:defRPr sz="1100"/>
+            </a:pPr>
+            <a:r>
+              <a:t>OE4 (Resiliencia y Edición Offline): Habilitar reproducción autónoma y modificación local de contenido y programación sin internet (con archivos en locación).</a:t>
+            </a:r>
+          </a:p>
+          <a:p>
+            <a:pPr>
+              <a:defRPr sz="1100"/>
+            </a:pPr>
+            <a:r>
+              <a:t>OE5 (Telemetría de Conectividad NUC): Incorporar consulta del estado básico de conectividad de los NUC y su última comunicación.</a:t>
+            </a:r>
+          </a:p>
+          <a:p>
+            <a:pPr>
+              <a:defRPr sz="1100"/>
+            </a:pPr>
+            <a:r>
+              <a:t>OE6 (Validación con Cliente y QA): Validar el sistema en entorno de pruebas con Lumina Motion (gestión remota, permisos y pruebas online/offline).</a:t>
             </a:r>
           </a:p>
         </p:txBody>
@@ -8852,8 +9796,8 @@
         </p:nvSpPr>
         <p:spPr>
           <a:xfrm>
-            <a:off x="8092440" y="1691640"/>
-            <a:ext cx="3291840" cy="73152"/>
+            <a:off x="6263640" y="3246120"/>
+            <a:ext cx="5120640" cy="73152"/>
           </a:xfrm>
           <a:prstGeom prst="rect">
             <a:avLst/>
@@ -8987,7 +9931,7 @@
               </a:defRPr>
             </a:pPr>
             <a:r>
-              <a:t>Vinculación con el Cliente y Matriz de Riesgos</a:t>
+              <a:t>Metodología de Trabajo y Roles Disciplinares</a:t>
             </a:r>
           </a:p>
           <a:p>
@@ -9003,7 +9947,7 @@
               </a:defRPr>
             </a:pPr>
             <a:r>
-              <a:t>Factibilidad en 18 Semanas y Mitigación Estratégica</a:t>
+              <a:t>Marco Ágil Scrum Adaptado con Integración Continua y Trazabilidad</a:t>
             </a:r>
           </a:p>
         </p:txBody>
@@ -9072,7 +10016,7 @@
         <p:spPr>
           <a:xfrm>
             <a:off x="731520" y="1645920"/>
-            <a:ext cx="5212080" cy="4572000"/>
+            <a:ext cx="3383280" cy="4572000"/>
           </a:xfrm>
           <a:prstGeom prst="roundRect">
             <a:avLst/>
@@ -9116,7 +10060,7 @@
               </a:defRPr>
             </a:pPr>
             <a:r>
-              <a:t>Relación Técnica con Lumina Motion</a:t>
+              <a:t>Ciclo Ágil Scrum Adaptado</a:t>
             </a:r>
           </a:p>
           <a:p>
@@ -9134,7 +10078,7 @@
                   <a:srgbClr val="1E3A8A"/>
                 </a:solidFill>
               </a:rPr>
-              <a:t>Interlocutor Clave: </a:t>
+              <a:t>Sprints Bisemanales: </a:t>
             </a:r>
             <a:r>
               <a:rPr>
@@ -9142,7 +10086,7 @@
                   <a:srgbClr val="334155"/>
                 </a:solidFill>
               </a:rPr>
-              <a:t>Cristóbal Manzo, Jefe de Informática en Lumina Motion Studio.</a:t>
+              <a:t>Ciclos de 2 semanas con entregables funcionales e incrementales.</a:t>
             </a:r>
           </a:p>
           <a:p>
@@ -9160,7 +10104,7 @@
                   <a:srgbClr val="1E3A8A"/>
                 </a:solidFill>
               </a:rPr>
-              <a:t>Acceso Directo: </a:t>
+              <a:t>Product Backlog: </a:t>
             </a:r>
             <a:r>
               <a:rPr>
@@ -9168,7 +10112,7 @@
                   <a:srgbClr val="334155"/>
                 </a:solidFill>
               </a:rPr>
-              <a:t>Reuniones periódicas para levantamiento de requisitos funcionales y diseño de pautas.</a:t>
+              <a:t>Priorizado según los dolores de Lumina Motion y los hitos Duoc UC.</a:t>
             </a:r>
           </a:p>
           <a:p>
@@ -9186,7 +10130,7 @@
                   <a:srgbClr val="1E3A8A"/>
                 </a:solidFill>
               </a:rPr>
-              <a:t>Validación en Terreno: </a:t>
+              <a:t>Reuniones de Equipo: </a:t>
             </a:r>
             <a:r>
               <a:rPr>
@@ -9194,7 +10138,7 @@
                   <a:srgbClr val="334155"/>
                 </a:solidFill>
               </a:rPr>
-              <a:t>Pruebas UAT sobre infraestructura visual real instalada en centros comerciales.</a:t>
+              <a:t>Sincronización semanal presencial y virtual para remover impedimentos.</a:t>
             </a:r>
           </a:p>
           <a:p>
@@ -9212,7 +10156,7 @@
                   <a:srgbClr val="1E3A8A"/>
                 </a:solidFill>
               </a:rPr>
-              <a:t>Viabilidad 18 Semanas: </a:t>
+              <a:t>Demo con Cliente: </a:t>
             </a:r>
             <a:r>
               <a:rPr>
@@ -9220,33 +10164,7 @@
                   <a:srgbClr val="334155"/>
                 </a:solidFill>
               </a:rPr>
-              <a:t>Alcance estrictamente delimitado: plataforma de distribución y gestión (sin edición de video).</a:t>
-            </a:r>
-          </a:p>
-          <a:p>
-            <a:pPr>
-              <a:spcAft>
-                <a:spcPts val="500"/>
-              </a:spcAft>
-              <a:defRPr sz="1100">
-                <a:latin typeface="Arial"/>
-              </a:defRPr>
-            </a:pPr>
-            <a:r>
-              <a:rPr b="1">
-                <a:solidFill>
-                  <a:srgbClr val="1E3A8A"/>
-                </a:solidFill>
-              </a:rPr>
-              <a:t>Infraestructura: </a:t>
-            </a:r>
-            <a:r>
-              <a:rPr>
-                <a:solidFill>
-                  <a:srgbClr val="334155"/>
-                </a:solidFill>
-              </a:rPr>
-              <a:t>Disponibilidad de microcomputadores Mini-PC, switches de red y monitores de prueba.</a:t>
+              <a:t>Validación continua de incrementos con la contraparte técnica.</a:t>
             </a:r>
           </a:p>
         </p:txBody>
@@ -9260,7 +10178,7 @@
         <p:spPr>
           <a:xfrm>
             <a:off x="777240" y="1691640"/>
-            <a:ext cx="5120640" cy="73152"/>
+            <a:ext cx="3291840" cy="73152"/>
           </a:xfrm>
           <a:prstGeom prst="rect">
             <a:avLst/>
@@ -9302,8 +10220,8 @@
         </p:nvSpPr>
         <p:spPr>
           <a:xfrm>
-            <a:off x="6217920" y="1645920"/>
-            <a:ext cx="5212080" cy="4572000"/>
+            <a:off x="4389120" y="1645920"/>
+            <a:ext cx="3383280" cy="4572000"/>
           </a:xfrm>
           <a:prstGeom prst="roundRect">
             <a:avLst/>
@@ -9347,7 +10265,7 @@
               </a:defRPr>
             </a:pPr>
             <a:r>
-              <a:t>Matriz de Riesgos y Mitigación</a:t>
+              <a:t>Control de Calidad en GitHub</a:t>
             </a:r>
           </a:p>
           <a:p>
@@ -9365,7 +10283,7 @@
                   <a:srgbClr val="1E3A8A"/>
                 </a:solidFill>
               </a:rPr>
-              <a:t>Riesgo 1: Pérdida de red en malls </a:t>
+              <a:t>Feature Branches: </a:t>
             </a:r>
             <a:r>
               <a:rPr>
@@ -9373,7 +10291,7 @@
                   <a:srgbClr val="334155"/>
                 </a:solidFill>
               </a:rPr>
-              <a:t>Mitigación: Caché local obligatorio (SQLite/local storage) y reproducción autónoma.</a:t>
+              <a:t>Desarrollo aislado de funcionalidades en ramas específicas.</a:t>
             </a:r>
           </a:p>
           <a:p>
@@ -9391,7 +10309,7 @@
                   <a:srgbClr val="1E3A8A"/>
                 </a:solidFill>
               </a:rPr>
-              <a:t>Riesgo 2: Formatos de video dispares </a:t>
+              <a:t>Pull Requests Cruzados: </a:t>
             </a:r>
             <a:r>
               <a:rPr>
@@ -9399,7 +10317,7 @@
                   <a:srgbClr val="334155"/>
                 </a:solidFill>
               </a:rPr>
-              <a:t>Mitigación: Estandarización a MP4 H.264 y validación estricta de códecs al subir.</a:t>
+              <a:t>Revisión obligatoria de código (Peer Review) antes de integrar a main.</a:t>
             </a:r>
           </a:p>
           <a:p>
@@ -9417,7 +10335,7 @@
                   <a:srgbClr val="1E3A8A"/>
                 </a:solidFill>
               </a:rPr>
-              <a:t>Riesgo 3: Falta de pantallas para pruebas </a:t>
+              <a:t>Trazabilidad Total: </a:t>
             </a:r>
             <a:r>
               <a:rPr>
@@ -9425,7 +10343,7 @@
                   <a:srgbClr val="334155"/>
                 </a:solidFill>
               </a:rPr>
-              <a:t>Mitigación: Desarrollo de emulador web de pantalla que simula resolución y heartbeats.</a:t>
+              <a:t>Historial transparente de aportes individuales y commits auditables.</a:t>
             </a:r>
           </a:p>
           <a:p>
@@ -9443,7 +10361,7 @@
                   <a:srgbClr val="1E3A8A"/>
                 </a:solidFill>
               </a:rPr>
-              <a:t>Riesgo 4: Corrupción durante descarga </a:t>
+              <a:t>Estándar Documental: </a:t>
             </a:r>
             <a:r>
               <a:rPr>
@@ -9451,7 +10369,7 @@
                   <a:srgbClr val="334155"/>
                 </a:solidFill>
               </a:rPr>
-              <a:t>Mitigación: Validación mandatoria de hash criptográfico SHA-256 antes de reproducir.</a:t>
+              <a:t>Control de cambios riguroso en Markdown y repositorios de entrega.</a:t>
             </a:r>
           </a:p>
         </p:txBody>
@@ -9464,8 +10382,148 @@
         </p:nvSpPr>
         <p:spPr>
           <a:xfrm>
-            <a:off x="6263640" y="1691640"/>
-            <a:ext cx="5120640" cy="73152"/>
+            <a:off x="4434840" y="1691640"/>
+            <a:ext cx="3291840" cy="73152"/>
+          </a:xfrm>
+          <a:prstGeom prst="rect">
+            <a:avLst/>
+          </a:prstGeom>
+          <a:solidFill>
+            <a:srgbClr val="0D9488"/>
+          </a:solidFill>
+          <a:ln>
+            <a:noFill/>
+          </a:ln>
+        </p:spPr>
+        <p:style>
+          <a:lnRef idx="1">
+            <a:schemeClr val="accent1"/>
+          </a:lnRef>
+          <a:fillRef idx="3">
+            <a:schemeClr val="accent1"/>
+          </a:fillRef>
+          <a:effectRef idx="2">
+            <a:schemeClr val="accent1"/>
+          </a:effectRef>
+          <a:fontRef idx="minor">
+            <a:schemeClr val="lt1"/>
+          </a:fontRef>
+        </p:style>
+        <p:txBody>
+          <a:bodyPr rtlCol="0" anchor="ctr"/>
+          <a:lstStyle/>
+          <a:p>
+            <a:pPr algn="ctr"/>
+          </a:p>
+        </p:txBody>
+      </p:sp>
+      <p:sp>
+        <p:nvSpPr>
+          <p:cNvPr id="9" name="Rounded Rectangle 8"/>
+          <p:cNvSpPr/>
+          <p:nvPr/>
+        </p:nvSpPr>
+        <p:spPr>
+          <a:xfrm>
+            <a:off x="8046720" y="1645920"/>
+            <a:ext cx="3383280" cy="4572000"/>
+          </a:xfrm>
+          <a:prstGeom prst="roundRect">
+            <a:avLst/>
+          </a:prstGeom>
+          <a:solidFill>
+            <a:srgbClr val="F8FAFC"/>
+          </a:solidFill>
+          <a:ln w="12700">
+            <a:solidFill>
+              <a:srgbClr val="E2E8F0"/>
+            </a:solidFill>
+          </a:ln>
+        </p:spPr>
+        <p:style>
+          <a:lnRef idx="1">
+            <a:schemeClr val="accent1"/>
+          </a:lnRef>
+          <a:fillRef idx="3">
+            <a:schemeClr val="accent1"/>
+          </a:fillRef>
+          <a:effectRef idx="2">
+            <a:schemeClr val="accent1"/>
+          </a:effectRef>
+          <a:fontRef idx="minor">
+            <a:schemeClr val="lt1"/>
+          </a:fontRef>
+        </p:style>
+        <p:txBody>
+          <a:bodyPr rtlCol="0" anchor="t" wrap="square" lIns="228600" rIns="228600" tIns="201168" bIns="182880"/>
+          <a:lstStyle/>
+          <a:p>
+            <a:pPr algn="ctr">
+              <a:spcAft>
+                <a:spcPts val="800"/>
+              </a:spcAft>
+              <a:defRPr sz="1500" b="1">
+                <a:solidFill>
+                  <a:srgbClr val="1E3A8A"/>
+                </a:solidFill>
+                <a:latin typeface="Arial"/>
+              </a:defRPr>
+            </a:pPr>
+            <a:r>
+              <a:t>Especialización de Roles</a:t>
+            </a:r>
+          </a:p>
+          <a:p>
+            <a:pPr>
+              <a:spcAft>
+                <a:spcPts val="500"/>
+              </a:spcAft>
+              <a:defRPr sz="1100">
+                <a:latin typeface="Arial"/>
+              </a:defRPr>
+            </a:pPr>
+            <a:r>
+              <a:t>Tomás Escalante: Arquitectura distribuida, backend API Laravel, WebSockets y modelado relacional.</a:t>
+            </a:r>
+          </a:p>
+          <a:p>
+            <a:pPr>
+              <a:spcAft>
+                <a:spcPts val="500"/>
+              </a:spcAft>
+              <a:defRPr sz="1100">
+                <a:latin typeface="Arial"/>
+              </a:defRPr>
+            </a:pPr>
+            <a:r>
+              <a:t>Matías Salas: Gestión ágil Scrum, vinculación con Lumina, construcción de migraciones y pruebas UAT.</a:t>
+            </a:r>
+          </a:p>
+          <a:p>
+            <a:pPr>
+              <a:spcAft>
+                <a:spcPts val="500"/>
+              </a:spcAft>
+              <a:defRPr sz="1100">
+                <a:latin typeface="Arial"/>
+              </a:defRPr>
+            </a:pPr>
+            <a:r>
+              <a:t>Paulo Loyola: Interfaces Blade/UI, paneles de programación, optimización MariaDB y estándar documental.</a:t>
+            </a:r>
+          </a:p>
+        </p:txBody>
+      </p:sp>
+      <p:sp>
+        <p:nvSpPr>
+          <p:cNvPr id="10" name="Rectangle 9"/>
+          <p:cNvSpPr/>
+          <p:nvPr/>
+        </p:nvSpPr>
+        <p:spPr>
+          <a:xfrm>
+            <a:off x="8092440" y="1691640"/>
+            <a:ext cx="3291840" cy="73152"/>
           </a:xfrm>
           <a:prstGeom prst="rect">
             <a:avLst/>
@@ -9599,7 +10657,7 @@
               </a:defRPr>
             </a:pPr>
             <a:r>
-              <a:t>Modelo de Datos Relacional (MariaDB) y Frontend</a:t>
+              <a:t>Vinculación con el Cliente y Matriz de Riesgos</a:t>
             </a:r>
           </a:p>
           <a:p>
@@ -9615,7 +10673,7 @@
               </a:defRPr>
             </a:pPr>
             <a:r>
-              <a:t>Persistencia ACID, Estructura Jerárquica e Interfaz de Gestión</a:t>
+              <a:t>Factibilidad en 18 Semanas y Mitigación Estratégica</a:t>
             </a:r>
           </a:p>
         </p:txBody>
@@ -9670,7 +10728,7 @@
               </a:defRPr>
             </a:pPr>
             <a:r>
-              <a:t>Paulo Loyola | Bloque 3</a:t>
+              <a:t>Matías Salas | Bloque 2</a:t>
             </a:r>
           </a:p>
         </p:txBody>
@@ -9728,7 +10786,7 @@
               </a:defRPr>
             </a:pPr>
             <a:r>
-              <a:t>Arquitectura de Datos (MariaDB 3FN)</a:t>
+              <a:t>Relación Técnica con Lumina Motion</a:t>
             </a:r>
           </a:p>
           <a:p>
@@ -9741,7 +10799,20 @@
               </a:defRPr>
             </a:pPr>
             <a:r>
-              <a:t>Jerarquía de Ubicación: Locación (ej. Mall Costanera) → Sectores (ej. Patio Comidas) → Pantallas individuales.</a:t>
+              <a:rPr b="1">
+                <a:solidFill>
+                  <a:srgbClr val="1E3A8A"/>
+                </a:solidFill>
+              </a:rPr>
+              <a:t>Interlocutor Clave: </a:t>
+            </a:r>
+            <a:r>
+              <a:rPr>
+                <a:solidFill>
+                  <a:srgbClr val="334155"/>
+                </a:solidFill>
+              </a:rPr>
+              <a:t>Cristóbal Manzo, Jefe de Informática en Lumina Motion Studio.</a:t>
             </a:r>
           </a:p>
           <a:p>
@@ -9759,7 +10830,7 @@
                   <a:srgbClr val="1E3A8A"/>
                 </a:solidFill>
               </a:rPr>
-              <a:t>Entidades de Contenido: </a:t>
+              <a:t>Acceso Directo: </a:t>
             </a:r>
             <a:r>
               <a:rPr>
@@ -9767,7 +10838,7 @@
                   <a:srgbClr val="334155"/>
                 </a:solidFill>
               </a:rPr>
-              <a:t>Catálogo de Medios con metadatos, peso, resolución y Checksum SHA-256.</a:t>
+              <a:t>Reuniones periódicas para levantamiento de requisitos funcionales y diseño de pautas.</a:t>
             </a:r>
           </a:p>
           <a:p>
@@ -9785,7 +10856,7 @@
                   <a:srgbClr val="1E3A8A"/>
                 </a:solidFill>
               </a:rPr>
-              <a:t>Listas y Programación: </a:t>
+              <a:t>Validación en Terreno: </a:t>
             </a:r>
             <a:r>
               <a:rPr>
@@ -9793,7 +10864,7 @@
                   <a:srgbClr val="334155"/>
                 </a:solidFill>
               </a:rPr>
-              <a:t>Playlists secuenciales asociadas a Reglas Horarias (días, horas de inicio/fin).</a:t>
+              <a:t>Pruebas UAT sobre infraestructura visual real instalada en centros comerciales.</a:t>
             </a:r>
           </a:p>
           <a:p>
@@ -9811,7 +10882,7 @@
                   <a:srgbClr val="1E3A8A"/>
                 </a:solidFill>
               </a:rPr>
-              <a:t>Integridad y Transacciones: </a:t>
+              <a:t>Viabilidad 18 Semanas: </a:t>
             </a:r>
             <a:r>
               <a:rPr>
@@ -9819,7 +10890,7 @@
                   <a:srgbClr val="334155"/>
                 </a:solidFill>
               </a:rPr>
-              <a:t>Normalización 3FN con llaves foráneas estrictas y operaciones ACID que previenen solapamientos.</a:t>
+              <a:t>Alcance estrictamente delimitado: plataforma de distribución y gestión (sin edición de video).</a:t>
             </a:r>
           </a:p>
           <a:p>
@@ -9832,7 +10903,20 @@
               </a:defRPr>
             </a:pPr>
             <a:r>
-              <a:t>Roles y Permisos: Tabla usuarios_locaciones para restringir operadores a locaciones asignadas. Administrador con acceso global.</a:t>
+              <a:rPr b="1">
+                <a:solidFill>
+                  <a:srgbClr val="1E3A8A"/>
+                </a:solidFill>
+              </a:rPr>
+              <a:t>Infraestructura: </a:t>
+            </a:r>
+            <a:r>
+              <a:rPr>
+                <a:solidFill>
+                  <a:srgbClr val="334155"/>
+                </a:solidFill>
+              </a:rPr>
+              <a:t>Disponibilidad de microcomputadores Mini-PC, switches de red y monitores de prueba.</a:t>
             </a:r>
           </a:p>
         </p:txBody>
@@ -9933,7 +11017,7 @@
               </a:defRPr>
             </a:pPr>
             <a:r>
-              <a:t>Frontend y Experiencia de Usuario (UI/UX)</a:t>
+              <a:t>Matriz de Riesgos y Mitigación</a:t>
             </a:r>
           </a:p>
           <a:p>
@@ -9951,7 +11035,7 @@
                   <a:srgbClr val="1E3A8A"/>
                 </a:solidFill>
               </a:rPr>
-              <a:t>Vistas Administrativas: </a:t>
+              <a:t>Riesgo 1: Pérdida de red en malls </a:t>
             </a:r>
             <a:r>
               <a:rPr>
@@ -9959,7 +11043,7 @@
                   <a:srgbClr val="334155"/>
                 </a:solidFill>
               </a:rPr>
-              <a:t>Desarrolladas con Blade, HTML5/CSS3 y JavaScript responsivo.</a:t>
+              <a:t>Mitigación: Caché local obligatorio (SQLite/local storage) y reproducción autónoma.</a:t>
             </a:r>
           </a:p>
           <a:p>
@@ -9977,7 +11061,7 @@
                   <a:srgbClr val="1E3A8A"/>
                 </a:solidFill>
               </a:rPr>
-              <a:t>Gestor de Pautas Visual: </a:t>
+              <a:t>Riesgo 2: Formatos de video dispares </a:t>
             </a:r>
             <a:r>
               <a:rPr>
@@ -9985,7 +11069,7 @@
                   <a:srgbClr val="334155"/>
                 </a:solidFill>
               </a:rPr>
-              <a:t>Visualización gráfica de parrillas horarias para evitar conflictos de programación.</a:t>
+              <a:t>Mitigación: Estandarización a MP4 H.264 y validación estricta de códecs al subir.</a:t>
             </a:r>
           </a:p>
           <a:p>
@@ -10003,7 +11087,7 @@
                   <a:srgbClr val="1E3A8A"/>
                 </a:solidFill>
               </a:rPr>
-              <a:t>Monitoreo de Telemetría: </a:t>
+              <a:t>Riesgo 3: Falta de pantallas para pruebas </a:t>
             </a:r>
             <a:r>
               <a:rPr>
@@ -10011,7 +11095,7 @@
                   <a:srgbClr val="334155"/>
                 </a:solidFill>
               </a:rPr>
-              <a:t>Panel de estado de pantallas en vivo con semáforo de conectividad (Online/Offline).</a:t>
+              <a:t>Mitigación: Desarrollo de emulador web de pantalla que simula resolución y heartbeats.</a:t>
             </a:r>
           </a:p>
           <a:p>
@@ -10029,7 +11113,7 @@
                   <a:srgbClr val="1E3A8A"/>
                 </a:solidFill>
               </a:rPr>
-              <a:t>Panel Local de Emergencia: </a:t>
+              <a:t>Riesgo 4: Corrupción durante descarga </a:t>
             </a:r>
             <a:r>
               <a:rPr>
@@ -10037,7 +11121,7 @@
                   <a:srgbClr val="334155"/>
                 </a:solidFill>
               </a:rPr>
-              <a:t>Interfaz web embebida en el nodo de sitio para control manual in situ sin internet.</a:t>
+              <a:t>Mitigación: Validación mandatoria de hash criptográfico SHA-256 antes de reproducir.</a:t>
             </a:r>
           </a:p>
         </p:txBody>
@@ -10057,7 +11141,7 @@
             <a:avLst/>
           </a:prstGeom>
           <a:solidFill>
-            <a:srgbClr val="0D9488"/>
+            <a:srgbClr val="D97706"/>
           </a:solidFill>
           <a:ln>
             <a:noFill/>
@@ -10185,7 +11269,7 @@
               </a:defRPr>
             </a:pPr>
             <a:r>
-              <a:t>Plan de Trabajo y Carta Gantt — 18 Semanas</a:t>
+              <a:t>Modelo de Datos Relacional (MariaDB) y Frontend</a:t>
             </a:r>
           </a:p>
           <a:p>
@@ -10201,7 +11285,7 @@
               </a:defRPr>
             </a:pPr>
             <a:r>
-              <a:t>Ruta Crítica e Hitos Evaluativos Académicos (PTY4614)</a:t>
+              <a:t>Persistencia ACID, Estructura Jerárquica e Interfaz de Gestión</a:t>
             </a:r>
           </a:p>
         </p:txBody>
@@ -10270,7 +11354,7 @@
         <p:spPr>
           <a:xfrm>
             <a:off x="731520" y="1645920"/>
-            <a:ext cx="2468880" cy="4572000"/>
+            <a:ext cx="5212080" cy="4572000"/>
           </a:xfrm>
           <a:prstGeom prst="roundRect">
             <a:avLst/>
@@ -10314,7 +11398,7 @@
               </a:defRPr>
             </a:pPr>
             <a:r>
-              <a:t>Fase 1: Definición (S1-S4)</a:t>
+              <a:t>Arquitectura de Datos (MariaDB 3FN)</a:t>
             </a:r>
           </a:p>
           <a:p>
@@ -10327,20 +11411,7 @@
               </a:defRPr>
             </a:pPr>
             <a:r>
-              <a:rPr b="1">
-                <a:solidFill>
-                  <a:srgbClr val="1E3A8A"/>
-                </a:solidFill>
-              </a:rPr>
-              <a:t>S1-S2: </a:t>
-            </a:r>
-            <a:r>
-              <a:rPr>
-                <a:solidFill>
-                  <a:srgbClr val="334155"/>
-                </a:solidFill>
-              </a:rPr>
-              <a:t>Constitución y diagnóstico en terreno con Lumina.</a:t>
+              <a:t>Jerarquía de Ubicación: Locación (ej. Mall Costanera) → Sectores (ej. Patio Comidas) → Pantallas individuales.</a:t>
             </a:r>
           </a:p>
           <a:p>
@@ -10358,7 +11429,7 @@
                   <a:srgbClr val="1E3A8A"/>
                 </a:solidFill>
               </a:rPr>
-              <a:t>S3: </a:t>
+              <a:t>Entidades de Contenido: </a:t>
             </a:r>
             <a:r>
               <a:rPr>
@@ -10366,7 +11437,7 @@
                   <a:srgbClr val="334155"/>
                 </a:solidFill>
               </a:rPr>
-              <a:t>Stack tecnológico y formalización de objetivos.</a:t>
+              <a:t>Catálogo de Medios con metadatos, peso, resolución y Checksum SHA-256.</a:t>
             </a:r>
           </a:p>
           <a:p>
@@ -10384,7 +11455,7 @@
                   <a:srgbClr val="1E3A8A"/>
                 </a:solidFill>
               </a:rPr>
-              <a:t>S4 [HITO 1]: </a:t>
+              <a:t>Listas y Programación: </a:t>
             </a:r>
             <a:r>
               <a:rPr>
@@ -10392,7 +11463,46 @@
                   <a:srgbClr val="334155"/>
                 </a:solidFill>
               </a:rPr>
-              <a:t>Entrega Informe Fase 1 y Exposición Grupal.</a:t>
+              <a:t>Playlists secuenciales asociadas a Reglas Horarias (días, horas de inicio/fin).</a:t>
+            </a:r>
+          </a:p>
+          <a:p>
+            <a:pPr>
+              <a:spcAft>
+                <a:spcPts val="500"/>
+              </a:spcAft>
+              <a:defRPr sz="1100">
+                <a:latin typeface="Arial"/>
+              </a:defRPr>
+            </a:pPr>
+            <a:r>
+              <a:rPr b="1">
+                <a:solidFill>
+                  <a:srgbClr val="1E3A8A"/>
+                </a:solidFill>
+              </a:rPr>
+              <a:t>Integridad y Transacciones: </a:t>
+            </a:r>
+            <a:r>
+              <a:rPr>
+                <a:solidFill>
+                  <a:srgbClr val="334155"/>
+                </a:solidFill>
+              </a:rPr>
+              <a:t>Normalización 3FN con llaves foráneas estrictas y operaciones ACID que previenen solapamientos.</a:t>
+            </a:r>
+          </a:p>
+          <a:p>
+            <a:pPr>
+              <a:spcAft>
+                <a:spcPts val="500"/>
+              </a:spcAft>
+              <a:defRPr sz="1100">
+                <a:latin typeface="Arial"/>
+              </a:defRPr>
+            </a:pPr>
+            <a:r>
+              <a:t>Roles y Permisos: Tabla usuarios_locaciones para restringir operadores a locaciones asignadas. Administrador con acceso global.</a:t>
             </a:r>
           </a:p>
         </p:txBody>
@@ -10406,7 +11516,7 @@
         <p:spPr>
           <a:xfrm>
             <a:off x="777240" y="1691640"/>
-            <a:ext cx="2377440" cy="73152"/>
+            <a:ext cx="5120640" cy="73152"/>
           </a:xfrm>
           <a:prstGeom prst="rect">
             <a:avLst/>
@@ -10448,8 +11558,8 @@
         </p:nvSpPr>
         <p:spPr>
           <a:xfrm>
-            <a:off x="3474720" y="1645920"/>
-            <a:ext cx="2468880" cy="4572000"/>
+            <a:off x="6217920" y="1645920"/>
+            <a:ext cx="5212080" cy="4572000"/>
           </a:xfrm>
           <a:prstGeom prst="roundRect">
             <a:avLst/>
@@ -10493,7 +11603,7 @@
               </a:defRPr>
             </a:pPr>
             <a:r>
-              <a:t>Fase 2: Core (S5-S10)</a:t>
+              <a:t>Frontend y Experiencia de Usuario (UI/UX)</a:t>
             </a:r>
           </a:p>
           <a:p>
@@ -10511,7 +11621,7 @@
                   <a:srgbClr val="1E3A8A"/>
                 </a:solidFill>
               </a:rPr>
-              <a:t>S5-S6: </a:t>
+              <a:t>Vistas Administrativas: </a:t>
             </a:r>
             <a:r>
               <a:rPr>
@@ -10519,7 +11629,7 @@
                   <a:srgbClr val="334155"/>
                 </a:solidFill>
               </a:rPr>
-              <a:t>Modelado MariaDB y migraciones Laravel.</a:t>
+              <a:t>Desarrolladas con Blade, HTML5/CSS3 y JavaScript responsivo.</a:t>
             </a:r>
           </a:p>
           <a:p>
@@ -10537,7 +11647,7 @@
                   <a:srgbClr val="1E3A8A"/>
                 </a:solidFill>
               </a:rPr>
-              <a:t>S7-S8: </a:t>
+              <a:t>Gestor de Pautas Visual: </a:t>
             </a:r>
             <a:r>
               <a:rPr>
@@ -10545,7 +11655,7 @@
                   <a:srgbClr val="334155"/>
                 </a:solidFill>
               </a:rPr>
-              <a:t>API RESTful, Auth JWT y carga con SHA-256.</a:t>
+              <a:t>Visualización gráfica de parrillas horarias para evitar conflictos de programación.</a:t>
             </a:r>
           </a:p>
           <a:p>
@@ -10563,7 +11673,7 @@
                   <a:srgbClr val="1E3A8A"/>
                 </a:solidFill>
               </a:rPr>
-              <a:t>S9-S10 [HITO 2]: </a:t>
+              <a:t>Monitoreo de Telemetría: </a:t>
             </a:r>
             <a:r>
               <a:rPr>
@@ -10571,7 +11681,33 @@
                   <a:srgbClr val="334155"/>
                 </a:solidFill>
               </a:rPr>
-              <a:t>Playlists, UI de pautas y Demo Funcional.</a:t>
+              <a:t>Panel de estado de pantallas en vivo con semáforo de conectividad (Online/Offline).</a:t>
+            </a:r>
+          </a:p>
+          <a:p>
+            <a:pPr>
+              <a:spcAft>
+                <a:spcPts val="500"/>
+              </a:spcAft>
+              <a:defRPr sz="1100">
+                <a:latin typeface="Arial"/>
+              </a:defRPr>
+            </a:pPr>
+            <a:r>
+              <a:rPr b="1">
+                <a:solidFill>
+                  <a:srgbClr val="1E3A8A"/>
+                </a:solidFill>
+              </a:rPr>
+              <a:t>Panel Local de Emergencia: </a:t>
+            </a:r>
+            <a:r>
+              <a:rPr>
+                <a:solidFill>
+                  <a:srgbClr val="334155"/>
+                </a:solidFill>
+              </a:rPr>
+              <a:t>Interfaz web embebida en el nodo de sitio para control manual in situ sin internet.</a:t>
             </a:r>
           </a:p>
         </p:txBody>
@@ -10584,372 +11720,14 @@
         </p:nvSpPr>
         <p:spPr>
           <a:xfrm>
-            <a:off x="3520439" y="1691640"/>
-            <a:ext cx="2377440" cy="73152"/>
+            <a:off x="6263640" y="1691640"/>
+            <a:ext cx="5120640" cy="73152"/>
           </a:xfrm>
           <a:prstGeom prst="rect">
             <a:avLst/>
           </a:prstGeom>
           <a:solidFill>
             <a:srgbClr val="0D9488"/>
-          </a:solidFill>
-          <a:ln>
-            <a:noFill/>
-          </a:ln>
-        </p:spPr>
-        <p:style>
-          <a:lnRef idx="1">
-            <a:schemeClr val="accent1"/>
-          </a:lnRef>
-          <a:fillRef idx="3">
-            <a:schemeClr val="accent1"/>
-          </a:fillRef>
-          <a:effectRef idx="2">
-            <a:schemeClr val="accent1"/>
-          </a:effectRef>
-          <a:fontRef idx="minor">
-            <a:schemeClr val="lt1"/>
-          </a:fontRef>
-        </p:style>
-        <p:txBody>
-          <a:bodyPr rtlCol="0" anchor="ctr"/>
-          <a:lstStyle/>
-          <a:p>
-            <a:pPr algn="ctr"/>
-          </a:p>
-        </p:txBody>
-      </p:sp>
-      <p:sp>
-        <p:nvSpPr>
-          <p:cNvPr id="9" name="Rounded Rectangle 8"/>
-          <p:cNvSpPr/>
-          <p:nvPr/>
-        </p:nvSpPr>
-        <p:spPr>
-          <a:xfrm>
-            <a:off x="6217920" y="1645920"/>
-            <a:ext cx="2468880" cy="4572000"/>
-          </a:xfrm>
-          <a:prstGeom prst="roundRect">
-            <a:avLst/>
-          </a:prstGeom>
-          <a:solidFill>
-            <a:srgbClr val="F8FAFC"/>
-          </a:solidFill>
-          <a:ln w="12700">
-            <a:solidFill>
-              <a:srgbClr val="E2E8F0"/>
-            </a:solidFill>
-          </a:ln>
-        </p:spPr>
-        <p:style>
-          <a:lnRef idx="1">
-            <a:schemeClr val="accent1"/>
-          </a:lnRef>
-          <a:fillRef idx="3">
-            <a:schemeClr val="accent1"/>
-          </a:fillRef>
-          <a:effectRef idx="2">
-            <a:schemeClr val="accent1"/>
-          </a:effectRef>
-          <a:fontRef idx="minor">
-            <a:schemeClr val="lt1"/>
-          </a:fontRef>
-        </p:style>
-        <p:txBody>
-          <a:bodyPr rtlCol="0" anchor="t" wrap="square" lIns="228600" rIns="228600" tIns="201168" bIns="182880"/>
-          <a:lstStyle/>
-          <a:p>
-            <a:pPr algn="ctr">
-              <a:spcAft>
-                <a:spcPts val="800"/>
-              </a:spcAft>
-              <a:defRPr sz="1500" b="1">
-                <a:solidFill>
-                  <a:srgbClr val="1E3A8A"/>
-                </a:solidFill>
-                <a:latin typeface="Arial"/>
-              </a:defRPr>
-            </a:pPr>
-            <a:r>
-              <a:t>Fase 3: Resiliencia (S11-S15)</a:t>
-            </a:r>
-          </a:p>
-          <a:p>
-            <a:pPr>
-              <a:spcAft>
-                <a:spcPts val="500"/>
-              </a:spcAft>
-              <a:defRPr sz="1100">
-                <a:latin typeface="Arial"/>
-              </a:defRPr>
-            </a:pPr>
-            <a:r>
-              <a:rPr b="1">
-                <a:solidFill>
-                  <a:srgbClr val="1E3A8A"/>
-                </a:solidFill>
-              </a:rPr>
-              <a:t>S11-S12: </a:t>
-            </a:r>
-            <a:r>
-              <a:rPr>
-                <a:solidFill>
-                  <a:srgbClr val="334155"/>
-                </a:solidFill>
-              </a:rPr>
-              <a:t>Servidor WebSockets y Player local.</a:t>
-            </a:r>
-          </a:p>
-          <a:p>
-            <a:pPr>
-              <a:spcAft>
-                <a:spcPts val="500"/>
-              </a:spcAft>
-              <a:defRPr sz="1100">
-                <a:latin typeface="Arial"/>
-              </a:defRPr>
-            </a:pPr>
-            <a:r>
-              <a:rPr b="1">
-                <a:solidFill>
-                  <a:srgbClr val="1E3A8A"/>
-                </a:solidFill>
-              </a:rPr>
-              <a:t>S13-S14: </a:t>
-            </a:r>
-            <a:r>
-              <a:rPr>
-                <a:solidFill>
-                  <a:srgbClr val="334155"/>
-                </a:solidFill>
-              </a:rPr>
-              <a:t>Módulo Fail-Safe y panel web local.</a:t>
-            </a:r>
-          </a:p>
-          <a:p>
-            <a:pPr>
-              <a:spcAft>
-                <a:spcPts val="500"/>
-              </a:spcAft>
-              <a:defRPr sz="1100">
-                <a:latin typeface="Arial"/>
-              </a:defRPr>
-            </a:pPr>
-            <a:r>
-              <a:rPr b="1">
-                <a:solidFill>
-                  <a:srgbClr val="1E3A8A"/>
-                </a:solidFill>
-              </a:rPr>
-              <a:t>S15 [HITO 3]: </a:t>
-            </a:r>
-            <a:r>
-              <a:rPr>
-                <a:solidFill>
-                  <a:srgbClr val="334155"/>
-                </a:solidFill>
-              </a:rPr>
-              <a:t>Entrega software consolidado y manuales.</a:t>
-            </a:r>
-          </a:p>
-        </p:txBody>
-      </p:sp>
-      <p:sp>
-        <p:nvSpPr>
-          <p:cNvPr id="10" name="Rectangle 9"/>
-          <p:cNvSpPr/>
-          <p:nvPr/>
-        </p:nvSpPr>
-        <p:spPr>
-          <a:xfrm>
-            <a:off x="6263640" y="1691640"/>
-            <a:ext cx="2377440" cy="73152"/>
-          </a:xfrm>
-          <a:prstGeom prst="rect">
-            <a:avLst/>
-          </a:prstGeom>
-          <a:solidFill>
-            <a:srgbClr val="D97706"/>
-          </a:solidFill>
-          <a:ln>
-            <a:noFill/>
-          </a:ln>
-        </p:spPr>
-        <p:style>
-          <a:lnRef idx="1">
-            <a:schemeClr val="accent1"/>
-          </a:lnRef>
-          <a:fillRef idx="3">
-            <a:schemeClr val="accent1"/>
-          </a:fillRef>
-          <a:effectRef idx="2">
-            <a:schemeClr val="accent1"/>
-          </a:effectRef>
-          <a:fontRef idx="minor">
-            <a:schemeClr val="lt1"/>
-          </a:fontRef>
-        </p:style>
-        <p:txBody>
-          <a:bodyPr rtlCol="0" anchor="ctr"/>
-          <a:lstStyle/>
-          <a:p>
-            <a:pPr algn="ctr"/>
-          </a:p>
-        </p:txBody>
-      </p:sp>
-      <p:sp>
-        <p:nvSpPr>
-          <p:cNvPr id="11" name="Rounded Rectangle 10"/>
-          <p:cNvSpPr/>
-          <p:nvPr/>
-        </p:nvSpPr>
-        <p:spPr>
-          <a:xfrm>
-            <a:off x="8961120" y="1645920"/>
-            <a:ext cx="2468880" cy="4572000"/>
-          </a:xfrm>
-          <a:prstGeom prst="roundRect">
-            <a:avLst/>
-          </a:prstGeom>
-          <a:solidFill>
-            <a:srgbClr val="F8FAFC"/>
-          </a:solidFill>
-          <a:ln w="12700">
-            <a:solidFill>
-              <a:srgbClr val="E2E8F0"/>
-            </a:solidFill>
-          </a:ln>
-        </p:spPr>
-        <p:style>
-          <a:lnRef idx="1">
-            <a:schemeClr val="accent1"/>
-          </a:lnRef>
-          <a:fillRef idx="3">
-            <a:schemeClr val="accent1"/>
-          </a:fillRef>
-          <a:effectRef idx="2">
-            <a:schemeClr val="accent1"/>
-          </a:effectRef>
-          <a:fontRef idx="minor">
-            <a:schemeClr val="lt1"/>
-          </a:fontRef>
-        </p:style>
-        <p:txBody>
-          <a:bodyPr rtlCol="0" anchor="t" wrap="square" lIns="228600" rIns="228600" tIns="201168" bIns="182880"/>
-          <a:lstStyle/>
-          <a:p>
-            <a:pPr algn="ctr">
-              <a:spcAft>
-                <a:spcPts val="800"/>
-              </a:spcAft>
-              <a:defRPr sz="1500" b="1">
-                <a:solidFill>
-                  <a:srgbClr val="1E3A8A"/>
-                </a:solidFill>
-                <a:latin typeface="Arial"/>
-              </a:defRPr>
-            </a:pPr>
-            <a:r>
-              <a:t>Fase 4: Cierre (S16-S18)</a:t>
-            </a:r>
-          </a:p>
-          <a:p>
-            <a:pPr>
-              <a:spcAft>
-                <a:spcPts val="500"/>
-              </a:spcAft>
-              <a:defRPr sz="1100">
-                <a:latin typeface="Arial"/>
-              </a:defRPr>
-            </a:pPr>
-            <a:r>
-              <a:rPr b="1">
-                <a:solidFill>
-                  <a:srgbClr val="1E3A8A"/>
-                </a:solidFill>
-              </a:rPr>
-              <a:t>S16: </a:t>
-            </a:r>
-            <a:r>
-              <a:rPr>
-                <a:solidFill>
-                  <a:srgbClr val="334155"/>
-                </a:solidFill>
-              </a:rPr>
-              <a:t>Pruebas UAT en terreno con Cristóbal Manzo.</a:t>
-            </a:r>
-          </a:p>
-          <a:p>
-            <a:pPr>
-              <a:spcAft>
-                <a:spcPts val="500"/>
-              </a:spcAft>
-              <a:defRPr sz="1100">
-                <a:latin typeface="Arial"/>
-              </a:defRPr>
-            </a:pPr>
-            <a:r>
-              <a:rPr b="1">
-                <a:solidFill>
-                  <a:srgbClr val="1E3A8A"/>
-                </a:solidFill>
-              </a:rPr>
-              <a:t>S17 [HITO 4]: </a:t>
-            </a:r>
-            <a:r>
-              <a:rPr>
-                <a:solidFill>
-                  <a:srgbClr val="334155"/>
-                </a:solidFill>
-              </a:rPr>
-              <a:t>Ensayo y Defensa Presencial (Sesión 1).</a:t>
-            </a:r>
-          </a:p>
-          <a:p>
-            <a:pPr>
-              <a:spcAft>
-                <a:spcPts val="500"/>
-              </a:spcAft>
-              <a:defRPr sz="1100">
-                <a:latin typeface="Arial"/>
-              </a:defRPr>
-            </a:pPr>
-            <a:r>
-              <a:rPr b="1">
-                <a:solidFill>
-                  <a:srgbClr val="1E3A8A"/>
-                </a:solidFill>
-              </a:rPr>
-              <a:t>S18 [HITO 4]: </a:t>
-            </a:r>
-            <a:r>
-              <a:rPr>
-                <a:solidFill>
-                  <a:srgbClr val="334155"/>
-                </a:solidFill>
-              </a:rPr>
-              <a:t>Defensa Final de Titulación y Cierre de Actas.</a:t>
-            </a:r>
-          </a:p>
-        </p:txBody>
-      </p:sp>
-      <p:sp>
-        <p:nvSpPr>
-          <p:cNvPr id="12" name="Rectangle 11"/>
-          <p:cNvSpPr/>
-          <p:nvPr/>
-        </p:nvSpPr>
-        <p:spPr>
-          <a:xfrm>
-            <a:off x="9006840" y="1691640"/>
-            <a:ext cx="2377440" cy="73152"/>
-          </a:xfrm>
-          <a:prstGeom prst="rect">
-            <a:avLst/>
-          </a:prstGeom>
-          <a:solidFill>
-            <a:srgbClr val="1E3A8A"/>
           </a:solidFill>
           <a:ln>
             <a:noFill/>
@@ -11077,7 +11855,7 @@
               </a:defRPr>
             </a:pPr>
             <a:r>
-              <a:t>Evidencias del Proyecto y Conclusión</a:t>
+              <a:t>Banco de Preguntas Típicas de la Comisión Docente</a:t>
             </a:r>
           </a:p>
           <a:p>
@@ -11093,7 +11871,7 @@
               </a:defRPr>
             </a:pPr>
             <a:r>
-              <a:t>Acreditación Rigurosa e Integración del Perfil de Egreso</a:t>
+              <a:t>Defensa de Decisiones Técnicas y Metodológicas de Ingeniería</a:t>
             </a:r>
           </a:p>
         </p:txBody>
@@ -11148,7 +11926,7 @@
               </a:defRPr>
             </a:pPr>
             <a:r>
-              <a:t>Paulo Loyola | Bloque 3</a:t>
+              <a:t>Todo el Equipo</a:t>
             </a:r>
           </a:p>
         </p:txBody>
@@ -11162,7 +11940,7 @@
         <p:spPr>
           <a:xfrm>
             <a:off x="731520" y="1645920"/>
-            <a:ext cx="5212080" cy="4572000"/>
+            <a:ext cx="5212080" cy="2194560"/>
           </a:xfrm>
           <a:prstGeom prst="roundRect">
             <a:avLst/>
@@ -11206,7 +11984,7 @@
               </a:defRPr>
             </a:pPr>
             <a:r>
-              <a:t>Evidencias Objetivas de Acreditación</a:t>
+              <a:t>¿Por qué Laravel y MariaDB vs NoSQL?</a:t>
             </a:r>
           </a:p>
           <a:p>
@@ -11219,150 +11997,7 @@
               </a:defRPr>
             </a:pPr>
             <a:r>
-              <a:rPr b="1">
-                <a:solidFill>
-                  <a:srgbClr val="1E3A8A"/>
-                </a:solidFill>
-              </a:rPr>
-              <a:t>EVID-01 (Gestión): </a:t>
-            </a:r>
-            <a:r>
-              <a:rPr>
-                <a:solidFill>
-                  <a:srgbClr val="334155"/>
-                </a:solidFill>
-              </a:rPr>
-              <a:t>Acta de levantamiento y alcance validada por Cristóbal Manzo (Lumina).</a:t>
-            </a:r>
-          </a:p>
-          <a:p>
-            <a:pPr>
-              <a:spcAft>
-                <a:spcPts val="500"/>
-              </a:spcAft>
-              <a:defRPr sz="1100">
-                <a:latin typeface="Arial"/>
-              </a:defRPr>
-            </a:pPr>
-            <a:r>
-              <a:rPr b="1">
-                <a:solidFill>
-                  <a:srgbClr val="1E3A8A"/>
-                </a:solidFill>
-              </a:rPr>
-              <a:t>EVID-02 (Ingeniería DB): </a:t>
-            </a:r>
-            <a:r>
-              <a:rPr>
-                <a:solidFill>
-                  <a:srgbClr val="334155"/>
-                </a:solidFill>
-              </a:rPr>
-              <a:t>Diagrama E-R, diccionario de datos y migraciones MariaDB ejecutables.</a:t>
-            </a:r>
-          </a:p>
-          <a:p>
-            <a:pPr>
-              <a:spcAft>
-                <a:spcPts val="500"/>
-              </a:spcAft>
-              <a:defRPr sz="1100">
-                <a:latin typeface="Arial"/>
-              </a:defRPr>
-            </a:pPr>
-            <a:r>
-              <a:rPr b="1">
-                <a:solidFill>
-                  <a:srgbClr val="1E3A8A"/>
-                </a:solidFill>
-              </a:rPr>
-              <a:t>EVID-03 (Desarrollo): </a:t>
-            </a:r>
-            <a:r>
-              <a:rPr>
-                <a:solidFill>
-                  <a:srgbClr val="334155"/>
-                </a:solidFill>
-              </a:rPr>
-              <a:t>Repositorio GitHub con commits trazables y Pull Requests cruzados.</a:t>
-            </a:r>
-          </a:p>
-          <a:p>
-            <a:pPr>
-              <a:spcAft>
-                <a:spcPts val="500"/>
-              </a:spcAft>
-              <a:defRPr sz="1100">
-                <a:latin typeface="Arial"/>
-              </a:defRPr>
-            </a:pPr>
-            <a:r>
-              <a:rPr b="1">
-                <a:solidFill>
-                  <a:srgbClr val="1E3A8A"/>
-                </a:solidFill>
-              </a:rPr>
-              <a:t>EVID-04 (Servicios): </a:t>
-            </a:r>
-            <a:r>
-              <a:rPr>
-                <a:solidFill>
-                  <a:srgbClr val="334155"/>
-                </a:solidFill>
-              </a:rPr>
-              <a:t>Colección Postman y especificación interactiva OpenAPI / Swagger.</a:t>
-            </a:r>
-          </a:p>
-          <a:p>
-            <a:pPr>
-              <a:spcAft>
-                <a:spcPts val="500"/>
-              </a:spcAft>
-              <a:defRPr sz="1100">
-                <a:latin typeface="Arial"/>
-              </a:defRPr>
-            </a:pPr>
-            <a:r>
-              <a:rPr b="1">
-                <a:solidFill>
-                  <a:srgbClr val="1E3A8A"/>
-                </a:solidFill>
-              </a:rPr>
-              <a:t>EVID-05 (Resiliencia): </a:t>
-            </a:r>
-            <a:r>
-              <a:rPr>
-                <a:solidFill>
-                  <a:srgbClr val="334155"/>
-                </a:solidFill>
-              </a:rPr>
-              <a:t>Matriz y video de prueba de desconexión forzada de red (Fail-Safe).</a:t>
-            </a:r>
-          </a:p>
-          <a:p>
-            <a:pPr>
-              <a:spcAft>
-                <a:spcPts val="500"/>
-              </a:spcAft>
-              <a:defRPr sz="1100">
-                <a:latin typeface="Arial"/>
-              </a:defRPr>
-            </a:pPr>
-            <a:r>
-              <a:rPr b="1">
-                <a:solidFill>
-                  <a:srgbClr val="1E3A8A"/>
-                </a:solidFill>
-              </a:rPr>
-              <a:t>EVID-06 (Validación): </a:t>
-            </a:r>
-            <a:r>
-              <a:rPr>
-                <a:solidFill>
-                  <a:srgbClr val="334155"/>
-                </a:solidFill>
-              </a:rPr>
-              <a:t>Acta formal de recepción y pruebas de usuario (UAT) de Lumina Motion.</a:t>
+              <a:t>Fundamento: El dominio de cartelería digital es estrictamente estructurado (Locaciones &gt; Sectores &gt; Pantallas &gt; Playlists). Las transacciones ACID y llaves foráneas de MariaDB previenen estados inconsistentes y solapamientos que en NoSQL exigirían validaciones manuales complejas.</a:t>
             </a:r>
           </a:p>
         </p:txBody>
@@ -11419,7 +12054,7 @@
         <p:spPr>
           <a:xfrm>
             <a:off x="6217920" y="1645920"/>
-            <a:ext cx="5212080" cy="4572000"/>
+            <a:ext cx="5212080" cy="2194560"/>
           </a:xfrm>
           <a:prstGeom prst="roundRect">
             <a:avLst/>
@@ -11463,7 +12098,7 @@
               </a:defRPr>
             </a:pPr>
             <a:r>
-              <a:t>Conclusión y Valor Agregado</a:t>
+              <a:t>¿Cómo evitan pantallas en negro en malls?</a:t>
             </a:r>
           </a:p>
           <a:p>
@@ -11481,7 +12116,7 @@
                   <a:srgbClr val="1E3A8A"/>
                 </a:solidFill>
               </a:rPr>
-              <a:t>Solución Industrial Real: </a:t>
+              <a:t>Fundamento: </a:t>
             </a:r>
             <a:r>
               <a:rPr>
@@ -11489,85 +12124,7 @@
                   <a:srgbClr val="334155"/>
                 </a:solidFill>
               </a:rPr>
-              <a:t>Resuelve el dolor logístico y los costos de licenciamiento de Lumina Motion.</a:t>
-            </a:r>
-          </a:p>
-          <a:p>
-            <a:pPr>
-              <a:spcAft>
-                <a:spcPts val="500"/>
-              </a:spcAft>
-              <a:defRPr sz="1100">
-                <a:latin typeface="Arial"/>
-              </a:defRPr>
-            </a:pPr>
-            <a:r>
-              <a:rPr b="1">
-                <a:solidFill>
-                  <a:srgbClr val="1E3A8A"/>
-                </a:solidFill>
-              </a:rPr>
-              <a:t>Autonomía sin Conexión: </a:t>
-            </a:r>
-            <a:r>
-              <a:rPr>
-                <a:solidFill>
-                  <a:srgbClr val="334155"/>
-                </a:solidFill>
-              </a:rPr>
-              <a:t>Garantía de continuidad operativa ante caídas de internet en eventos masivos.</a:t>
-            </a:r>
-          </a:p>
-          <a:p>
-            <a:pPr>
-              <a:spcAft>
-                <a:spcPts val="500"/>
-              </a:spcAft>
-              <a:defRPr sz="1100">
-                <a:latin typeface="Arial"/>
-              </a:defRPr>
-            </a:pPr>
-            <a:r>
-              <a:rPr b="1">
-                <a:solidFill>
-                  <a:srgbClr val="1E3A8A"/>
-                </a:solidFill>
-              </a:rPr>
-              <a:t>Integración Formativa: </a:t>
-            </a:r>
-            <a:r>
-              <a:rPr>
-                <a:solidFill>
-                  <a:srgbClr val="334155"/>
-                </a:solidFill>
-              </a:rPr>
-              <a:t>Articulación plena de las 4 competencias clave del perfil de egreso Duoc UC: Desarrollo Fullstack, Bases de Datos, Arquitectura y Gestión Ágil.</a:t>
-            </a:r>
-          </a:p>
-          <a:p>
-            <a:pPr>
-              <a:spcAft>
-                <a:spcPts val="500"/>
-              </a:spcAft>
-              <a:defRPr sz="1100">
-                <a:latin typeface="Arial"/>
-              </a:defRPr>
-            </a:pPr>
-            <a:r>
-              <a:rPr b="1">
-                <a:solidFill>
-                  <a:srgbClr val="1E3A8A"/>
-                </a:solidFill>
-              </a:rPr>
-              <a:t>Discurso de Cierre: </a:t>
-            </a:r>
-            <a:r>
-              <a:rPr>
-                <a:solidFill>
-                  <a:srgbClr val="334155"/>
-                </a:solidFill>
-              </a:rPr>
-              <a:t>'Con ACE no solo resolvemos un problema logístico de Lumina Motion, sino que demostramos la integración transversal de las competencias de nuestro perfil de egreso en Duoc UC. Quedamos atentos a sus preguntas.'</a:t>
+              <a:t>Arquitectura Cache-First: el reproductor nunca hace streaming directo. Descarga preventivamente los videos a disco local y verifica SHA-256. Ante caída de red, reproduce localmente y expone un panel web en la intranet para control manual de emergencia.</a:t>
             </a:r>
           </a:p>
         </p:txBody>
@@ -11588,6 +12145,247 @@
           </a:prstGeom>
           <a:solidFill>
             <a:srgbClr val="0D9488"/>
+          </a:solidFill>
+          <a:ln>
+            <a:noFill/>
+          </a:ln>
+        </p:spPr>
+        <p:style>
+          <a:lnRef idx="1">
+            <a:schemeClr val="accent1"/>
+          </a:lnRef>
+          <a:fillRef idx="3">
+            <a:schemeClr val="accent1"/>
+          </a:fillRef>
+          <a:effectRef idx="2">
+            <a:schemeClr val="accent1"/>
+          </a:effectRef>
+          <a:fontRef idx="minor">
+            <a:schemeClr val="lt1"/>
+          </a:fontRef>
+        </p:style>
+        <p:txBody>
+          <a:bodyPr rtlCol="0" anchor="ctr"/>
+          <a:lstStyle/>
+          <a:p>
+            <a:pPr algn="ctr"/>
+          </a:p>
+        </p:txBody>
+      </p:sp>
+      <p:sp>
+        <p:nvSpPr>
+          <p:cNvPr id="9" name="Rounded Rectangle 8"/>
+          <p:cNvSpPr/>
+          <p:nvPr/>
+        </p:nvSpPr>
+        <p:spPr>
+          <a:xfrm>
+            <a:off x="731520" y="4023360"/>
+            <a:ext cx="5212080" cy="2194560"/>
+          </a:xfrm>
+          <a:prstGeom prst="roundRect">
+            <a:avLst/>
+          </a:prstGeom>
+          <a:solidFill>
+            <a:srgbClr val="F8FAFC"/>
+          </a:solidFill>
+          <a:ln w="12700">
+            <a:solidFill>
+              <a:srgbClr val="E2E8F0"/>
+            </a:solidFill>
+          </a:ln>
+        </p:spPr>
+        <p:style>
+          <a:lnRef idx="1">
+            <a:schemeClr val="accent1"/>
+          </a:lnRef>
+          <a:fillRef idx="3">
+            <a:schemeClr val="accent1"/>
+          </a:fillRef>
+          <a:effectRef idx="2">
+            <a:schemeClr val="accent1"/>
+          </a:effectRef>
+          <a:fontRef idx="minor">
+            <a:schemeClr val="lt1"/>
+          </a:fontRef>
+        </p:style>
+        <p:txBody>
+          <a:bodyPr rtlCol="0" anchor="t" wrap="square" lIns="228600" rIns="228600" tIns="201168" bIns="182880"/>
+          <a:lstStyle/>
+          <a:p>
+            <a:pPr algn="ctr">
+              <a:spcAft>
+                <a:spcPts val="800"/>
+              </a:spcAft>
+              <a:defRPr sz="1500" b="1">
+                <a:solidFill>
+                  <a:srgbClr val="1E3A8A"/>
+                </a:solidFill>
+                <a:latin typeface="Arial"/>
+              </a:defRPr>
+            </a:pPr>
+            <a:r>
+              <a:t>¿Cómo aseguran terminar en 18 semanas?</a:t>
+            </a:r>
+          </a:p>
+          <a:p>
+            <a:pPr>
+              <a:spcAft>
+                <a:spcPts val="500"/>
+              </a:spcAft>
+              <a:defRPr sz="1100">
+                <a:latin typeface="Arial"/>
+              </a:defRPr>
+            </a:pPr>
+            <a:r>
+              <a:rPr b="1">
+                <a:solidFill>
+                  <a:srgbClr val="1E3A8A"/>
+                </a:solidFill>
+              </a:rPr>
+              <a:t>Fundamento: </a:t>
+            </a:r>
+            <a:r>
+              <a:rPr>
+                <a:solidFill>
+                  <a:srgbClr val="334155"/>
+                </a:solidFill>
+              </a:rPr>
+              <a:t>Delimitación estricta del alcance: ACE es distribución y programación (se excluye edición de video). Scrum bisemanal con hito crítico en S10 (core API y DB operativo), dejando semanas finales para pruebas de resiliencia y UAT con Lumina.</a:t>
+            </a:r>
+          </a:p>
+        </p:txBody>
+      </p:sp>
+      <p:sp>
+        <p:nvSpPr>
+          <p:cNvPr id="10" name="Rectangle 9"/>
+          <p:cNvSpPr/>
+          <p:nvPr/>
+        </p:nvSpPr>
+        <p:spPr>
+          <a:xfrm>
+            <a:off x="777240" y="4069080"/>
+            <a:ext cx="5120640" cy="73152"/>
+          </a:xfrm>
+          <a:prstGeom prst="rect">
+            <a:avLst/>
+          </a:prstGeom>
+          <a:solidFill>
+            <a:srgbClr val="D97706"/>
+          </a:solidFill>
+          <a:ln>
+            <a:noFill/>
+          </a:ln>
+        </p:spPr>
+        <p:style>
+          <a:lnRef idx="1">
+            <a:schemeClr val="accent1"/>
+          </a:lnRef>
+          <a:fillRef idx="3">
+            <a:schemeClr val="accent1"/>
+          </a:fillRef>
+          <a:effectRef idx="2">
+            <a:schemeClr val="accent1"/>
+          </a:effectRef>
+          <a:fontRef idx="minor">
+            <a:schemeClr val="lt1"/>
+          </a:fontRef>
+        </p:style>
+        <p:txBody>
+          <a:bodyPr rtlCol="0" anchor="ctr"/>
+          <a:lstStyle/>
+          <a:p>
+            <a:pPr algn="ctr"/>
+          </a:p>
+        </p:txBody>
+      </p:sp>
+      <p:sp>
+        <p:nvSpPr>
+          <p:cNvPr id="11" name="Rounded Rectangle 10"/>
+          <p:cNvSpPr/>
+          <p:nvPr/>
+        </p:nvSpPr>
+        <p:spPr>
+          <a:xfrm>
+            <a:off x="6217920" y="4023360"/>
+            <a:ext cx="5212080" cy="2194560"/>
+          </a:xfrm>
+          <a:prstGeom prst="roundRect">
+            <a:avLst/>
+          </a:prstGeom>
+          <a:solidFill>
+            <a:srgbClr val="F8FAFC"/>
+          </a:solidFill>
+          <a:ln w="12700">
+            <a:solidFill>
+              <a:srgbClr val="E2E8F0"/>
+            </a:solidFill>
+          </a:ln>
+        </p:spPr>
+        <p:style>
+          <a:lnRef idx="1">
+            <a:schemeClr val="accent1"/>
+          </a:lnRef>
+          <a:fillRef idx="3">
+            <a:schemeClr val="accent1"/>
+          </a:fillRef>
+          <a:effectRef idx="2">
+            <a:schemeClr val="accent1"/>
+          </a:effectRef>
+          <a:fontRef idx="minor">
+            <a:schemeClr val="lt1"/>
+          </a:fontRef>
+        </p:style>
+        <p:txBody>
+          <a:bodyPr rtlCol="0" anchor="t" wrap="square" lIns="228600" rIns="228600" tIns="201168" bIns="182880"/>
+          <a:lstStyle/>
+          <a:p>
+            <a:pPr algn="ctr">
+              <a:spcAft>
+                <a:spcPts val="800"/>
+              </a:spcAft>
+              <a:defRPr sz="1500" b="1">
+                <a:solidFill>
+                  <a:srgbClr val="1E3A8A"/>
+                </a:solidFill>
+                <a:latin typeface="Arial"/>
+              </a:defRPr>
+            </a:pPr>
+            <a:r>
+              <a:t>¿Cómo garantizan aporte equitativo?</a:t>
+            </a:r>
+          </a:p>
+          <a:p>
+            <a:pPr>
+              <a:spcAft>
+                <a:spcPts val="500"/>
+              </a:spcAft>
+              <a:defRPr sz="1100">
+                <a:latin typeface="Arial"/>
+              </a:defRPr>
+            </a:pPr>
+            <a:r>
+              <a:t>Fundamento: Distribución por dominios técnicos complementarios y corresponsabilidad en persistencia (MariaDB): Tomás (Arquitectura, Backend y BD), Matías (Gestión Ágil, Vinculación con Cliente y BD) y Paulo (Frontend, UI/UX y Documentación Técnica). Trazabilidad auditable mediante Pull Requests cruzados en GitHub.</a:t>
+            </a:r>
+          </a:p>
+        </p:txBody>
+      </p:sp>
+      <p:sp>
+        <p:nvSpPr>
+          <p:cNvPr id="12" name="Rectangle 11"/>
+          <p:cNvSpPr/>
+          <p:nvPr/>
+        </p:nvSpPr>
+        <p:spPr>
+          <a:xfrm>
+            <a:off x="6263640" y="4069080"/>
+            <a:ext cx="5120640" cy="73152"/>
+          </a:xfrm>
+          <a:prstGeom prst="rect">
+            <a:avLst/>
+          </a:prstGeom>
+          <a:solidFill>
+            <a:srgbClr val="1E3A8A"/>
           </a:solidFill>
           <a:ln>
             <a:noFill/>

--- a/Borradores/Entrega 1/PRESENTACION_FASE_1_PROYECTO_ACE.pptx
+++ b/Borradores/Entrega 1/PRESENTACION_FASE_1_PROYECTO_ACE.pptx
@@ -4753,7 +4753,7 @@
               </a:defRPr>
             </a:pPr>
             <a:r>
-              <a:t>Ruta Crítica e Hitos Evaluativos Académicos (PTY4614)</a:t>
+              <a:t>Ruta Crítica de 22 Actividades de Ingeniería e Hitos Evaluativos (PTY4614)</a:t>
             </a:r>
           </a:p>
         </p:txBody>
@@ -6976,6 +6976,14 @@
 <file path=ppt/slides/slide13.xml><?xml version="1.0" encoding="utf-8"?>
 <p:sld xmlns:a="http://schemas.openxmlformats.org/drawingml/2006/main" xmlns:p="http://schemas.openxmlformats.org/presentationml/2006/main" xmlns:r="http://schemas.openxmlformats.org/officeDocument/2006/relationships">
   <p:cSld>
+    <p:bg>
+      <p:bgPr>
+        <a:solidFill>
+          <a:srgbClr val="FFFFFF"/>
+        </a:solidFill>
+        <a:effectLst/>
+      </p:bgPr>
+    </p:bg>
     <p:spTree>
       <p:nvGrpSpPr>
         <p:cNvPr id="1" name=""/>
@@ -6992,13 +7000,13 @@
         <p:spPr>
           <a:xfrm>
             <a:off x="731520" y="457200"/>
-            <a:ext cx="10725912" cy="45720"/>
+            <a:ext cx="10728655" cy="45720"/>
           </a:xfrm>
           <a:prstGeom prst="rect">
             <a:avLst/>
           </a:prstGeom>
           <a:solidFill>
-            <a:srgbClr val="003366"/>
+            <a:srgbClr val="2563EB"/>
           </a:solidFill>
           <a:ln>
             <a:noFill/>
@@ -7035,7 +7043,7 @@
         <p:spPr>
           <a:xfrm>
             <a:off x="731520" y="594360"/>
-            <a:ext cx="8412480" cy="822960"/>
+            <a:ext cx="8686800" cy="822960"/>
           </a:xfrm>
           <a:prstGeom prst="rect">
             <a:avLst/>
@@ -7043,32 +7051,37 @@
           <a:noFill/>
         </p:spPr>
         <p:txBody>
-          <a:bodyPr wrap="square">
+          <a:bodyPr wrap="square" lIns="0" tIns="0" rIns="0" bIns="0">
             <a:spAutoFit/>
           </a:bodyPr>
           <a:lstStyle/>
           <a:p>
             <a:pPr>
-              <a:defRPr b="1" sz="2200">
-                <a:solidFill>
-                  <a:srgbClr val="003366"/>
-                </a:solidFill>
-              </a:defRPr>
-            </a:pPr>
-            <a:r>
-              <a:t>Prototipos Visuales de Interfaz (Mockups Figma)</a:t>
-            </a:r>
-          </a:p>
-          <a:p>
-            <a:pPr>
+              <a:defRPr sz="2400" b="1">
+                <a:solidFill>
+                  <a:srgbClr val="1E3A8A"/>
+                </a:solidFill>
+                <a:latin typeface="Arial"/>
+              </a:defRPr>
+            </a:pPr>
+            <a:r>
+              <a:t>Banco de Preguntas Típicas de la Comisión Docente</a:t>
+            </a:r>
+          </a:p>
+          <a:p>
+            <a:pPr>
+              <a:spcBef>
+                <a:spcPts val="200"/>
+              </a:spcBef>
               <a:defRPr sz="1300">
                 <a:solidFill>
-                  <a:srgbClr val="646464"/>
-                </a:solidFill>
-              </a:defRPr>
-            </a:pPr>
-            <a:r>
-              <a:t>Diseño UI/UX del Panel Administrativo Centralizado y Monitoreo de Pantallas</a:t>
+                  <a:srgbClr val="64748B"/>
+                </a:solidFill>
+                <a:latin typeface="Arial"/>
+              </a:defRPr>
+            </a:pPr>
+            <a:r>
+              <a:t>Defensa de Decisiones Técnicas y Metodológicas de Ingeniería</a:t>
             </a:r>
           </a:p>
         </p:txBody>
@@ -7081,18 +7094,18 @@
         </p:nvSpPr>
         <p:spPr>
           <a:xfrm>
-            <a:off x="9144000" y="640080"/>
-            <a:ext cx="2313432" cy="411480"/>
+            <a:off x="9326880" y="640080"/>
+            <a:ext cx="2133295" cy="411480"/>
           </a:xfrm>
           <a:prstGeom prst="roundRect">
             <a:avLst/>
           </a:prstGeom>
           <a:solidFill>
-            <a:srgbClr val="F0F3F6"/>
+            <a:srgbClr val="EEF2FF"/>
           </a:solidFill>
-          <a:ln>
+          <a:ln w="12700">
             <a:solidFill>
-              <a:srgbClr val="C8D2DC"/>
+              <a:srgbClr val="2563EB"/>
             </a:solidFill>
           </a:ln>
         </p:spPr>
@@ -7115,14 +7128,15 @@
           <a:lstStyle/>
           <a:p>
             <a:pPr algn="ctr">
-              <a:defRPr sz="1100" b="1">
-                <a:solidFill>
-                  <a:srgbClr val="003366"/>
-                </a:solidFill>
-              </a:defRPr>
-            </a:pPr>
-            <a:r>
-              <a:t>Paulo Loyola | Bloque 3</a:t>
+              <a:defRPr sz="1050" b="1">
+                <a:solidFill>
+                  <a:srgbClr val="2563EB"/>
+                </a:solidFill>
+                <a:latin typeface="Arial"/>
+              </a:defRPr>
+            </a:pPr>
+            <a:r>
+              <a:t>Todo el Equipo</a:t>
             </a:r>
           </a:p>
         </p:txBody>
@@ -7136,7 +7150,7 @@
         <p:spPr>
           <a:xfrm>
             <a:off x="731520" y="1645920"/>
-            <a:ext cx="3474720" cy="4389120"/>
+            <a:ext cx="5212080" cy="2194560"/>
           </a:xfrm>
           <a:prstGeom prst="roundRect">
             <a:avLst/>
@@ -7144,9 +7158,9 @@
           <a:solidFill>
             <a:srgbClr val="F8FAFC"/>
           </a:solidFill>
-          <a:ln>
+          <a:ln w="12700">
             <a:solidFill>
-              <a:srgbClr val="DAE1E9"/>
+              <a:srgbClr val="E2E8F0"/>
             </a:solidFill>
           </a:ln>
         </p:spPr>
@@ -7165,139 +7179,58 @@
           </a:fontRef>
         </p:style>
         <p:txBody>
-          <a:bodyPr rtlCol="0" anchor="ctr" wrap="square"/>
+          <a:bodyPr rtlCol="0" anchor="t" wrap="square" lIns="228600" rIns="228600" tIns="201168" bIns="182880"/>
           <a:lstStyle/>
           <a:p>
             <a:pPr algn="ctr">
-              <a:defRPr b="1" sz="1300">
-                <a:solidFill>
-                  <a:srgbClr val="003366"/>
-                </a:solidFill>
-              </a:defRPr>
-            </a:pPr>
-            <a:r>
-              <a:t>Componentes de Interfaz UI/UX</a:t>
-            </a:r>
-          </a:p>
-          <a:p>
-            <a:pPr>
-              <a:defRPr b="1" sz="1050">
-                <a:solidFill>
-                  <a:srgbClr val="141E2D"/>
-                </a:solidFill>
-              </a:defRPr>
-            </a:pPr>
-            <a:r>
-              <a:t>• 1. Monitoreo NUC en Vivo</a:t>
-            </a:r>
-          </a:p>
-          <a:p>
-            <a:pPr>
-              <a:defRPr sz="950">
-                <a:solidFill>
-                  <a:srgbClr val="5A646E"/>
-                </a:solidFill>
-              </a:defRPr>
-            </a:pPr>
-            <a:r>
-              <a:t>   Panel de pantallas con semáforo de conectividad (Online / Offline) y última comunicación.</a:t>
-            </a:r>
-          </a:p>
-          <a:p>
-            <a:pPr>
-              <a:defRPr b="1" sz="1050">
-                <a:solidFill>
-                  <a:srgbClr val="141E2D"/>
-                </a:solidFill>
-              </a:defRPr>
-            </a:pPr>
-            <a:r>
-              <a:t>• 2. Catálogo de Medios</a:t>
-            </a:r>
-          </a:p>
-          <a:p>
-            <a:pPr>
-              <a:defRPr sz="950">
-                <a:solidFill>
-                  <a:srgbClr val="5A646E"/>
-                </a:solidFill>
-              </a:defRPr>
-            </a:pPr>
-            <a:r>
-              <a:t>   Carga de videos MP4/imágenes, cálculo SHA-256 automático y metadatos de peso/resolución.</a:t>
-            </a:r>
-          </a:p>
-          <a:p>
-            <a:pPr>
-              <a:defRPr b="1" sz="1050">
-                <a:solidFill>
-                  <a:srgbClr val="141E2D"/>
-                </a:solidFill>
-              </a:defRPr>
-            </a:pPr>
-            <a:r>
-              <a:t>• 3. Parrilla de Horarios</a:t>
-            </a:r>
-          </a:p>
-          <a:p>
-            <a:pPr>
-              <a:defRPr sz="950">
-                <a:solidFill>
-                  <a:srgbClr val="5A646E"/>
-                </a:solidFill>
-              </a:defRPr>
-            </a:pPr>
-            <a:r>
-              <a:t>   Timeline visual para programar listas de reproducción por locación y sector sin solapamientos.</a:t>
-            </a:r>
-          </a:p>
-          <a:p>
-            <a:pPr>
-              <a:defRPr b="1" sz="1050">
-                <a:solidFill>
-                  <a:srgbClr val="141E2D"/>
-                </a:solidFill>
-              </a:defRPr>
-            </a:pPr>
-            <a:r>
-              <a:t>• 4. Vistas por Rol</a:t>
-            </a:r>
-          </a:p>
-          <a:p>
-            <a:pPr>
-              <a:defRPr sz="950">
-                <a:solidFill>
-                  <a:srgbClr val="5A646E"/>
-                </a:solidFill>
-              </a:defRPr>
-            </a:pPr>
-            <a:r>
-              <a:t>   Acceso global para Administrador y vistas restringidas a locaciones asignadas para Operador.</a:t>
-            </a:r>
-          </a:p>
-        </p:txBody>
-      </p:sp>
-      <p:sp>
-        <p:nvSpPr>
-          <p:cNvPr id="6" name="Rounded Rectangle 5"/>
+              <a:spcAft>
+                <a:spcPts val="800"/>
+              </a:spcAft>
+              <a:defRPr sz="1500" b="1">
+                <a:solidFill>
+                  <a:srgbClr val="1E3A8A"/>
+                </a:solidFill>
+                <a:latin typeface="Arial"/>
+              </a:defRPr>
+            </a:pPr>
+            <a:r>
+              <a:t>¿Por qué Laravel y MariaDB vs NoSQL?</a:t>
+            </a:r>
+          </a:p>
+          <a:p>
+            <a:pPr>
+              <a:spcAft>
+                <a:spcPts val="500"/>
+              </a:spcAft>
+              <a:defRPr sz="1100">
+                <a:latin typeface="Arial"/>
+              </a:defRPr>
+            </a:pPr>
+            <a:r>
+              <a:t>Fundamento: El dominio de cartelería digital es estrictamente estructurado (Locaciones &gt; Sectores &gt; Pantallas &gt; Playlists). Las transacciones ACID y llaves foráneas de MariaDB previenen estados inconsistentes y solapamientos que en NoSQL exigirían validaciones manuales complejas.</a:t>
+            </a:r>
+          </a:p>
+        </p:txBody>
+      </p:sp>
+      <p:sp>
+        <p:nvSpPr>
+          <p:cNvPr id="6" name="Rectangle 5"/>
           <p:cNvSpPr/>
           <p:nvPr/>
         </p:nvSpPr>
         <p:spPr>
           <a:xfrm>
-            <a:off x="4389120" y="1645920"/>
-            <a:ext cx="7068312" cy="4389120"/>
-          </a:xfrm>
-          <a:prstGeom prst="roundRect">
+            <a:off x="777240" y="1691640"/>
+            <a:ext cx="5120640" cy="73152"/>
+          </a:xfrm>
+          <a:prstGeom prst="rect">
             <a:avLst/>
           </a:prstGeom>
           <a:solidFill>
-            <a:srgbClr val="F0F4F8"/>
+            <a:srgbClr val="2563EB"/>
           </a:solidFill>
-          <a:ln w="25400">
-            <a:solidFill>
-              <a:srgbClr val="003366"/>
-            </a:solidFill>
+          <a:ln>
+            <a:noFill/>
           </a:ln>
         </p:spPr>
         <p:style>
@@ -7315,39 +7248,378 @@
           </a:fontRef>
         </p:style>
         <p:txBody>
-          <a:bodyPr rtlCol="0" anchor="ctr" wrap="square"/>
+          <a:bodyPr rtlCol="0" anchor="ctr"/>
+          <a:lstStyle/>
+          <a:p>
+            <a:pPr algn="ctr"/>
+          </a:p>
+        </p:txBody>
+      </p:sp>
+      <p:sp>
+        <p:nvSpPr>
+          <p:cNvPr id="7" name="Rounded Rectangle 6"/>
+          <p:cNvSpPr/>
+          <p:nvPr/>
+        </p:nvSpPr>
+        <p:spPr>
+          <a:xfrm>
+            <a:off x="6217920" y="1645920"/>
+            <a:ext cx="5212080" cy="2194560"/>
+          </a:xfrm>
+          <a:prstGeom prst="roundRect">
+            <a:avLst/>
+          </a:prstGeom>
+          <a:solidFill>
+            <a:srgbClr val="F8FAFC"/>
+          </a:solidFill>
+          <a:ln w="12700">
+            <a:solidFill>
+              <a:srgbClr val="E2E8F0"/>
+            </a:solidFill>
+          </a:ln>
+        </p:spPr>
+        <p:style>
+          <a:lnRef idx="1">
+            <a:schemeClr val="accent1"/>
+          </a:lnRef>
+          <a:fillRef idx="3">
+            <a:schemeClr val="accent1"/>
+          </a:fillRef>
+          <a:effectRef idx="2">
+            <a:schemeClr val="accent1"/>
+          </a:effectRef>
+          <a:fontRef idx="minor">
+            <a:schemeClr val="lt1"/>
+          </a:fontRef>
+        </p:style>
+        <p:txBody>
+          <a:bodyPr rtlCol="0" anchor="t" wrap="square" lIns="228600" rIns="228600" tIns="201168" bIns="182880"/>
           <a:lstStyle/>
           <a:p>
             <a:pPr algn="ctr">
-              <a:defRPr b="1" sz="1500">
-                <a:solidFill>
-                  <a:srgbClr val="003366"/>
-                </a:solidFill>
-              </a:defRPr>
-            </a:pPr>
-            <a:br/>
-            <a:br/>
-            <a:br/>
-            <a:r>
-              <a:t>🖼️ [ESPACIO RESERVADO PARA WIREFRAME / MOCKUP DE FIGMA]</a:t>
-            </a:r>
-          </a:p>
+              <a:spcAft>
+                <a:spcPts val="800"/>
+              </a:spcAft>
+              <a:defRPr sz="1500" b="1">
+                <a:solidFill>
+                  <a:srgbClr val="1E3A8A"/>
+                </a:solidFill>
+                <a:latin typeface="Arial"/>
+              </a:defRPr>
+            </a:pPr>
+            <a:r>
+              <a:t>¿Cómo evitan pantallas en negro en malls?</a:t>
+            </a:r>
+          </a:p>
+          <a:p>
+            <a:pPr>
+              <a:spcAft>
+                <a:spcPts val="500"/>
+              </a:spcAft>
+              <a:defRPr sz="1100">
+                <a:latin typeface="Arial"/>
+              </a:defRPr>
+            </a:pPr>
+            <a:r>
+              <a:rPr b="1">
+                <a:solidFill>
+                  <a:srgbClr val="1E3A8A"/>
+                </a:solidFill>
+              </a:rPr>
+              <a:t>Fundamento: </a:t>
+            </a:r>
+            <a:r>
+              <a:rPr>
+                <a:solidFill>
+                  <a:srgbClr val="334155"/>
+                </a:solidFill>
+              </a:rPr>
+              <a:t>Arquitectura Cache-First: el reproductor nunca hace streaming directo. Descarga preventivamente los videos a disco local y verifica SHA-256. Ante caída de red, reproduce localmente y expone un panel web en la intranet para control manual de emergencia.</a:t>
+            </a:r>
+          </a:p>
+        </p:txBody>
+      </p:sp>
+      <p:sp>
+        <p:nvSpPr>
+          <p:cNvPr id="8" name="Rectangle 7"/>
+          <p:cNvSpPr/>
+          <p:nvPr/>
+        </p:nvSpPr>
+        <p:spPr>
+          <a:xfrm>
+            <a:off x="6263640" y="1691640"/>
+            <a:ext cx="5120640" cy="73152"/>
+          </a:xfrm>
+          <a:prstGeom prst="rect">
+            <a:avLst/>
+          </a:prstGeom>
+          <a:solidFill>
+            <a:srgbClr val="0D9488"/>
+          </a:solidFill>
+          <a:ln>
+            <a:noFill/>
+          </a:ln>
+        </p:spPr>
+        <p:style>
+          <a:lnRef idx="1">
+            <a:schemeClr val="accent1"/>
+          </a:lnRef>
+          <a:fillRef idx="3">
+            <a:schemeClr val="accent1"/>
+          </a:fillRef>
+          <a:effectRef idx="2">
+            <a:schemeClr val="accent1"/>
+          </a:effectRef>
+          <a:fontRef idx="minor">
+            <a:schemeClr val="lt1"/>
+          </a:fontRef>
+        </p:style>
+        <p:txBody>
+          <a:bodyPr rtlCol="0" anchor="ctr"/>
+          <a:lstStyle/>
+          <a:p>
+            <a:pPr algn="ctr"/>
+          </a:p>
+        </p:txBody>
+      </p:sp>
+      <p:sp>
+        <p:nvSpPr>
+          <p:cNvPr id="9" name="Rounded Rectangle 8"/>
+          <p:cNvSpPr/>
+          <p:nvPr/>
+        </p:nvSpPr>
+        <p:spPr>
+          <a:xfrm>
+            <a:off x="731520" y="4023360"/>
+            <a:ext cx="5212080" cy="2194560"/>
+          </a:xfrm>
+          <a:prstGeom prst="roundRect">
+            <a:avLst/>
+          </a:prstGeom>
+          <a:solidFill>
+            <a:srgbClr val="F8FAFC"/>
+          </a:solidFill>
+          <a:ln w="12700">
+            <a:solidFill>
+              <a:srgbClr val="E2E8F0"/>
+            </a:solidFill>
+          </a:ln>
+        </p:spPr>
+        <p:style>
+          <a:lnRef idx="1">
+            <a:schemeClr val="accent1"/>
+          </a:lnRef>
+          <a:fillRef idx="3">
+            <a:schemeClr val="accent1"/>
+          </a:fillRef>
+          <a:effectRef idx="2">
+            <a:schemeClr val="accent1"/>
+          </a:effectRef>
+          <a:fontRef idx="minor">
+            <a:schemeClr val="lt1"/>
+          </a:fontRef>
+        </p:style>
+        <p:txBody>
+          <a:bodyPr rtlCol="0" anchor="t" wrap="square" lIns="228600" rIns="228600" tIns="201168" bIns="182880"/>
+          <a:lstStyle/>
           <a:p>
             <a:pPr algn="ctr">
+              <a:spcAft>
+                <a:spcPts val="800"/>
+              </a:spcAft>
+              <a:defRPr sz="1500" b="1">
+                <a:solidFill>
+                  <a:srgbClr val="1E3A8A"/>
+                </a:solidFill>
+                <a:latin typeface="Arial"/>
+              </a:defRPr>
+            </a:pPr>
+            <a:r>
+              <a:t>¿Cómo aseguran terminar en 18 semanas?</a:t>
+            </a:r>
+          </a:p>
+          <a:p>
+            <a:pPr>
+              <a:spcAft>
+                <a:spcPts val="500"/>
+              </a:spcAft>
               <a:defRPr sz="1100">
-                <a:solidFill>
-                  <a:srgbClr val="6E7882"/>
-                </a:solidFill>
-              </a:defRPr>
-            </a:pPr>
-            <a:br/>
-            <a:r>
-              <a:t>Pegue o inserte aquí la captura de pantalla del prototipo de alta fidelidad diseñado en Figma.</a:t>
-            </a:r>
-            <a:br/>
-            <a:r>
-              <a:t>(Panel Web Reactivo Blade • Parrilla de Programación • Telemetría NUC en Vivo)</a:t>
-            </a:r>
+                <a:latin typeface="Arial"/>
+              </a:defRPr>
+            </a:pPr>
+            <a:r>
+              <a:rPr b="1">
+                <a:solidFill>
+                  <a:srgbClr val="1E3A8A"/>
+                </a:solidFill>
+              </a:rPr>
+              <a:t>Fundamento: </a:t>
+            </a:r>
+            <a:r>
+              <a:rPr>
+                <a:solidFill>
+                  <a:srgbClr val="334155"/>
+                </a:solidFill>
+              </a:rPr>
+              <a:t>Delimitación estricta del alcance: ACE es distribución y programación (se excluye edición de video). Scrum bisemanal con hito crítico en S10 (core API y DB operativo), dejando semanas finales para pruebas de resiliencia y UAT con Lumina.</a:t>
+            </a:r>
+          </a:p>
+        </p:txBody>
+      </p:sp>
+      <p:sp>
+        <p:nvSpPr>
+          <p:cNvPr id="10" name="Rectangle 9"/>
+          <p:cNvSpPr/>
+          <p:nvPr/>
+        </p:nvSpPr>
+        <p:spPr>
+          <a:xfrm>
+            <a:off x="777240" y="4069080"/>
+            <a:ext cx="5120640" cy="73152"/>
+          </a:xfrm>
+          <a:prstGeom prst="rect">
+            <a:avLst/>
+          </a:prstGeom>
+          <a:solidFill>
+            <a:srgbClr val="D97706"/>
+          </a:solidFill>
+          <a:ln>
+            <a:noFill/>
+          </a:ln>
+        </p:spPr>
+        <p:style>
+          <a:lnRef idx="1">
+            <a:schemeClr val="accent1"/>
+          </a:lnRef>
+          <a:fillRef idx="3">
+            <a:schemeClr val="accent1"/>
+          </a:fillRef>
+          <a:effectRef idx="2">
+            <a:schemeClr val="accent1"/>
+          </a:effectRef>
+          <a:fontRef idx="minor">
+            <a:schemeClr val="lt1"/>
+          </a:fontRef>
+        </p:style>
+        <p:txBody>
+          <a:bodyPr rtlCol="0" anchor="ctr"/>
+          <a:lstStyle/>
+          <a:p>
+            <a:pPr algn="ctr"/>
+          </a:p>
+        </p:txBody>
+      </p:sp>
+      <p:sp>
+        <p:nvSpPr>
+          <p:cNvPr id="11" name="Rounded Rectangle 10"/>
+          <p:cNvSpPr/>
+          <p:nvPr/>
+        </p:nvSpPr>
+        <p:spPr>
+          <a:xfrm>
+            <a:off x="6217920" y="4023360"/>
+            <a:ext cx="5212080" cy="2194560"/>
+          </a:xfrm>
+          <a:prstGeom prst="roundRect">
+            <a:avLst/>
+          </a:prstGeom>
+          <a:solidFill>
+            <a:srgbClr val="F8FAFC"/>
+          </a:solidFill>
+          <a:ln w="12700">
+            <a:solidFill>
+              <a:srgbClr val="E2E8F0"/>
+            </a:solidFill>
+          </a:ln>
+        </p:spPr>
+        <p:style>
+          <a:lnRef idx="1">
+            <a:schemeClr val="accent1"/>
+          </a:lnRef>
+          <a:fillRef idx="3">
+            <a:schemeClr val="accent1"/>
+          </a:fillRef>
+          <a:effectRef idx="2">
+            <a:schemeClr val="accent1"/>
+          </a:effectRef>
+          <a:fontRef idx="minor">
+            <a:schemeClr val="lt1"/>
+          </a:fontRef>
+        </p:style>
+        <p:txBody>
+          <a:bodyPr rtlCol="0" anchor="t" wrap="square" lIns="228600" rIns="228600" tIns="201168" bIns="182880"/>
+          <a:lstStyle/>
+          <a:p>
+            <a:pPr algn="ctr">
+              <a:spcAft>
+                <a:spcPts val="800"/>
+              </a:spcAft>
+              <a:defRPr sz="1500" b="1">
+                <a:solidFill>
+                  <a:srgbClr val="1E3A8A"/>
+                </a:solidFill>
+                <a:latin typeface="Arial"/>
+              </a:defRPr>
+            </a:pPr>
+            <a:r>
+              <a:t>¿Cómo garantizan aporte equitativo?</a:t>
+            </a:r>
+          </a:p>
+          <a:p>
+            <a:pPr>
+              <a:spcAft>
+                <a:spcPts val="500"/>
+              </a:spcAft>
+              <a:defRPr sz="1100">
+                <a:latin typeface="Arial"/>
+              </a:defRPr>
+            </a:pPr>
+            <a:r>
+              <a:t>Fundamento: Distribución por dominios técnicos complementarios y corresponsabilidad en persistencia (MariaDB): Tomás (Arquitectura, Backend y BD), Matías (Gestión Ágil, Vinculación con Cliente y BD) y Paulo (Frontend, UI/UX y Documentación Técnica). Trazabilidad auditable mediante Pull Requests cruzados en GitHub.</a:t>
+            </a:r>
+          </a:p>
+        </p:txBody>
+      </p:sp>
+      <p:sp>
+        <p:nvSpPr>
+          <p:cNvPr id="12" name="Rectangle 11"/>
+          <p:cNvSpPr/>
+          <p:nvPr/>
+        </p:nvSpPr>
+        <p:spPr>
+          <a:xfrm>
+            <a:off x="6263640" y="4069080"/>
+            <a:ext cx="5120640" cy="73152"/>
+          </a:xfrm>
+          <a:prstGeom prst="rect">
+            <a:avLst/>
+          </a:prstGeom>
+          <a:solidFill>
+            <a:srgbClr val="1E3A8A"/>
+          </a:solidFill>
+          <a:ln>
+            <a:noFill/>
+          </a:ln>
+        </p:spPr>
+        <p:style>
+          <a:lnRef idx="1">
+            <a:schemeClr val="accent1"/>
+          </a:lnRef>
+          <a:fillRef idx="3">
+            <a:schemeClr val="accent1"/>
+          </a:fillRef>
+          <a:effectRef idx="2">
+            <a:schemeClr val="accent1"/>
+          </a:effectRef>
+          <a:fontRef idx="minor">
+            <a:schemeClr val="lt1"/>
+          </a:fontRef>
+        </p:style>
+        <p:txBody>
+          <a:bodyPr rtlCol="0" anchor="ctr"/>
+          <a:lstStyle/>
+          <a:p>
+            <a:pPr algn="ctr"/>
           </a:p>
         </p:txBody>
       </p:sp>
@@ -9230,20 +9502,7 @@
               </a:defRPr>
             </a:pPr>
             <a:r>
-              <a:rPr b="1">
-                <a:solidFill>
-                  <a:srgbClr val="1E3A8A"/>
-                </a:solidFill>
-              </a:rPr>
-              <a:t>Panel Local de Emergencia: </a:t>
-            </a:r>
-            <a:r>
-              <a:rPr>
-                <a:solidFill>
-                  <a:srgbClr val="334155"/>
-                </a:solidFill>
-              </a:rPr>
-              <a:t>Servidor web embebido en la intranet para conmutación manual presencial.</a:t>
+              <a:t>Modificación Local sin Internet: Panel local en el nodo reproductor NUC para conmutación manual presencial ante contingencias.</a:t>
             </a:r>
           </a:p>
         </p:txBody>
@@ -10657,7 +10916,7 @@
               </a:defRPr>
             </a:pPr>
             <a:r>
-              <a:t>Vinculación con el Cliente y Matriz de Riesgos</a:t>
+              <a:t>Factibilidad, Matriz de Riesgos y Modelo Operacional</a:t>
             </a:r>
           </a:p>
           <a:p>
@@ -10673,7 +10932,7 @@
               </a:defRPr>
             </a:pPr>
             <a:r>
-              <a:t>Factibilidad en 18 Semanas y Mitigación Estratégica</a:t>
+              <a:t>Viabilidad en 18 Semanas, Mitigación de Contingencias e Impacto en Lumina Motion</a:t>
             </a:r>
           </a:p>
         </p:txBody>
@@ -10778,145 +11037,55 @@
               <a:spcAft>
                 <a:spcPts val="800"/>
               </a:spcAft>
-              <a:defRPr sz="1500" b="1">
-                <a:solidFill>
-                  <a:srgbClr val="1E3A8A"/>
-                </a:solidFill>
-                <a:latin typeface="Arial"/>
-              </a:defRPr>
-            </a:pPr>
-            <a:r>
-              <a:t>Relación Técnica con Lumina Motion</a:t>
-            </a:r>
-          </a:p>
-          <a:p>
-            <a:pPr>
-              <a:spcAft>
-                <a:spcPts val="500"/>
-              </a:spcAft>
-              <a:defRPr sz="1100">
-                <a:latin typeface="Arial"/>
-              </a:defRPr>
-            </a:pPr>
-            <a:r>
-              <a:rPr b="1">
-                <a:solidFill>
-                  <a:srgbClr val="1E3A8A"/>
-                </a:solidFill>
-              </a:rPr>
-              <a:t>Interlocutor Clave: </a:t>
-            </a:r>
-            <a:r>
-              <a:rPr>
-                <a:solidFill>
-                  <a:srgbClr val="334155"/>
-                </a:solidFill>
-              </a:rPr>
-              <a:t>Cristóbal Manzo, Jefe de Informática en Lumina Motion Studio.</a:t>
-            </a:r>
-          </a:p>
-          <a:p>
-            <a:pPr>
-              <a:spcAft>
-                <a:spcPts val="500"/>
-              </a:spcAft>
-              <a:defRPr sz="1100">
-                <a:latin typeface="Arial"/>
-              </a:defRPr>
-            </a:pPr>
-            <a:r>
-              <a:rPr b="1">
-                <a:solidFill>
-                  <a:srgbClr val="1E3A8A"/>
-                </a:solidFill>
-              </a:rPr>
-              <a:t>Acceso Directo: </a:t>
-            </a:r>
-            <a:r>
-              <a:rPr>
-                <a:solidFill>
-                  <a:srgbClr val="334155"/>
-                </a:solidFill>
-              </a:rPr>
-              <a:t>Reuniones periódicas para levantamiento de requisitos funcionales y diseño de pautas.</a:t>
-            </a:r>
-          </a:p>
-          <a:p>
-            <a:pPr>
-              <a:spcAft>
-                <a:spcPts val="500"/>
-              </a:spcAft>
-              <a:defRPr sz="1100">
-                <a:latin typeface="Arial"/>
-              </a:defRPr>
-            </a:pPr>
-            <a:r>
-              <a:rPr b="1">
-                <a:solidFill>
-                  <a:srgbClr val="1E3A8A"/>
-                </a:solidFill>
-              </a:rPr>
-              <a:t>Validación en Terreno: </a:t>
-            </a:r>
-            <a:r>
-              <a:rPr>
-                <a:solidFill>
-                  <a:srgbClr val="334155"/>
-                </a:solidFill>
-              </a:rPr>
-              <a:t>Pruebas UAT sobre infraestructura visual real instalada en centros comerciales.</a:t>
-            </a:r>
-          </a:p>
-          <a:p>
-            <a:pPr>
-              <a:spcAft>
-                <a:spcPts val="500"/>
-              </a:spcAft>
-              <a:defRPr sz="1100">
-                <a:latin typeface="Arial"/>
-              </a:defRPr>
-            </a:pPr>
-            <a:r>
-              <a:rPr b="1">
-                <a:solidFill>
-                  <a:srgbClr val="1E3A8A"/>
-                </a:solidFill>
-              </a:rPr>
-              <a:t>Viabilidad 18 Semanas: </a:t>
-            </a:r>
-            <a:r>
-              <a:rPr>
-                <a:solidFill>
-                  <a:srgbClr val="334155"/>
-                </a:solidFill>
-              </a:rPr>
-              <a:t>Alcance estrictamente delimitado: plataforma de distribución y gestión (sin edición de video).</a:t>
-            </a:r>
-          </a:p>
-          <a:p>
-            <a:pPr>
-              <a:spcAft>
-                <a:spcPts val="500"/>
-              </a:spcAft>
-              <a:defRPr sz="1100">
-                <a:latin typeface="Arial"/>
-              </a:defRPr>
-            </a:pPr>
-            <a:r>
-              <a:rPr b="1">
-                <a:solidFill>
-                  <a:srgbClr val="1E3A8A"/>
-                </a:solidFill>
-              </a:rPr>
-              <a:t>Infraestructura: </a:t>
-            </a:r>
-            <a:r>
-              <a:rPr>
-                <a:solidFill>
-                  <a:srgbClr val="334155"/>
-                </a:solidFill>
-              </a:rPr>
-              <a:t>Disponibilidad de microcomputadores Mini-PC, switches de red y monitores de prueba.</a:t>
+              <a:defRPr sz="1400" b="1">
+                <a:solidFill>
+                  <a:srgbClr val="003366"/>
+                </a:solidFill>
+                <a:latin typeface="Arial"/>
+              </a:defRPr>
+            </a:pPr>
+            <a:r>
+              <a:t>Relación con Lumina y Modelo Operacional</a:t>
+            </a:r>
+          </a:p>
+          <a:p>
+            <a:pPr>
+              <a:defRPr sz="1050"/>
+            </a:pPr>
+            <a:r>
+              <a:t>• Interlocutor Clave: Cristóbal Manzo, Jefe de Informática en Lumina Motion Studio.</a:t>
+            </a:r>
+          </a:p>
+          <a:p>
+            <a:pPr>
+              <a:defRPr sz="1050"/>
+            </a:pPr>
+            <a:r>
+              <a:t>• Acceso y Validación: Reuniones periódicas de levantamiento funcional y pruebas UAT sobre pantallas reales.</a:t>
+            </a:r>
+          </a:p>
+          <a:p>
+            <a:pPr>
+              <a:defRPr sz="1050"/>
+            </a:pPr>
+            <a:r>
+              <a:t>• Modelo Internal Tooling: Software a medida para operación interna; sustituye licencias comerciales de MadMapper/Arena.im.</a:t>
+            </a:r>
+          </a:p>
+          <a:p>
+            <a:pPr>
+              <a:defRPr sz="1050"/>
+            </a:pPr>
+            <a:r>
+              <a:t>• Impacto Financiero: Reduce a cero los viáticos y traslados técnicos in situ para actualizaciones de anuncios por USB.</a:t>
+            </a:r>
+          </a:p>
+          <a:p>
+            <a:pPr>
+              <a:defRPr sz="1050"/>
+            </a:pPr>
+            <a:r>
+              <a:t>• Viabilidad 18 Semanas: Alcance estrictamente delimitado a distribución, programación y resiliencia (sin edición audiovisual).</a:t>
             </a:r>
           </a:p>
         </p:txBody>
@@ -11694,20 +11863,7 @@
               </a:defRPr>
             </a:pPr>
             <a:r>
-              <a:rPr b="1">
-                <a:solidFill>
-                  <a:srgbClr val="1E3A8A"/>
-                </a:solidFill>
-              </a:rPr>
-              <a:t>Panel Local de Emergencia: </a:t>
-            </a:r>
-            <a:r>
-              <a:rPr>
-                <a:solidFill>
-                  <a:srgbClr val="334155"/>
-                </a:solidFill>
-              </a:rPr>
-              <a:t>Interfaz web embebida en el nodo de sitio para control manual in situ sin internet.</a:t>
+              <a:t>Modificación Local sin Internet: Panel embebido en nodo NUC para conmutación manual in situ ante contingencias.</a:t>
             </a:r>
           </a:p>
         </p:txBody>
@@ -11766,14 +11922,6 @@
 <file path=ppt/slides/slide9.xml><?xml version="1.0" encoding="utf-8"?>
 <p:sld xmlns:a="http://schemas.openxmlformats.org/drawingml/2006/main" xmlns:p="http://schemas.openxmlformats.org/presentationml/2006/main" xmlns:r="http://schemas.openxmlformats.org/officeDocument/2006/relationships">
   <p:cSld>
-    <p:bg>
-      <p:bgPr>
-        <a:solidFill>
-          <a:srgbClr val="FFFFFF"/>
-        </a:solidFill>
-        <a:effectLst/>
-      </p:bgPr>
-    </p:bg>
     <p:spTree>
       <p:nvGrpSpPr>
         <p:cNvPr id="1" name=""/>
@@ -11790,13 +11938,13 @@
         <p:spPr>
           <a:xfrm>
             <a:off x="731520" y="457200"/>
-            <a:ext cx="10728655" cy="45720"/>
+            <a:ext cx="10725912" cy="45720"/>
           </a:xfrm>
           <a:prstGeom prst="rect">
             <a:avLst/>
           </a:prstGeom>
           <a:solidFill>
-            <a:srgbClr val="2563EB"/>
+            <a:srgbClr val="003366"/>
           </a:solidFill>
           <a:ln>
             <a:noFill/>
@@ -11833,7 +11981,7 @@
         <p:spPr>
           <a:xfrm>
             <a:off x="731520" y="594360"/>
-            <a:ext cx="8686800" cy="822960"/>
+            <a:ext cx="8412480" cy="822960"/>
           </a:xfrm>
           <a:prstGeom prst="rect">
             <a:avLst/>
@@ -11841,37 +11989,32 @@
           <a:noFill/>
         </p:spPr>
         <p:txBody>
-          <a:bodyPr wrap="square" lIns="0" tIns="0" rIns="0" bIns="0">
+          <a:bodyPr wrap="square">
             <a:spAutoFit/>
           </a:bodyPr>
           <a:lstStyle/>
           <a:p>
             <a:pPr>
-              <a:defRPr sz="2400" b="1">
-                <a:solidFill>
-                  <a:srgbClr val="1E3A8A"/>
-                </a:solidFill>
-                <a:latin typeface="Arial"/>
-              </a:defRPr>
-            </a:pPr>
-            <a:r>
-              <a:t>Banco de Preguntas Típicas de la Comisión Docente</a:t>
-            </a:r>
-          </a:p>
-          <a:p>
-            <a:pPr>
-              <a:spcBef>
-                <a:spcPts val="200"/>
-              </a:spcBef>
+              <a:defRPr b="1" sz="2200">
+                <a:solidFill>
+                  <a:srgbClr val="003366"/>
+                </a:solidFill>
+              </a:defRPr>
+            </a:pPr>
+            <a:r>
+              <a:t>Prototipos Visuales de Interfaz (Mockups Figma)</a:t>
+            </a:r>
+          </a:p>
+          <a:p>
+            <a:pPr>
               <a:defRPr sz="1300">
                 <a:solidFill>
-                  <a:srgbClr val="64748B"/>
-                </a:solidFill>
-                <a:latin typeface="Arial"/>
-              </a:defRPr>
-            </a:pPr>
-            <a:r>
-              <a:t>Defensa de Decisiones Técnicas y Metodológicas de Ingeniería</a:t>
+                  <a:srgbClr val="646464"/>
+                </a:solidFill>
+              </a:defRPr>
+            </a:pPr>
+            <a:r>
+              <a:t>Diseño UI/UX del Panel Administrativo Centralizado y Monitoreo de Pantallas</a:t>
             </a:r>
           </a:p>
         </p:txBody>
@@ -11884,18 +12027,18 @@
         </p:nvSpPr>
         <p:spPr>
           <a:xfrm>
-            <a:off x="9326880" y="640080"/>
-            <a:ext cx="2133295" cy="411480"/>
+            <a:off x="9144000" y="640080"/>
+            <a:ext cx="2313432" cy="411480"/>
           </a:xfrm>
           <a:prstGeom prst="roundRect">
             <a:avLst/>
           </a:prstGeom>
           <a:solidFill>
-            <a:srgbClr val="EEF2FF"/>
+            <a:srgbClr val="F0F3F6"/>
           </a:solidFill>
-          <a:ln w="12700">
+          <a:ln>
             <a:solidFill>
-              <a:srgbClr val="2563EB"/>
+              <a:srgbClr val="C8D2DC"/>
             </a:solidFill>
           </a:ln>
         </p:spPr>
@@ -11918,15 +12061,14 @@
           <a:lstStyle/>
           <a:p>
             <a:pPr algn="ctr">
-              <a:defRPr sz="1050" b="1">
-                <a:solidFill>
-                  <a:srgbClr val="2563EB"/>
-                </a:solidFill>
-                <a:latin typeface="Arial"/>
-              </a:defRPr>
-            </a:pPr>
-            <a:r>
-              <a:t>Todo el Equipo</a:t>
+              <a:defRPr sz="1100" b="1">
+                <a:solidFill>
+                  <a:srgbClr val="003366"/>
+                </a:solidFill>
+              </a:defRPr>
+            </a:pPr>
+            <a:r>
+              <a:t>Paulo Loyola | Bloque 3</a:t>
             </a:r>
           </a:p>
         </p:txBody>
@@ -11940,7 +12082,7 @@
         <p:spPr>
           <a:xfrm>
             <a:off x="731520" y="1645920"/>
-            <a:ext cx="5212080" cy="2194560"/>
+            <a:ext cx="3474720" cy="4389120"/>
           </a:xfrm>
           <a:prstGeom prst="roundRect">
             <a:avLst/>
@@ -11948,9 +12090,9 @@
           <a:solidFill>
             <a:srgbClr val="F8FAFC"/>
           </a:solidFill>
-          <a:ln w="12700">
+          <a:ln>
             <a:solidFill>
-              <a:srgbClr val="E2E8F0"/>
+              <a:srgbClr val="DAE1E9"/>
             </a:solidFill>
           </a:ln>
         </p:spPr>
@@ -11969,58 +12111,139 @@
           </a:fontRef>
         </p:style>
         <p:txBody>
-          <a:bodyPr rtlCol="0" anchor="t" wrap="square" lIns="228600" rIns="228600" tIns="201168" bIns="182880"/>
+          <a:bodyPr rtlCol="0" anchor="ctr" wrap="square"/>
           <a:lstStyle/>
           <a:p>
             <a:pPr algn="ctr">
-              <a:spcAft>
-                <a:spcPts val="800"/>
-              </a:spcAft>
-              <a:defRPr sz="1500" b="1">
-                <a:solidFill>
-                  <a:srgbClr val="1E3A8A"/>
-                </a:solidFill>
-                <a:latin typeface="Arial"/>
-              </a:defRPr>
-            </a:pPr>
-            <a:r>
-              <a:t>¿Por qué Laravel y MariaDB vs NoSQL?</a:t>
-            </a:r>
-          </a:p>
-          <a:p>
-            <a:pPr>
-              <a:spcAft>
-                <a:spcPts val="500"/>
-              </a:spcAft>
-              <a:defRPr sz="1100">
-                <a:latin typeface="Arial"/>
-              </a:defRPr>
-            </a:pPr>
-            <a:r>
-              <a:t>Fundamento: El dominio de cartelería digital es estrictamente estructurado (Locaciones &gt; Sectores &gt; Pantallas &gt; Playlists). Las transacciones ACID y llaves foráneas de MariaDB previenen estados inconsistentes y solapamientos que en NoSQL exigirían validaciones manuales complejas.</a:t>
-            </a:r>
-          </a:p>
-        </p:txBody>
-      </p:sp>
-      <p:sp>
-        <p:nvSpPr>
-          <p:cNvPr id="6" name="Rectangle 5"/>
+              <a:defRPr b="1" sz="1300">
+                <a:solidFill>
+                  <a:srgbClr val="003366"/>
+                </a:solidFill>
+              </a:defRPr>
+            </a:pPr>
+            <a:r>
+              <a:t>Componentes de Interfaz UI/UX</a:t>
+            </a:r>
+          </a:p>
+          <a:p>
+            <a:pPr>
+              <a:defRPr b="1" sz="1050">
+                <a:solidFill>
+                  <a:srgbClr val="141E2D"/>
+                </a:solidFill>
+              </a:defRPr>
+            </a:pPr>
+            <a:r>
+              <a:t>• 1. Monitoreo NUC en Vivo</a:t>
+            </a:r>
+          </a:p>
+          <a:p>
+            <a:pPr>
+              <a:defRPr sz="950">
+                <a:solidFill>
+                  <a:srgbClr val="5A646E"/>
+                </a:solidFill>
+              </a:defRPr>
+            </a:pPr>
+            <a:r>
+              <a:t>   Panel de pantallas con semáforo de conectividad (Online / Offline) y última comunicación.</a:t>
+            </a:r>
+          </a:p>
+          <a:p>
+            <a:pPr>
+              <a:defRPr b="1" sz="1050">
+                <a:solidFill>
+                  <a:srgbClr val="141E2D"/>
+                </a:solidFill>
+              </a:defRPr>
+            </a:pPr>
+            <a:r>
+              <a:t>• 2. Catálogo de Medios</a:t>
+            </a:r>
+          </a:p>
+          <a:p>
+            <a:pPr>
+              <a:defRPr sz="950">
+                <a:solidFill>
+                  <a:srgbClr val="5A646E"/>
+                </a:solidFill>
+              </a:defRPr>
+            </a:pPr>
+            <a:r>
+              <a:t>   Carga de videos MP4/imágenes, cálculo SHA-256 automático y metadatos de peso/resolución.</a:t>
+            </a:r>
+          </a:p>
+          <a:p>
+            <a:pPr>
+              <a:defRPr b="1" sz="1050">
+                <a:solidFill>
+                  <a:srgbClr val="141E2D"/>
+                </a:solidFill>
+              </a:defRPr>
+            </a:pPr>
+            <a:r>
+              <a:t>• 3. Parrilla de Horarios</a:t>
+            </a:r>
+          </a:p>
+          <a:p>
+            <a:pPr>
+              <a:defRPr sz="950">
+                <a:solidFill>
+                  <a:srgbClr val="5A646E"/>
+                </a:solidFill>
+              </a:defRPr>
+            </a:pPr>
+            <a:r>
+              <a:t>   Timeline visual para programar listas de reproducción por locación y sector sin solapamientos.</a:t>
+            </a:r>
+          </a:p>
+          <a:p>
+            <a:pPr>
+              <a:defRPr b="1" sz="1050">
+                <a:solidFill>
+                  <a:srgbClr val="141E2D"/>
+                </a:solidFill>
+              </a:defRPr>
+            </a:pPr>
+            <a:r>
+              <a:t>• 4. Vistas por Rol</a:t>
+            </a:r>
+          </a:p>
+          <a:p>
+            <a:pPr>
+              <a:defRPr sz="950">
+                <a:solidFill>
+                  <a:srgbClr val="5A646E"/>
+                </a:solidFill>
+              </a:defRPr>
+            </a:pPr>
+            <a:r>
+              <a:t>   Acceso global para Administrador y vistas restringidas a locaciones asignadas para Operador.</a:t>
+            </a:r>
+          </a:p>
+        </p:txBody>
+      </p:sp>
+      <p:sp>
+        <p:nvSpPr>
+          <p:cNvPr id="6" name="Rounded Rectangle 5"/>
           <p:cNvSpPr/>
           <p:nvPr/>
         </p:nvSpPr>
         <p:spPr>
           <a:xfrm>
-            <a:off x="777240" y="1691640"/>
-            <a:ext cx="5120640" cy="73152"/>
-          </a:xfrm>
-          <a:prstGeom prst="rect">
+            <a:off x="4389120" y="1645920"/>
+            <a:ext cx="7068312" cy="4389120"/>
+          </a:xfrm>
+          <a:prstGeom prst="roundRect">
             <a:avLst/>
           </a:prstGeom>
           <a:solidFill>
-            <a:srgbClr val="2563EB"/>
+            <a:srgbClr val="F0F4F8"/>
           </a:solidFill>
-          <a:ln>
-            <a:noFill/>
+          <a:ln w="25400">
+            <a:solidFill>
+              <a:srgbClr val="003366"/>
+            </a:solidFill>
           </a:ln>
         </p:spPr>
         <p:style>
@@ -12038,378 +12261,39 @@
           </a:fontRef>
         </p:style>
         <p:txBody>
-          <a:bodyPr rtlCol="0" anchor="ctr"/>
-          <a:lstStyle/>
-          <a:p>
-            <a:pPr algn="ctr"/>
-          </a:p>
-        </p:txBody>
-      </p:sp>
-      <p:sp>
-        <p:nvSpPr>
-          <p:cNvPr id="7" name="Rounded Rectangle 6"/>
-          <p:cNvSpPr/>
-          <p:nvPr/>
-        </p:nvSpPr>
-        <p:spPr>
-          <a:xfrm>
-            <a:off x="6217920" y="1645920"/>
-            <a:ext cx="5212080" cy="2194560"/>
-          </a:xfrm>
-          <a:prstGeom prst="roundRect">
-            <a:avLst/>
-          </a:prstGeom>
-          <a:solidFill>
-            <a:srgbClr val="F8FAFC"/>
-          </a:solidFill>
-          <a:ln w="12700">
-            <a:solidFill>
-              <a:srgbClr val="E2E8F0"/>
-            </a:solidFill>
-          </a:ln>
-        </p:spPr>
-        <p:style>
-          <a:lnRef idx="1">
-            <a:schemeClr val="accent1"/>
-          </a:lnRef>
-          <a:fillRef idx="3">
-            <a:schemeClr val="accent1"/>
-          </a:fillRef>
-          <a:effectRef idx="2">
-            <a:schemeClr val="accent1"/>
-          </a:effectRef>
-          <a:fontRef idx="minor">
-            <a:schemeClr val="lt1"/>
-          </a:fontRef>
-        </p:style>
-        <p:txBody>
-          <a:bodyPr rtlCol="0" anchor="t" wrap="square" lIns="228600" rIns="228600" tIns="201168" bIns="182880"/>
+          <a:bodyPr rtlCol="0" anchor="ctr" wrap="square"/>
           <a:lstStyle/>
           <a:p>
             <a:pPr algn="ctr">
-              <a:spcAft>
-                <a:spcPts val="800"/>
-              </a:spcAft>
-              <a:defRPr sz="1500" b="1">
-                <a:solidFill>
-                  <a:srgbClr val="1E3A8A"/>
-                </a:solidFill>
-                <a:latin typeface="Arial"/>
-              </a:defRPr>
-            </a:pPr>
-            <a:r>
-              <a:t>¿Cómo evitan pantallas en negro en malls?</a:t>
-            </a:r>
-          </a:p>
-          <a:p>
-            <a:pPr>
-              <a:spcAft>
-                <a:spcPts val="500"/>
-              </a:spcAft>
+              <a:defRPr b="1" sz="1500">
+                <a:solidFill>
+                  <a:srgbClr val="003366"/>
+                </a:solidFill>
+              </a:defRPr>
+            </a:pPr>
+            <a:br/>
+            <a:br/>
+            <a:br/>
+            <a:r>
+              <a:t>🖼️ [ESPACIO RESERVADO PARA WIREFRAME / MOCKUP DE FIGMA]</a:t>
+            </a:r>
+          </a:p>
+          <a:p>
+            <a:pPr algn="ctr">
               <a:defRPr sz="1100">
-                <a:latin typeface="Arial"/>
-              </a:defRPr>
-            </a:pPr>
-            <a:r>
-              <a:rPr b="1">
-                <a:solidFill>
-                  <a:srgbClr val="1E3A8A"/>
-                </a:solidFill>
-              </a:rPr>
-              <a:t>Fundamento: </a:t>
-            </a:r>
-            <a:r>
-              <a:rPr>
-                <a:solidFill>
-                  <a:srgbClr val="334155"/>
-                </a:solidFill>
-              </a:rPr>
-              <a:t>Arquitectura Cache-First: el reproductor nunca hace streaming directo. Descarga preventivamente los videos a disco local y verifica SHA-256. Ante caída de red, reproduce localmente y expone un panel web en la intranet para control manual de emergencia.</a:t>
-            </a:r>
-          </a:p>
-        </p:txBody>
-      </p:sp>
-      <p:sp>
-        <p:nvSpPr>
-          <p:cNvPr id="8" name="Rectangle 7"/>
-          <p:cNvSpPr/>
-          <p:nvPr/>
-        </p:nvSpPr>
-        <p:spPr>
-          <a:xfrm>
-            <a:off x="6263640" y="1691640"/>
-            <a:ext cx="5120640" cy="73152"/>
-          </a:xfrm>
-          <a:prstGeom prst="rect">
-            <a:avLst/>
-          </a:prstGeom>
-          <a:solidFill>
-            <a:srgbClr val="0D9488"/>
-          </a:solidFill>
-          <a:ln>
-            <a:noFill/>
-          </a:ln>
-        </p:spPr>
-        <p:style>
-          <a:lnRef idx="1">
-            <a:schemeClr val="accent1"/>
-          </a:lnRef>
-          <a:fillRef idx="3">
-            <a:schemeClr val="accent1"/>
-          </a:fillRef>
-          <a:effectRef idx="2">
-            <a:schemeClr val="accent1"/>
-          </a:effectRef>
-          <a:fontRef idx="minor">
-            <a:schemeClr val="lt1"/>
-          </a:fontRef>
-        </p:style>
-        <p:txBody>
-          <a:bodyPr rtlCol="0" anchor="ctr"/>
-          <a:lstStyle/>
-          <a:p>
-            <a:pPr algn="ctr"/>
-          </a:p>
-        </p:txBody>
-      </p:sp>
-      <p:sp>
-        <p:nvSpPr>
-          <p:cNvPr id="9" name="Rounded Rectangle 8"/>
-          <p:cNvSpPr/>
-          <p:nvPr/>
-        </p:nvSpPr>
-        <p:spPr>
-          <a:xfrm>
-            <a:off x="731520" y="4023360"/>
-            <a:ext cx="5212080" cy="2194560"/>
-          </a:xfrm>
-          <a:prstGeom prst="roundRect">
-            <a:avLst/>
-          </a:prstGeom>
-          <a:solidFill>
-            <a:srgbClr val="F8FAFC"/>
-          </a:solidFill>
-          <a:ln w="12700">
-            <a:solidFill>
-              <a:srgbClr val="E2E8F0"/>
-            </a:solidFill>
-          </a:ln>
-        </p:spPr>
-        <p:style>
-          <a:lnRef idx="1">
-            <a:schemeClr val="accent1"/>
-          </a:lnRef>
-          <a:fillRef idx="3">
-            <a:schemeClr val="accent1"/>
-          </a:fillRef>
-          <a:effectRef idx="2">
-            <a:schemeClr val="accent1"/>
-          </a:effectRef>
-          <a:fontRef idx="minor">
-            <a:schemeClr val="lt1"/>
-          </a:fontRef>
-        </p:style>
-        <p:txBody>
-          <a:bodyPr rtlCol="0" anchor="t" wrap="square" lIns="228600" rIns="228600" tIns="201168" bIns="182880"/>
-          <a:lstStyle/>
-          <a:p>
-            <a:pPr algn="ctr">
-              <a:spcAft>
-                <a:spcPts val="800"/>
-              </a:spcAft>
-              <a:defRPr sz="1500" b="1">
-                <a:solidFill>
-                  <a:srgbClr val="1E3A8A"/>
-                </a:solidFill>
-                <a:latin typeface="Arial"/>
-              </a:defRPr>
-            </a:pPr>
-            <a:r>
-              <a:t>¿Cómo aseguran terminar en 18 semanas?</a:t>
-            </a:r>
-          </a:p>
-          <a:p>
-            <a:pPr>
-              <a:spcAft>
-                <a:spcPts val="500"/>
-              </a:spcAft>
-              <a:defRPr sz="1100">
-                <a:latin typeface="Arial"/>
-              </a:defRPr>
-            </a:pPr>
-            <a:r>
-              <a:rPr b="1">
-                <a:solidFill>
-                  <a:srgbClr val="1E3A8A"/>
-                </a:solidFill>
-              </a:rPr>
-              <a:t>Fundamento: </a:t>
-            </a:r>
-            <a:r>
-              <a:rPr>
-                <a:solidFill>
-                  <a:srgbClr val="334155"/>
-                </a:solidFill>
-              </a:rPr>
-              <a:t>Delimitación estricta del alcance: ACE es distribución y programación (se excluye edición de video). Scrum bisemanal con hito crítico en S10 (core API y DB operativo), dejando semanas finales para pruebas de resiliencia y UAT con Lumina.</a:t>
-            </a:r>
-          </a:p>
-        </p:txBody>
-      </p:sp>
-      <p:sp>
-        <p:nvSpPr>
-          <p:cNvPr id="10" name="Rectangle 9"/>
-          <p:cNvSpPr/>
-          <p:nvPr/>
-        </p:nvSpPr>
-        <p:spPr>
-          <a:xfrm>
-            <a:off x="777240" y="4069080"/>
-            <a:ext cx="5120640" cy="73152"/>
-          </a:xfrm>
-          <a:prstGeom prst="rect">
-            <a:avLst/>
-          </a:prstGeom>
-          <a:solidFill>
-            <a:srgbClr val="D97706"/>
-          </a:solidFill>
-          <a:ln>
-            <a:noFill/>
-          </a:ln>
-        </p:spPr>
-        <p:style>
-          <a:lnRef idx="1">
-            <a:schemeClr val="accent1"/>
-          </a:lnRef>
-          <a:fillRef idx="3">
-            <a:schemeClr val="accent1"/>
-          </a:fillRef>
-          <a:effectRef idx="2">
-            <a:schemeClr val="accent1"/>
-          </a:effectRef>
-          <a:fontRef idx="minor">
-            <a:schemeClr val="lt1"/>
-          </a:fontRef>
-        </p:style>
-        <p:txBody>
-          <a:bodyPr rtlCol="0" anchor="ctr"/>
-          <a:lstStyle/>
-          <a:p>
-            <a:pPr algn="ctr"/>
-          </a:p>
-        </p:txBody>
-      </p:sp>
-      <p:sp>
-        <p:nvSpPr>
-          <p:cNvPr id="11" name="Rounded Rectangle 10"/>
-          <p:cNvSpPr/>
-          <p:nvPr/>
-        </p:nvSpPr>
-        <p:spPr>
-          <a:xfrm>
-            <a:off x="6217920" y="4023360"/>
-            <a:ext cx="5212080" cy="2194560"/>
-          </a:xfrm>
-          <a:prstGeom prst="roundRect">
-            <a:avLst/>
-          </a:prstGeom>
-          <a:solidFill>
-            <a:srgbClr val="F8FAFC"/>
-          </a:solidFill>
-          <a:ln w="12700">
-            <a:solidFill>
-              <a:srgbClr val="E2E8F0"/>
-            </a:solidFill>
-          </a:ln>
-        </p:spPr>
-        <p:style>
-          <a:lnRef idx="1">
-            <a:schemeClr val="accent1"/>
-          </a:lnRef>
-          <a:fillRef idx="3">
-            <a:schemeClr val="accent1"/>
-          </a:fillRef>
-          <a:effectRef idx="2">
-            <a:schemeClr val="accent1"/>
-          </a:effectRef>
-          <a:fontRef idx="minor">
-            <a:schemeClr val="lt1"/>
-          </a:fontRef>
-        </p:style>
-        <p:txBody>
-          <a:bodyPr rtlCol="0" anchor="t" wrap="square" lIns="228600" rIns="228600" tIns="201168" bIns="182880"/>
-          <a:lstStyle/>
-          <a:p>
-            <a:pPr algn="ctr">
-              <a:spcAft>
-                <a:spcPts val="800"/>
-              </a:spcAft>
-              <a:defRPr sz="1500" b="1">
-                <a:solidFill>
-                  <a:srgbClr val="1E3A8A"/>
-                </a:solidFill>
-                <a:latin typeface="Arial"/>
-              </a:defRPr>
-            </a:pPr>
-            <a:r>
-              <a:t>¿Cómo garantizan aporte equitativo?</a:t>
-            </a:r>
-          </a:p>
-          <a:p>
-            <a:pPr>
-              <a:spcAft>
-                <a:spcPts val="500"/>
-              </a:spcAft>
-              <a:defRPr sz="1100">
-                <a:latin typeface="Arial"/>
-              </a:defRPr>
-            </a:pPr>
-            <a:r>
-              <a:t>Fundamento: Distribución por dominios técnicos complementarios y corresponsabilidad en persistencia (MariaDB): Tomás (Arquitectura, Backend y BD), Matías (Gestión Ágil, Vinculación con Cliente y BD) y Paulo (Frontend, UI/UX y Documentación Técnica). Trazabilidad auditable mediante Pull Requests cruzados en GitHub.</a:t>
-            </a:r>
-          </a:p>
-        </p:txBody>
-      </p:sp>
-      <p:sp>
-        <p:nvSpPr>
-          <p:cNvPr id="12" name="Rectangle 11"/>
-          <p:cNvSpPr/>
-          <p:nvPr/>
-        </p:nvSpPr>
-        <p:spPr>
-          <a:xfrm>
-            <a:off x="6263640" y="4069080"/>
-            <a:ext cx="5120640" cy="73152"/>
-          </a:xfrm>
-          <a:prstGeom prst="rect">
-            <a:avLst/>
-          </a:prstGeom>
-          <a:solidFill>
-            <a:srgbClr val="1E3A8A"/>
-          </a:solidFill>
-          <a:ln>
-            <a:noFill/>
-          </a:ln>
-        </p:spPr>
-        <p:style>
-          <a:lnRef idx="1">
-            <a:schemeClr val="accent1"/>
-          </a:lnRef>
-          <a:fillRef idx="3">
-            <a:schemeClr val="accent1"/>
-          </a:fillRef>
-          <a:effectRef idx="2">
-            <a:schemeClr val="accent1"/>
-          </a:effectRef>
-          <a:fontRef idx="minor">
-            <a:schemeClr val="lt1"/>
-          </a:fontRef>
-        </p:style>
-        <p:txBody>
-          <a:bodyPr rtlCol="0" anchor="ctr"/>
-          <a:lstStyle/>
-          <a:p>
-            <a:pPr algn="ctr"/>
+                <a:solidFill>
+                  <a:srgbClr val="6E7882"/>
+                </a:solidFill>
+              </a:defRPr>
+            </a:pPr>
+            <a:br/>
+            <a:r>
+              <a:t>Pegue o inserte aquí la captura de pantalla del prototipo de alta fidelidad diseñado en Figma.</a:t>
+            </a:r>
+            <a:br/>
+            <a:r>
+              <a:t>(Panel Web Reactivo Blade • Parrilla de Programación • Telemetría NUC en Vivo)</a:t>
+            </a:r>
           </a:p>
         </p:txBody>
       </p:sp>

--- a/Borradores/Entrega 1/PRESENTACION_FASE_1_PROYECTO_ACE.pptx
+++ b/Borradores/Entrega 1/PRESENTACION_FASE_1_PROYECTO_ACE.pptx
@@ -14,6 +14,8 @@
     <p:sldId id="261" r:id="rId13"/>
     <p:sldId id="262" r:id="rId14"/>
     <p:sldId id="268" r:id="rId20"/>
+    <p:sldId id="269" r:id="rId21"/>
+    <p:sldId id="270" r:id="rId22"/>
     <p:sldId id="263" r:id="rId15"/>
     <p:sldId id="264" r:id="rId16"/>
     <p:sldId id="265" r:id="rId17"/>
@@ -4737,7 +4739,7 @@
               </a:defRPr>
             </a:pPr>
             <a:r>
-              <a:t>Plan de Trabajo y Carta Gantt — 18 Semanas</a:t>
+              <a:t>Glosario Técnico Disciplinar Indispensable</a:t>
             </a:r>
           </a:p>
           <a:p>
@@ -4753,7 +4755,7 @@
               </a:defRPr>
             </a:pPr>
             <a:r>
-              <a:t>Ruta Crítica de 22 Actividades de Ingeniería e Hitos Evaluativos (PTY4614)</a:t>
+              <a:t>Conceptos Clave para la Defensa Individual (Indicador 11 - 10 pts)</a:t>
             </a:r>
           </a:p>
         </p:txBody>
@@ -4808,7 +4810,7 @@
               </a:defRPr>
             </a:pPr>
             <a:r>
-              <a:t>Paulo Loyola | Bloque 3</a:t>
+              <a:t>Todo el Equipo</a:t>
             </a:r>
           </a:p>
         </p:txBody>
@@ -4822,7 +4824,7 @@
         <p:spPr>
           <a:xfrm>
             <a:off x="731520" y="1645920"/>
-            <a:ext cx="2468880" cy="4572000"/>
+            <a:ext cx="5212080" cy="2103120"/>
           </a:xfrm>
           <a:prstGeom prst="roundRect">
             <a:avLst/>
@@ -4866,7 +4868,7 @@
               </a:defRPr>
             </a:pPr>
             <a:r>
-              <a:t>Fase 1: Definición (S1-S4)</a:t>
+              <a:t>1. Resiliencia Offline / Fail-Safe</a:t>
             </a:r>
           </a:p>
           <a:p>
@@ -4884,7 +4886,7 @@
                   <a:srgbClr val="1E3A8A"/>
                 </a:solidFill>
               </a:rPr>
-              <a:t>S1-S2: </a:t>
+              <a:t>Definición: </a:t>
             </a:r>
             <a:r>
               <a:rPr>
@@ -4892,59 +4894,7 @@
                   <a:srgbClr val="334155"/>
                 </a:solidFill>
               </a:rPr>
-              <a:t>Constitución y diagnóstico en terreno con Lumina.</a:t>
-            </a:r>
-          </a:p>
-          <a:p>
-            <a:pPr>
-              <a:spcAft>
-                <a:spcPts val="500"/>
-              </a:spcAft>
-              <a:defRPr sz="1100">
-                <a:latin typeface="Arial"/>
-              </a:defRPr>
-            </a:pPr>
-            <a:r>
-              <a:rPr b="1">
-                <a:solidFill>
-                  <a:srgbClr val="1E3A8A"/>
-                </a:solidFill>
-              </a:rPr>
-              <a:t>S3: </a:t>
-            </a:r>
-            <a:r>
-              <a:rPr>
-                <a:solidFill>
-                  <a:srgbClr val="334155"/>
-                </a:solidFill>
-              </a:rPr>
-              <a:t>Stack tecnológico y formalización de objetivos.</a:t>
-            </a:r>
-          </a:p>
-          <a:p>
-            <a:pPr>
-              <a:spcAft>
-                <a:spcPts val="500"/>
-              </a:spcAft>
-              <a:defRPr sz="1100">
-                <a:latin typeface="Arial"/>
-              </a:defRPr>
-            </a:pPr>
-            <a:r>
-              <a:rPr b="1">
-                <a:solidFill>
-                  <a:srgbClr val="1E3A8A"/>
-                </a:solidFill>
-              </a:rPr>
-              <a:t>S4 [HITO 1]: </a:t>
-            </a:r>
-            <a:r>
-              <a:rPr>
-                <a:solidFill>
-                  <a:srgbClr val="334155"/>
-                </a:solidFill>
-              </a:rPr>
-              <a:t>Entrega Informe Fase 1 y Exposición Grupal.</a:t>
+              <a:t>Capacidad del nodo reproductor de continuar ejecutando la parrilla multimedia programada utilizando almacenamiento local cuando se interrumpe la conexión a internet.</a:t>
             </a:r>
           </a:p>
         </p:txBody>
@@ -4958,7 +4908,7 @@
         <p:spPr>
           <a:xfrm>
             <a:off x="777240" y="1691640"/>
-            <a:ext cx="2377440" cy="73152"/>
+            <a:ext cx="5120640" cy="73152"/>
           </a:xfrm>
           <a:prstGeom prst="rect">
             <a:avLst/>
@@ -5000,8 +4950,8 @@
         </p:nvSpPr>
         <p:spPr>
           <a:xfrm>
-            <a:off x="3474720" y="1645920"/>
-            <a:ext cx="2468880" cy="4572000"/>
+            <a:off x="6217920" y="1645920"/>
+            <a:ext cx="5212080" cy="2103120"/>
           </a:xfrm>
           <a:prstGeom prst="roundRect">
             <a:avLst/>
@@ -5045,7 +4995,7 @@
               </a:defRPr>
             </a:pPr>
             <a:r>
-              <a:t>Fase 2: Core (S5-S10)</a:t>
+              <a:t>2. Integridad Criptográfica (SHA-256)</a:t>
             </a:r>
           </a:p>
           <a:p>
@@ -5063,7 +5013,7 @@
                   <a:srgbClr val="1E3A8A"/>
                 </a:solidFill>
               </a:rPr>
-              <a:t>S5-S6: </a:t>
+              <a:t>Definición: </a:t>
             </a:r>
             <a:r>
               <a:rPr>
@@ -5071,59 +5021,7 @@
                   <a:srgbClr val="334155"/>
                 </a:solidFill>
               </a:rPr>
-              <a:t>Modelado MariaDB y migraciones Laravel.</a:t>
-            </a:r>
-          </a:p>
-          <a:p>
-            <a:pPr>
-              <a:spcAft>
-                <a:spcPts val="500"/>
-              </a:spcAft>
-              <a:defRPr sz="1100">
-                <a:latin typeface="Arial"/>
-              </a:defRPr>
-            </a:pPr>
-            <a:r>
-              <a:rPr b="1">
-                <a:solidFill>
-                  <a:srgbClr val="1E3A8A"/>
-                </a:solidFill>
-              </a:rPr>
-              <a:t>S7-S8: </a:t>
-            </a:r>
-            <a:r>
-              <a:rPr>
-                <a:solidFill>
-                  <a:srgbClr val="334155"/>
-                </a:solidFill>
-              </a:rPr>
-              <a:t>API RESTful, Auth JWT y carga con SHA-256.</a:t>
-            </a:r>
-          </a:p>
-          <a:p>
-            <a:pPr>
-              <a:spcAft>
-                <a:spcPts val="500"/>
-              </a:spcAft>
-              <a:defRPr sz="1100">
-                <a:latin typeface="Arial"/>
-              </a:defRPr>
-            </a:pPr>
-            <a:r>
-              <a:rPr b="1">
-                <a:solidFill>
-                  <a:srgbClr val="1E3A8A"/>
-                </a:solidFill>
-              </a:rPr>
-              <a:t>S9-S10 [HITO 2]: </a:t>
-            </a:r>
-            <a:r>
-              <a:rPr>
-                <a:solidFill>
-                  <a:srgbClr val="334155"/>
-                </a:solidFill>
-              </a:rPr>
-              <a:t>Playlists, UI de pautas y Demo Funcional.</a:t>
+              <a:t>Mecanismo de validación por hash que garantiza que los archivos de video descargados en el reproductor no sufrieron corrupción durante la transferencia de red antes de ser emitidos.</a:t>
             </a:r>
           </a:p>
         </p:txBody>
@@ -5136,8 +5034,8 @@
         </p:nvSpPr>
         <p:spPr>
           <a:xfrm>
-            <a:off x="3520439" y="1691640"/>
-            <a:ext cx="2377440" cy="73152"/>
+            <a:off x="6263640" y="1691640"/>
+            <a:ext cx="5120640" cy="73152"/>
           </a:xfrm>
           <a:prstGeom prst="rect">
             <a:avLst/>
@@ -5179,8 +5077,8 @@
         </p:nvSpPr>
         <p:spPr>
           <a:xfrm>
-            <a:off x="6217920" y="1645920"/>
-            <a:ext cx="2468880" cy="4572000"/>
+            <a:off x="731520" y="4023360"/>
+            <a:ext cx="3383280" cy="2194560"/>
           </a:xfrm>
           <a:prstGeom prst="roundRect">
             <a:avLst/>
@@ -5224,7 +5122,7 @@
               </a:defRPr>
             </a:pPr>
             <a:r>
-              <a:t>Fase 3: Resiliencia (S11-S15)</a:t>
+              <a:t>3. Persistencia ACID (MariaDB)</a:t>
             </a:r>
           </a:p>
           <a:p>
@@ -5242,7 +5140,7 @@
                   <a:srgbClr val="1E3A8A"/>
                 </a:solidFill>
               </a:rPr>
-              <a:t>S11-S12: </a:t>
+              <a:t>Definición: </a:t>
             </a:r>
             <a:r>
               <a:rPr>
@@ -5250,59 +5148,7 @@
                   <a:srgbClr val="334155"/>
                 </a:solidFill>
               </a:rPr>
-              <a:t>Servidor WebSockets y Player local.</a:t>
-            </a:r>
-          </a:p>
-          <a:p>
-            <a:pPr>
-              <a:spcAft>
-                <a:spcPts val="500"/>
-              </a:spcAft>
-              <a:defRPr sz="1100">
-                <a:latin typeface="Arial"/>
-              </a:defRPr>
-            </a:pPr>
-            <a:r>
-              <a:rPr b="1">
-                <a:solidFill>
-                  <a:srgbClr val="1E3A8A"/>
-                </a:solidFill>
-              </a:rPr>
-              <a:t>S13-S14: </a:t>
-            </a:r>
-            <a:r>
-              <a:rPr>
-                <a:solidFill>
-                  <a:srgbClr val="334155"/>
-                </a:solidFill>
-              </a:rPr>
-              <a:t>Módulo Fail-Safe y panel web local.</a:t>
-            </a:r>
-          </a:p>
-          <a:p>
-            <a:pPr>
-              <a:spcAft>
-                <a:spcPts val="500"/>
-              </a:spcAft>
-              <a:defRPr sz="1100">
-                <a:latin typeface="Arial"/>
-              </a:defRPr>
-            </a:pPr>
-            <a:r>
-              <a:rPr b="1">
-                <a:solidFill>
-                  <a:srgbClr val="1E3A8A"/>
-                </a:solidFill>
-              </a:rPr>
-              <a:t>S15 [HITO 3]: </a:t>
-            </a:r>
-            <a:r>
-              <a:rPr>
-                <a:solidFill>
-                  <a:srgbClr val="334155"/>
-                </a:solidFill>
-              </a:rPr>
-              <a:t>Entrega software consolidado y manuales.</a:t>
+              <a:t>Garantía de atomicidad, consistencia, aislamiento y durabilidad en operaciones relacionales que controlan la planificación horaria sin solapamientos.</a:t>
             </a:r>
           </a:p>
         </p:txBody>
@@ -5315,8 +5161,8 @@
         </p:nvSpPr>
         <p:spPr>
           <a:xfrm>
-            <a:off x="6263640" y="1691640"/>
-            <a:ext cx="2377440" cy="73152"/>
+            <a:off x="777240" y="4069080"/>
+            <a:ext cx="3291840" cy="73152"/>
           </a:xfrm>
           <a:prstGeom prst="rect">
             <a:avLst/>
@@ -5358,8 +5204,8 @@
         </p:nvSpPr>
         <p:spPr>
           <a:xfrm>
-            <a:off x="8961120" y="1645920"/>
-            <a:ext cx="2468880" cy="4572000"/>
+            <a:off x="4389120" y="4023360"/>
+            <a:ext cx="3383280" cy="2194560"/>
           </a:xfrm>
           <a:prstGeom prst="roundRect">
             <a:avLst/>
@@ -5403,7 +5249,7 @@
               </a:defRPr>
             </a:pPr>
             <a:r>
-              <a:t>Fase 4: Cierre (S16-S18)</a:t>
+              <a:t>4. Protocolo Dual (API &amp; WebSockets)</a:t>
             </a:r>
           </a:p>
           <a:p>
@@ -5421,7 +5267,7 @@
                   <a:srgbClr val="1E3A8A"/>
                 </a:solidFill>
               </a:rPr>
-              <a:t>S16: </a:t>
+              <a:t>Definición: </a:t>
             </a:r>
             <a:r>
               <a:rPr>
@@ -5429,7 +5275,108 @@
                   <a:srgbClr val="334155"/>
                 </a:solidFill>
               </a:rPr>
-              <a:t>Pruebas UAT en terreno con Cristóbal Manzo.</a:t>
+              <a:t>HTTP REST sin estado para administración CRUD y WebSockets para telemetría bidireccional (heartbeats) y control inmediato de pantallas.</a:t>
+            </a:r>
+          </a:p>
+        </p:txBody>
+      </p:sp>
+      <p:sp>
+        <p:nvSpPr>
+          <p:cNvPr id="12" name="Rectangle 11"/>
+          <p:cNvSpPr/>
+          <p:nvPr/>
+        </p:nvSpPr>
+        <p:spPr>
+          <a:xfrm>
+            <a:off x="4434840" y="4069080"/>
+            <a:ext cx="3291840" cy="73152"/>
+          </a:xfrm>
+          <a:prstGeom prst="rect">
+            <a:avLst/>
+          </a:prstGeom>
+          <a:solidFill>
+            <a:srgbClr val="2563EB"/>
+          </a:solidFill>
+          <a:ln>
+            <a:noFill/>
+          </a:ln>
+        </p:spPr>
+        <p:style>
+          <a:lnRef idx="1">
+            <a:schemeClr val="accent1"/>
+          </a:lnRef>
+          <a:fillRef idx="3">
+            <a:schemeClr val="accent1"/>
+          </a:fillRef>
+          <a:effectRef idx="2">
+            <a:schemeClr val="accent1"/>
+          </a:effectRef>
+          <a:fontRef idx="minor">
+            <a:schemeClr val="lt1"/>
+          </a:fontRef>
+        </p:style>
+        <p:txBody>
+          <a:bodyPr rtlCol="0" anchor="ctr"/>
+          <a:lstStyle/>
+          <a:p>
+            <a:pPr algn="ctr"/>
+          </a:p>
+        </p:txBody>
+      </p:sp>
+      <p:sp>
+        <p:nvSpPr>
+          <p:cNvPr id="13" name="Rounded Rectangle 12"/>
+          <p:cNvSpPr/>
+          <p:nvPr/>
+        </p:nvSpPr>
+        <p:spPr>
+          <a:xfrm>
+            <a:off x="8046720" y="4023360"/>
+            <a:ext cx="3383280" cy="2194560"/>
+          </a:xfrm>
+          <a:prstGeom prst="roundRect">
+            <a:avLst/>
+          </a:prstGeom>
+          <a:solidFill>
+            <a:srgbClr val="F8FAFC"/>
+          </a:solidFill>
+          <a:ln w="12700">
+            <a:solidFill>
+              <a:srgbClr val="E2E8F0"/>
+            </a:solidFill>
+          </a:ln>
+        </p:spPr>
+        <p:style>
+          <a:lnRef idx="1">
+            <a:schemeClr val="accent1"/>
+          </a:lnRef>
+          <a:fillRef idx="3">
+            <a:schemeClr val="accent1"/>
+          </a:fillRef>
+          <a:effectRef idx="2">
+            <a:schemeClr val="accent1"/>
+          </a:effectRef>
+          <a:fontRef idx="minor">
+            <a:schemeClr val="lt1"/>
+          </a:fontRef>
+        </p:style>
+        <p:txBody>
+          <a:bodyPr rtlCol="0" anchor="t" wrap="square" lIns="228600" rIns="228600" tIns="201168" bIns="182880"/>
+          <a:lstStyle/>
+          <a:p>
+            <a:pPr algn="ctr">
+              <a:spcAft>
+                <a:spcPts val="800"/>
+              </a:spcAft>
+              <a:defRPr sz="1500" b="1">
+                <a:solidFill>
+                  <a:srgbClr val="1E3A8A"/>
+                </a:solidFill>
+                <a:latin typeface="Arial"/>
+              </a:defRPr>
+            </a:pPr>
+            <a:r>
+              <a:t>5. Arquitectura Desacoplada</a:t>
             </a:r>
           </a:p>
           <a:p>
@@ -5442,66 +5389,27 @@
               </a:defRPr>
             </a:pPr>
             <a:r>
-              <a:rPr b="1">
-                <a:solidFill>
-                  <a:srgbClr val="1E3A8A"/>
-                </a:solidFill>
-              </a:rPr>
-              <a:t>S17 [HITO 4]: </a:t>
-            </a:r>
-            <a:r>
-              <a:rPr>
-                <a:solidFill>
-                  <a:srgbClr val="334155"/>
-                </a:solidFill>
-              </a:rPr>
-              <a:t>Ensayo y Defensa Presencial (Sesión 1).</a:t>
-            </a:r>
-          </a:p>
-          <a:p>
-            <a:pPr>
-              <a:spcAft>
-                <a:spcPts val="500"/>
-              </a:spcAft>
-              <a:defRPr sz="1100">
-                <a:latin typeface="Arial"/>
-              </a:defRPr>
-            </a:pPr>
-            <a:r>
-              <a:rPr b="1">
-                <a:solidFill>
-                  <a:srgbClr val="1E3A8A"/>
-                </a:solidFill>
-              </a:rPr>
-              <a:t>S18 [HITO 4]: </a:t>
-            </a:r>
-            <a:r>
-              <a:rPr>
-                <a:solidFill>
-                  <a:srgbClr val="334155"/>
-                </a:solidFill>
-              </a:rPr>
-              <a:t>Defensa Final de Titulación y Cierre de Actas.</a:t>
-            </a:r>
-          </a:p>
-        </p:txBody>
-      </p:sp>
-      <p:sp>
-        <p:nvSpPr>
-          <p:cNvPr id="12" name="Rectangle 11"/>
+              <a:t>Definición: Separación física y lógica entre la capa de administración centralizada en la nube y los nodos ejecutores autónomos desplegados en locaciones fijas (NUCs).</a:t>
+            </a:r>
+          </a:p>
+        </p:txBody>
+      </p:sp>
+      <p:sp>
+        <p:nvSpPr>
+          <p:cNvPr id="14" name="Rectangle 13"/>
           <p:cNvSpPr/>
           <p:nvPr/>
         </p:nvSpPr>
         <p:spPr>
           <a:xfrm>
-            <a:off x="9006840" y="1691640"/>
-            <a:ext cx="2377440" cy="73152"/>
+            <a:off x="8092440" y="4069080"/>
+            <a:ext cx="3291840" cy="73152"/>
           </a:xfrm>
           <a:prstGeom prst="rect">
             <a:avLst/>
           </a:prstGeom>
           <a:solidFill>
-            <a:srgbClr val="1E3A8A"/>
+            <a:srgbClr val="0D9488"/>
           </a:solidFill>
           <a:ln>
             <a:noFill/>
@@ -5629,7 +5537,7 @@
               </a:defRPr>
             </a:pPr>
             <a:r>
-              <a:t>Evidencias del Proyecto y Conclusión</a:t>
+              <a:t>Banco de Preguntas Típicas de la Comisión Docente</a:t>
             </a:r>
           </a:p>
           <a:p>
@@ -5645,7 +5553,7 @@
               </a:defRPr>
             </a:pPr>
             <a:r>
-              <a:t>Acreditación Rigurosa e Integración del Perfil de Egreso</a:t>
+              <a:t>Defensa de Decisiones Técnicas y Metodológicas de Ingeniería</a:t>
             </a:r>
           </a:p>
         </p:txBody>
@@ -5700,7 +5608,7 @@
               </a:defRPr>
             </a:pPr>
             <a:r>
-              <a:t>Paulo Loyola | Bloque 3</a:t>
+              <a:t>Todo el Equipo</a:t>
             </a:r>
           </a:p>
         </p:txBody>
@@ -5714,7 +5622,7 @@
         <p:spPr>
           <a:xfrm>
             <a:off x="731520" y="1645920"/>
-            <a:ext cx="5212080" cy="4572000"/>
+            <a:ext cx="5212080" cy="2194560"/>
           </a:xfrm>
           <a:prstGeom prst="roundRect">
             <a:avLst/>
@@ -5758,7 +5666,7 @@
               </a:defRPr>
             </a:pPr>
             <a:r>
-              <a:t>Evidencias Objetivas de Acreditación</a:t>
+              <a:t>¿Por qué Laravel y MariaDB vs NoSQL?</a:t>
             </a:r>
           </a:p>
           <a:p>
@@ -5771,150 +5679,7 @@
               </a:defRPr>
             </a:pPr>
             <a:r>
-              <a:rPr b="1">
-                <a:solidFill>
-                  <a:srgbClr val="1E3A8A"/>
-                </a:solidFill>
-              </a:rPr>
-              <a:t>EVID-01 (Gestión): </a:t>
-            </a:r>
-            <a:r>
-              <a:rPr>
-                <a:solidFill>
-                  <a:srgbClr val="334155"/>
-                </a:solidFill>
-              </a:rPr>
-              <a:t>Acta de levantamiento y alcance validada por Cristóbal Manzo (Lumina).</a:t>
-            </a:r>
-          </a:p>
-          <a:p>
-            <a:pPr>
-              <a:spcAft>
-                <a:spcPts val="500"/>
-              </a:spcAft>
-              <a:defRPr sz="1100">
-                <a:latin typeface="Arial"/>
-              </a:defRPr>
-            </a:pPr>
-            <a:r>
-              <a:rPr b="1">
-                <a:solidFill>
-                  <a:srgbClr val="1E3A8A"/>
-                </a:solidFill>
-              </a:rPr>
-              <a:t>EVID-02 (Ingeniería DB): </a:t>
-            </a:r>
-            <a:r>
-              <a:rPr>
-                <a:solidFill>
-                  <a:srgbClr val="334155"/>
-                </a:solidFill>
-              </a:rPr>
-              <a:t>Diagrama E-R, diccionario de datos y migraciones MariaDB ejecutables.</a:t>
-            </a:r>
-          </a:p>
-          <a:p>
-            <a:pPr>
-              <a:spcAft>
-                <a:spcPts val="500"/>
-              </a:spcAft>
-              <a:defRPr sz="1100">
-                <a:latin typeface="Arial"/>
-              </a:defRPr>
-            </a:pPr>
-            <a:r>
-              <a:rPr b="1">
-                <a:solidFill>
-                  <a:srgbClr val="1E3A8A"/>
-                </a:solidFill>
-              </a:rPr>
-              <a:t>EVID-03 (Desarrollo): </a:t>
-            </a:r>
-            <a:r>
-              <a:rPr>
-                <a:solidFill>
-                  <a:srgbClr val="334155"/>
-                </a:solidFill>
-              </a:rPr>
-              <a:t>Repositorio GitHub con commits trazables y Pull Requests cruzados.</a:t>
-            </a:r>
-          </a:p>
-          <a:p>
-            <a:pPr>
-              <a:spcAft>
-                <a:spcPts val="500"/>
-              </a:spcAft>
-              <a:defRPr sz="1100">
-                <a:latin typeface="Arial"/>
-              </a:defRPr>
-            </a:pPr>
-            <a:r>
-              <a:rPr b="1">
-                <a:solidFill>
-                  <a:srgbClr val="1E3A8A"/>
-                </a:solidFill>
-              </a:rPr>
-              <a:t>EVID-04 (Servicios): </a:t>
-            </a:r>
-            <a:r>
-              <a:rPr>
-                <a:solidFill>
-                  <a:srgbClr val="334155"/>
-                </a:solidFill>
-              </a:rPr>
-              <a:t>Colección Postman y especificación interactiva OpenAPI / Swagger.</a:t>
-            </a:r>
-          </a:p>
-          <a:p>
-            <a:pPr>
-              <a:spcAft>
-                <a:spcPts val="500"/>
-              </a:spcAft>
-              <a:defRPr sz="1100">
-                <a:latin typeface="Arial"/>
-              </a:defRPr>
-            </a:pPr>
-            <a:r>
-              <a:rPr b="1">
-                <a:solidFill>
-                  <a:srgbClr val="1E3A8A"/>
-                </a:solidFill>
-              </a:rPr>
-              <a:t>EVID-05 (Resiliencia): </a:t>
-            </a:r>
-            <a:r>
-              <a:rPr>
-                <a:solidFill>
-                  <a:srgbClr val="334155"/>
-                </a:solidFill>
-              </a:rPr>
-              <a:t>Matriz y video de prueba de desconexión forzada de red (Fail-Safe).</a:t>
-            </a:r>
-          </a:p>
-          <a:p>
-            <a:pPr>
-              <a:spcAft>
-                <a:spcPts val="500"/>
-              </a:spcAft>
-              <a:defRPr sz="1100">
-                <a:latin typeface="Arial"/>
-              </a:defRPr>
-            </a:pPr>
-            <a:r>
-              <a:rPr b="1">
-                <a:solidFill>
-                  <a:srgbClr val="1E3A8A"/>
-                </a:solidFill>
-              </a:rPr>
-              <a:t>EVID-06 (Validación): </a:t>
-            </a:r>
-            <a:r>
-              <a:rPr>
-                <a:solidFill>
-                  <a:srgbClr val="334155"/>
-                </a:solidFill>
-              </a:rPr>
-              <a:t>Acta formal de recepción y pruebas de usuario (UAT) de Lumina Motion.</a:t>
+              <a:t>Fundamento: El dominio de cartelería digital es estrictamente estructurado (Locaciones &gt; Sectores &gt; Pantallas &gt; Playlists). Las transacciones ACID y llaves foráneas de MariaDB previenen estados inconsistentes y solapamientos que en NoSQL exigirían validaciones manuales complejas.</a:t>
             </a:r>
           </a:p>
         </p:txBody>
@@ -5971,7 +5736,7 @@
         <p:spPr>
           <a:xfrm>
             <a:off x="6217920" y="1645920"/>
-            <a:ext cx="5212080" cy="4572000"/>
+            <a:ext cx="5212080" cy="2194560"/>
           </a:xfrm>
           <a:prstGeom prst="roundRect">
             <a:avLst/>
@@ -6015,7 +5780,7 @@
               </a:defRPr>
             </a:pPr>
             <a:r>
-              <a:t>Conclusión y Valor Agregado</a:t>
+              <a:t>¿Cómo evitan pantallas en negro en malls?</a:t>
             </a:r>
           </a:p>
           <a:p>
@@ -6033,7 +5798,7 @@
                   <a:srgbClr val="1E3A8A"/>
                 </a:solidFill>
               </a:rPr>
-              <a:t>Solución Industrial Real: </a:t>
+              <a:t>Fundamento: </a:t>
             </a:r>
             <a:r>
               <a:rPr>
@@ -6041,85 +5806,7 @@
                   <a:srgbClr val="334155"/>
                 </a:solidFill>
               </a:rPr>
-              <a:t>Resuelve el dolor logístico y los costos de licenciamiento de Lumina Motion.</a:t>
-            </a:r>
-          </a:p>
-          <a:p>
-            <a:pPr>
-              <a:spcAft>
-                <a:spcPts val="500"/>
-              </a:spcAft>
-              <a:defRPr sz="1100">
-                <a:latin typeface="Arial"/>
-              </a:defRPr>
-            </a:pPr>
-            <a:r>
-              <a:rPr b="1">
-                <a:solidFill>
-                  <a:srgbClr val="1E3A8A"/>
-                </a:solidFill>
-              </a:rPr>
-              <a:t>Autonomía sin Conexión: </a:t>
-            </a:r>
-            <a:r>
-              <a:rPr>
-                <a:solidFill>
-                  <a:srgbClr val="334155"/>
-                </a:solidFill>
-              </a:rPr>
-              <a:t>Garantía de continuidad operativa ante caídas de internet en eventos masivos.</a:t>
-            </a:r>
-          </a:p>
-          <a:p>
-            <a:pPr>
-              <a:spcAft>
-                <a:spcPts val="500"/>
-              </a:spcAft>
-              <a:defRPr sz="1100">
-                <a:latin typeface="Arial"/>
-              </a:defRPr>
-            </a:pPr>
-            <a:r>
-              <a:rPr b="1">
-                <a:solidFill>
-                  <a:srgbClr val="1E3A8A"/>
-                </a:solidFill>
-              </a:rPr>
-              <a:t>Integración Formativa: </a:t>
-            </a:r>
-            <a:r>
-              <a:rPr>
-                <a:solidFill>
-                  <a:srgbClr val="334155"/>
-                </a:solidFill>
-              </a:rPr>
-              <a:t>Articulación plena de las 4 competencias clave del perfil de egreso Duoc UC: Desarrollo Fullstack, Bases de Datos, Arquitectura y Gestión Ágil.</a:t>
-            </a:r>
-          </a:p>
-          <a:p>
-            <a:pPr>
-              <a:spcAft>
-                <a:spcPts val="500"/>
-              </a:spcAft>
-              <a:defRPr sz="1100">
-                <a:latin typeface="Arial"/>
-              </a:defRPr>
-            </a:pPr>
-            <a:r>
-              <a:rPr b="1">
-                <a:solidFill>
-                  <a:srgbClr val="1E3A8A"/>
-                </a:solidFill>
-              </a:rPr>
-              <a:t>Discurso de Cierre: </a:t>
-            </a:r>
-            <a:r>
-              <a:rPr>
-                <a:solidFill>
-                  <a:srgbClr val="334155"/>
-                </a:solidFill>
-              </a:rPr>
-              <a:t>'Con ACE no solo resolvemos un problema logístico de Lumina Motion, sino que demostramos la integración transversal de las competencias de nuestro perfil de egreso en Duoc UC. Quedamos atentos a sus preguntas.'</a:t>
+              <a:t>Arquitectura Cache-First: el reproductor nunca hace streaming directo. Descarga preventivamente los videos a disco local y verifica SHA-256. Ante caída de red, reproduce localmente y expone un panel web en la intranet para control manual de emergencia.</a:t>
             </a:r>
           </a:p>
         </p:txBody>
@@ -6167,6 +5854,247 @@
           </a:p>
         </p:txBody>
       </p:sp>
+      <p:sp>
+        <p:nvSpPr>
+          <p:cNvPr id="9" name="Rounded Rectangle 8"/>
+          <p:cNvSpPr/>
+          <p:nvPr/>
+        </p:nvSpPr>
+        <p:spPr>
+          <a:xfrm>
+            <a:off x="731520" y="4023360"/>
+            <a:ext cx="5212080" cy="2194560"/>
+          </a:xfrm>
+          <a:prstGeom prst="roundRect">
+            <a:avLst/>
+          </a:prstGeom>
+          <a:solidFill>
+            <a:srgbClr val="F8FAFC"/>
+          </a:solidFill>
+          <a:ln w="12700">
+            <a:solidFill>
+              <a:srgbClr val="E2E8F0"/>
+            </a:solidFill>
+          </a:ln>
+        </p:spPr>
+        <p:style>
+          <a:lnRef idx="1">
+            <a:schemeClr val="accent1"/>
+          </a:lnRef>
+          <a:fillRef idx="3">
+            <a:schemeClr val="accent1"/>
+          </a:fillRef>
+          <a:effectRef idx="2">
+            <a:schemeClr val="accent1"/>
+          </a:effectRef>
+          <a:fontRef idx="minor">
+            <a:schemeClr val="lt1"/>
+          </a:fontRef>
+        </p:style>
+        <p:txBody>
+          <a:bodyPr rtlCol="0" anchor="t" wrap="square" lIns="228600" rIns="228600" tIns="201168" bIns="182880"/>
+          <a:lstStyle/>
+          <a:p>
+            <a:pPr algn="ctr">
+              <a:spcAft>
+                <a:spcPts val="800"/>
+              </a:spcAft>
+              <a:defRPr sz="1500" b="1">
+                <a:solidFill>
+                  <a:srgbClr val="1E3A8A"/>
+                </a:solidFill>
+                <a:latin typeface="Arial"/>
+              </a:defRPr>
+            </a:pPr>
+            <a:r>
+              <a:t>¿Cómo aseguran terminar en 18 semanas?</a:t>
+            </a:r>
+          </a:p>
+          <a:p>
+            <a:pPr>
+              <a:spcAft>
+                <a:spcPts val="500"/>
+              </a:spcAft>
+              <a:defRPr sz="1100">
+                <a:latin typeface="Arial"/>
+              </a:defRPr>
+            </a:pPr>
+            <a:r>
+              <a:rPr b="1">
+                <a:solidFill>
+                  <a:srgbClr val="1E3A8A"/>
+                </a:solidFill>
+              </a:rPr>
+              <a:t>Fundamento: </a:t>
+            </a:r>
+            <a:r>
+              <a:rPr>
+                <a:solidFill>
+                  <a:srgbClr val="334155"/>
+                </a:solidFill>
+              </a:rPr>
+              <a:t>Delimitación estricta del alcance: ACE es distribución y programación (se excluye edición de video). Scrum bisemanal con hito crítico en S10 (core API y DB operativo), dejando semanas finales para pruebas de resiliencia y UAT con Lumina.</a:t>
+            </a:r>
+          </a:p>
+        </p:txBody>
+      </p:sp>
+      <p:sp>
+        <p:nvSpPr>
+          <p:cNvPr id="10" name="Rectangle 9"/>
+          <p:cNvSpPr/>
+          <p:nvPr/>
+        </p:nvSpPr>
+        <p:spPr>
+          <a:xfrm>
+            <a:off x="777240" y="4069080"/>
+            <a:ext cx="5120640" cy="73152"/>
+          </a:xfrm>
+          <a:prstGeom prst="rect">
+            <a:avLst/>
+          </a:prstGeom>
+          <a:solidFill>
+            <a:srgbClr val="D97706"/>
+          </a:solidFill>
+          <a:ln>
+            <a:noFill/>
+          </a:ln>
+        </p:spPr>
+        <p:style>
+          <a:lnRef idx="1">
+            <a:schemeClr val="accent1"/>
+          </a:lnRef>
+          <a:fillRef idx="3">
+            <a:schemeClr val="accent1"/>
+          </a:fillRef>
+          <a:effectRef idx="2">
+            <a:schemeClr val="accent1"/>
+          </a:effectRef>
+          <a:fontRef idx="minor">
+            <a:schemeClr val="lt1"/>
+          </a:fontRef>
+        </p:style>
+        <p:txBody>
+          <a:bodyPr rtlCol="0" anchor="ctr"/>
+          <a:lstStyle/>
+          <a:p>
+            <a:pPr algn="ctr"/>
+          </a:p>
+        </p:txBody>
+      </p:sp>
+      <p:sp>
+        <p:nvSpPr>
+          <p:cNvPr id="11" name="Rounded Rectangle 10"/>
+          <p:cNvSpPr/>
+          <p:nvPr/>
+        </p:nvSpPr>
+        <p:spPr>
+          <a:xfrm>
+            <a:off x="6217920" y="4023360"/>
+            <a:ext cx="5212080" cy="2194560"/>
+          </a:xfrm>
+          <a:prstGeom prst="roundRect">
+            <a:avLst/>
+          </a:prstGeom>
+          <a:solidFill>
+            <a:srgbClr val="F8FAFC"/>
+          </a:solidFill>
+          <a:ln w="12700">
+            <a:solidFill>
+              <a:srgbClr val="E2E8F0"/>
+            </a:solidFill>
+          </a:ln>
+        </p:spPr>
+        <p:style>
+          <a:lnRef idx="1">
+            <a:schemeClr val="accent1"/>
+          </a:lnRef>
+          <a:fillRef idx="3">
+            <a:schemeClr val="accent1"/>
+          </a:fillRef>
+          <a:effectRef idx="2">
+            <a:schemeClr val="accent1"/>
+          </a:effectRef>
+          <a:fontRef idx="minor">
+            <a:schemeClr val="lt1"/>
+          </a:fontRef>
+        </p:style>
+        <p:txBody>
+          <a:bodyPr rtlCol="0" anchor="t" wrap="square" lIns="228600" rIns="228600" tIns="201168" bIns="182880"/>
+          <a:lstStyle/>
+          <a:p>
+            <a:pPr algn="ctr">
+              <a:spcAft>
+                <a:spcPts val="800"/>
+              </a:spcAft>
+              <a:defRPr sz="1500" b="1">
+                <a:solidFill>
+                  <a:srgbClr val="1E3A8A"/>
+                </a:solidFill>
+                <a:latin typeface="Arial"/>
+              </a:defRPr>
+            </a:pPr>
+            <a:r>
+              <a:t>¿Cómo garantizan aporte equitativo?</a:t>
+            </a:r>
+          </a:p>
+          <a:p>
+            <a:pPr>
+              <a:spcAft>
+                <a:spcPts val="500"/>
+              </a:spcAft>
+              <a:defRPr sz="1100">
+                <a:latin typeface="Arial"/>
+              </a:defRPr>
+            </a:pPr>
+            <a:r>
+              <a:t>Fundamento: Distribución por dominios técnicos complementarios y corresponsabilidad en persistencia (MariaDB): Tomás (Arquitectura, Backend y BD), Matías (Gestión Ágil, Vinculación con Cliente y BD) y Paulo (Frontend, UI/UX y Documentación Técnica). Trazabilidad auditable mediante Pull Requests cruzados en GitHub.</a:t>
+            </a:r>
+          </a:p>
+        </p:txBody>
+      </p:sp>
+      <p:sp>
+        <p:nvSpPr>
+          <p:cNvPr id="12" name="Rectangle 11"/>
+          <p:cNvSpPr/>
+          <p:nvPr/>
+        </p:nvSpPr>
+        <p:spPr>
+          <a:xfrm>
+            <a:off x="6263640" y="4069080"/>
+            <a:ext cx="5120640" cy="73152"/>
+          </a:xfrm>
+          <a:prstGeom prst="rect">
+            <a:avLst/>
+          </a:prstGeom>
+          <a:solidFill>
+            <a:srgbClr val="1E3A8A"/>
+          </a:solidFill>
+          <a:ln>
+            <a:noFill/>
+          </a:ln>
+        </p:spPr>
+        <p:style>
+          <a:lnRef idx="1">
+            <a:schemeClr val="accent1"/>
+          </a:lnRef>
+          <a:fillRef idx="3">
+            <a:schemeClr val="accent1"/>
+          </a:fillRef>
+          <a:effectRef idx="2">
+            <a:schemeClr val="accent1"/>
+          </a:effectRef>
+          <a:fontRef idx="minor">
+            <a:schemeClr val="lt1"/>
+          </a:fontRef>
+        </p:style>
+        <p:txBody>
+          <a:bodyPr rtlCol="0" anchor="ctr"/>
+          <a:lstStyle/>
+          <a:p>
+            <a:pPr algn="ctr"/>
+          </a:p>
+        </p:txBody>
+      </p:sp>
     </p:spTree>
   </p:cSld>
   <p:clrMapOvr>
@@ -6176,6 +6104,1611 @@
 </file>
 
 <file path=ppt/slides/slide12.xml><?xml version="1.0" encoding="utf-8"?>
+<p:sld xmlns:a="http://schemas.openxmlformats.org/drawingml/2006/main" xmlns:p="http://schemas.openxmlformats.org/presentationml/2006/main" xmlns:r="http://schemas.openxmlformats.org/officeDocument/2006/relationships">
+  <p:cSld>
+    <p:spTree>
+      <p:nvGrpSpPr>
+        <p:cNvPr id="1" name=""/>
+        <p:cNvGrpSpPr/>
+        <p:nvPr/>
+      </p:nvGrpSpPr>
+      <p:grpSpPr/>
+      <p:sp>
+        <p:nvSpPr>
+          <p:cNvPr id="2" name="Rectangle 1"/>
+          <p:cNvSpPr/>
+          <p:nvPr/>
+        </p:nvSpPr>
+        <p:spPr>
+          <a:xfrm>
+            <a:off x="731520" y="457200"/>
+            <a:ext cx="10725912" cy="45720"/>
+          </a:xfrm>
+          <a:prstGeom prst="rect">
+            <a:avLst/>
+          </a:prstGeom>
+          <a:solidFill>
+            <a:srgbClr val="003366"/>
+          </a:solidFill>
+          <a:ln>
+            <a:noFill/>
+          </a:ln>
+        </p:spPr>
+        <p:style>
+          <a:lnRef idx="1">
+            <a:schemeClr val="accent1"/>
+          </a:lnRef>
+          <a:fillRef idx="3">
+            <a:schemeClr val="accent1"/>
+          </a:fillRef>
+          <a:effectRef idx="2">
+            <a:schemeClr val="accent1"/>
+          </a:effectRef>
+          <a:fontRef idx="minor">
+            <a:schemeClr val="lt1"/>
+          </a:fontRef>
+        </p:style>
+        <p:txBody>
+          <a:bodyPr rtlCol="0" anchor="ctr"/>
+          <a:lstStyle/>
+          <a:p>
+            <a:pPr algn="ctr"/>
+          </a:p>
+        </p:txBody>
+      </p:sp>
+      <p:sp>
+        <p:nvSpPr>
+          <p:cNvPr id="3" name="TextBox 2"/>
+          <p:cNvSpPr txBox="1"/>
+          <p:nvPr/>
+        </p:nvSpPr>
+        <p:spPr>
+          <a:xfrm>
+            <a:off x="731520" y="594360"/>
+            <a:ext cx="8412480" cy="822960"/>
+          </a:xfrm>
+          <a:prstGeom prst="rect">
+            <a:avLst/>
+          </a:prstGeom>
+          <a:noFill/>
+        </p:spPr>
+        <p:txBody>
+          <a:bodyPr wrap="none">
+            <a:spAutoFit/>
+          </a:bodyPr>
+          <a:lstStyle/>
+          <a:p>
+            <a:pPr>
+              <a:defRPr b="1" sz="2200">
+                <a:solidFill>
+                  <a:srgbClr val="003366"/>
+                </a:solidFill>
+              </a:defRPr>
+            </a:pPr>
+            <a:r>
+              <a:t>Estructura de la Defensa y Agenda</a:t>
+            </a:r>
+          </a:p>
+          <a:p>
+            <a:pPr>
+              <a:defRPr sz="1300">
+                <a:solidFill>
+                  <a:srgbClr val="646464"/>
+                </a:solidFill>
+              </a:defRPr>
+            </a:pPr>
+            <a:r>
+              <a:t>Hoja de Ruta de la Exposición Fase 1 — Proyecto ACE (PTY4614)</a:t>
+            </a:r>
+          </a:p>
+        </p:txBody>
+      </p:sp>
+      <p:sp>
+        <p:nvSpPr>
+          <p:cNvPr id="4" name="Rounded Rectangle 3"/>
+          <p:cNvSpPr/>
+          <p:nvPr/>
+        </p:nvSpPr>
+        <p:spPr>
+          <a:xfrm>
+            <a:off x="9326880" y="640080"/>
+            <a:ext cx="2130552" cy="411480"/>
+          </a:xfrm>
+          <a:prstGeom prst="roundRect">
+            <a:avLst/>
+          </a:prstGeom>
+          <a:solidFill>
+            <a:srgbClr val="F0F3F6"/>
+          </a:solidFill>
+          <a:ln>
+            <a:solidFill>
+              <a:srgbClr val="C8D2DC"/>
+            </a:solidFill>
+          </a:ln>
+        </p:spPr>
+        <p:style>
+          <a:lnRef idx="1">
+            <a:schemeClr val="accent1"/>
+          </a:lnRef>
+          <a:fillRef idx="3">
+            <a:schemeClr val="accent1"/>
+          </a:fillRef>
+          <a:effectRef idx="2">
+            <a:schemeClr val="accent1"/>
+          </a:effectRef>
+          <a:fontRef idx="minor">
+            <a:schemeClr val="lt1"/>
+          </a:fontRef>
+        </p:style>
+        <p:txBody>
+          <a:bodyPr rtlCol="0" anchor="ctr"/>
+          <a:lstStyle/>
+          <a:p>
+            <a:pPr algn="ctr">
+              <a:defRPr sz="1100" b="1">
+                <a:solidFill>
+                  <a:srgbClr val="003366"/>
+                </a:solidFill>
+              </a:defRPr>
+            </a:pPr>
+            <a:r>
+              <a:t>Todo el Equipo</a:t>
+            </a:r>
+          </a:p>
+        </p:txBody>
+      </p:sp>
+      <p:sp>
+        <p:nvSpPr>
+          <p:cNvPr id="5" name="Rounded Rectangle 4"/>
+          <p:cNvSpPr/>
+          <p:nvPr/>
+        </p:nvSpPr>
+        <p:spPr>
+          <a:xfrm>
+            <a:off x="731520" y="1645920"/>
+            <a:ext cx="5212080" cy="4389120"/>
+          </a:xfrm>
+          <a:prstGeom prst="roundRect">
+            <a:avLst/>
+          </a:prstGeom>
+          <a:solidFill>
+            <a:srgbClr val="F8FAFC"/>
+          </a:solidFill>
+          <a:ln>
+            <a:solidFill>
+              <a:srgbClr val="DAE1E9"/>
+            </a:solidFill>
+          </a:ln>
+        </p:spPr>
+        <p:style>
+          <a:lnRef idx="1">
+            <a:schemeClr val="accent1"/>
+          </a:lnRef>
+          <a:fillRef idx="3">
+            <a:schemeClr val="accent1"/>
+          </a:fillRef>
+          <a:effectRef idx="2">
+            <a:schemeClr val="accent1"/>
+          </a:effectRef>
+          <a:fontRef idx="minor">
+            <a:schemeClr val="lt1"/>
+          </a:fontRef>
+        </p:style>
+        <p:txBody>
+          <a:bodyPr rtlCol="0" anchor="ctr"/>
+          <a:lstStyle/>
+          <a:p>
+            <a:pPr algn="ctr">
+              <a:defRPr b="1" sz="1400">
+                <a:solidFill>
+                  <a:srgbClr val="003366"/>
+                </a:solidFill>
+              </a:defRPr>
+            </a:pPr>
+            <a:r>
+              <a:t>Bloque I: Fundamentación y Estrategia</a:t>
+            </a:r>
+          </a:p>
+          <a:p>
+            <a:pPr>
+              <a:defRPr b="1" sz="1150">
+                <a:solidFill>
+                  <a:srgbClr val="141E2D"/>
+                </a:solidFill>
+              </a:defRPr>
+            </a:pPr>
+            <a:r>
+              <a:t>• I. Contexto y Diagnóstico del Negocio</a:t>
+            </a:r>
+          </a:p>
+          <a:p>
+            <a:pPr>
+              <a:defRPr sz="1000">
+                <a:solidFill>
+                  <a:srgbClr val="5A646E"/>
+                </a:solidFill>
+              </a:defRPr>
+            </a:pPr>
+            <a:r>
+              <a:t>   Problemática de Lumina Motion: pendrives, licencias externas y caídas WAN.</a:t>
+            </a:r>
+          </a:p>
+          <a:p>
+            <a:pPr>
+              <a:defRPr b="1" sz="1150">
+                <a:solidFill>
+                  <a:srgbClr val="141E2D"/>
+                </a:solidFill>
+              </a:defRPr>
+            </a:pPr>
+            <a:r>
+              <a:t>• II. Solución y Arquitectura Desacoplada</a:t>
+            </a:r>
+          </a:p>
+          <a:p>
+            <a:pPr>
+              <a:defRPr sz="1000">
+                <a:solidFill>
+                  <a:srgbClr val="5A646E"/>
+                </a:solidFill>
+              </a:defRPr>
+            </a:pPr>
+            <a:r>
+              <a:t>   Estructura Cliente-Servidor Cache-First y resiliencia offline ante cortes.</a:t>
+            </a:r>
+          </a:p>
+          <a:p>
+            <a:pPr>
+              <a:defRPr b="1" sz="1150">
+                <a:solidFill>
+                  <a:srgbClr val="141E2D"/>
+                </a:solidFill>
+              </a:defRPr>
+            </a:pPr>
+            <a:r>
+              <a:t>• III. Formulación de Objetivos de Ingeniería</a:t>
+            </a:r>
+          </a:p>
+          <a:p>
+            <a:pPr>
+              <a:defRPr sz="1000">
+                <a:solidFill>
+                  <a:srgbClr val="5A646E"/>
+                </a:solidFill>
+              </a:defRPr>
+            </a:pPr>
+            <a:r>
+              <a:t>   Meta General y 6 Objetivos Específicos alineados a la industria.</a:t>
+            </a:r>
+          </a:p>
+          <a:p>
+            <a:pPr>
+              <a:defRPr b="1" sz="1150">
+                <a:solidFill>
+                  <a:srgbClr val="141E2D"/>
+                </a:solidFill>
+              </a:defRPr>
+            </a:pPr>
+            <a:r>
+              <a:t>• IV. Metodología Ágil y Roles Disciplinares</a:t>
+            </a:r>
+          </a:p>
+          <a:p>
+            <a:pPr>
+              <a:defRPr sz="1000">
+                <a:solidFill>
+                  <a:srgbClr val="5A646E"/>
+                </a:solidFill>
+              </a:defRPr>
+            </a:pPr>
+            <a:r>
+              <a:t>   Scrum adaptado, flujos de integración en GitHub y corresponsabilidad técnica.</a:t>
+            </a:r>
+          </a:p>
+        </p:txBody>
+      </p:sp>
+      <p:sp>
+        <p:nvSpPr>
+          <p:cNvPr id="6" name="Rounded Rectangle 5"/>
+          <p:cNvSpPr/>
+          <p:nvPr/>
+        </p:nvSpPr>
+        <p:spPr>
+          <a:xfrm>
+            <a:off x="6217920" y="1645920"/>
+            <a:ext cx="5212080" cy="4389120"/>
+          </a:xfrm>
+          <a:prstGeom prst="roundRect">
+            <a:avLst/>
+          </a:prstGeom>
+          <a:solidFill>
+            <a:srgbClr val="F8FAFC"/>
+          </a:solidFill>
+          <a:ln>
+            <a:solidFill>
+              <a:srgbClr val="DAE1E9"/>
+            </a:solidFill>
+          </a:ln>
+        </p:spPr>
+        <p:style>
+          <a:lnRef idx="1">
+            <a:schemeClr val="accent1"/>
+          </a:lnRef>
+          <a:fillRef idx="3">
+            <a:schemeClr val="accent1"/>
+          </a:fillRef>
+          <a:effectRef idx="2">
+            <a:schemeClr val="accent1"/>
+          </a:effectRef>
+          <a:fontRef idx="minor">
+            <a:schemeClr val="lt1"/>
+          </a:fontRef>
+        </p:style>
+        <p:txBody>
+          <a:bodyPr rtlCol="0" anchor="ctr"/>
+          <a:lstStyle/>
+          <a:p>
+            <a:pPr algn="ctr">
+              <a:defRPr b="1" sz="1400">
+                <a:solidFill>
+                  <a:srgbClr val="003366"/>
+                </a:solidFill>
+              </a:defRPr>
+            </a:pPr>
+            <a:r>
+              <a:t>Bloque II: Planificación e Ingeniería</a:t>
+            </a:r>
+          </a:p>
+          <a:p>
+            <a:pPr>
+              <a:defRPr b="1" sz="1150">
+                <a:solidFill>
+                  <a:srgbClr val="141E2D"/>
+                </a:solidFill>
+              </a:defRPr>
+            </a:pPr>
+            <a:r>
+              <a:t>• V. Factibilidad, Matriz de Riesgos y Seguridad</a:t>
+            </a:r>
+          </a:p>
+          <a:p>
+            <a:pPr>
+              <a:defRPr sz="1000">
+                <a:solidFill>
+                  <a:srgbClr val="5A646E"/>
+                </a:solidFill>
+              </a:defRPr>
+            </a:pPr>
+            <a:r>
+              <a:t>   Viabilidad en 18 semanas, mitigaciones, JWT y validación SHA-256.</a:t>
+            </a:r>
+          </a:p>
+          <a:p>
+            <a:pPr>
+              <a:defRPr b="1" sz="1150">
+                <a:solidFill>
+                  <a:srgbClr val="141E2D"/>
+                </a:solidFill>
+              </a:defRPr>
+            </a:pPr>
+            <a:r>
+              <a:t>• VI. Modelo de Datos y Mockups UI/UX</a:t>
+            </a:r>
+          </a:p>
+          <a:p>
+            <a:pPr>
+              <a:defRPr sz="1000">
+                <a:solidFill>
+                  <a:srgbClr val="5A646E"/>
+                </a:solidFill>
+              </a:defRPr>
+            </a:pPr>
+            <a:r>
+              <a:t>   Esquema MariaDB 3FN y 3 vistas de interfaz (Screens, Schedules, Library).</a:t>
+            </a:r>
+          </a:p>
+          <a:p>
+            <a:pPr>
+              <a:defRPr b="1" sz="1150">
+                <a:solidFill>
+                  <a:srgbClr val="141E2D"/>
+                </a:solidFill>
+              </a:defRPr>
+            </a:pPr>
+            <a:r>
+              <a:t>• VII. Plan de Trabajo y Carta Gantt Detallada</a:t>
+            </a:r>
+          </a:p>
+          <a:p>
+            <a:pPr>
+              <a:defRPr sz="1000">
+                <a:solidFill>
+                  <a:srgbClr val="5A646E"/>
+                </a:solidFill>
+              </a:defRPr>
+            </a:pPr>
+            <a:r>
+              <a:t>   Desglose de 22 actividades de ingeniería e hitos evaluativos Duoc.</a:t>
+            </a:r>
+          </a:p>
+          <a:p>
+            <a:pPr>
+              <a:defRPr b="1" sz="1150">
+                <a:solidFill>
+                  <a:srgbClr val="141E2D"/>
+                </a:solidFill>
+              </a:defRPr>
+            </a:pPr>
+            <a:r>
+              <a:t>• VIII. Evidencias, Glosario Técnico y Defensa</a:t>
+            </a:r>
+          </a:p>
+          <a:p>
+            <a:pPr>
+              <a:defRPr sz="1000">
+                <a:solidFill>
+                  <a:srgbClr val="5A646E"/>
+                </a:solidFill>
+              </a:defRPr>
+            </a:pPr>
+            <a:r>
+              <a:t>   Acreditación del perfil de egreso y preparación rigurosa de preguntas.</a:t>
+            </a:r>
+          </a:p>
+        </p:txBody>
+      </p:sp>
+    </p:spTree>
+  </p:cSld>
+  <p:clrMapOvr>
+    <a:masterClrMapping/>
+  </p:clrMapOvr>
+</p:sld>
+</file>
+
+<file path=ppt/slides/slide13.xml><?xml version="1.0" encoding="utf-8"?>
+<p:sld xmlns:a="http://schemas.openxmlformats.org/drawingml/2006/main" xmlns:p="http://schemas.openxmlformats.org/presentationml/2006/main" xmlns:r="http://schemas.openxmlformats.org/officeDocument/2006/relationships">
+  <p:cSld>
+    <p:spTree>
+      <p:nvGrpSpPr>
+        <p:cNvPr id="1" name=""/>
+        <p:cNvGrpSpPr/>
+        <p:nvPr/>
+      </p:nvGrpSpPr>
+      <p:grpSpPr/>
+      <p:sp>
+        <p:nvSpPr>
+          <p:cNvPr id="2" name="Rectangle 1"/>
+          <p:cNvSpPr/>
+          <p:nvPr/>
+        </p:nvSpPr>
+        <p:spPr>
+          <a:xfrm>
+            <a:off x="731520" y="457200"/>
+            <a:ext cx="10725912" cy="45720"/>
+          </a:xfrm>
+          <a:prstGeom prst="rect">
+            <a:avLst/>
+          </a:prstGeom>
+          <a:solidFill>
+            <a:srgbClr val="003366"/>
+          </a:solidFill>
+          <a:ln>
+            <a:noFill/>
+          </a:ln>
+        </p:spPr>
+        <p:style>
+          <a:lnRef idx="1">
+            <a:schemeClr val="accent1"/>
+          </a:lnRef>
+          <a:fillRef idx="3">
+            <a:schemeClr val="accent1"/>
+          </a:fillRef>
+          <a:effectRef idx="2">
+            <a:schemeClr val="accent1"/>
+          </a:effectRef>
+          <a:fontRef idx="minor">
+            <a:schemeClr val="lt1"/>
+          </a:fontRef>
+        </p:style>
+        <p:txBody>
+          <a:bodyPr rtlCol="0" anchor="ctr"/>
+          <a:lstStyle/>
+          <a:p>
+            <a:pPr algn="ctr"/>
+          </a:p>
+        </p:txBody>
+      </p:sp>
+      <p:sp>
+        <p:nvSpPr>
+          <p:cNvPr id="3" name="TextBox 2"/>
+          <p:cNvSpPr txBox="1"/>
+          <p:nvPr/>
+        </p:nvSpPr>
+        <p:spPr>
+          <a:xfrm>
+            <a:off x="731520" y="594360"/>
+            <a:ext cx="8412480" cy="822960"/>
+          </a:xfrm>
+          <a:prstGeom prst="rect">
+            <a:avLst/>
+          </a:prstGeom>
+          <a:noFill/>
+        </p:spPr>
+        <p:txBody>
+          <a:bodyPr wrap="none">
+            <a:spAutoFit/>
+          </a:bodyPr>
+          <a:lstStyle/>
+          <a:p>
+            <a:pPr>
+              <a:defRPr b="1" sz="2100">
+                <a:solidFill>
+                  <a:srgbClr val="003366"/>
+                </a:solidFill>
+              </a:defRPr>
+            </a:pPr>
+            <a:r>
+              <a:t>Prototipos UI/UX — Vista 1: Gestión de Pantallas (Screens)</a:t>
+            </a:r>
+          </a:p>
+          <a:p>
+            <a:pPr>
+              <a:defRPr sz="1250">
+                <a:solidFill>
+                  <a:srgbClr val="646464"/>
+                </a:solidFill>
+              </a:defRPr>
+            </a:pPr>
+            <a:r>
+              <a:t>Command Center: Telemetría de NUCs, Estado de Red y Control Operacional</a:t>
+            </a:r>
+          </a:p>
+        </p:txBody>
+      </p:sp>
+      <p:sp>
+        <p:nvSpPr>
+          <p:cNvPr id="4" name="Rounded Rectangle 3"/>
+          <p:cNvSpPr/>
+          <p:nvPr/>
+        </p:nvSpPr>
+        <p:spPr>
+          <a:xfrm>
+            <a:off x="9144000" y="640080"/>
+            <a:ext cx="2313432" cy="411480"/>
+          </a:xfrm>
+          <a:prstGeom prst="roundRect">
+            <a:avLst/>
+          </a:prstGeom>
+          <a:solidFill>
+            <a:srgbClr val="F0F3F6"/>
+          </a:solidFill>
+          <a:ln>
+            <a:solidFill>
+              <a:srgbClr val="C8D2DC"/>
+            </a:solidFill>
+          </a:ln>
+        </p:spPr>
+        <p:style>
+          <a:lnRef idx="1">
+            <a:schemeClr val="accent1"/>
+          </a:lnRef>
+          <a:fillRef idx="3">
+            <a:schemeClr val="accent1"/>
+          </a:fillRef>
+          <a:effectRef idx="2">
+            <a:schemeClr val="accent1"/>
+          </a:effectRef>
+          <a:fontRef idx="minor">
+            <a:schemeClr val="lt1"/>
+          </a:fontRef>
+        </p:style>
+        <p:txBody>
+          <a:bodyPr rtlCol="0" anchor="ctr"/>
+          <a:lstStyle/>
+          <a:p>
+            <a:pPr algn="ctr">
+              <a:defRPr sz="1100" b="1">
+                <a:solidFill>
+                  <a:srgbClr val="003366"/>
+                </a:solidFill>
+              </a:defRPr>
+            </a:pPr>
+            <a:r>
+              <a:t>Paulo Loyola | Bloque 3</a:t>
+            </a:r>
+          </a:p>
+        </p:txBody>
+      </p:sp>
+      <p:sp>
+        <p:nvSpPr>
+          <p:cNvPr id="5" name="Rounded Rectangle 4"/>
+          <p:cNvSpPr/>
+          <p:nvPr/>
+        </p:nvSpPr>
+        <p:spPr>
+          <a:xfrm>
+            <a:off x="731520" y="1645920"/>
+            <a:ext cx="3291840" cy="4389120"/>
+          </a:xfrm>
+          <a:prstGeom prst="roundRect">
+            <a:avLst/>
+          </a:prstGeom>
+          <a:solidFill>
+            <a:srgbClr val="F8FAFC"/>
+          </a:solidFill>
+          <a:ln>
+            <a:solidFill>
+              <a:srgbClr val="DAE1E9"/>
+            </a:solidFill>
+          </a:ln>
+        </p:spPr>
+        <p:style>
+          <a:lnRef idx="1">
+            <a:schemeClr val="accent1"/>
+          </a:lnRef>
+          <a:fillRef idx="3">
+            <a:schemeClr val="accent1"/>
+          </a:fillRef>
+          <a:effectRef idx="2">
+            <a:schemeClr val="accent1"/>
+          </a:effectRef>
+          <a:fontRef idx="minor">
+            <a:schemeClr val="lt1"/>
+          </a:fontRef>
+        </p:style>
+        <p:txBody>
+          <a:bodyPr rtlCol="0" anchor="ctr"/>
+          <a:lstStyle/>
+          <a:p>
+            <a:pPr algn="ctr">
+              <a:defRPr b="1" sz="1300">
+                <a:solidFill>
+                  <a:srgbClr val="003366"/>
+                </a:solidFill>
+              </a:defRPr>
+            </a:pPr>
+            <a:r>
+              <a:t>Especificación y Usabilidad</a:t>
+            </a:r>
+          </a:p>
+          <a:p>
+            <a:pPr>
+              <a:defRPr b="1" sz="1050">
+                <a:solidFill>
+                  <a:srgbClr val="141E2D"/>
+                </a:solidFill>
+              </a:defRPr>
+            </a:pPr>
+            <a:r>
+              <a:t>• Monitoreo en Tiempo Real</a:t>
+            </a:r>
+          </a:p>
+          <a:p>
+            <a:pPr>
+              <a:defRPr sz="950">
+                <a:solidFill>
+                  <a:srgbClr val="5A646E"/>
+                </a:solidFill>
+              </a:defRPr>
+            </a:pPr>
+            <a:r>
+              <a:t>   Supervisión de locaciones y sectores en centros comerciales.</a:t>
+            </a:r>
+          </a:p>
+          <a:p>
+            <a:pPr>
+              <a:defRPr b="1" sz="1050">
+                <a:solidFill>
+                  <a:srgbClr val="141E2D"/>
+                </a:solidFill>
+              </a:defRPr>
+            </a:pPr>
+            <a:r>
+              <a:t>• Telemetría de NUCs</a:t>
+            </a:r>
+          </a:p>
+          <a:p>
+            <a:pPr>
+              <a:defRPr sz="950">
+                <a:solidFill>
+                  <a:srgbClr val="5A646E"/>
+                </a:solidFill>
+              </a:defRPr>
+            </a:pPr>
+            <a:r>
+              <a:t>   Reporte vital de hardware: temperatura, CPU y resolución (1080x1920 / 4K).</a:t>
+            </a:r>
+          </a:p>
+          <a:p>
+            <a:pPr>
+              <a:defRPr b="1" sz="1050">
+                <a:solidFill>
+                  <a:srgbClr val="141E2D"/>
+                </a:solidFill>
+              </a:defRPr>
+            </a:pPr>
+            <a:r>
+              <a:t>• Resiliencia de Red</a:t>
+            </a:r>
+          </a:p>
+          <a:p>
+            <a:pPr>
+              <a:defRPr sz="950">
+                <a:solidFill>
+                  <a:srgbClr val="5A646E"/>
+                </a:solidFill>
+              </a:defRPr>
+            </a:pPr>
+            <a:r>
+              <a:t>   Semáforo online/offline e indicador de contenido precargado (100% Cached).</a:t>
+            </a:r>
+          </a:p>
+          <a:p>
+            <a:pPr>
+              <a:defRPr b="1" sz="1050">
+                <a:solidFill>
+                  <a:srgbClr val="141E2D"/>
+                </a:solidFill>
+              </a:defRPr>
+            </a:pPr>
+            <a:r>
+              <a:t>• Asignación Activa</a:t>
+            </a:r>
+          </a:p>
+          <a:p>
+            <a:pPr>
+              <a:defRPr sz="950">
+                <a:solidFill>
+                  <a:srgbClr val="5A646E"/>
+                </a:solidFill>
+              </a:defRPr>
+            </a:pPr>
+            <a:r>
+              <a:t>   Visualización del spot y playlist activa en emisión en cada pantalla.</a:t>
+            </a:r>
+          </a:p>
+        </p:txBody>
+      </p:sp>
+      <p:sp>
+        <p:nvSpPr>
+          <p:cNvPr id="6" name="Rounded Rectangle 5"/>
+          <p:cNvSpPr/>
+          <p:nvPr/>
+        </p:nvSpPr>
+        <p:spPr>
+          <a:xfrm>
+            <a:off x="4206240" y="1645920"/>
+            <a:ext cx="7251192" cy="4389120"/>
+          </a:xfrm>
+          <a:prstGeom prst="roundRect">
+            <a:avLst/>
+          </a:prstGeom>
+          <a:solidFill>
+            <a:srgbClr val="F0F3F6"/>
+          </a:solidFill>
+          <a:ln w="19050">
+            <a:solidFill>
+              <a:srgbClr val="003366"/>
+            </a:solidFill>
+          </a:ln>
+        </p:spPr>
+        <p:style>
+          <a:lnRef idx="1">
+            <a:schemeClr val="accent1"/>
+          </a:lnRef>
+          <a:fillRef idx="3">
+            <a:schemeClr val="accent1"/>
+          </a:fillRef>
+          <a:effectRef idx="2">
+            <a:schemeClr val="accent1"/>
+          </a:effectRef>
+          <a:fontRef idx="minor">
+            <a:schemeClr val="lt1"/>
+          </a:fontRef>
+        </p:style>
+        <p:txBody>
+          <a:bodyPr rtlCol="0" anchor="ctr"/>
+          <a:lstStyle/>
+          <a:p>
+            <a:pPr algn="ctr"/>
+          </a:p>
+        </p:txBody>
+      </p:sp>
+      <p:pic>
+        <p:nvPicPr>
+          <p:cNvPr id="7" name="Picture 6" descr="ace_screens_mockup_1788503951369.jpg"/>
+          <p:cNvPicPr>
+            <a:picLocks noChangeAspect="1"/>
+          </p:cNvPicPr>
+          <p:nvPr/>
+        </p:nvPicPr>
+        <p:blipFill>
+          <a:blip r:embed="rId2"/>
+          <a:stretch>
+            <a:fillRect/>
+          </a:stretch>
+        </p:blipFill>
+        <p:spPr>
+          <a:xfrm>
+            <a:off x="4279392" y="1719072"/>
+            <a:ext cx="7104888" cy="4242816"/>
+          </a:xfrm>
+          <a:prstGeom prst="rect">
+            <a:avLst/>
+          </a:prstGeom>
+        </p:spPr>
+      </p:pic>
+    </p:spTree>
+  </p:cSld>
+  <p:clrMapOvr>
+    <a:masterClrMapping/>
+  </p:clrMapOvr>
+</p:sld>
+</file>
+
+<file path=ppt/slides/slide14.xml><?xml version="1.0" encoding="utf-8"?>
+<p:sld xmlns:a="http://schemas.openxmlformats.org/drawingml/2006/main" xmlns:p="http://schemas.openxmlformats.org/presentationml/2006/main" xmlns:r="http://schemas.openxmlformats.org/officeDocument/2006/relationships">
+  <p:cSld>
+    <p:spTree>
+      <p:nvGrpSpPr>
+        <p:cNvPr id="1" name=""/>
+        <p:cNvGrpSpPr/>
+        <p:nvPr/>
+      </p:nvGrpSpPr>
+      <p:grpSpPr/>
+      <p:sp>
+        <p:nvSpPr>
+          <p:cNvPr id="2" name="Rectangle 1"/>
+          <p:cNvSpPr/>
+          <p:nvPr/>
+        </p:nvSpPr>
+        <p:spPr>
+          <a:xfrm>
+            <a:off x="731520" y="457200"/>
+            <a:ext cx="10725912" cy="45720"/>
+          </a:xfrm>
+          <a:prstGeom prst="rect">
+            <a:avLst/>
+          </a:prstGeom>
+          <a:solidFill>
+            <a:srgbClr val="003366"/>
+          </a:solidFill>
+          <a:ln>
+            <a:noFill/>
+          </a:ln>
+        </p:spPr>
+        <p:style>
+          <a:lnRef idx="1">
+            <a:schemeClr val="accent1"/>
+          </a:lnRef>
+          <a:fillRef idx="3">
+            <a:schemeClr val="accent1"/>
+          </a:fillRef>
+          <a:effectRef idx="2">
+            <a:schemeClr val="accent1"/>
+          </a:effectRef>
+          <a:fontRef idx="minor">
+            <a:schemeClr val="lt1"/>
+          </a:fontRef>
+        </p:style>
+        <p:txBody>
+          <a:bodyPr rtlCol="0" anchor="ctr"/>
+          <a:lstStyle/>
+          <a:p>
+            <a:pPr algn="ctr"/>
+          </a:p>
+        </p:txBody>
+      </p:sp>
+      <p:sp>
+        <p:nvSpPr>
+          <p:cNvPr id="3" name="TextBox 2"/>
+          <p:cNvSpPr txBox="1"/>
+          <p:nvPr/>
+        </p:nvSpPr>
+        <p:spPr>
+          <a:xfrm>
+            <a:off x="731520" y="594360"/>
+            <a:ext cx="8412480" cy="822960"/>
+          </a:xfrm>
+          <a:prstGeom prst="rect">
+            <a:avLst/>
+          </a:prstGeom>
+          <a:noFill/>
+        </p:spPr>
+        <p:txBody>
+          <a:bodyPr wrap="none">
+            <a:spAutoFit/>
+          </a:bodyPr>
+          <a:lstStyle/>
+          <a:p>
+            <a:pPr>
+              <a:defRPr b="1" sz="2100">
+                <a:solidFill>
+                  <a:srgbClr val="003366"/>
+                </a:solidFill>
+              </a:defRPr>
+            </a:pPr>
+            <a:r>
+              <a:t>Prototipos UI/UX — Vista 2: Programación Horaria (Schedules)</a:t>
+            </a:r>
+          </a:p>
+          <a:p>
+            <a:pPr>
+              <a:defRPr sz="1250">
+                <a:solidFill>
+                  <a:srgbClr val="646464"/>
+                </a:solidFill>
+              </a:defRPr>
+            </a:pPr>
+            <a:r>
+              <a:t>Planificador de Pautas: Timeline Multi-Pista y Asignación Segmentada por Sector</a:t>
+            </a:r>
+          </a:p>
+        </p:txBody>
+      </p:sp>
+      <p:sp>
+        <p:nvSpPr>
+          <p:cNvPr id="4" name="Rounded Rectangle 3"/>
+          <p:cNvSpPr/>
+          <p:nvPr/>
+        </p:nvSpPr>
+        <p:spPr>
+          <a:xfrm>
+            <a:off x="9144000" y="640080"/>
+            <a:ext cx="2313432" cy="411480"/>
+          </a:xfrm>
+          <a:prstGeom prst="roundRect">
+            <a:avLst/>
+          </a:prstGeom>
+          <a:solidFill>
+            <a:srgbClr val="F0F3F6"/>
+          </a:solidFill>
+          <a:ln>
+            <a:solidFill>
+              <a:srgbClr val="C8D2DC"/>
+            </a:solidFill>
+          </a:ln>
+        </p:spPr>
+        <p:style>
+          <a:lnRef idx="1">
+            <a:schemeClr val="accent1"/>
+          </a:lnRef>
+          <a:fillRef idx="3">
+            <a:schemeClr val="accent1"/>
+          </a:fillRef>
+          <a:effectRef idx="2">
+            <a:schemeClr val="accent1"/>
+          </a:effectRef>
+          <a:fontRef idx="minor">
+            <a:schemeClr val="lt1"/>
+          </a:fontRef>
+        </p:style>
+        <p:txBody>
+          <a:bodyPr rtlCol="0" anchor="ctr"/>
+          <a:lstStyle/>
+          <a:p>
+            <a:pPr algn="ctr">
+              <a:defRPr sz="1100" b="1">
+                <a:solidFill>
+                  <a:srgbClr val="003366"/>
+                </a:solidFill>
+              </a:defRPr>
+            </a:pPr>
+            <a:r>
+              <a:t>Paulo Loyola | Bloque 3</a:t>
+            </a:r>
+          </a:p>
+        </p:txBody>
+      </p:sp>
+      <p:sp>
+        <p:nvSpPr>
+          <p:cNvPr id="5" name="Rounded Rectangle 4"/>
+          <p:cNvSpPr/>
+          <p:nvPr/>
+        </p:nvSpPr>
+        <p:spPr>
+          <a:xfrm>
+            <a:off x="731520" y="1645920"/>
+            <a:ext cx="3291840" cy="4389120"/>
+          </a:xfrm>
+          <a:prstGeom prst="roundRect">
+            <a:avLst/>
+          </a:prstGeom>
+          <a:solidFill>
+            <a:srgbClr val="F8FAFC"/>
+          </a:solidFill>
+          <a:ln>
+            <a:solidFill>
+              <a:srgbClr val="DAE1E9"/>
+            </a:solidFill>
+          </a:ln>
+        </p:spPr>
+        <p:style>
+          <a:lnRef idx="1">
+            <a:schemeClr val="accent1"/>
+          </a:lnRef>
+          <a:fillRef idx="3">
+            <a:schemeClr val="accent1"/>
+          </a:fillRef>
+          <a:effectRef idx="2">
+            <a:schemeClr val="accent1"/>
+          </a:effectRef>
+          <a:fontRef idx="minor">
+            <a:schemeClr val="lt1"/>
+          </a:fontRef>
+        </p:style>
+        <p:txBody>
+          <a:bodyPr rtlCol="0" anchor="ctr"/>
+          <a:lstStyle/>
+          <a:p>
+            <a:pPr algn="ctr">
+              <a:defRPr b="1" sz="1300">
+                <a:solidFill>
+                  <a:srgbClr val="003366"/>
+                </a:solidFill>
+              </a:defRPr>
+            </a:pPr>
+            <a:r>
+              <a:t>Especificación y Usabilidad</a:t>
+            </a:r>
+          </a:p>
+          <a:p>
+            <a:pPr>
+              <a:defRPr b="1" sz="1050">
+                <a:solidFill>
+                  <a:srgbClr val="141E2D"/>
+                </a:solidFill>
+              </a:defRPr>
+            </a:pPr>
+            <a:r>
+              <a:t>• Timeline Horario Multi-Pista</a:t>
+            </a:r>
+          </a:p>
+          <a:p>
+            <a:pPr>
+              <a:defRPr sz="950">
+                <a:solidFill>
+                  <a:srgbClr val="5A646E"/>
+                </a:solidFill>
+              </a:defRPr>
+            </a:pPr>
+            <a:r>
+              <a:t>   Regla de 24 horas (08:00 a 22:00) para estructuración de pautas publicitarias.</a:t>
+            </a:r>
+          </a:p>
+          <a:p>
+            <a:pPr>
+              <a:defRPr b="1" sz="1050">
+                <a:solidFill>
+                  <a:srgbClr val="141E2D"/>
+                </a:solidFill>
+              </a:defRPr>
+            </a:pPr>
+            <a:r>
+              <a:t>• Segmentación por Bloques</a:t>
+            </a:r>
+          </a:p>
+          <a:p>
+            <a:pPr>
+              <a:defRPr sz="950">
+                <a:solidFill>
+                  <a:srgbClr val="5A646E"/>
+                </a:solidFill>
+              </a:defRPr>
+            </a:pPr>
+            <a:r>
+              <a:t>   Segmentación cromática de campañas: Morning Brand Loop, Promo Flash y Evening.</a:t>
+            </a:r>
+          </a:p>
+          <a:p>
+            <a:pPr>
+              <a:defRPr b="1" sz="1050">
+                <a:solidFill>
+                  <a:srgbClr val="141E2D"/>
+                </a:solidFill>
+              </a:defRPr>
+            </a:pPr>
+            <a:r>
+              <a:t>• Prevención de Solapamientos</a:t>
+            </a:r>
+          </a:p>
+          <a:p>
+            <a:pPr>
+              <a:defRPr sz="950">
+                <a:solidFill>
+                  <a:srgbClr val="5A646E"/>
+                </a:solidFill>
+              </a:defRPr>
+            </a:pPr>
+            <a:r>
+              <a:t>   Validación interactiva que impide conflictos horarios entre locaciones y sectores.</a:t>
+            </a:r>
+          </a:p>
+          <a:p>
+            <a:pPr>
+              <a:defRPr b="1" sz="1050">
+                <a:solidFill>
+                  <a:srgbClr val="141E2D"/>
+                </a:solidFill>
+              </a:defRPr>
+            </a:pPr>
+            <a:r>
+              <a:t>• Publicación Preventiva</a:t>
+            </a:r>
+          </a:p>
+          <a:p>
+            <a:pPr>
+              <a:defRPr sz="950">
+                <a:solidFill>
+                  <a:srgbClr val="5A646E"/>
+                </a:solidFill>
+              </a:defRPr>
+            </a:pPr>
+            <a:r>
+              <a:t>   Botón 'Publish to NUCs' que sincroniza y asegura la precarga antes de la emisión.</a:t>
+            </a:r>
+          </a:p>
+        </p:txBody>
+      </p:sp>
+      <p:sp>
+        <p:nvSpPr>
+          <p:cNvPr id="6" name="Rounded Rectangle 5"/>
+          <p:cNvSpPr/>
+          <p:nvPr/>
+        </p:nvSpPr>
+        <p:spPr>
+          <a:xfrm>
+            <a:off x="4206240" y="1645920"/>
+            <a:ext cx="7251192" cy="4389120"/>
+          </a:xfrm>
+          <a:prstGeom prst="roundRect">
+            <a:avLst/>
+          </a:prstGeom>
+          <a:solidFill>
+            <a:srgbClr val="F0F3F6"/>
+          </a:solidFill>
+          <a:ln w="19050">
+            <a:solidFill>
+              <a:srgbClr val="003366"/>
+            </a:solidFill>
+          </a:ln>
+        </p:spPr>
+        <p:style>
+          <a:lnRef idx="1">
+            <a:schemeClr val="accent1"/>
+          </a:lnRef>
+          <a:fillRef idx="3">
+            <a:schemeClr val="accent1"/>
+          </a:fillRef>
+          <a:effectRef idx="2">
+            <a:schemeClr val="accent1"/>
+          </a:effectRef>
+          <a:fontRef idx="minor">
+            <a:schemeClr val="lt1"/>
+          </a:fontRef>
+        </p:style>
+        <p:txBody>
+          <a:bodyPr rtlCol="0" anchor="ctr"/>
+          <a:lstStyle/>
+          <a:p>
+            <a:pPr algn="ctr"/>
+          </a:p>
+        </p:txBody>
+      </p:sp>
+      <p:pic>
+        <p:nvPicPr>
+          <p:cNvPr id="7" name="Picture 6" descr="ace_schedules_mockup_1788504015540.jpg"/>
+          <p:cNvPicPr>
+            <a:picLocks noChangeAspect="1"/>
+          </p:cNvPicPr>
+          <p:nvPr/>
+        </p:nvPicPr>
+        <p:blipFill>
+          <a:blip r:embed="rId2"/>
+          <a:stretch>
+            <a:fillRect/>
+          </a:stretch>
+        </p:blipFill>
+        <p:spPr>
+          <a:xfrm>
+            <a:off x="4279392" y="1719072"/>
+            <a:ext cx="7104888" cy="4242816"/>
+          </a:xfrm>
+          <a:prstGeom prst="rect">
+            <a:avLst/>
+          </a:prstGeom>
+        </p:spPr>
+      </p:pic>
+    </p:spTree>
+  </p:cSld>
+  <p:clrMapOvr>
+    <a:masterClrMapping/>
+  </p:clrMapOvr>
+</p:sld>
+</file>
+
+<file path=ppt/slides/slide15.xml><?xml version="1.0" encoding="utf-8"?>
+<p:sld xmlns:a="http://schemas.openxmlformats.org/drawingml/2006/main" xmlns:p="http://schemas.openxmlformats.org/presentationml/2006/main" xmlns:r="http://schemas.openxmlformats.org/officeDocument/2006/relationships">
+  <p:cSld>
+    <p:spTree>
+      <p:nvGrpSpPr>
+        <p:cNvPr id="1" name=""/>
+        <p:cNvGrpSpPr/>
+        <p:nvPr/>
+      </p:nvGrpSpPr>
+      <p:grpSpPr/>
+      <p:sp>
+        <p:nvSpPr>
+          <p:cNvPr id="2" name="Rectangle 1"/>
+          <p:cNvSpPr/>
+          <p:nvPr/>
+        </p:nvSpPr>
+        <p:spPr>
+          <a:xfrm>
+            <a:off x="731520" y="457200"/>
+            <a:ext cx="10725912" cy="45720"/>
+          </a:xfrm>
+          <a:prstGeom prst="rect">
+            <a:avLst/>
+          </a:prstGeom>
+          <a:solidFill>
+            <a:srgbClr val="003366"/>
+          </a:solidFill>
+          <a:ln>
+            <a:noFill/>
+          </a:ln>
+        </p:spPr>
+        <p:style>
+          <a:lnRef idx="1">
+            <a:schemeClr val="accent1"/>
+          </a:lnRef>
+          <a:fillRef idx="3">
+            <a:schemeClr val="accent1"/>
+          </a:fillRef>
+          <a:effectRef idx="2">
+            <a:schemeClr val="accent1"/>
+          </a:effectRef>
+          <a:fontRef idx="minor">
+            <a:schemeClr val="lt1"/>
+          </a:fontRef>
+        </p:style>
+        <p:txBody>
+          <a:bodyPr rtlCol="0" anchor="ctr"/>
+          <a:lstStyle/>
+          <a:p>
+            <a:pPr algn="ctr"/>
+          </a:p>
+        </p:txBody>
+      </p:sp>
+      <p:sp>
+        <p:nvSpPr>
+          <p:cNvPr id="3" name="TextBox 2"/>
+          <p:cNvSpPr txBox="1"/>
+          <p:nvPr/>
+        </p:nvSpPr>
+        <p:spPr>
+          <a:xfrm>
+            <a:off x="731520" y="594360"/>
+            <a:ext cx="8412480" cy="822960"/>
+          </a:xfrm>
+          <a:prstGeom prst="rect">
+            <a:avLst/>
+          </a:prstGeom>
+          <a:noFill/>
+        </p:spPr>
+        <p:txBody>
+          <a:bodyPr wrap="none">
+            <a:spAutoFit/>
+          </a:bodyPr>
+          <a:lstStyle/>
+          <a:p>
+            <a:pPr>
+              <a:defRPr b="1" sz="2100">
+                <a:solidFill>
+                  <a:srgbClr val="003366"/>
+                </a:solidFill>
+              </a:defRPr>
+            </a:pPr>
+            <a:r>
+              <a:t>Prototipos UI/UX — Vista 3: Bóveda de Medios (Media Library)</a:t>
+            </a:r>
+          </a:p>
+          <a:p>
+            <a:pPr>
+              <a:defRPr sz="1250">
+                <a:solidFill>
+                  <a:srgbClr val="646464"/>
+                </a:solidFill>
+              </a:defRPr>
+            </a:pPr>
+            <a:r>
+              <a:t>Gestor Multimedia: Catálogo de Contenidos con Verificación Criptográfica SHA-256</a:t>
+            </a:r>
+          </a:p>
+        </p:txBody>
+      </p:sp>
+      <p:sp>
+        <p:nvSpPr>
+          <p:cNvPr id="4" name="Rounded Rectangle 3"/>
+          <p:cNvSpPr/>
+          <p:nvPr/>
+        </p:nvSpPr>
+        <p:spPr>
+          <a:xfrm>
+            <a:off x="9144000" y="640080"/>
+            <a:ext cx="2313432" cy="411480"/>
+          </a:xfrm>
+          <a:prstGeom prst="roundRect">
+            <a:avLst/>
+          </a:prstGeom>
+          <a:solidFill>
+            <a:srgbClr val="F0F3F6"/>
+          </a:solidFill>
+          <a:ln>
+            <a:solidFill>
+              <a:srgbClr val="C8D2DC"/>
+            </a:solidFill>
+          </a:ln>
+        </p:spPr>
+        <p:style>
+          <a:lnRef idx="1">
+            <a:schemeClr val="accent1"/>
+          </a:lnRef>
+          <a:fillRef idx="3">
+            <a:schemeClr val="accent1"/>
+          </a:fillRef>
+          <a:effectRef idx="2">
+            <a:schemeClr val="accent1"/>
+          </a:effectRef>
+          <a:fontRef idx="minor">
+            <a:schemeClr val="lt1"/>
+          </a:fontRef>
+        </p:style>
+        <p:txBody>
+          <a:bodyPr rtlCol="0" anchor="ctr"/>
+          <a:lstStyle/>
+          <a:p>
+            <a:pPr algn="ctr">
+              <a:defRPr sz="1100" b="1">
+                <a:solidFill>
+                  <a:srgbClr val="003366"/>
+                </a:solidFill>
+              </a:defRPr>
+            </a:pPr>
+            <a:r>
+              <a:t>Paulo Loyola | Bloque 3</a:t>
+            </a:r>
+          </a:p>
+        </p:txBody>
+      </p:sp>
+      <p:sp>
+        <p:nvSpPr>
+          <p:cNvPr id="5" name="Rounded Rectangle 4"/>
+          <p:cNvSpPr/>
+          <p:nvPr/>
+        </p:nvSpPr>
+        <p:spPr>
+          <a:xfrm>
+            <a:off x="731520" y="1645920"/>
+            <a:ext cx="3291840" cy="4389120"/>
+          </a:xfrm>
+          <a:prstGeom prst="roundRect">
+            <a:avLst/>
+          </a:prstGeom>
+          <a:solidFill>
+            <a:srgbClr val="F8FAFC"/>
+          </a:solidFill>
+          <a:ln>
+            <a:solidFill>
+              <a:srgbClr val="DAE1E9"/>
+            </a:solidFill>
+          </a:ln>
+        </p:spPr>
+        <p:style>
+          <a:lnRef idx="1">
+            <a:schemeClr val="accent1"/>
+          </a:lnRef>
+          <a:fillRef idx="3">
+            <a:schemeClr val="accent1"/>
+          </a:fillRef>
+          <a:effectRef idx="2">
+            <a:schemeClr val="accent1"/>
+          </a:effectRef>
+          <a:fontRef idx="minor">
+            <a:schemeClr val="lt1"/>
+          </a:fontRef>
+        </p:style>
+        <p:txBody>
+          <a:bodyPr rtlCol="0" anchor="ctr"/>
+          <a:lstStyle/>
+          <a:p>
+            <a:pPr algn="ctr">
+              <a:defRPr b="1" sz="1300">
+                <a:solidFill>
+                  <a:srgbClr val="003366"/>
+                </a:solidFill>
+              </a:defRPr>
+            </a:pPr>
+            <a:r>
+              <a:t>Especificación y Usabilidad</a:t>
+            </a:r>
+          </a:p>
+          <a:p>
+            <a:pPr>
+              <a:defRPr b="1" sz="1050">
+                <a:solidFill>
+                  <a:srgbClr val="141E2D"/>
+                </a:solidFill>
+              </a:defRPr>
+            </a:pPr>
+            <a:r>
+              <a:t>• Bóveda Central de Medios</a:t>
+            </a:r>
+          </a:p>
+          <a:p>
+            <a:pPr>
+              <a:defRPr sz="950">
+                <a:solidFill>
+                  <a:srgbClr val="5A646E"/>
+                </a:solidFill>
+              </a:defRPr>
+            </a:pPr>
+            <a:r>
+              <a:t>   Catálogo centralizado de videos e imágenes con filtros por tipo y locación.</a:t>
+            </a:r>
+          </a:p>
+          <a:p>
+            <a:pPr>
+              <a:defRPr b="1" sz="1050">
+                <a:solidFill>
+                  <a:srgbClr val="141E2D"/>
+                </a:solidFill>
+              </a:defRPr>
+            </a:pPr>
+            <a:r>
+              <a:t>• Integridad Criptográfica</a:t>
+            </a:r>
+          </a:p>
+          <a:p>
+            <a:pPr>
+              <a:defRPr sz="950">
+                <a:solidFill>
+                  <a:srgbClr val="5A646E"/>
+                </a:solidFill>
+              </a:defRPr>
+            </a:pPr>
+            <a:r>
+              <a:t>   Cálculo automático de hash SHA-256 para evitar corrupción en la descarga local.</a:t>
+            </a:r>
+          </a:p>
+          <a:p>
+            <a:pPr>
+              <a:defRPr b="1" sz="1050">
+                <a:solidFill>
+                  <a:srgbClr val="141E2D"/>
+                </a:solidFill>
+              </a:defRPr>
+            </a:pPr>
+            <a:r>
+              <a:t>• Metadatos y Formatos</a:t>
+            </a:r>
+          </a:p>
+          <a:p>
+            <a:pPr>
+              <a:defRPr sz="950">
+                <a:solidFill>
+                  <a:srgbClr val="5A646E"/>
+                </a:solidFill>
+              </a:defRPr>
+            </a:pPr>
+            <a:r>
+              <a:t>   Estandarización mandatoria en MP4 H.264, JPG y PNG con control estricto de pesos.</a:t>
+            </a:r>
+          </a:p>
+          <a:p>
+            <a:pPr>
+              <a:defRPr b="1" sz="1050">
+                <a:solidFill>
+                  <a:srgbClr val="141E2D"/>
+                </a:solidFill>
+              </a:defRPr>
+            </a:pPr>
+            <a:r>
+              <a:t>• Tiempos de Exhibición</a:t>
+            </a:r>
+          </a:p>
+          <a:p>
+            <a:pPr>
+              <a:defRPr sz="950">
+                <a:solidFill>
+                  <a:srgbClr val="5A646E"/>
+                </a:solidFill>
+              </a:defRPr>
+            </a:pPr>
+            <a:r>
+              <a:t>   Configuración flexible de duración por aparición dentro de playlists reutilizables.</a:t>
+            </a:r>
+          </a:p>
+        </p:txBody>
+      </p:sp>
+      <p:sp>
+        <p:nvSpPr>
+          <p:cNvPr id="6" name="Rounded Rectangle 5"/>
+          <p:cNvSpPr/>
+          <p:nvPr/>
+        </p:nvSpPr>
+        <p:spPr>
+          <a:xfrm>
+            <a:off x="4206240" y="1645920"/>
+            <a:ext cx="7251192" cy="4389120"/>
+          </a:xfrm>
+          <a:prstGeom prst="roundRect">
+            <a:avLst/>
+          </a:prstGeom>
+          <a:solidFill>
+            <a:srgbClr val="F0F3F6"/>
+          </a:solidFill>
+          <a:ln w="19050">
+            <a:solidFill>
+              <a:srgbClr val="003366"/>
+            </a:solidFill>
+          </a:ln>
+        </p:spPr>
+        <p:style>
+          <a:lnRef idx="1">
+            <a:schemeClr val="accent1"/>
+          </a:lnRef>
+          <a:fillRef idx="3">
+            <a:schemeClr val="accent1"/>
+          </a:fillRef>
+          <a:effectRef idx="2">
+            <a:schemeClr val="accent1"/>
+          </a:effectRef>
+          <a:fontRef idx="minor">
+            <a:schemeClr val="lt1"/>
+          </a:fontRef>
+        </p:style>
+        <p:txBody>
+          <a:bodyPr rtlCol="0" anchor="ctr"/>
+          <a:lstStyle/>
+          <a:p>
+            <a:pPr algn="ctr"/>
+          </a:p>
+        </p:txBody>
+      </p:sp>
+      <p:pic>
+        <p:nvPicPr>
+          <p:cNvPr id="7" name="Picture 6" descr="ace_library_mockup_1788503322412.jpg"/>
+          <p:cNvPicPr>
+            <a:picLocks noChangeAspect="1"/>
+          </p:cNvPicPr>
+          <p:nvPr/>
+        </p:nvPicPr>
+        <p:blipFill>
+          <a:blip r:embed="rId2"/>
+          <a:stretch>
+            <a:fillRect/>
+          </a:stretch>
+        </p:blipFill>
+        <p:spPr>
+          <a:xfrm>
+            <a:off x="4279392" y="1719072"/>
+            <a:ext cx="7104888" cy="4242816"/>
+          </a:xfrm>
+          <a:prstGeom prst="rect">
+            <a:avLst/>
+          </a:prstGeom>
+        </p:spPr>
+      </p:pic>
+    </p:spTree>
+  </p:cSld>
+  <p:clrMapOvr>
+    <a:masterClrMapping/>
+  </p:clrMapOvr>
+</p:sld>
+</file>
+
+<file path=ppt/slides/slide2.xml><?xml version="1.0" encoding="utf-8"?>
 <p:sld xmlns:a="http://schemas.openxmlformats.org/drawingml/2006/main" xmlns:p="http://schemas.openxmlformats.org/presentationml/2006/main" xmlns:r="http://schemas.openxmlformats.org/officeDocument/2006/relationships">
   <p:cSld>
     <p:bg>
@@ -6267,7 +7800,7 @@
               </a:defRPr>
             </a:pPr>
             <a:r>
-              <a:t>Glosario Técnico Disciplinar Indispensable</a:t>
+              <a:t>El Dolor del Negocio: Lumina Motion Studio</a:t>
             </a:r>
           </a:p>
           <a:p>
@@ -6283,7 +7816,7 @@
               </a:defRPr>
             </a:pPr>
             <a:r>
-              <a:t>Conceptos Clave para la Defensa Individual (Indicador 11 - 10 pts)</a:t>
+              <a:t>Diagnóstico Operativo de la Infraestructura de Cartelería Digital</a:t>
             </a:r>
           </a:p>
         </p:txBody>
@@ -6338,7 +7871,7 @@
               </a:defRPr>
             </a:pPr>
             <a:r>
-              <a:t>Todo el Equipo</a:t>
+              <a:t>Tomás Escalante | Bloque 1</a:t>
             </a:r>
           </a:p>
         </p:txBody>
@@ -6352,7 +7885,7 @@
         <p:spPr>
           <a:xfrm>
             <a:off x="731520" y="1645920"/>
-            <a:ext cx="5212080" cy="2103120"/>
+            <a:ext cx="3383280" cy="4572000"/>
           </a:xfrm>
           <a:prstGeom prst="roundRect">
             <a:avLst/>
@@ -6396,7 +7929,7 @@
               </a:defRPr>
             </a:pPr>
             <a:r>
-              <a:t>1. Resiliencia Offline / Fail-Safe</a:t>
+              <a:t>1. Operativa Fragmentada</a:t>
             </a:r>
           </a:p>
           <a:p>
@@ -6414,7 +7947,7 @@
                   <a:srgbClr val="1E3A8A"/>
                 </a:solidFill>
               </a:rPr>
-              <a:t>Definición: </a:t>
+              <a:t>Actualización manual: </a:t>
             </a:r>
             <a:r>
               <a:rPr>
@@ -6422,7 +7955,59 @@
                   <a:srgbClr val="334155"/>
                 </a:solidFill>
               </a:rPr>
-              <a:t>Capacidad del nodo reproductor de continuar ejecutando la parrilla multimedia programada utilizando almacenamiento local cuando se interrumpe la conexión a internet.</a:t>
+              <a:t>Gran parte del parque de pantallas se actualiza físicamente vía pendrives USB in situ.</a:t>
+            </a:r>
+          </a:p>
+          <a:p>
+            <a:pPr>
+              <a:spcAft>
+                <a:spcPts val="500"/>
+              </a:spcAft>
+              <a:defRPr sz="1100">
+                <a:latin typeface="Arial"/>
+              </a:defRPr>
+            </a:pPr>
+            <a:r>
+              <a:rPr b="1">
+                <a:solidFill>
+                  <a:srgbClr val="1E3A8A"/>
+                </a:solidFill>
+              </a:rPr>
+              <a:t>Costos logísticos: </a:t>
+            </a:r>
+            <a:r>
+              <a:rPr>
+                <a:solidFill>
+                  <a:srgbClr val="334155"/>
+                </a:solidFill>
+              </a:rPr>
+              <a:t>Traslados continuos de técnicos ante cambios de pauta publicitaria en recintos comerciales.</a:t>
+            </a:r>
+          </a:p>
+          <a:p>
+            <a:pPr>
+              <a:spcAft>
+                <a:spcPts val="500"/>
+              </a:spcAft>
+              <a:defRPr sz="1100">
+                <a:latin typeface="Arial"/>
+              </a:defRPr>
+            </a:pPr>
+            <a:r>
+              <a:rPr b="1">
+                <a:solidFill>
+                  <a:srgbClr val="1E3A8A"/>
+                </a:solidFill>
+              </a:rPr>
+              <a:t>Tiempo de respuesta lento: </a:t>
+            </a:r>
+            <a:r>
+              <a:rPr>
+                <a:solidFill>
+                  <a:srgbClr val="334155"/>
+                </a:solidFill>
+              </a:rPr>
+              <a:t>Horas o días para actualizar un anuncio comercial en múltiples sedes.</a:t>
             </a:r>
           </a:p>
         </p:txBody>
@@ -6436,13 +8021,13 @@
         <p:spPr>
           <a:xfrm>
             <a:off x="777240" y="1691640"/>
-            <a:ext cx="5120640" cy="73152"/>
+            <a:ext cx="3291840" cy="73152"/>
           </a:xfrm>
           <a:prstGeom prst="rect">
             <a:avLst/>
           </a:prstGeom>
           <a:solidFill>
-            <a:srgbClr val="2563EB"/>
+            <a:srgbClr val="D97706"/>
           </a:solidFill>
           <a:ln>
             <a:noFill/>
@@ -6478,8 +8063,8 @@
         </p:nvSpPr>
         <p:spPr>
           <a:xfrm>
-            <a:off x="6217920" y="1645920"/>
-            <a:ext cx="5212080" cy="2103120"/>
+            <a:off x="4389120" y="1645920"/>
+            <a:ext cx="3383280" cy="4572000"/>
           </a:xfrm>
           <a:prstGeom prst="roundRect">
             <a:avLst/>
@@ -6523,7 +8108,7 @@
               </a:defRPr>
             </a:pPr>
             <a:r>
-              <a:t>2. Integridad Criptográfica (SHA-256)</a:t>
+              <a:t>2. Licenciamiento Propietario</a:t>
             </a:r>
           </a:p>
           <a:p>
@@ -6541,7 +8126,7 @@
                   <a:srgbClr val="1E3A8A"/>
                 </a:solidFill>
               </a:rPr>
-              <a:t>Definición: </a:t>
+              <a:t>Herramientas dispares: </a:t>
             </a:r>
             <a:r>
               <a:rPr>
@@ -6549,7 +8134,59 @@
                   <a:srgbClr val="334155"/>
                 </a:solidFill>
               </a:rPr>
-              <a:t>Mecanismo de validación por hash que garantiza que los archivos de video descargados en el reproductor no sufrieron corrupción durante la transferencia de red antes de ser emitidos.</a:t>
+              <a:t>Uso fragmentado de software comercial (MadMapper, Arena.im) sin integración entre sí.</a:t>
+            </a:r>
+          </a:p>
+          <a:p>
+            <a:pPr>
+              <a:spcAft>
+                <a:spcPts val="500"/>
+              </a:spcAft>
+              <a:defRPr sz="1100">
+                <a:latin typeface="Arial"/>
+              </a:defRPr>
+            </a:pPr>
+            <a:r>
+              <a:rPr b="1">
+                <a:solidFill>
+                  <a:srgbClr val="1E3A8A"/>
+                </a:solidFill>
+              </a:rPr>
+              <a:t>Sin panel central: </a:t>
+            </a:r>
+            <a:r>
+              <a:rPr>
+                <a:solidFill>
+                  <a:srgbClr val="334155"/>
+                </a:solidFill>
+              </a:rPr>
+              <a:t>Imposibilidad de gestionar un catálogo unificado de medios y pantallas por sectores.</a:t>
+            </a:r>
+          </a:p>
+          <a:p>
+            <a:pPr>
+              <a:spcAft>
+                <a:spcPts val="500"/>
+              </a:spcAft>
+              <a:defRPr sz="1100">
+                <a:latin typeface="Arial"/>
+              </a:defRPr>
+            </a:pPr>
+            <a:r>
+              <a:rPr b="1">
+                <a:solidFill>
+                  <a:srgbClr val="1E3A8A"/>
+                </a:solidFill>
+              </a:rPr>
+              <a:t>Costos recurrentes: </a:t>
+            </a:r>
+            <a:r>
+              <a:rPr>
+                <a:solidFill>
+                  <a:srgbClr val="334155"/>
+                </a:solidFill>
+              </a:rPr>
+              <a:t>Alto gasto en licencias externas que no resuelven la automatización de horarios.</a:t>
             </a:r>
           </a:p>
         </p:txBody>
@@ -6562,14 +8199,14 @@
         </p:nvSpPr>
         <p:spPr>
           <a:xfrm>
-            <a:off x="6263640" y="1691640"/>
-            <a:ext cx="5120640" cy="73152"/>
+            <a:off x="4434840" y="1691640"/>
+            <a:ext cx="3291840" cy="73152"/>
           </a:xfrm>
           <a:prstGeom prst="rect">
             <a:avLst/>
           </a:prstGeom>
           <a:solidFill>
-            <a:srgbClr val="0D9488"/>
+            <a:srgbClr val="2563EB"/>
           </a:solidFill>
           <a:ln>
             <a:noFill/>
@@ -6605,8 +8242,8 @@
         </p:nvSpPr>
         <p:spPr>
           <a:xfrm>
-            <a:off x="731520" y="4023360"/>
-            <a:ext cx="3383280" cy="2194560"/>
+            <a:off x="8046720" y="1645920"/>
+            <a:ext cx="3383280" cy="4572000"/>
           </a:xfrm>
           <a:prstGeom prst="roundRect">
             <a:avLst/>
@@ -6650,7 +8287,7 @@
               </a:defRPr>
             </a:pPr>
             <a:r>
-              <a:t>3. Persistencia ACID (MariaDB)</a:t>
+              <a:t>3. Falla Crítica de Red</a:t>
             </a:r>
           </a:p>
           <a:p>
@@ -6668,7 +8305,7 @@
                   <a:srgbClr val="1E3A8A"/>
                 </a:solidFill>
               </a:rPr>
-              <a:t>Definición: </a:t>
+              <a:t>Vulnerabilidad WAN: </a:t>
             </a:r>
             <a:r>
               <a:rPr>
@@ -6676,7 +8313,59 @@
                   <a:srgbClr val="334155"/>
                 </a:solidFill>
               </a:rPr>
-              <a:t>Garantía de atomicidad, consistencia, aislamiento y durabilidad en operaciones relacionales que controlan la planificación horaria sin solapamientos.</a:t>
+              <a:t>La conectividad a internet en recintos masivos (malls, eventos) es inestable y propensa a caídas.</a:t>
+            </a:r>
+          </a:p>
+          <a:p>
+            <a:pPr>
+              <a:spcAft>
+                <a:spcPts val="500"/>
+              </a:spcAft>
+              <a:defRPr sz="1100">
+                <a:latin typeface="Arial"/>
+              </a:defRPr>
+            </a:pPr>
+            <a:r>
+              <a:rPr b="1">
+                <a:solidFill>
+                  <a:srgbClr val="1E3A8A"/>
+                </a:solidFill>
+              </a:rPr>
+              <a:t>Riesgo de pantalla en negro: </a:t>
+            </a:r>
+            <a:r>
+              <a:rPr>
+                <a:solidFill>
+                  <a:srgbClr val="334155"/>
+                </a:solidFill>
+              </a:rPr>
+              <a:t>Soluciones basadas en streaming colapsan ante interrupciones de red.</a:t>
+            </a:r>
+          </a:p>
+          <a:p>
+            <a:pPr>
+              <a:spcAft>
+                <a:spcPts val="500"/>
+              </a:spcAft>
+              <a:defRPr sz="1100">
+                <a:latin typeface="Arial"/>
+              </a:defRPr>
+            </a:pPr>
+            <a:r>
+              <a:rPr b="1">
+                <a:solidFill>
+                  <a:srgbClr val="1E3A8A"/>
+                </a:solidFill>
+              </a:rPr>
+              <a:t>Penalizaciones comerciales: </a:t>
+            </a:r>
+            <a:r>
+              <a:rPr>
+                <a:solidFill>
+                  <a:srgbClr val="334155"/>
+                </a:solidFill>
+              </a:rPr>
+              <a:t>Pérdida de ingresos y sanciones contractuales por indisponibilidad de anuncios.</a:t>
             </a:r>
           </a:p>
         </p:txBody>
@@ -6689,14 +8378,14 @@
         </p:nvSpPr>
         <p:spPr>
           <a:xfrm>
-            <a:off x="777240" y="4069080"/>
+            <a:off x="8092440" y="1691640"/>
             <a:ext cx="3291840" cy="73152"/>
           </a:xfrm>
           <a:prstGeom prst="rect">
             <a:avLst/>
           </a:prstGeom>
           <a:solidFill>
-            <a:srgbClr val="D97706"/>
+            <a:srgbClr val="DC2626"/>
           </a:solidFill>
           <a:ln>
             <a:noFill/>
@@ -6721,1367 +8410,6 @@
           <a:lstStyle/>
           <a:p>
             <a:pPr algn="ctr"/>
-          </a:p>
-        </p:txBody>
-      </p:sp>
-      <p:sp>
-        <p:nvSpPr>
-          <p:cNvPr id="11" name="Rounded Rectangle 10"/>
-          <p:cNvSpPr/>
-          <p:nvPr/>
-        </p:nvSpPr>
-        <p:spPr>
-          <a:xfrm>
-            <a:off x="4389120" y="4023360"/>
-            <a:ext cx="3383280" cy="2194560"/>
-          </a:xfrm>
-          <a:prstGeom prst="roundRect">
-            <a:avLst/>
-          </a:prstGeom>
-          <a:solidFill>
-            <a:srgbClr val="F8FAFC"/>
-          </a:solidFill>
-          <a:ln w="12700">
-            <a:solidFill>
-              <a:srgbClr val="E2E8F0"/>
-            </a:solidFill>
-          </a:ln>
-        </p:spPr>
-        <p:style>
-          <a:lnRef idx="1">
-            <a:schemeClr val="accent1"/>
-          </a:lnRef>
-          <a:fillRef idx="3">
-            <a:schemeClr val="accent1"/>
-          </a:fillRef>
-          <a:effectRef idx="2">
-            <a:schemeClr val="accent1"/>
-          </a:effectRef>
-          <a:fontRef idx="minor">
-            <a:schemeClr val="lt1"/>
-          </a:fontRef>
-        </p:style>
-        <p:txBody>
-          <a:bodyPr rtlCol="0" anchor="t" wrap="square" lIns="228600" rIns="228600" tIns="201168" bIns="182880"/>
-          <a:lstStyle/>
-          <a:p>
-            <a:pPr algn="ctr">
-              <a:spcAft>
-                <a:spcPts val="800"/>
-              </a:spcAft>
-              <a:defRPr sz="1500" b="1">
-                <a:solidFill>
-                  <a:srgbClr val="1E3A8A"/>
-                </a:solidFill>
-                <a:latin typeface="Arial"/>
-              </a:defRPr>
-            </a:pPr>
-            <a:r>
-              <a:t>4. Protocolo Dual (API &amp; WebSockets)</a:t>
-            </a:r>
-          </a:p>
-          <a:p>
-            <a:pPr>
-              <a:spcAft>
-                <a:spcPts val="500"/>
-              </a:spcAft>
-              <a:defRPr sz="1100">
-                <a:latin typeface="Arial"/>
-              </a:defRPr>
-            </a:pPr>
-            <a:r>
-              <a:rPr b="1">
-                <a:solidFill>
-                  <a:srgbClr val="1E3A8A"/>
-                </a:solidFill>
-              </a:rPr>
-              <a:t>Definición: </a:t>
-            </a:r>
-            <a:r>
-              <a:rPr>
-                <a:solidFill>
-                  <a:srgbClr val="334155"/>
-                </a:solidFill>
-              </a:rPr>
-              <a:t>HTTP REST sin estado para administración CRUD y WebSockets para telemetría bidireccional (heartbeats) y control inmediato de pantallas.</a:t>
-            </a:r>
-          </a:p>
-        </p:txBody>
-      </p:sp>
-      <p:sp>
-        <p:nvSpPr>
-          <p:cNvPr id="12" name="Rectangle 11"/>
-          <p:cNvSpPr/>
-          <p:nvPr/>
-        </p:nvSpPr>
-        <p:spPr>
-          <a:xfrm>
-            <a:off x="4434840" y="4069080"/>
-            <a:ext cx="3291840" cy="73152"/>
-          </a:xfrm>
-          <a:prstGeom prst="rect">
-            <a:avLst/>
-          </a:prstGeom>
-          <a:solidFill>
-            <a:srgbClr val="2563EB"/>
-          </a:solidFill>
-          <a:ln>
-            <a:noFill/>
-          </a:ln>
-        </p:spPr>
-        <p:style>
-          <a:lnRef idx="1">
-            <a:schemeClr val="accent1"/>
-          </a:lnRef>
-          <a:fillRef idx="3">
-            <a:schemeClr val="accent1"/>
-          </a:fillRef>
-          <a:effectRef idx="2">
-            <a:schemeClr val="accent1"/>
-          </a:effectRef>
-          <a:fontRef idx="minor">
-            <a:schemeClr val="lt1"/>
-          </a:fontRef>
-        </p:style>
-        <p:txBody>
-          <a:bodyPr rtlCol="0" anchor="ctr"/>
-          <a:lstStyle/>
-          <a:p>
-            <a:pPr algn="ctr"/>
-          </a:p>
-        </p:txBody>
-      </p:sp>
-      <p:sp>
-        <p:nvSpPr>
-          <p:cNvPr id="13" name="Rounded Rectangle 12"/>
-          <p:cNvSpPr/>
-          <p:nvPr/>
-        </p:nvSpPr>
-        <p:spPr>
-          <a:xfrm>
-            <a:off x="8046720" y="4023360"/>
-            <a:ext cx="3383280" cy="2194560"/>
-          </a:xfrm>
-          <a:prstGeom prst="roundRect">
-            <a:avLst/>
-          </a:prstGeom>
-          <a:solidFill>
-            <a:srgbClr val="F8FAFC"/>
-          </a:solidFill>
-          <a:ln w="12700">
-            <a:solidFill>
-              <a:srgbClr val="E2E8F0"/>
-            </a:solidFill>
-          </a:ln>
-        </p:spPr>
-        <p:style>
-          <a:lnRef idx="1">
-            <a:schemeClr val="accent1"/>
-          </a:lnRef>
-          <a:fillRef idx="3">
-            <a:schemeClr val="accent1"/>
-          </a:fillRef>
-          <a:effectRef idx="2">
-            <a:schemeClr val="accent1"/>
-          </a:effectRef>
-          <a:fontRef idx="minor">
-            <a:schemeClr val="lt1"/>
-          </a:fontRef>
-        </p:style>
-        <p:txBody>
-          <a:bodyPr rtlCol="0" anchor="t" wrap="square" lIns="228600" rIns="228600" tIns="201168" bIns="182880"/>
-          <a:lstStyle/>
-          <a:p>
-            <a:pPr algn="ctr">
-              <a:spcAft>
-                <a:spcPts val="800"/>
-              </a:spcAft>
-              <a:defRPr sz="1500" b="1">
-                <a:solidFill>
-                  <a:srgbClr val="1E3A8A"/>
-                </a:solidFill>
-                <a:latin typeface="Arial"/>
-              </a:defRPr>
-            </a:pPr>
-            <a:r>
-              <a:t>5. Arquitectura Desacoplada</a:t>
-            </a:r>
-          </a:p>
-          <a:p>
-            <a:pPr>
-              <a:spcAft>
-                <a:spcPts val="500"/>
-              </a:spcAft>
-              <a:defRPr sz="1100">
-                <a:latin typeface="Arial"/>
-              </a:defRPr>
-            </a:pPr>
-            <a:r>
-              <a:t>Definición: Separación física y lógica entre la capa de administración centralizada en la nube y los nodos ejecutores autónomos desplegados en locaciones fijas (NUCs).</a:t>
-            </a:r>
-          </a:p>
-        </p:txBody>
-      </p:sp>
-      <p:sp>
-        <p:nvSpPr>
-          <p:cNvPr id="14" name="Rectangle 13"/>
-          <p:cNvSpPr/>
-          <p:nvPr/>
-        </p:nvSpPr>
-        <p:spPr>
-          <a:xfrm>
-            <a:off x="8092440" y="4069080"/>
-            <a:ext cx="3291840" cy="73152"/>
-          </a:xfrm>
-          <a:prstGeom prst="rect">
-            <a:avLst/>
-          </a:prstGeom>
-          <a:solidFill>
-            <a:srgbClr val="0D9488"/>
-          </a:solidFill>
-          <a:ln>
-            <a:noFill/>
-          </a:ln>
-        </p:spPr>
-        <p:style>
-          <a:lnRef idx="1">
-            <a:schemeClr val="accent1"/>
-          </a:lnRef>
-          <a:fillRef idx="3">
-            <a:schemeClr val="accent1"/>
-          </a:fillRef>
-          <a:effectRef idx="2">
-            <a:schemeClr val="accent1"/>
-          </a:effectRef>
-          <a:fontRef idx="minor">
-            <a:schemeClr val="lt1"/>
-          </a:fontRef>
-        </p:style>
-        <p:txBody>
-          <a:bodyPr rtlCol="0" anchor="ctr"/>
-          <a:lstStyle/>
-          <a:p>
-            <a:pPr algn="ctr"/>
-          </a:p>
-        </p:txBody>
-      </p:sp>
-    </p:spTree>
-  </p:cSld>
-  <p:clrMapOvr>
-    <a:masterClrMapping/>
-  </p:clrMapOvr>
-</p:sld>
-</file>
-
-<file path=ppt/slides/slide13.xml><?xml version="1.0" encoding="utf-8"?>
-<p:sld xmlns:a="http://schemas.openxmlformats.org/drawingml/2006/main" xmlns:p="http://schemas.openxmlformats.org/presentationml/2006/main" xmlns:r="http://schemas.openxmlformats.org/officeDocument/2006/relationships">
-  <p:cSld>
-    <p:bg>
-      <p:bgPr>
-        <a:solidFill>
-          <a:srgbClr val="FFFFFF"/>
-        </a:solidFill>
-        <a:effectLst/>
-      </p:bgPr>
-    </p:bg>
-    <p:spTree>
-      <p:nvGrpSpPr>
-        <p:cNvPr id="1" name=""/>
-        <p:cNvGrpSpPr/>
-        <p:nvPr/>
-      </p:nvGrpSpPr>
-      <p:grpSpPr/>
-      <p:sp>
-        <p:nvSpPr>
-          <p:cNvPr id="2" name="Rectangle 1"/>
-          <p:cNvSpPr/>
-          <p:nvPr/>
-        </p:nvSpPr>
-        <p:spPr>
-          <a:xfrm>
-            <a:off x="731520" y="457200"/>
-            <a:ext cx="10728655" cy="45720"/>
-          </a:xfrm>
-          <a:prstGeom prst="rect">
-            <a:avLst/>
-          </a:prstGeom>
-          <a:solidFill>
-            <a:srgbClr val="2563EB"/>
-          </a:solidFill>
-          <a:ln>
-            <a:noFill/>
-          </a:ln>
-        </p:spPr>
-        <p:style>
-          <a:lnRef idx="1">
-            <a:schemeClr val="accent1"/>
-          </a:lnRef>
-          <a:fillRef idx="3">
-            <a:schemeClr val="accent1"/>
-          </a:fillRef>
-          <a:effectRef idx="2">
-            <a:schemeClr val="accent1"/>
-          </a:effectRef>
-          <a:fontRef idx="minor">
-            <a:schemeClr val="lt1"/>
-          </a:fontRef>
-        </p:style>
-        <p:txBody>
-          <a:bodyPr rtlCol="0" anchor="ctr"/>
-          <a:lstStyle/>
-          <a:p>
-            <a:pPr algn="ctr"/>
-          </a:p>
-        </p:txBody>
-      </p:sp>
-      <p:sp>
-        <p:nvSpPr>
-          <p:cNvPr id="3" name="TextBox 2"/>
-          <p:cNvSpPr txBox="1"/>
-          <p:nvPr/>
-        </p:nvSpPr>
-        <p:spPr>
-          <a:xfrm>
-            <a:off x="731520" y="594360"/>
-            <a:ext cx="8686800" cy="822960"/>
-          </a:xfrm>
-          <a:prstGeom prst="rect">
-            <a:avLst/>
-          </a:prstGeom>
-          <a:noFill/>
-        </p:spPr>
-        <p:txBody>
-          <a:bodyPr wrap="square" lIns="0" tIns="0" rIns="0" bIns="0">
-            <a:spAutoFit/>
-          </a:bodyPr>
-          <a:lstStyle/>
-          <a:p>
-            <a:pPr>
-              <a:defRPr sz="2400" b="1">
-                <a:solidFill>
-                  <a:srgbClr val="1E3A8A"/>
-                </a:solidFill>
-                <a:latin typeface="Arial"/>
-              </a:defRPr>
-            </a:pPr>
-            <a:r>
-              <a:t>Banco de Preguntas Típicas de la Comisión Docente</a:t>
-            </a:r>
-          </a:p>
-          <a:p>
-            <a:pPr>
-              <a:spcBef>
-                <a:spcPts val="200"/>
-              </a:spcBef>
-              <a:defRPr sz="1300">
-                <a:solidFill>
-                  <a:srgbClr val="64748B"/>
-                </a:solidFill>
-                <a:latin typeface="Arial"/>
-              </a:defRPr>
-            </a:pPr>
-            <a:r>
-              <a:t>Defensa de Decisiones Técnicas y Metodológicas de Ingeniería</a:t>
-            </a:r>
-          </a:p>
-        </p:txBody>
-      </p:sp>
-      <p:sp>
-        <p:nvSpPr>
-          <p:cNvPr id="4" name="Rounded Rectangle 3"/>
-          <p:cNvSpPr/>
-          <p:nvPr/>
-        </p:nvSpPr>
-        <p:spPr>
-          <a:xfrm>
-            <a:off x="9326880" y="640080"/>
-            <a:ext cx="2133295" cy="411480"/>
-          </a:xfrm>
-          <a:prstGeom prst="roundRect">
-            <a:avLst/>
-          </a:prstGeom>
-          <a:solidFill>
-            <a:srgbClr val="EEF2FF"/>
-          </a:solidFill>
-          <a:ln w="12700">
-            <a:solidFill>
-              <a:srgbClr val="2563EB"/>
-            </a:solidFill>
-          </a:ln>
-        </p:spPr>
-        <p:style>
-          <a:lnRef idx="1">
-            <a:schemeClr val="accent1"/>
-          </a:lnRef>
-          <a:fillRef idx="3">
-            <a:schemeClr val="accent1"/>
-          </a:fillRef>
-          <a:effectRef idx="2">
-            <a:schemeClr val="accent1"/>
-          </a:effectRef>
-          <a:fontRef idx="minor">
-            <a:schemeClr val="lt1"/>
-          </a:fontRef>
-        </p:style>
-        <p:txBody>
-          <a:bodyPr rtlCol="0" anchor="ctr"/>
-          <a:lstStyle/>
-          <a:p>
-            <a:pPr algn="ctr">
-              <a:defRPr sz="1050" b="1">
-                <a:solidFill>
-                  <a:srgbClr val="2563EB"/>
-                </a:solidFill>
-                <a:latin typeface="Arial"/>
-              </a:defRPr>
-            </a:pPr>
-            <a:r>
-              <a:t>Todo el Equipo</a:t>
-            </a:r>
-          </a:p>
-        </p:txBody>
-      </p:sp>
-      <p:sp>
-        <p:nvSpPr>
-          <p:cNvPr id="5" name="Rounded Rectangle 4"/>
-          <p:cNvSpPr/>
-          <p:nvPr/>
-        </p:nvSpPr>
-        <p:spPr>
-          <a:xfrm>
-            <a:off x="731520" y="1645920"/>
-            <a:ext cx="5212080" cy="2194560"/>
-          </a:xfrm>
-          <a:prstGeom prst="roundRect">
-            <a:avLst/>
-          </a:prstGeom>
-          <a:solidFill>
-            <a:srgbClr val="F8FAFC"/>
-          </a:solidFill>
-          <a:ln w="12700">
-            <a:solidFill>
-              <a:srgbClr val="E2E8F0"/>
-            </a:solidFill>
-          </a:ln>
-        </p:spPr>
-        <p:style>
-          <a:lnRef idx="1">
-            <a:schemeClr val="accent1"/>
-          </a:lnRef>
-          <a:fillRef idx="3">
-            <a:schemeClr val="accent1"/>
-          </a:fillRef>
-          <a:effectRef idx="2">
-            <a:schemeClr val="accent1"/>
-          </a:effectRef>
-          <a:fontRef idx="minor">
-            <a:schemeClr val="lt1"/>
-          </a:fontRef>
-        </p:style>
-        <p:txBody>
-          <a:bodyPr rtlCol="0" anchor="t" wrap="square" lIns="228600" rIns="228600" tIns="201168" bIns="182880"/>
-          <a:lstStyle/>
-          <a:p>
-            <a:pPr algn="ctr">
-              <a:spcAft>
-                <a:spcPts val="800"/>
-              </a:spcAft>
-              <a:defRPr sz="1500" b="1">
-                <a:solidFill>
-                  <a:srgbClr val="1E3A8A"/>
-                </a:solidFill>
-                <a:latin typeface="Arial"/>
-              </a:defRPr>
-            </a:pPr>
-            <a:r>
-              <a:t>¿Por qué Laravel y MariaDB vs NoSQL?</a:t>
-            </a:r>
-          </a:p>
-          <a:p>
-            <a:pPr>
-              <a:spcAft>
-                <a:spcPts val="500"/>
-              </a:spcAft>
-              <a:defRPr sz="1100">
-                <a:latin typeface="Arial"/>
-              </a:defRPr>
-            </a:pPr>
-            <a:r>
-              <a:t>Fundamento: El dominio de cartelería digital es estrictamente estructurado (Locaciones &gt; Sectores &gt; Pantallas &gt; Playlists). Las transacciones ACID y llaves foráneas de MariaDB previenen estados inconsistentes y solapamientos que en NoSQL exigirían validaciones manuales complejas.</a:t>
-            </a:r>
-          </a:p>
-        </p:txBody>
-      </p:sp>
-      <p:sp>
-        <p:nvSpPr>
-          <p:cNvPr id="6" name="Rectangle 5"/>
-          <p:cNvSpPr/>
-          <p:nvPr/>
-        </p:nvSpPr>
-        <p:spPr>
-          <a:xfrm>
-            <a:off x="777240" y="1691640"/>
-            <a:ext cx="5120640" cy="73152"/>
-          </a:xfrm>
-          <a:prstGeom prst="rect">
-            <a:avLst/>
-          </a:prstGeom>
-          <a:solidFill>
-            <a:srgbClr val="2563EB"/>
-          </a:solidFill>
-          <a:ln>
-            <a:noFill/>
-          </a:ln>
-        </p:spPr>
-        <p:style>
-          <a:lnRef idx="1">
-            <a:schemeClr val="accent1"/>
-          </a:lnRef>
-          <a:fillRef idx="3">
-            <a:schemeClr val="accent1"/>
-          </a:fillRef>
-          <a:effectRef idx="2">
-            <a:schemeClr val="accent1"/>
-          </a:effectRef>
-          <a:fontRef idx="minor">
-            <a:schemeClr val="lt1"/>
-          </a:fontRef>
-        </p:style>
-        <p:txBody>
-          <a:bodyPr rtlCol="0" anchor="ctr"/>
-          <a:lstStyle/>
-          <a:p>
-            <a:pPr algn="ctr"/>
-          </a:p>
-        </p:txBody>
-      </p:sp>
-      <p:sp>
-        <p:nvSpPr>
-          <p:cNvPr id="7" name="Rounded Rectangle 6"/>
-          <p:cNvSpPr/>
-          <p:nvPr/>
-        </p:nvSpPr>
-        <p:spPr>
-          <a:xfrm>
-            <a:off x="6217920" y="1645920"/>
-            <a:ext cx="5212080" cy="2194560"/>
-          </a:xfrm>
-          <a:prstGeom prst="roundRect">
-            <a:avLst/>
-          </a:prstGeom>
-          <a:solidFill>
-            <a:srgbClr val="F8FAFC"/>
-          </a:solidFill>
-          <a:ln w="12700">
-            <a:solidFill>
-              <a:srgbClr val="E2E8F0"/>
-            </a:solidFill>
-          </a:ln>
-        </p:spPr>
-        <p:style>
-          <a:lnRef idx="1">
-            <a:schemeClr val="accent1"/>
-          </a:lnRef>
-          <a:fillRef idx="3">
-            <a:schemeClr val="accent1"/>
-          </a:fillRef>
-          <a:effectRef idx="2">
-            <a:schemeClr val="accent1"/>
-          </a:effectRef>
-          <a:fontRef idx="minor">
-            <a:schemeClr val="lt1"/>
-          </a:fontRef>
-        </p:style>
-        <p:txBody>
-          <a:bodyPr rtlCol="0" anchor="t" wrap="square" lIns="228600" rIns="228600" tIns="201168" bIns="182880"/>
-          <a:lstStyle/>
-          <a:p>
-            <a:pPr algn="ctr">
-              <a:spcAft>
-                <a:spcPts val="800"/>
-              </a:spcAft>
-              <a:defRPr sz="1500" b="1">
-                <a:solidFill>
-                  <a:srgbClr val="1E3A8A"/>
-                </a:solidFill>
-                <a:latin typeface="Arial"/>
-              </a:defRPr>
-            </a:pPr>
-            <a:r>
-              <a:t>¿Cómo evitan pantallas en negro en malls?</a:t>
-            </a:r>
-          </a:p>
-          <a:p>
-            <a:pPr>
-              <a:spcAft>
-                <a:spcPts val="500"/>
-              </a:spcAft>
-              <a:defRPr sz="1100">
-                <a:latin typeface="Arial"/>
-              </a:defRPr>
-            </a:pPr>
-            <a:r>
-              <a:rPr b="1">
-                <a:solidFill>
-                  <a:srgbClr val="1E3A8A"/>
-                </a:solidFill>
-              </a:rPr>
-              <a:t>Fundamento: </a:t>
-            </a:r>
-            <a:r>
-              <a:rPr>
-                <a:solidFill>
-                  <a:srgbClr val="334155"/>
-                </a:solidFill>
-              </a:rPr>
-              <a:t>Arquitectura Cache-First: el reproductor nunca hace streaming directo. Descarga preventivamente los videos a disco local y verifica SHA-256. Ante caída de red, reproduce localmente y expone un panel web en la intranet para control manual de emergencia.</a:t>
-            </a:r>
-          </a:p>
-        </p:txBody>
-      </p:sp>
-      <p:sp>
-        <p:nvSpPr>
-          <p:cNvPr id="8" name="Rectangle 7"/>
-          <p:cNvSpPr/>
-          <p:nvPr/>
-        </p:nvSpPr>
-        <p:spPr>
-          <a:xfrm>
-            <a:off x="6263640" y="1691640"/>
-            <a:ext cx="5120640" cy="73152"/>
-          </a:xfrm>
-          <a:prstGeom prst="rect">
-            <a:avLst/>
-          </a:prstGeom>
-          <a:solidFill>
-            <a:srgbClr val="0D9488"/>
-          </a:solidFill>
-          <a:ln>
-            <a:noFill/>
-          </a:ln>
-        </p:spPr>
-        <p:style>
-          <a:lnRef idx="1">
-            <a:schemeClr val="accent1"/>
-          </a:lnRef>
-          <a:fillRef idx="3">
-            <a:schemeClr val="accent1"/>
-          </a:fillRef>
-          <a:effectRef idx="2">
-            <a:schemeClr val="accent1"/>
-          </a:effectRef>
-          <a:fontRef idx="minor">
-            <a:schemeClr val="lt1"/>
-          </a:fontRef>
-        </p:style>
-        <p:txBody>
-          <a:bodyPr rtlCol="0" anchor="ctr"/>
-          <a:lstStyle/>
-          <a:p>
-            <a:pPr algn="ctr"/>
-          </a:p>
-        </p:txBody>
-      </p:sp>
-      <p:sp>
-        <p:nvSpPr>
-          <p:cNvPr id="9" name="Rounded Rectangle 8"/>
-          <p:cNvSpPr/>
-          <p:nvPr/>
-        </p:nvSpPr>
-        <p:spPr>
-          <a:xfrm>
-            <a:off x="731520" y="4023360"/>
-            <a:ext cx="5212080" cy="2194560"/>
-          </a:xfrm>
-          <a:prstGeom prst="roundRect">
-            <a:avLst/>
-          </a:prstGeom>
-          <a:solidFill>
-            <a:srgbClr val="F8FAFC"/>
-          </a:solidFill>
-          <a:ln w="12700">
-            <a:solidFill>
-              <a:srgbClr val="E2E8F0"/>
-            </a:solidFill>
-          </a:ln>
-        </p:spPr>
-        <p:style>
-          <a:lnRef idx="1">
-            <a:schemeClr val="accent1"/>
-          </a:lnRef>
-          <a:fillRef idx="3">
-            <a:schemeClr val="accent1"/>
-          </a:fillRef>
-          <a:effectRef idx="2">
-            <a:schemeClr val="accent1"/>
-          </a:effectRef>
-          <a:fontRef idx="minor">
-            <a:schemeClr val="lt1"/>
-          </a:fontRef>
-        </p:style>
-        <p:txBody>
-          <a:bodyPr rtlCol="0" anchor="t" wrap="square" lIns="228600" rIns="228600" tIns="201168" bIns="182880"/>
-          <a:lstStyle/>
-          <a:p>
-            <a:pPr algn="ctr">
-              <a:spcAft>
-                <a:spcPts val="800"/>
-              </a:spcAft>
-              <a:defRPr sz="1500" b="1">
-                <a:solidFill>
-                  <a:srgbClr val="1E3A8A"/>
-                </a:solidFill>
-                <a:latin typeface="Arial"/>
-              </a:defRPr>
-            </a:pPr>
-            <a:r>
-              <a:t>¿Cómo aseguran terminar en 18 semanas?</a:t>
-            </a:r>
-          </a:p>
-          <a:p>
-            <a:pPr>
-              <a:spcAft>
-                <a:spcPts val="500"/>
-              </a:spcAft>
-              <a:defRPr sz="1100">
-                <a:latin typeface="Arial"/>
-              </a:defRPr>
-            </a:pPr>
-            <a:r>
-              <a:rPr b="1">
-                <a:solidFill>
-                  <a:srgbClr val="1E3A8A"/>
-                </a:solidFill>
-              </a:rPr>
-              <a:t>Fundamento: </a:t>
-            </a:r>
-            <a:r>
-              <a:rPr>
-                <a:solidFill>
-                  <a:srgbClr val="334155"/>
-                </a:solidFill>
-              </a:rPr>
-              <a:t>Delimitación estricta del alcance: ACE es distribución y programación (se excluye edición de video). Scrum bisemanal con hito crítico en S10 (core API y DB operativo), dejando semanas finales para pruebas de resiliencia y UAT con Lumina.</a:t>
-            </a:r>
-          </a:p>
-        </p:txBody>
-      </p:sp>
-      <p:sp>
-        <p:nvSpPr>
-          <p:cNvPr id="10" name="Rectangle 9"/>
-          <p:cNvSpPr/>
-          <p:nvPr/>
-        </p:nvSpPr>
-        <p:spPr>
-          <a:xfrm>
-            <a:off x="777240" y="4069080"/>
-            <a:ext cx="5120640" cy="73152"/>
-          </a:xfrm>
-          <a:prstGeom prst="rect">
-            <a:avLst/>
-          </a:prstGeom>
-          <a:solidFill>
-            <a:srgbClr val="D97706"/>
-          </a:solidFill>
-          <a:ln>
-            <a:noFill/>
-          </a:ln>
-        </p:spPr>
-        <p:style>
-          <a:lnRef idx="1">
-            <a:schemeClr val="accent1"/>
-          </a:lnRef>
-          <a:fillRef idx="3">
-            <a:schemeClr val="accent1"/>
-          </a:fillRef>
-          <a:effectRef idx="2">
-            <a:schemeClr val="accent1"/>
-          </a:effectRef>
-          <a:fontRef idx="minor">
-            <a:schemeClr val="lt1"/>
-          </a:fontRef>
-        </p:style>
-        <p:txBody>
-          <a:bodyPr rtlCol="0" anchor="ctr"/>
-          <a:lstStyle/>
-          <a:p>
-            <a:pPr algn="ctr"/>
-          </a:p>
-        </p:txBody>
-      </p:sp>
-      <p:sp>
-        <p:nvSpPr>
-          <p:cNvPr id="11" name="Rounded Rectangle 10"/>
-          <p:cNvSpPr/>
-          <p:nvPr/>
-        </p:nvSpPr>
-        <p:spPr>
-          <a:xfrm>
-            <a:off x="6217920" y="4023360"/>
-            <a:ext cx="5212080" cy="2194560"/>
-          </a:xfrm>
-          <a:prstGeom prst="roundRect">
-            <a:avLst/>
-          </a:prstGeom>
-          <a:solidFill>
-            <a:srgbClr val="F8FAFC"/>
-          </a:solidFill>
-          <a:ln w="12700">
-            <a:solidFill>
-              <a:srgbClr val="E2E8F0"/>
-            </a:solidFill>
-          </a:ln>
-        </p:spPr>
-        <p:style>
-          <a:lnRef idx="1">
-            <a:schemeClr val="accent1"/>
-          </a:lnRef>
-          <a:fillRef idx="3">
-            <a:schemeClr val="accent1"/>
-          </a:fillRef>
-          <a:effectRef idx="2">
-            <a:schemeClr val="accent1"/>
-          </a:effectRef>
-          <a:fontRef idx="minor">
-            <a:schemeClr val="lt1"/>
-          </a:fontRef>
-        </p:style>
-        <p:txBody>
-          <a:bodyPr rtlCol="0" anchor="t" wrap="square" lIns="228600" rIns="228600" tIns="201168" bIns="182880"/>
-          <a:lstStyle/>
-          <a:p>
-            <a:pPr algn="ctr">
-              <a:spcAft>
-                <a:spcPts val="800"/>
-              </a:spcAft>
-              <a:defRPr sz="1500" b="1">
-                <a:solidFill>
-                  <a:srgbClr val="1E3A8A"/>
-                </a:solidFill>
-                <a:latin typeface="Arial"/>
-              </a:defRPr>
-            </a:pPr>
-            <a:r>
-              <a:t>¿Cómo garantizan aporte equitativo?</a:t>
-            </a:r>
-          </a:p>
-          <a:p>
-            <a:pPr>
-              <a:spcAft>
-                <a:spcPts val="500"/>
-              </a:spcAft>
-              <a:defRPr sz="1100">
-                <a:latin typeface="Arial"/>
-              </a:defRPr>
-            </a:pPr>
-            <a:r>
-              <a:t>Fundamento: Distribución por dominios técnicos complementarios y corresponsabilidad en persistencia (MariaDB): Tomás (Arquitectura, Backend y BD), Matías (Gestión Ágil, Vinculación con Cliente y BD) y Paulo (Frontend, UI/UX y Documentación Técnica). Trazabilidad auditable mediante Pull Requests cruzados en GitHub.</a:t>
-            </a:r>
-          </a:p>
-        </p:txBody>
-      </p:sp>
-      <p:sp>
-        <p:nvSpPr>
-          <p:cNvPr id="12" name="Rectangle 11"/>
-          <p:cNvSpPr/>
-          <p:nvPr/>
-        </p:nvSpPr>
-        <p:spPr>
-          <a:xfrm>
-            <a:off x="6263640" y="4069080"/>
-            <a:ext cx="5120640" cy="73152"/>
-          </a:xfrm>
-          <a:prstGeom prst="rect">
-            <a:avLst/>
-          </a:prstGeom>
-          <a:solidFill>
-            <a:srgbClr val="1E3A8A"/>
-          </a:solidFill>
-          <a:ln>
-            <a:noFill/>
-          </a:ln>
-        </p:spPr>
-        <p:style>
-          <a:lnRef idx="1">
-            <a:schemeClr val="accent1"/>
-          </a:lnRef>
-          <a:fillRef idx="3">
-            <a:schemeClr val="accent1"/>
-          </a:fillRef>
-          <a:effectRef idx="2">
-            <a:schemeClr val="accent1"/>
-          </a:effectRef>
-          <a:fontRef idx="minor">
-            <a:schemeClr val="lt1"/>
-          </a:fontRef>
-        </p:style>
-        <p:txBody>
-          <a:bodyPr rtlCol="0" anchor="ctr"/>
-          <a:lstStyle/>
-          <a:p>
-            <a:pPr algn="ctr"/>
-          </a:p>
-        </p:txBody>
-      </p:sp>
-    </p:spTree>
-  </p:cSld>
-  <p:clrMapOvr>
-    <a:masterClrMapping/>
-  </p:clrMapOvr>
-</p:sld>
-</file>
-
-<file path=ppt/slides/slide2.xml><?xml version="1.0" encoding="utf-8"?>
-<p:sld xmlns:a="http://schemas.openxmlformats.org/drawingml/2006/main" xmlns:p="http://schemas.openxmlformats.org/presentationml/2006/main" xmlns:r="http://schemas.openxmlformats.org/officeDocument/2006/relationships">
-  <p:cSld>
-    <p:spTree>
-      <p:nvGrpSpPr>
-        <p:cNvPr id="1" name=""/>
-        <p:cNvGrpSpPr/>
-        <p:nvPr/>
-      </p:nvGrpSpPr>
-      <p:grpSpPr/>
-      <p:sp>
-        <p:nvSpPr>
-          <p:cNvPr id="2" name="Rectangle 1"/>
-          <p:cNvSpPr/>
-          <p:nvPr/>
-        </p:nvSpPr>
-        <p:spPr>
-          <a:xfrm>
-            <a:off x="731520" y="457200"/>
-            <a:ext cx="10725912" cy="45720"/>
-          </a:xfrm>
-          <a:prstGeom prst="rect">
-            <a:avLst/>
-          </a:prstGeom>
-          <a:solidFill>
-            <a:srgbClr val="003366"/>
-          </a:solidFill>
-          <a:ln>
-            <a:noFill/>
-          </a:ln>
-        </p:spPr>
-        <p:style>
-          <a:lnRef idx="1">
-            <a:schemeClr val="accent1"/>
-          </a:lnRef>
-          <a:fillRef idx="3">
-            <a:schemeClr val="accent1"/>
-          </a:fillRef>
-          <a:effectRef idx="2">
-            <a:schemeClr val="accent1"/>
-          </a:effectRef>
-          <a:fontRef idx="minor">
-            <a:schemeClr val="lt1"/>
-          </a:fontRef>
-        </p:style>
-        <p:txBody>
-          <a:bodyPr rtlCol="0" anchor="ctr"/>
-          <a:lstStyle/>
-          <a:p>
-            <a:pPr algn="ctr"/>
-          </a:p>
-        </p:txBody>
-      </p:sp>
-      <p:sp>
-        <p:nvSpPr>
-          <p:cNvPr id="3" name="TextBox 2"/>
-          <p:cNvSpPr txBox="1"/>
-          <p:nvPr/>
-        </p:nvSpPr>
-        <p:spPr>
-          <a:xfrm>
-            <a:off x="731520" y="594360"/>
-            <a:ext cx="8412480" cy="822960"/>
-          </a:xfrm>
-          <a:prstGeom prst="rect">
-            <a:avLst/>
-          </a:prstGeom>
-          <a:noFill/>
-        </p:spPr>
-        <p:txBody>
-          <a:bodyPr wrap="square">
-            <a:spAutoFit/>
-          </a:bodyPr>
-          <a:lstStyle/>
-          <a:p>
-            <a:pPr>
-              <a:defRPr b="1" sz="2200">
-                <a:solidFill>
-                  <a:srgbClr val="003366"/>
-                </a:solidFill>
-              </a:defRPr>
-            </a:pPr>
-            <a:r>
-              <a:t>Estructura de la Defensa y Agenda</a:t>
-            </a:r>
-          </a:p>
-          <a:p>
-            <a:pPr>
-              <a:defRPr sz="1300">
-                <a:solidFill>
-                  <a:srgbClr val="646464"/>
-                </a:solidFill>
-              </a:defRPr>
-            </a:pPr>
-            <a:r>
-              <a:t>Hoja de Ruta de la Exposición Fase 1 — Proyecto ACE (PTY4614)</a:t>
-            </a:r>
-          </a:p>
-        </p:txBody>
-      </p:sp>
-      <p:sp>
-        <p:nvSpPr>
-          <p:cNvPr id="4" name="Rounded Rectangle 3"/>
-          <p:cNvSpPr/>
-          <p:nvPr/>
-        </p:nvSpPr>
-        <p:spPr>
-          <a:xfrm>
-            <a:off x="9326880" y="640080"/>
-            <a:ext cx="2130552" cy="411480"/>
-          </a:xfrm>
-          <a:prstGeom prst="roundRect">
-            <a:avLst/>
-          </a:prstGeom>
-          <a:solidFill>
-            <a:srgbClr val="F0F3F6"/>
-          </a:solidFill>
-          <a:ln>
-            <a:solidFill>
-              <a:srgbClr val="C8D2DC"/>
-            </a:solidFill>
-          </a:ln>
-        </p:spPr>
-        <p:style>
-          <a:lnRef idx="1">
-            <a:schemeClr val="accent1"/>
-          </a:lnRef>
-          <a:fillRef idx="3">
-            <a:schemeClr val="accent1"/>
-          </a:fillRef>
-          <a:effectRef idx="2">
-            <a:schemeClr val="accent1"/>
-          </a:effectRef>
-          <a:fontRef idx="minor">
-            <a:schemeClr val="lt1"/>
-          </a:fontRef>
-        </p:style>
-        <p:txBody>
-          <a:bodyPr rtlCol="0" anchor="ctr"/>
-          <a:lstStyle/>
-          <a:p>
-            <a:pPr algn="ctr">
-              <a:defRPr sz="1100" b="1">
-                <a:solidFill>
-                  <a:srgbClr val="003366"/>
-                </a:solidFill>
-              </a:defRPr>
-            </a:pPr>
-            <a:r>
-              <a:t>Todo el Equipo</a:t>
-            </a:r>
-          </a:p>
-        </p:txBody>
-      </p:sp>
-      <p:sp>
-        <p:nvSpPr>
-          <p:cNvPr id="5" name="Rounded Rectangle 4"/>
-          <p:cNvSpPr/>
-          <p:nvPr/>
-        </p:nvSpPr>
-        <p:spPr>
-          <a:xfrm>
-            <a:off x="731520" y="1645920"/>
-            <a:ext cx="5212080" cy="4389120"/>
-          </a:xfrm>
-          <a:prstGeom prst="roundRect">
-            <a:avLst/>
-          </a:prstGeom>
-          <a:solidFill>
-            <a:srgbClr val="F8FAFC"/>
-          </a:solidFill>
-          <a:ln>
-            <a:solidFill>
-              <a:srgbClr val="DAE1E9"/>
-            </a:solidFill>
-          </a:ln>
-        </p:spPr>
-        <p:style>
-          <a:lnRef idx="1">
-            <a:schemeClr val="accent1"/>
-          </a:lnRef>
-          <a:fillRef idx="3">
-            <a:schemeClr val="accent1"/>
-          </a:fillRef>
-          <a:effectRef idx="2">
-            <a:schemeClr val="accent1"/>
-          </a:effectRef>
-          <a:fontRef idx="minor">
-            <a:schemeClr val="lt1"/>
-          </a:fontRef>
-        </p:style>
-        <p:txBody>
-          <a:bodyPr rtlCol="0" anchor="ctr" wrap="square"/>
-          <a:lstStyle/>
-          <a:p>
-            <a:pPr algn="ctr">
-              <a:defRPr b="1" sz="1400">
-                <a:solidFill>
-                  <a:srgbClr val="003366"/>
-                </a:solidFill>
-              </a:defRPr>
-            </a:pPr>
-            <a:r>
-              <a:t>Bloque I: Fundamentación y Estrategia</a:t>
-            </a:r>
-          </a:p>
-          <a:p>
-            <a:pPr>
-              <a:defRPr b="1" sz="1150">
-                <a:solidFill>
-                  <a:srgbClr val="141E2D"/>
-                </a:solidFill>
-              </a:defRPr>
-            </a:pPr>
-            <a:r>
-              <a:t>• I. Contexto y Diagnóstico del Negocio</a:t>
-            </a:r>
-          </a:p>
-          <a:p>
-            <a:pPr>
-              <a:defRPr sz="1000">
-                <a:solidFill>
-                  <a:srgbClr val="5A646E"/>
-                </a:solidFill>
-              </a:defRPr>
-            </a:pPr>
-            <a:r>
-              <a:t>   Problemática de Lumina Motion: pendrives, licencias externas y caídas WAN.</a:t>
-            </a:r>
-          </a:p>
-          <a:p>
-            <a:pPr>
-              <a:defRPr b="1" sz="1150">
-                <a:solidFill>
-                  <a:srgbClr val="141E2D"/>
-                </a:solidFill>
-              </a:defRPr>
-            </a:pPr>
-            <a:r>
-              <a:t>• II. Solución y Arquitectura Desacoplada</a:t>
-            </a:r>
-          </a:p>
-          <a:p>
-            <a:pPr>
-              <a:defRPr sz="1000">
-                <a:solidFill>
-                  <a:srgbClr val="5A646E"/>
-                </a:solidFill>
-              </a:defRPr>
-            </a:pPr>
-            <a:r>
-              <a:t>   Estructura Cliente-Servidor Cache-First y resiliencia offline ante cortes.</a:t>
-            </a:r>
-          </a:p>
-          <a:p>
-            <a:pPr>
-              <a:defRPr b="1" sz="1150">
-                <a:solidFill>
-                  <a:srgbClr val="141E2D"/>
-                </a:solidFill>
-              </a:defRPr>
-            </a:pPr>
-            <a:r>
-              <a:t>• III. Formulación de Objetivos de Ingeniería</a:t>
-            </a:r>
-          </a:p>
-          <a:p>
-            <a:pPr>
-              <a:defRPr sz="1000">
-                <a:solidFill>
-                  <a:srgbClr val="5A646E"/>
-                </a:solidFill>
-              </a:defRPr>
-            </a:pPr>
-            <a:r>
-              <a:t>   Meta General y 6 Objetivos Específicos alineados a la industria.</a:t>
-            </a:r>
-          </a:p>
-          <a:p>
-            <a:pPr>
-              <a:defRPr b="1" sz="1150">
-                <a:solidFill>
-                  <a:srgbClr val="141E2D"/>
-                </a:solidFill>
-              </a:defRPr>
-            </a:pPr>
-            <a:r>
-              <a:t>• IV. Metodología Ágil y Roles Disciplinares</a:t>
-            </a:r>
-          </a:p>
-          <a:p>
-            <a:pPr>
-              <a:defRPr sz="1000">
-                <a:solidFill>
-                  <a:srgbClr val="5A646E"/>
-                </a:solidFill>
-              </a:defRPr>
-            </a:pPr>
-            <a:r>
-              <a:t>   Scrum adaptado, flujos de integración en GitHub y corresponsabilidad técnica.</a:t>
-            </a:r>
-          </a:p>
-        </p:txBody>
-      </p:sp>
-      <p:sp>
-        <p:nvSpPr>
-          <p:cNvPr id="6" name="Rounded Rectangle 5"/>
-          <p:cNvSpPr/>
-          <p:nvPr/>
-        </p:nvSpPr>
-        <p:spPr>
-          <a:xfrm>
-            <a:off x="6217920" y="1645920"/>
-            <a:ext cx="5212080" cy="4389120"/>
-          </a:xfrm>
-          <a:prstGeom prst="roundRect">
-            <a:avLst/>
-          </a:prstGeom>
-          <a:solidFill>
-            <a:srgbClr val="F8FAFC"/>
-          </a:solidFill>
-          <a:ln>
-            <a:solidFill>
-              <a:srgbClr val="DAE1E9"/>
-            </a:solidFill>
-          </a:ln>
-        </p:spPr>
-        <p:style>
-          <a:lnRef idx="1">
-            <a:schemeClr val="accent1"/>
-          </a:lnRef>
-          <a:fillRef idx="3">
-            <a:schemeClr val="accent1"/>
-          </a:fillRef>
-          <a:effectRef idx="2">
-            <a:schemeClr val="accent1"/>
-          </a:effectRef>
-          <a:fontRef idx="minor">
-            <a:schemeClr val="lt1"/>
-          </a:fontRef>
-        </p:style>
-        <p:txBody>
-          <a:bodyPr rtlCol="0" anchor="ctr" wrap="square"/>
-          <a:lstStyle/>
-          <a:p>
-            <a:pPr algn="ctr">
-              <a:defRPr b="1" sz="1400">
-                <a:solidFill>
-                  <a:srgbClr val="003366"/>
-                </a:solidFill>
-              </a:defRPr>
-            </a:pPr>
-            <a:r>
-              <a:t>Bloque II: Planificación e Ingeniería</a:t>
-            </a:r>
-          </a:p>
-          <a:p>
-            <a:pPr>
-              <a:defRPr b="1" sz="1150">
-                <a:solidFill>
-                  <a:srgbClr val="141E2D"/>
-                </a:solidFill>
-              </a:defRPr>
-            </a:pPr>
-            <a:r>
-              <a:t>• V. Factibilidad, Matriz de Riesgos y Seguridad</a:t>
-            </a:r>
-          </a:p>
-          <a:p>
-            <a:pPr>
-              <a:defRPr sz="1000">
-                <a:solidFill>
-                  <a:srgbClr val="5A646E"/>
-                </a:solidFill>
-              </a:defRPr>
-            </a:pPr>
-            <a:r>
-              <a:t>   Viabilidad en 18 semanas, mitigaciones, JWT y validación SHA-256.</a:t>
-            </a:r>
-          </a:p>
-          <a:p>
-            <a:pPr>
-              <a:defRPr b="1" sz="1150">
-                <a:solidFill>
-                  <a:srgbClr val="141E2D"/>
-                </a:solidFill>
-              </a:defRPr>
-            </a:pPr>
-            <a:r>
-              <a:t>• VI. Modelo de Datos y Prototipos UI/UX (Mockups)</a:t>
-            </a:r>
-          </a:p>
-          <a:p>
-            <a:pPr>
-              <a:defRPr sz="1000">
-                <a:solidFill>
-                  <a:srgbClr val="5A646E"/>
-                </a:solidFill>
-              </a:defRPr>
-            </a:pPr>
-            <a:r>
-              <a:t>   Esquema MariaDB 3FN, roles de acceso y wireframes de interfaces Figma.</a:t>
-            </a:r>
-          </a:p>
-          <a:p>
-            <a:pPr>
-              <a:defRPr b="1" sz="1150">
-                <a:solidFill>
-                  <a:srgbClr val="141E2D"/>
-                </a:solidFill>
-              </a:defRPr>
-            </a:pPr>
-            <a:r>
-              <a:t>• VII. Plan de Trabajo y Carta Gantt Detallada</a:t>
-            </a:r>
-          </a:p>
-          <a:p>
-            <a:pPr>
-              <a:defRPr sz="1000">
-                <a:solidFill>
-                  <a:srgbClr val="5A646E"/>
-                </a:solidFill>
-              </a:defRPr>
-            </a:pPr>
-            <a:r>
-              <a:t>   Desglose de 22 actividades de ingeniería e hitos evaluativos Duoc.</a:t>
-            </a:r>
-          </a:p>
-          <a:p>
-            <a:pPr>
-              <a:defRPr b="1" sz="1150">
-                <a:solidFill>
-                  <a:srgbClr val="141E2D"/>
-                </a:solidFill>
-              </a:defRPr>
-            </a:pPr>
-            <a:r>
-              <a:t>• VIII. Evidencias, Glosario Técnico y Defensa</a:t>
-            </a:r>
-          </a:p>
-          <a:p>
-            <a:pPr>
-              <a:defRPr sz="1000">
-                <a:solidFill>
-                  <a:srgbClr val="5A646E"/>
-                </a:solidFill>
-              </a:defRPr>
-            </a:pPr>
-            <a:r>
-              <a:t>   Acreditación del perfil de egreso y preparación rigurosa de preguntas.</a:t>
-            </a:r>
           </a:p>
         </p:txBody>
       </p:sp>
@@ -8185,7 +8513,7 @@
               </a:defRPr>
             </a:pPr>
             <a:r>
-              <a:t>El Dolor del Negocio: Lumina Motion Studio</a:t>
+              <a:t>La Solución ACE y Arquitectura Híbrida Desacoplada</a:t>
             </a:r>
           </a:p>
           <a:p>
@@ -8201,7 +8529,7 @@
               </a:defRPr>
             </a:pPr>
             <a:r>
-              <a:t>Diagnóstico Operativo de la Infraestructura de Cartelería Digital</a:t>
+              <a:t>Estructura Cliente-Servidor con Enfoque Cache-First y Fail-Safe</a:t>
             </a:r>
           </a:p>
         </p:txBody>
@@ -8314,7 +8642,7 @@
               </a:defRPr>
             </a:pPr>
             <a:r>
-              <a:t>1. Operativa Fragmentada</a:t>
+              <a:t>Servidor Central (Cloud)</a:t>
             </a:r>
           </a:p>
           <a:p>
@@ -8332,7 +8660,7 @@
                   <a:srgbClr val="1E3A8A"/>
                 </a:solidFill>
               </a:rPr>
-              <a:t>Actualización manual: </a:t>
+              <a:t>Backend Robusto: </a:t>
             </a:r>
             <a:r>
               <a:rPr>
@@ -8340,7 +8668,7 @@
                   <a:srgbClr val="334155"/>
                 </a:solidFill>
               </a:rPr>
-              <a:t>Gran parte del parque de pantallas se actualiza físicamente vía pendrives USB in situ.</a:t>
+              <a:t>Desarrollado en PHP 8.2+ con Laravel 11 y arquitectura MVC / API RESTful.</a:t>
             </a:r>
           </a:p>
           <a:p>
@@ -8358,7 +8686,7 @@
                   <a:srgbClr val="1E3A8A"/>
                 </a:solidFill>
               </a:rPr>
-              <a:t>Costos logísticos: </a:t>
+              <a:t>Persistencia Relacional: </a:t>
             </a:r>
             <a:r>
               <a:rPr>
@@ -8366,7 +8694,7 @@
                   <a:srgbClr val="334155"/>
                 </a:solidFill>
               </a:rPr>
-              <a:t>Traslados continuos de técnicos ante cambios de pauta publicitaria en recintos comerciales.</a:t>
+              <a:t>MariaDB normalizada en 3FN con transacciones ACID para evitar colisiones horarias.</a:t>
             </a:r>
           </a:p>
           <a:p>
@@ -8384,7 +8712,7 @@
                   <a:srgbClr val="1E3A8A"/>
                 </a:solidFill>
               </a:rPr>
-              <a:t>Tiempo de respuesta lento: </a:t>
+              <a:t>Catálogo Multimedia: </a:t>
             </a:r>
             <a:r>
               <a:rPr>
@@ -8392,7 +8720,20 @@
                   <a:srgbClr val="334155"/>
                 </a:solidFill>
               </a:rPr>
-              <a:t>Horas o días para actualizar un anuncio comercial en múltiples sedes.</a:t>
+              <a:t>Cálculo automático de hash SHA-256 para verificación criptográfica de archivos.</a:t>
+            </a:r>
+          </a:p>
+          <a:p>
+            <a:pPr>
+              <a:spcAft>
+                <a:spcPts val="500"/>
+              </a:spcAft>
+              <a:defRPr sz="1100">
+                <a:latin typeface="Arial"/>
+              </a:defRPr>
+            </a:pPr>
+            <a:r>
+              <a:t>Gestión de Pautas: Asignación jerárquica de listas de reproducción por Locación, Sector y Pantalla (roles Admin y Operador).</a:t>
             </a:r>
           </a:p>
         </p:txBody>
@@ -8412,7 +8753,7 @@
             <a:avLst/>
           </a:prstGeom>
           <a:solidFill>
-            <a:srgbClr val="D97706"/>
+            <a:srgbClr val="2563EB"/>
           </a:solidFill>
           <a:ln>
             <a:noFill/>
@@ -8493,7 +8834,7 @@
               </a:defRPr>
             </a:pPr>
             <a:r>
-              <a:t>2. Licenciamiento Propietario</a:t>
+              <a:t>Canal de Sincronización</a:t>
             </a:r>
           </a:p>
           <a:p>
@@ -8511,7 +8852,7 @@
                   <a:srgbClr val="1E3A8A"/>
                 </a:solidFill>
               </a:rPr>
-              <a:t>Herramientas dispares: </a:t>
+              <a:t>Protocolo Dual: </a:t>
             </a:r>
             <a:r>
               <a:rPr>
@@ -8519,7 +8860,7 @@
                   <a:srgbClr val="334155"/>
                 </a:solidFill>
               </a:rPr>
-              <a:t>Uso fragmentado de software comercial (MadMapper, Arena.im) sin integración entre sí.</a:t>
+              <a:t>REST HTTP para CRUD administrativo + WebSockets para tiempo real.</a:t>
             </a:r>
           </a:p>
           <a:p>
@@ -8537,7 +8878,7 @@
                   <a:srgbClr val="1E3A8A"/>
                 </a:solidFill>
               </a:rPr>
-              <a:t>Sin panel central: </a:t>
+              <a:t>Telemetría en Vivo: </a:t>
             </a:r>
             <a:r>
               <a:rPr>
@@ -8545,7 +8886,7 @@
                   <a:srgbClr val="334155"/>
                 </a:solidFill>
               </a:rPr>
-              <a:t>Imposibilidad de gestionar un catálogo unificado de medios y pantallas por sectores.</a:t>
+              <a:t>Latidos periódicos (Heartbeats) para monitoreo de salud de pantallas.</a:t>
             </a:r>
           </a:p>
           <a:p>
@@ -8563,7 +8904,7 @@
                   <a:srgbClr val="1E3A8A"/>
                 </a:solidFill>
               </a:rPr>
-              <a:t>Costos recurrentes: </a:t>
+              <a:t>Comandos Inmediatos: </a:t>
             </a:r>
             <a:r>
               <a:rPr>
@@ -8571,7 +8912,33 @@
                   <a:srgbClr val="334155"/>
                 </a:solidFill>
               </a:rPr>
-              <a:t>Alto gasto en licencias externas que no resuelven la automatización de horarios.</a:t>
+              <a:t>Publicación instantánea de cambios de parrilla a reproductores conectados.</a:t>
+            </a:r>
+          </a:p>
+          <a:p>
+            <a:pPr>
+              <a:spcAft>
+                <a:spcPts val="500"/>
+              </a:spcAft>
+              <a:defRPr sz="1100">
+                <a:latin typeface="Arial"/>
+              </a:defRPr>
+            </a:pPr>
+            <a:r>
+              <a:rPr b="1">
+                <a:solidFill>
+                  <a:srgbClr val="1E3A8A"/>
+                </a:solidFill>
+              </a:rPr>
+              <a:t>Fallback Automático: </a:t>
+            </a:r>
+            <a:r>
+              <a:rPr>
+                <a:solidFill>
+                  <a:srgbClr val="334155"/>
+                </a:solidFill>
+              </a:rPr>
+              <a:t>Sondeo HTTP periódico si los puertos de sockets están bloqueados por firewall.</a:t>
             </a:r>
           </a:p>
         </p:txBody>
@@ -8591,7 +8958,7 @@
             <a:avLst/>
           </a:prstGeom>
           <a:solidFill>
-            <a:srgbClr val="2563EB"/>
+            <a:srgbClr val="0D9488"/>
           </a:solidFill>
           <a:ln>
             <a:noFill/>
@@ -8672,7 +9039,7 @@
               </a:defRPr>
             </a:pPr>
             <a:r>
-              <a:t>3. Falla Crítica de Red</a:t>
+              <a:t>Nodo Reproductor Local (NUC)</a:t>
             </a:r>
           </a:p>
           <a:p>
@@ -8685,20 +9052,7 @@
               </a:defRPr>
             </a:pPr>
             <a:r>
-              <a:rPr b="1">
-                <a:solidFill>
-                  <a:srgbClr val="1E3A8A"/>
-                </a:solidFill>
-              </a:rPr>
-              <a:t>Vulnerabilidad WAN: </a:t>
-            </a:r>
-            <a:r>
-              <a:rPr>
-                <a:solidFill>
-                  <a:srgbClr val="334155"/>
-                </a:solidFill>
-              </a:rPr>
-              <a:t>La conectividad a internet en recintos masivos (malls, eventos) es inestable y propensa a caídas.</a:t>
+              <a:t>Arquitectura Cache-First en NUCs: Descarga preventiva de videos al almacenamiento local; sin streaming.</a:t>
             </a:r>
           </a:p>
           <a:p>
@@ -8716,7 +9070,7 @@
                   <a:srgbClr val="1E3A8A"/>
                 </a:solidFill>
               </a:rPr>
-              <a:t>Riesgo de pantalla en negro: </a:t>
+              <a:t>Resiliencia Offline Total: </a:t>
             </a:r>
             <a:r>
               <a:rPr>
@@ -8724,7 +9078,7 @@
                   <a:srgbClr val="334155"/>
                 </a:solidFill>
               </a:rPr>
-              <a:t>Soluciones basadas en streaming colapsan ante interrupciones de red.</a:t>
+              <a:t>Si se cae internet, la reproducción continúa de forma indefinida y autónoma.</a:t>
             </a:r>
           </a:p>
           <a:p>
@@ -8742,7 +9096,7 @@
                   <a:srgbClr val="1E3A8A"/>
                 </a:solidFill>
               </a:rPr>
-              <a:t>Penalizaciones comerciales: </a:t>
+              <a:t>Integridad SHA-256: </a:t>
             </a:r>
             <a:r>
               <a:rPr>
@@ -8750,7 +9104,20 @@
                   <a:srgbClr val="334155"/>
                 </a:solidFill>
               </a:rPr>
-              <a:t>Pérdida de ingresos y sanciones contractuales por indisponibilidad de anuncios.</a:t>
+              <a:t>Comprobación estricta de integridad antes de marcar un archivo como listo.</a:t>
+            </a:r>
+          </a:p>
+          <a:p>
+            <a:pPr>
+              <a:spcAft>
+                <a:spcPts val="500"/>
+              </a:spcAft>
+              <a:defRPr sz="1100">
+                <a:latin typeface="Arial"/>
+              </a:defRPr>
+            </a:pPr>
+            <a:r>
+              <a:t>Modificación Local sin Internet: Panel local en nodo NUC para conmutación manual presencial ante contingencias.</a:t>
             </a:r>
           </a:p>
         </p:txBody>
@@ -8770,7 +9137,7 @@
             <a:avLst/>
           </a:prstGeom>
           <a:solidFill>
-            <a:srgbClr val="DC2626"/>
+            <a:srgbClr val="D97706"/>
           </a:solidFill>
           <a:ln>
             <a:noFill/>
@@ -8898,7 +9265,7 @@
               </a:defRPr>
             </a:pPr>
             <a:r>
-              <a:t>La Solución ACE y Arquitectura Híbrida Desacoplada</a:t>
+              <a:t>Objetivos del Proyecto ACE (PTY4614)</a:t>
             </a:r>
           </a:p>
           <a:p>
@@ -8914,7 +9281,7 @@
               </a:defRPr>
             </a:pPr>
             <a:r>
-              <a:t>Estructura Cliente-Servidor con Enfoque Cache-First y Fail-Safe</a:t>
+              <a:t>Meta General y 6 Objetivos Específicos Alineados al Perfil de Egreso</a:t>
             </a:r>
           </a:p>
         </p:txBody>
@@ -8969,7 +9336,7 @@
               </a:defRPr>
             </a:pPr>
             <a:r>
-              <a:t>Tomás Escalante | Bloque 1</a:t>
+              <a:t>Matías Salas | Bloque 2</a:t>
             </a:r>
           </a:p>
         </p:txBody>
@@ -8982,8 +9349,8 @@
         </p:nvSpPr>
         <p:spPr>
           <a:xfrm>
-            <a:off x="731520" y="1645920"/>
-            <a:ext cx="3383280" cy="4572000"/>
+            <a:off x="731520" y="1554480"/>
+            <a:ext cx="10728655" cy="1463040"/>
           </a:xfrm>
           <a:prstGeom prst="roundRect">
             <a:avLst/>
@@ -9027,7 +9394,7 @@
               </a:defRPr>
             </a:pPr>
             <a:r>
-              <a:t>Servidor Central (Cloud)</a:t>
+              <a:t>Objetivo General</a:t>
             </a:r>
           </a:p>
           <a:p>
@@ -9040,85 +9407,7 @@
               </a:defRPr>
             </a:pPr>
             <a:r>
-              <a:rPr b="1">
-                <a:solidFill>
-                  <a:srgbClr val="1E3A8A"/>
-                </a:solidFill>
-              </a:rPr>
-              <a:t>Backend Robusto: </a:t>
-            </a:r>
-            <a:r>
-              <a:rPr>
-                <a:solidFill>
-                  <a:srgbClr val="334155"/>
-                </a:solidFill>
-              </a:rPr>
-              <a:t>Desarrollado en PHP 8.2+ con Laravel 11 y arquitectura MVC / API RESTful.</a:t>
-            </a:r>
-          </a:p>
-          <a:p>
-            <a:pPr>
-              <a:spcAft>
-                <a:spcPts val="500"/>
-              </a:spcAft>
-              <a:defRPr sz="1100">
-                <a:latin typeface="Arial"/>
-              </a:defRPr>
-            </a:pPr>
-            <a:r>
-              <a:rPr b="1">
-                <a:solidFill>
-                  <a:srgbClr val="1E3A8A"/>
-                </a:solidFill>
-              </a:rPr>
-              <a:t>Persistencia Relacional: </a:t>
-            </a:r>
-            <a:r>
-              <a:rPr>
-                <a:solidFill>
-                  <a:srgbClr val="334155"/>
-                </a:solidFill>
-              </a:rPr>
-              <a:t>MariaDB normalizada en 3FN con transacciones ACID para evitar colisiones horarias.</a:t>
-            </a:r>
-          </a:p>
-          <a:p>
-            <a:pPr>
-              <a:spcAft>
-                <a:spcPts val="500"/>
-              </a:spcAft>
-              <a:defRPr sz="1100">
-                <a:latin typeface="Arial"/>
-              </a:defRPr>
-            </a:pPr>
-            <a:r>
-              <a:rPr b="1">
-                <a:solidFill>
-                  <a:srgbClr val="1E3A8A"/>
-                </a:solidFill>
-              </a:rPr>
-              <a:t>Catálogo Multimedia: </a:t>
-            </a:r>
-            <a:r>
-              <a:rPr>
-                <a:solidFill>
-                  <a:srgbClr val="334155"/>
-                </a:solidFill>
-              </a:rPr>
-              <a:t>Cálculo automático de hash SHA-256 para verificación criptográfica de archivos.</a:t>
-            </a:r>
-          </a:p>
-          <a:p>
-            <a:pPr>
-              <a:spcAft>
-                <a:spcPts val="500"/>
-              </a:spcAft>
-              <a:defRPr sz="1100">
-                <a:latin typeface="Arial"/>
-              </a:defRPr>
-            </a:pPr>
-            <a:r>
-              <a:t>Gestión de Pautas: Asignación jerárquica de listas de reproducción por Locación, Sector y Pantalla (roles Admin y Operador).</a:t>
+              <a:t>Meta Principal: Desarrollar una plataforma de gestión de cartelería digital para Lumina Motion que permita administrar centralizada y remotamente pantallas, contenidos y programación en locaciones fijas, manteniendo la reproducción y permitiendo cambios locales sin internet.</a:t>
             </a:r>
           </a:p>
         </p:txBody>
@@ -9131,8 +9420,8 @@
         </p:nvSpPr>
         <p:spPr>
           <a:xfrm>
-            <a:off x="777240" y="1691640"/>
-            <a:ext cx="3291840" cy="73152"/>
+            <a:off x="777240" y="1600200"/>
+            <a:ext cx="10637215" cy="73152"/>
           </a:xfrm>
           <a:prstGeom prst="rect">
             <a:avLst/>
@@ -9174,8 +9463,8 @@
         </p:nvSpPr>
         <p:spPr>
           <a:xfrm>
-            <a:off x="4389120" y="1645920"/>
-            <a:ext cx="3383280" cy="4572000"/>
+            <a:off x="731520" y="3200400"/>
+            <a:ext cx="5212080" cy="3108960"/>
           </a:xfrm>
           <a:prstGeom prst="roundRect">
             <a:avLst/>
@@ -9211,7 +9500,7 @@
               <a:spcAft>
                 <a:spcPts val="800"/>
               </a:spcAft>
-              <a:defRPr sz="1500" b="1">
+              <a:defRPr sz="1400" b="1">
                 <a:solidFill>
                   <a:srgbClr val="1E3A8A"/>
                 </a:solidFill>
@@ -9219,111 +9508,31 @@
               </a:defRPr>
             </a:pPr>
             <a:r>
-              <a:t>Canal de Sincronización</a:t>
-            </a:r>
-          </a:p>
-          <a:p>
-            <a:pPr>
-              <a:spcAft>
-                <a:spcPts val="500"/>
-              </a:spcAft>
-              <a:defRPr sz="1100">
-                <a:latin typeface="Arial"/>
-              </a:defRPr>
-            </a:pPr>
-            <a:r>
-              <a:rPr b="1">
-                <a:solidFill>
-                  <a:srgbClr val="1E3A8A"/>
-                </a:solidFill>
-              </a:rPr>
-              <a:t>Protocolo Dual: </a:t>
-            </a:r>
-            <a:r>
-              <a:rPr>
-                <a:solidFill>
-                  <a:srgbClr val="334155"/>
-                </a:solidFill>
-              </a:rPr>
-              <a:t>REST HTTP para CRUD administrativo + WebSockets para tiempo real.</a:t>
-            </a:r>
-          </a:p>
-          <a:p>
-            <a:pPr>
-              <a:spcAft>
-                <a:spcPts val="500"/>
-              </a:spcAft>
-              <a:defRPr sz="1100">
-                <a:latin typeface="Arial"/>
-              </a:defRPr>
-            </a:pPr>
-            <a:r>
-              <a:rPr b="1">
-                <a:solidFill>
-                  <a:srgbClr val="1E3A8A"/>
-                </a:solidFill>
-              </a:rPr>
-              <a:t>Telemetría en Vivo: </a:t>
-            </a:r>
-            <a:r>
-              <a:rPr>
-                <a:solidFill>
-                  <a:srgbClr val="334155"/>
-                </a:solidFill>
-              </a:rPr>
-              <a:t>Latidos periódicos (Heartbeats) para monitoreo de salud de pantallas.</a:t>
-            </a:r>
-          </a:p>
-          <a:p>
-            <a:pPr>
-              <a:spcAft>
-                <a:spcPts val="500"/>
-              </a:spcAft>
-              <a:defRPr sz="1100">
-                <a:latin typeface="Arial"/>
-              </a:defRPr>
-            </a:pPr>
-            <a:r>
-              <a:rPr b="1">
-                <a:solidFill>
-                  <a:srgbClr val="1E3A8A"/>
-                </a:solidFill>
-              </a:rPr>
-              <a:t>Comandos Inmediatos: </a:t>
-            </a:r>
-            <a:r>
-              <a:rPr>
-                <a:solidFill>
-                  <a:srgbClr val="334155"/>
-                </a:solidFill>
-              </a:rPr>
-              <a:t>Publicación instantánea de cambios de parrilla a reproductores conectados.</a:t>
-            </a:r>
-          </a:p>
-          <a:p>
-            <a:pPr>
-              <a:spcAft>
-                <a:spcPts val="500"/>
-              </a:spcAft>
-              <a:defRPr sz="1100">
-                <a:latin typeface="Arial"/>
-              </a:defRPr>
-            </a:pPr>
-            <a:r>
-              <a:rPr b="1">
-                <a:solidFill>
-                  <a:srgbClr val="1E3A8A"/>
-                </a:solidFill>
-              </a:rPr>
-              <a:t>Fallback Automático: </a:t>
-            </a:r>
-            <a:r>
-              <a:rPr>
-                <a:solidFill>
-                  <a:srgbClr val="334155"/>
-                </a:solidFill>
-              </a:rPr>
-              <a:t>Sondeo HTTP periódico si los puertos de sockets están bloqueados por firewall.</a:t>
+              <a:t>Objetivos Específicos (Gestión y Programación)</a:t>
+            </a:r>
+          </a:p>
+          <a:p>
+            <a:pPr>
+              <a:defRPr sz="1100"/>
+            </a:pPr>
+            <a:r>
+              <a:t>OE1 (Administración y Permisos por Locación): Implementar la gestión remota de locaciones, sectores y pantallas, con acceso diferenciado (Admin y Operador por locación).</a:t>
+            </a:r>
+          </a:p>
+          <a:p>
+            <a:pPr>
+              <a:defRPr sz="1100"/>
+            </a:pPr>
+            <a:r>
+              <a:t>OE2 (Gestión de Contenidos y Playlists): Desarrollar gestión de medios y listas reutilizables con orden, tiempos de exhibición y acceso autorizado.</a:t>
+            </a:r>
+          </a:p>
+          <a:p>
+            <a:pPr>
+              <a:defRPr sz="1100"/>
+            </a:pPr>
+            <a:r>
+              <a:t>OE3 (Programación Horaria Segmentada): Implementar programación por fechas y horarios con asignación a pantallas o sectores.</a:t>
             </a:r>
           </a:p>
         </p:txBody>
@@ -9336,8 +9545,8 @@
         </p:nvSpPr>
         <p:spPr>
           <a:xfrm>
-            <a:off x="4434840" y="1691640"/>
-            <a:ext cx="3291840" cy="73152"/>
+            <a:off x="777240" y="3246120"/>
+            <a:ext cx="5120640" cy="73152"/>
           </a:xfrm>
           <a:prstGeom prst="rect">
             <a:avLst/>
@@ -9379,8 +9588,8 @@
         </p:nvSpPr>
         <p:spPr>
           <a:xfrm>
-            <a:off x="8046720" y="1645920"/>
-            <a:ext cx="3383280" cy="4572000"/>
+            <a:off x="6217920" y="3200400"/>
+            <a:ext cx="5212080" cy="3108960"/>
           </a:xfrm>
           <a:prstGeom prst="roundRect">
             <a:avLst/>
@@ -9416,7 +9625,7 @@
               <a:spcAft>
                 <a:spcPts val="800"/>
               </a:spcAft>
-              <a:defRPr sz="1500" b="1">
+              <a:defRPr sz="1400" b="1">
                 <a:solidFill>
                   <a:srgbClr val="1E3A8A"/>
                 </a:solidFill>
@@ -9424,85 +9633,31 @@
               </a:defRPr>
             </a:pPr>
             <a:r>
-              <a:t>Nodo Reproductor Local (NUC)</a:t>
-            </a:r>
-          </a:p>
-          <a:p>
-            <a:pPr>
-              <a:spcAft>
-                <a:spcPts val="500"/>
-              </a:spcAft>
-              <a:defRPr sz="1100">
-                <a:latin typeface="Arial"/>
-              </a:defRPr>
-            </a:pPr>
-            <a:r>
-              <a:t>Arquitectura Cache-First en NUCs: Descarga preventiva de videos al almacenamiento local; sin streaming.</a:t>
-            </a:r>
-          </a:p>
-          <a:p>
-            <a:pPr>
-              <a:spcAft>
-                <a:spcPts val="500"/>
-              </a:spcAft>
-              <a:defRPr sz="1100">
-                <a:latin typeface="Arial"/>
-              </a:defRPr>
-            </a:pPr>
-            <a:r>
-              <a:rPr b="1">
-                <a:solidFill>
-                  <a:srgbClr val="1E3A8A"/>
-                </a:solidFill>
-              </a:rPr>
-              <a:t>Resiliencia Offline Total: </a:t>
-            </a:r>
-            <a:r>
-              <a:rPr>
-                <a:solidFill>
-                  <a:srgbClr val="334155"/>
-                </a:solidFill>
-              </a:rPr>
-              <a:t>Si se cae internet, la reproducción continúa de forma indefinida y autónoma.</a:t>
-            </a:r>
-          </a:p>
-          <a:p>
-            <a:pPr>
-              <a:spcAft>
-                <a:spcPts val="500"/>
-              </a:spcAft>
-              <a:defRPr sz="1100">
-                <a:latin typeface="Arial"/>
-              </a:defRPr>
-            </a:pPr>
-            <a:r>
-              <a:rPr b="1">
-                <a:solidFill>
-                  <a:srgbClr val="1E3A8A"/>
-                </a:solidFill>
-              </a:rPr>
-              <a:t>Integridad SHA-256: </a:t>
-            </a:r>
-            <a:r>
-              <a:rPr>
-                <a:solidFill>
-                  <a:srgbClr val="334155"/>
-                </a:solidFill>
-              </a:rPr>
-              <a:t>Comprobación estricta de integridad antes de marcar un archivo como listo.</a:t>
-            </a:r>
-          </a:p>
-          <a:p>
-            <a:pPr>
-              <a:spcAft>
-                <a:spcPts val="500"/>
-              </a:spcAft>
-              <a:defRPr sz="1100">
-                <a:latin typeface="Arial"/>
-              </a:defRPr>
-            </a:pPr>
-            <a:r>
-              <a:t>Modificación Local sin Internet: Panel local en el nodo reproductor NUC para conmutación manual presencial ante contingencias.</a:t>
+              <a:t>Objetivos Específicos (Resiliencia, Telemetría y QA)</a:t>
+            </a:r>
+          </a:p>
+          <a:p>
+            <a:pPr>
+              <a:defRPr sz="1100"/>
+            </a:pPr>
+            <a:r>
+              <a:t>OE4 (Resiliencia y Edición Offline): Habilitar reproducción autónoma y modificación local de contenido y programación sin internet (con archivos en locación).</a:t>
+            </a:r>
+          </a:p>
+          <a:p>
+            <a:pPr>
+              <a:defRPr sz="1100"/>
+            </a:pPr>
+            <a:r>
+              <a:t>OE5 (Telemetría de Conectividad NUC): Incorporar consulta del estado básico de conectividad de los NUC y su última comunicación.</a:t>
+            </a:r>
+          </a:p>
+          <a:p>
+            <a:pPr>
+              <a:defRPr sz="1100"/>
+            </a:pPr>
+            <a:r>
+              <a:t>OE6 (Validación con Cliente y QA): Validar el sistema en entorno de pruebas con Lumina Motion (gestión remota, permisos y pruebas online/offline).</a:t>
             </a:r>
           </a:p>
         </p:txBody>
@@ -9515,8 +9670,8 @@
         </p:nvSpPr>
         <p:spPr>
           <a:xfrm>
-            <a:off x="8092440" y="1691640"/>
-            <a:ext cx="3291840" cy="73152"/>
+            <a:off x="6263640" y="3246120"/>
+            <a:ext cx="5120640" cy="73152"/>
           </a:xfrm>
           <a:prstGeom prst="rect">
             <a:avLst/>
@@ -9650,7 +9805,7 @@
               </a:defRPr>
             </a:pPr>
             <a:r>
-              <a:t>Objetivos del Proyecto ACE (PTY4614)</a:t>
+              <a:t>Metodología de Trabajo y Roles Disciplinares</a:t>
             </a:r>
           </a:p>
           <a:p>
@@ -9666,7 +9821,7 @@
               </a:defRPr>
             </a:pPr>
             <a:r>
-              <a:t>Meta General y 6 Objetivos Específicos Alineados al Perfil de Egreso</a:t>
+              <a:t>Marco Ágil Scrum Adaptado con Integración Continua y Trazabilidad</a:t>
             </a:r>
           </a:p>
         </p:txBody>
@@ -9734,8 +9889,8 @@
         </p:nvSpPr>
         <p:spPr>
           <a:xfrm>
-            <a:off x="731520" y="1554480"/>
-            <a:ext cx="10728655" cy="1463040"/>
+            <a:off x="731520" y="1645920"/>
+            <a:ext cx="3383280" cy="4572000"/>
           </a:xfrm>
           <a:prstGeom prst="roundRect">
             <a:avLst/>
@@ -9779,7 +9934,7 @@
               </a:defRPr>
             </a:pPr>
             <a:r>
-              <a:t>Objetivo General</a:t>
+              <a:t>Ciclo Ágil Scrum Adaptado</a:t>
             </a:r>
           </a:p>
           <a:p>
@@ -9792,7 +9947,98 @@
               </a:defRPr>
             </a:pPr>
             <a:r>
-              <a:t>Meta Principal: Desarrollar una plataforma de gestión de cartelería digital para Lumina Motion que permita administrar centralizada y remotamente pantallas, contenidos y programación en locaciones fijas, manteniendo la reproducción y permitiendo cambios locales sin internet.</a:t>
+              <a:rPr b="1">
+                <a:solidFill>
+                  <a:srgbClr val="1E3A8A"/>
+                </a:solidFill>
+              </a:rPr>
+              <a:t>Sprints Bisemanales: </a:t>
+            </a:r>
+            <a:r>
+              <a:rPr>
+                <a:solidFill>
+                  <a:srgbClr val="334155"/>
+                </a:solidFill>
+              </a:rPr>
+              <a:t>Ciclos de 2 semanas con entregables funcionales e incrementales.</a:t>
+            </a:r>
+          </a:p>
+          <a:p>
+            <a:pPr>
+              <a:spcAft>
+                <a:spcPts val="500"/>
+              </a:spcAft>
+              <a:defRPr sz="1100">
+                <a:latin typeface="Arial"/>
+              </a:defRPr>
+            </a:pPr>
+            <a:r>
+              <a:rPr b="1">
+                <a:solidFill>
+                  <a:srgbClr val="1E3A8A"/>
+                </a:solidFill>
+              </a:rPr>
+              <a:t>Product Backlog: </a:t>
+            </a:r>
+            <a:r>
+              <a:rPr>
+                <a:solidFill>
+                  <a:srgbClr val="334155"/>
+                </a:solidFill>
+              </a:rPr>
+              <a:t>Priorizado según los dolores de Lumina Motion y los hitos Duoc UC.</a:t>
+            </a:r>
+          </a:p>
+          <a:p>
+            <a:pPr>
+              <a:spcAft>
+                <a:spcPts val="500"/>
+              </a:spcAft>
+              <a:defRPr sz="1100">
+                <a:latin typeface="Arial"/>
+              </a:defRPr>
+            </a:pPr>
+            <a:r>
+              <a:rPr b="1">
+                <a:solidFill>
+                  <a:srgbClr val="1E3A8A"/>
+                </a:solidFill>
+              </a:rPr>
+              <a:t>Reuniones de Equipo: </a:t>
+            </a:r>
+            <a:r>
+              <a:rPr>
+                <a:solidFill>
+                  <a:srgbClr val="334155"/>
+                </a:solidFill>
+              </a:rPr>
+              <a:t>Sincronización semanal presencial y virtual para remover impedimentos.</a:t>
+            </a:r>
+          </a:p>
+          <a:p>
+            <a:pPr>
+              <a:spcAft>
+                <a:spcPts val="500"/>
+              </a:spcAft>
+              <a:defRPr sz="1100">
+                <a:latin typeface="Arial"/>
+              </a:defRPr>
+            </a:pPr>
+            <a:r>
+              <a:rPr b="1">
+                <a:solidFill>
+                  <a:srgbClr val="1E3A8A"/>
+                </a:solidFill>
+              </a:rPr>
+              <a:t>Demo con Cliente: </a:t>
+            </a:r>
+            <a:r>
+              <a:rPr>
+                <a:solidFill>
+                  <a:srgbClr val="334155"/>
+                </a:solidFill>
+              </a:rPr>
+              <a:t>Validación continua de incrementos con la contraparte técnica.</a:t>
             </a:r>
           </a:p>
         </p:txBody>
@@ -9805,8 +10051,8 @@
         </p:nvSpPr>
         <p:spPr>
           <a:xfrm>
-            <a:off x="777240" y="1600200"/>
-            <a:ext cx="10637215" cy="73152"/>
+            <a:off x="777240" y="1691640"/>
+            <a:ext cx="3291840" cy="73152"/>
           </a:xfrm>
           <a:prstGeom prst="rect">
             <a:avLst/>
@@ -9848,8 +10094,8 @@
         </p:nvSpPr>
         <p:spPr>
           <a:xfrm>
-            <a:off x="731520" y="3200400"/>
-            <a:ext cx="5212080" cy="3108960"/>
+            <a:off x="4389120" y="1645920"/>
+            <a:ext cx="3383280" cy="4572000"/>
           </a:xfrm>
           <a:prstGeom prst="roundRect">
             <a:avLst/>
@@ -9885,7 +10131,7 @@
               <a:spcAft>
                 <a:spcPts val="800"/>
               </a:spcAft>
-              <a:defRPr sz="1400" b="1">
+              <a:defRPr sz="1500" b="1">
                 <a:solidFill>
                   <a:srgbClr val="1E3A8A"/>
                 </a:solidFill>
@@ -9893,31 +10139,111 @@
               </a:defRPr>
             </a:pPr>
             <a:r>
-              <a:t>Objetivos Específicos (Gestión y Programación)</a:t>
-            </a:r>
-          </a:p>
-          <a:p>
-            <a:pPr>
-              <a:defRPr sz="1100"/>
-            </a:pPr>
-            <a:r>
-              <a:t>OE1 (Administración y Permisos por Locación): Implementar la gestión remota de locaciones, sectores y pantallas, con acceso diferenciado (Admin y Operador por locación).</a:t>
-            </a:r>
-          </a:p>
-          <a:p>
-            <a:pPr>
-              <a:defRPr sz="1100"/>
-            </a:pPr>
-            <a:r>
-              <a:t>OE2 (Gestión de Contenidos y Playlists): Desarrollar gestión de medios y listas reutilizables con orden, tiempos de exhibición y acceso autorizado.</a:t>
-            </a:r>
-          </a:p>
-          <a:p>
-            <a:pPr>
-              <a:defRPr sz="1100"/>
-            </a:pPr>
-            <a:r>
-              <a:t>OE3 (Programación Horaria Segmentada): Implementar programación por fechas y horarios con asignación a pantallas o sectores.</a:t>
+              <a:t>Control de Calidad en GitHub</a:t>
+            </a:r>
+          </a:p>
+          <a:p>
+            <a:pPr>
+              <a:spcAft>
+                <a:spcPts val="500"/>
+              </a:spcAft>
+              <a:defRPr sz="1100">
+                <a:latin typeface="Arial"/>
+              </a:defRPr>
+            </a:pPr>
+            <a:r>
+              <a:rPr b="1">
+                <a:solidFill>
+                  <a:srgbClr val="1E3A8A"/>
+                </a:solidFill>
+              </a:rPr>
+              <a:t>Feature Branches: </a:t>
+            </a:r>
+            <a:r>
+              <a:rPr>
+                <a:solidFill>
+                  <a:srgbClr val="334155"/>
+                </a:solidFill>
+              </a:rPr>
+              <a:t>Desarrollo aislado de funcionalidades en ramas específicas.</a:t>
+            </a:r>
+          </a:p>
+          <a:p>
+            <a:pPr>
+              <a:spcAft>
+                <a:spcPts val="500"/>
+              </a:spcAft>
+              <a:defRPr sz="1100">
+                <a:latin typeface="Arial"/>
+              </a:defRPr>
+            </a:pPr>
+            <a:r>
+              <a:rPr b="1">
+                <a:solidFill>
+                  <a:srgbClr val="1E3A8A"/>
+                </a:solidFill>
+              </a:rPr>
+              <a:t>Pull Requests Cruzados: </a:t>
+            </a:r>
+            <a:r>
+              <a:rPr>
+                <a:solidFill>
+                  <a:srgbClr val="334155"/>
+                </a:solidFill>
+              </a:rPr>
+              <a:t>Revisión obligatoria de código (Peer Review) antes de integrar a main.</a:t>
+            </a:r>
+          </a:p>
+          <a:p>
+            <a:pPr>
+              <a:spcAft>
+                <a:spcPts val="500"/>
+              </a:spcAft>
+              <a:defRPr sz="1100">
+                <a:latin typeface="Arial"/>
+              </a:defRPr>
+            </a:pPr>
+            <a:r>
+              <a:rPr b="1">
+                <a:solidFill>
+                  <a:srgbClr val="1E3A8A"/>
+                </a:solidFill>
+              </a:rPr>
+              <a:t>Trazabilidad Total: </a:t>
+            </a:r>
+            <a:r>
+              <a:rPr>
+                <a:solidFill>
+                  <a:srgbClr val="334155"/>
+                </a:solidFill>
+              </a:rPr>
+              <a:t>Historial transparente de aportes individuales y commits auditables.</a:t>
+            </a:r>
+          </a:p>
+          <a:p>
+            <a:pPr>
+              <a:spcAft>
+                <a:spcPts val="500"/>
+              </a:spcAft>
+              <a:defRPr sz="1100">
+                <a:latin typeface="Arial"/>
+              </a:defRPr>
+            </a:pPr>
+            <a:r>
+              <a:rPr b="1">
+                <a:solidFill>
+                  <a:srgbClr val="1E3A8A"/>
+                </a:solidFill>
+              </a:rPr>
+              <a:t>Estándar Documental: </a:t>
+            </a:r>
+            <a:r>
+              <a:rPr>
+                <a:solidFill>
+                  <a:srgbClr val="334155"/>
+                </a:solidFill>
+              </a:rPr>
+              <a:t>Control de cambios riguroso en Markdown y repositorios de entrega.</a:t>
             </a:r>
           </a:p>
         </p:txBody>
@@ -9930,8 +10256,8 @@
         </p:nvSpPr>
         <p:spPr>
           <a:xfrm>
-            <a:off x="777240" y="3246120"/>
-            <a:ext cx="5120640" cy="73152"/>
+            <a:off x="4434840" y="1691640"/>
+            <a:ext cx="3291840" cy="73152"/>
           </a:xfrm>
           <a:prstGeom prst="rect">
             <a:avLst/>
@@ -9973,8 +10299,8 @@
         </p:nvSpPr>
         <p:spPr>
           <a:xfrm>
-            <a:off x="6217920" y="3200400"/>
-            <a:ext cx="5212080" cy="3108960"/>
+            <a:off x="8046720" y="1645920"/>
+            <a:ext cx="3383280" cy="4572000"/>
           </a:xfrm>
           <a:prstGeom prst="roundRect">
             <a:avLst/>
@@ -10010,7 +10336,7 @@
               <a:spcAft>
                 <a:spcPts val="800"/>
               </a:spcAft>
-              <a:defRPr sz="1400" b="1">
+              <a:defRPr sz="1500" b="1">
                 <a:solidFill>
                   <a:srgbClr val="1E3A8A"/>
                 </a:solidFill>
@@ -10018,31 +10344,46 @@
               </a:defRPr>
             </a:pPr>
             <a:r>
-              <a:t>Objetivos Específicos (Resiliencia, Telemetría y QA)</a:t>
-            </a:r>
-          </a:p>
-          <a:p>
-            <a:pPr>
-              <a:defRPr sz="1100"/>
-            </a:pPr>
-            <a:r>
-              <a:t>OE4 (Resiliencia y Edición Offline): Habilitar reproducción autónoma y modificación local de contenido y programación sin internet (con archivos en locación).</a:t>
-            </a:r>
-          </a:p>
-          <a:p>
-            <a:pPr>
-              <a:defRPr sz="1100"/>
-            </a:pPr>
-            <a:r>
-              <a:t>OE5 (Telemetría de Conectividad NUC): Incorporar consulta del estado básico de conectividad de los NUC y su última comunicación.</a:t>
-            </a:r>
-          </a:p>
-          <a:p>
-            <a:pPr>
-              <a:defRPr sz="1100"/>
-            </a:pPr>
-            <a:r>
-              <a:t>OE6 (Validación con Cliente y QA): Validar el sistema en entorno de pruebas con Lumina Motion (gestión remota, permisos y pruebas online/offline).</a:t>
+              <a:t>Especialización de Roles</a:t>
+            </a:r>
+          </a:p>
+          <a:p>
+            <a:pPr>
+              <a:spcAft>
+                <a:spcPts val="500"/>
+              </a:spcAft>
+              <a:defRPr sz="1100">
+                <a:latin typeface="Arial"/>
+              </a:defRPr>
+            </a:pPr>
+            <a:r>
+              <a:t>Tomás Escalante: Arquitectura distribuida, backend API Laravel, WebSockets y modelado relacional.</a:t>
+            </a:r>
+          </a:p>
+          <a:p>
+            <a:pPr>
+              <a:spcAft>
+                <a:spcPts val="500"/>
+              </a:spcAft>
+              <a:defRPr sz="1100">
+                <a:latin typeface="Arial"/>
+              </a:defRPr>
+            </a:pPr>
+            <a:r>
+              <a:t>Matías Salas: Gestión ágil Scrum, vinculación con Lumina, construcción de migraciones y pruebas UAT.</a:t>
+            </a:r>
+          </a:p>
+          <a:p>
+            <a:pPr>
+              <a:spcAft>
+                <a:spcPts val="500"/>
+              </a:spcAft>
+              <a:defRPr sz="1100">
+                <a:latin typeface="Arial"/>
+              </a:defRPr>
+            </a:pPr>
+            <a:r>
+              <a:t>Paulo Loyola: Interfaces Blade/UI, paneles de programación, optimización MariaDB y estándar documental.</a:t>
             </a:r>
           </a:p>
         </p:txBody>
@@ -10055,8 +10396,8 @@
         </p:nvSpPr>
         <p:spPr>
           <a:xfrm>
-            <a:off x="6263640" y="3246120"/>
-            <a:ext cx="5120640" cy="73152"/>
+            <a:off x="8092440" y="1691640"/>
+            <a:ext cx="3291840" cy="73152"/>
           </a:xfrm>
           <a:prstGeom prst="rect">
             <a:avLst/>
@@ -10190,7 +10531,7 @@
               </a:defRPr>
             </a:pPr>
             <a:r>
-              <a:t>Metodología de Trabajo y Roles Disciplinares</a:t>
+              <a:t>Factibilidad, Matriz de Riesgos y Modelo Operacional</a:t>
             </a:r>
           </a:p>
           <a:p>
@@ -10206,7 +10547,7 @@
               </a:defRPr>
             </a:pPr>
             <a:r>
-              <a:t>Marco Ágil Scrum Adaptado con Integración Continua y Trazabilidad</a:t>
+              <a:t>Viabilidad en 18 Semanas, Mitigación de Contingencias e Impacto en Lumina Motion</a:t>
             </a:r>
           </a:p>
         </p:txBody>
@@ -10275,7 +10616,7 @@
         <p:spPr>
           <a:xfrm>
             <a:off x="731520" y="1645920"/>
-            <a:ext cx="3383280" cy="4572000"/>
+            <a:ext cx="5212080" cy="4572000"/>
           </a:xfrm>
           <a:prstGeom prst="roundRect">
             <a:avLst/>
@@ -10311,119 +10652,55 @@
               <a:spcAft>
                 <a:spcPts val="800"/>
               </a:spcAft>
-              <a:defRPr sz="1500" b="1">
-                <a:solidFill>
-                  <a:srgbClr val="1E3A8A"/>
-                </a:solidFill>
-                <a:latin typeface="Arial"/>
-              </a:defRPr>
-            </a:pPr>
-            <a:r>
-              <a:t>Ciclo Ágil Scrum Adaptado</a:t>
-            </a:r>
-          </a:p>
-          <a:p>
-            <a:pPr>
-              <a:spcAft>
-                <a:spcPts val="500"/>
-              </a:spcAft>
-              <a:defRPr sz="1100">
-                <a:latin typeface="Arial"/>
-              </a:defRPr>
-            </a:pPr>
-            <a:r>
-              <a:rPr b="1">
-                <a:solidFill>
-                  <a:srgbClr val="1E3A8A"/>
-                </a:solidFill>
-              </a:rPr>
-              <a:t>Sprints Bisemanales: </a:t>
-            </a:r>
-            <a:r>
-              <a:rPr>
-                <a:solidFill>
-                  <a:srgbClr val="334155"/>
-                </a:solidFill>
-              </a:rPr>
-              <a:t>Ciclos de 2 semanas con entregables funcionales e incrementales.</a:t>
-            </a:r>
-          </a:p>
-          <a:p>
-            <a:pPr>
-              <a:spcAft>
-                <a:spcPts val="500"/>
-              </a:spcAft>
-              <a:defRPr sz="1100">
-                <a:latin typeface="Arial"/>
-              </a:defRPr>
-            </a:pPr>
-            <a:r>
-              <a:rPr b="1">
-                <a:solidFill>
-                  <a:srgbClr val="1E3A8A"/>
-                </a:solidFill>
-              </a:rPr>
-              <a:t>Product Backlog: </a:t>
-            </a:r>
-            <a:r>
-              <a:rPr>
-                <a:solidFill>
-                  <a:srgbClr val="334155"/>
-                </a:solidFill>
-              </a:rPr>
-              <a:t>Priorizado según los dolores de Lumina Motion y los hitos Duoc UC.</a:t>
-            </a:r>
-          </a:p>
-          <a:p>
-            <a:pPr>
-              <a:spcAft>
-                <a:spcPts val="500"/>
-              </a:spcAft>
-              <a:defRPr sz="1100">
-                <a:latin typeface="Arial"/>
-              </a:defRPr>
-            </a:pPr>
-            <a:r>
-              <a:rPr b="1">
-                <a:solidFill>
-                  <a:srgbClr val="1E3A8A"/>
-                </a:solidFill>
-              </a:rPr>
-              <a:t>Reuniones de Equipo: </a:t>
-            </a:r>
-            <a:r>
-              <a:rPr>
-                <a:solidFill>
-                  <a:srgbClr val="334155"/>
-                </a:solidFill>
-              </a:rPr>
-              <a:t>Sincronización semanal presencial y virtual para remover impedimentos.</a:t>
-            </a:r>
-          </a:p>
-          <a:p>
-            <a:pPr>
-              <a:spcAft>
-                <a:spcPts val="500"/>
-              </a:spcAft>
-              <a:defRPr sz="1100">
-                <a:latin typeface="Arial"/>
-              </a:defRPr>
-            </a:pPr>
-            <a:r>
-              <a:rPr b="1">
-                <a:solidFill>
-                  <a:srgbClr val="1E3A8A"/>
-                </a:solidFill>
-              </a:rPr>
-              <a:t>Demo con Cliente: </a:t>
-            </a:r>
-            <a:r>
-              <a:rPr>
-                <a:solidFill>
-                  <a:srgbClr val="334155"/>
-                </a:solidFill>
-              </a:rPr>
-              <a:t>Validación continua de incrementos con la contraparte técnica.</a:t>
+              <a:defRPr sz="1350" b="1">
+                <a:solidFill>
+                  <a:srgbClr val="003366"/>
+                </a:solidFill>
+                <a:latin typeface="Arial"/>
+              </a:defRPr>
+            </a:pPr>
+            <a:r>
+              <a:t>Relación con Lumina y Modelo Operacional</a:t>
+            </a:r>
+          </a:p>
+          <a:p>
+            <a:pPr>
+              <a:defRPr sz="1000"/>
+            </a:pPr>
+            <a:r>
+              <a:t>• Interlocutor Clave: Cristóbal Manzo, Jefe de Informática en Lumina Motion Studio.</a:t>
+            </a:r>
+          </a:p>
+          <a:p>
+            <a:pPr>
+              <a:defRPr sz="1000"/>
+            </a:pPr>
+            <a:r>
+              <a:t>• Acceso y Validación: Reuniones periódicas de levantamiento funcional y pruebas UAT sobre pantallas reales.</a:t>
+            </a:r>
+          </a:p>
+          <a:p>
+            <a:pPr>
+              <a:defRPr sz="1000"/>
+            </a:pPr>
+            <a:r>
+              <a:t>• Modelo Internal Tooling: Software a medida para operación interna; sustituye licencias comerciales de MadMapper/Arena.im.</a:t>
+            </a:r>
+          </a:p>
+          <a:p>
+            <a:pPr>
+              <a:defRPr sz="1000"/>
+            </a:pPr>
+            <a:r>
+              <a:t>• Impacto Financiero: Reduce a cero los viáticos y traslados técnicos in situ para actualizaciones de anuncios por USB.</a:t>
+            </a:r>
+          </a:p>
+          <a:p>
+            <a:pPr>
+              <a:defRPr sz="1000"/>
+            </a:pPr>
+            <a:r>
+              <a:t>• Viabilidad 18 Semanas: Alcance estrictamente delimitado a distribución, programación y resiliencia (sin edición audiovisual).</a:t>
             </a:r>
           </a:p>
         </p:txBody>
@@ -10437,7 +10714,7 @@
         <p:spPr>
           <a:xfrm>
             <a:off x="777240" y="1691640"/>
-            <a:ext cx="3291840" cy="73152"/>
+            <a:ext cx="5120640" cy="73152"/>
           </a:xfrm>
           <a:prstGeom prst="rect">
             <a:avLst/>
@@ -10479,8 +10756,8 @@
         </p:nvSpPr>
         <p:spPr>
           <a:xfrm>
-            <a:off x="4389120" y="1645920"/>
-            <a:ext cx="3383280" cy="4572000"/>
+            <a:off x="6217920" y="1645920"/>
+            <a:ext cx="5212080" cy="4572000"/>
           </a:xfrm>
           <a:prstGeom prst="roundRect">
             <a:avLst/>
@@ -10524,7 +10801,7 @@
               </a:defRPr>
             </a:pPr>
             <a:r>
-              <a:t>Control de Calidad en GitHub</a:t>
+              <a:t>Matriz de Riesgos y Mitigación</a:t>
             </a:r>
           </a:p>
           <a:p>
@@ -10542,7 +10819,7 @@
                   <a:srgbClr val="1E3A8A"/>
                 </a:solidFill>
               </a:rPr>
-              <a:t>Feature Branches: </a:t>
+              <a:t>Riesgo 1: Pérdida de red en malls </a:t>
             </a:r>
             <a:r>
               <a:rPr>
@@ -10550,7 +10827,7 @@
                   <a:srgbClr val="334155"/>
                 </a:solidFill>
               </a:rPr>
-              <a:t>Desarrollo aislado de funcionalidades en ramas específicas.</a:t>
+              <a:t>Mitigación: Caché local obligatorio (SQLite/local storage) y reproducción autónoma.</a:t>
             </a:r>
           </a:p>
           <a:p>
@@ -10568,7 +10845,7 @@
                   <a:srgbClr val="1E3A8A"/>
                 </a:solidFill>
               </a:rPr>
-              <a:t>Pull Requests Cruzados: </a:t>
+              <a:t>Riesgo 2: Formatos de video dispares </a:t>
             </a:r>
             <a:r>
               <a:rPr>
@@ -10576,7 +10853,7 @@
                   <a:srgbClr val="334155"/>
                 </a:solidFill>
               </a:rPr>
-              <a:t>Revisión obligatoria de código (Peer Review) antes de integrar a main.</a:t>
+              <a:t>Mitigación: Estandarización a MP4 H.264 y validación estricta de códecs al subir.</a:t>
             </a:r>
           </a:p>
           <a:p>
@@ -10594,7 +10871,7 @@
                   <a:srgbClr val="1E3A8A"/>
                 </a:solidFill>
               </a:rPr>
-              <a:t>Trazabilidad Total: </a:t>
+              <a:t>Riesgo 3: Falta de pantallas para pruebas </a:t>
             </a:r>
             <a:r>
               <a:rPr>
@@ -10602,7 +10879,7 @@
                   <a:srgbClr val="334155"/>
                 </a:solidFill>
               </a:rPr>
-              <a:t>Historial transparente de aportes individuales y commits auditables.</a:t>
+              <a:t>Mitigación: Desarrollo de emulador web de pantalla que simula resolución y heartbeats.</a:t>
             </a:r>
           </a:p>
           <a:p>
@@ -10620,7 +10897,7 @@
                   <a:srgbClr val="1E3A8A"/>
                 </a:solidFill>
               </a:rPr>
-              <a:t>Estándar Documental: </a:t>
+              <a:t>Riesgo 4: Corrupción durante descarga </a:t>
             </a:r>
             <a:r>
               <a:rPr>
@@ -10628,7 +10905,7 @@
                   <a:srgbClr val="334155"/>
                 </a:solidFill>
               </a:rPr>
-              <a:t>Control de cambios riguroso en Markdown y repositorios de entrega.</a:t>
+              <a:t>Mitigación: Validación mandatoria de hash criptográfico SHA-256 antes de reproducir.</a:t>
             </a:r>
           </a:p>
         </p:txBody>
@@ -10641,148 +10918,8 @@
         </p:nvSpPr>
         <p:spPr>
           <a:xfrm>
-            <a:off x="4434840" y="1691640"/>
-            <a:ext cx="3291840" cy="73152"/>
-          </a:xfrm>
-          <a:prstGeom prst="rect">
-            <a:avLst/>
-          </a:prstGeom>
-          <a:solidFill>
-            <a:srgbClr val="0D9488"/>
-          </a:solidFill>
-          <a:ln>
-            <a:noFill/>
-          </a:ln>
-        </p:spPr>
-        <p:style>
-          <a:lnRef idx="1">
-            <a:schemeClr val="accent1"/>
-          </a:lnRef>
-          <a:fillRef idx="3">
-            <a:schemeClr val="accent1"/>
-          </a:fillRef>
-          <a:effectRef idx="2">
-            <a:schemeClr val="accent1"/>
-          </a:effectRef>
-          <a:fontRef idx="minor">
-            <a:schemeClr val="lt1"/>
-          </a:fontRef>
-        </p:style>
-        <p:txBody>
-          <a:bodyPr rtlCol="0" anchor="ctr"/>
-          <a:lstStyle/>
-          <a:p>
-            <a:pPr algn="ctr"/>
-          </a:p>
-        </p:txBody>
-      </p:sp>
-      <p:sp>
-        <p:nvSpPr>
-          <p:cNvPr id="9" name="Rounded Rectangle 8"/>
-          <p:cNvSpPr/>
-          <p:nvPr/>
-        </p:nvSpPr>
-        <p:spPr>
-          <a:xfrm>
-            <a:off x="8046720" y="1645920"/>
-            <a:ext cx="3383280" cy="4572000"/>
-          </a:xfrm>
-          <a:prstGeom prst="roundRect">
-            <a:avLst/>
-          </a:prstGeom>
-          <a:solidFill>
-            <a:srgbClr val="F8FAFC"/>
-          </a:solidFill>
-          <a:ln w="12700">
-            <a:solidFill>
-              <a:srgbClr val="E2E8F0"/>
-            </a:solidFill>
-          </a:ln>
-        </p:spPr>
-        <p:style>
-          <a:lnRef idx="1">
-            <a:schemeClr val="accent1"/>
-          </a:lnRef>
-          <a:fillRef idx="3">
-            <a:schemeClr val="accent1"/>
-          </a:fillRef>
-          <a:effectRef idx="2">
-            <a:schemeClr val="accent1"/>
-          </a:effectRef>
-          <a:fontRef idx="minor">
-            <a:schemeClr val="lt1"/>
-          </a:fontRef>
-        </p:style>
-        <p:txBody>
-          <a:bodyPr rtlCol="0" anchor="t" wrap="square" lIns="228600" rIns="228600" tIns="201168" bIns="182880"/>
-          <a:lstStyle/>
-          <a:p>
-            <a:pPr algn="ctr">
-              <a:spcAft>
-                <a:spcPts val="800"/>
-              </a:spcAft>
-              <a:defRPr sz="1500" b="1">
-                <a:solidFill>
-                  <a:srgbClr val="1E3A8A"/>
-                </a:solidFill>
-                <a:latin typeface="Arial"/>
-              </a:defRPr>
-            </a:pPr>
-            <a:r>
-              <a:t>Especialización de Roles</a:t>
-            </a:r>
-          </a:p>
-          <a:p>
-            <a:pPr>
-              <a:spcAft>
-                <a:spcPts val="500"/>
-              </a:spcAft>
-              <a:defRPr sz="1100">
-                <a:latin typeface="Arial"/>
-              </a:defRPr>
-            </a:pPr>
-            <a:r>
-              <a:t>Tomás Escalante: Arquitectura distribuida, backend API Laravel, WebSockets y modelado relacional.</a:t>
-            </a:r>
-          </a:p>
-          <a:p>
-            <a:pPr>
-              <a:spcAft>
-                <a:spcPts val="500"/>
-              </a:spcAft>
-              <a:defRPr sz="1100">
-                <a:latin typeface="Arial"/>
-              </a:defRPr>
-            </a:pPr>
-            <a:r>
-              <a:t>Matías Salas: Gestión ágil Scrum, vinculación con Lumina, construcción de migraciones y pruebas UAT.</a:t>
-            </a:r>
-          </a:p>
-          <a:p>
-            <a:pPr>
-              <a:spcAft>
-                <a:spcPts val="500"/>
-              </a:spcAft>
-              <a:defRPr sz="1100">
-                <a:latin typeface="Arial"/>
-              </a:defRPr>
-            </a:pPr>
-            <a:r>
-              <a:t>Paulo Loyola: Interfaces Blade/UI, paneles de programación, optimización MariaDB y estándar documental.</a:t>
-            </a:r>
-          </a:p>
-        </p:txBody>
-      </p:sp>
-      <p:sp>
-        <p:nvSpPr>
-          <p:cNvPr id="10" name="Rectangle 9"/>
-          <p:cNvSpPr/>
-          <p:nvPr/>
-        </p:nvSpPr>
-        <p:spPr>
-          <a:xfrm>
-            <a:off x="8092440" y="1691640"/>
-            <a:ext cx="3291840" cy="73152"/>
+            <a:off x="6263640" y="1691640"/>
+            <a:ext cx="5120640" cy="73152"/>
           </a:xfrm>
           <a:prstGeom prst="rect">
             <a:avLst/>
@@ -10916,7 +11053,7 @@
               </a:defRPr>
             </a:pPr>
             <a:r>
-              <a:t>Factibilidad, Matriz de Riesgos y Modelo Operacional</a:t>
+              <a:t>Modelo de Datos Relacional (MariaDB) y Frontend</a:t>
             </a:r>
           </a:p>
           <a:p>
@@ -10932,7 +11069,7 @@
               </a:defRPr>
             </a:pPr>
             <a:r>
-              <a:t>Viabilidad en 18 Semanas, Mitigación de Contingencias e Impacto en Lumina Motion</a:t>
+              <a:t>Persistencia ACID, Estructura Jerárquica e Interfaz de Gestión</a:t>
             </a:r>
           </a:p>
         </p:txBody>
@@ -10987,7 +11124,7 @@
               </a:defRPr>
             </a:pPr>
             <a:r>
-              <a:t>Matías Salas | Bloque 2</a:t>
+              <a:t>Paulo Loyola | Bloque 3</a:t>
             </a:r>
           </a:p>
         </p:txBody>
@@ -11037,55 +11174,119 @@
               <a:spcAft>
                 <a:spcPts val="800"/>
               </a:spcAft>
-              <a:defRPr sz="1400" b="1">
-                <a:solidFill>
-                  <a:srgbClr val="003366"/>
-                </a:solidFill>
-                <a:latin typeface="Arial"/>
-              </a:defRPr>
-            </a:pPr>
-            <a:r>
-              <a:t>Relación con Lumina y Modelo Operacional</a:t>
-            </a:r>
-          </a:p>
-          <a:p>
-            <a:pPr>
-              <a:defRPr sz="1050"/>
-            </a:pPr>
-            <a:r>
-              <a:t>• Interlocutor Clave: Cristóbal Manzo, Jefe de Informática en Lumina Motion Studio.</a:t>
-            </a:r>
-          </a:p>
-          <a:p>
-            <a:pPr>
-              <a:defRPr sz="1050"/>
-            </a:pPr>
-            <a:r>
-              <a:t>• Acceso y Validación: Reuniones periódicas de levantamiento funcional y pruebas UAT sobre pantallas reales.</a:t>
-            </a:r>
-          </a:p>
-          <a:p>
-            <a:pPr>
-              <a:defRPr sz="1050"/>
-            </a:pPr>
-            <a:r>
-              <a:t>• Modelo Internal Tooling: Software a medida para operación interna; sustituye licencias comerciales de MadMapper/Arena.im.</a:t>
-            </a:r>
-          </a:p>
-          <a:p>
-            <a:pPr>
-              <a:defRPr sz="1050"/>
-            </a:pPr>
-            <a:r>
-              <a:t>• Impacto Financiero: Reduce a cero los viáticos y traslados técnicos in situ para actualizaciones de anuncios por USB.</a:t>
-            </a:r>
-          </a:p>
-          <a:p>
-            <a:pPr>
-              <a:defRPr sz="1050"/>
-            </a:pPr>
-            <a:r>
-              <a:t>• Viabilidad 18 Semanas: Alcance estrictamente delimitado a distribución, programación y resiliencia (sin edición audiovisual).</a:t>
+              <a:defRPr sz="1500" b="1">
+                <a:solidFill>
+                  <a:srgbClr val="1E3A8A"/>
+                </a:solidFill>
+                <a:latin typeface="Arial"/>
+              </a:defRPr>
+            </a:pPr>
+            <a:r>
+              <a:t>Arquitectura de Datos (MariaDB 3FN)</a:t>
+            </a:r>
+          </a:p>
+          <a:p>
+            <a:pPr>
+              <a:spcAft>
+                <a:spcPts val="500"/>
+              </a:spcAft>
+              <a:defRPr sz="1100">
+                <a:latin typeface="Arial"/>
+              </a:defRPr>
+            </a:pPr>
+            <a:r>
+              <a:t>Jerarquía de Ubicación: Locación (ej. Mall Costanera) → Sectores (ej. Patio Comidas) → Pantallas individuales.</a:t>
+            </a:r>
+          </a:p>
+          <a:p>
+            <a:pPr>
+              <a:spcAft>
+                <a:spcPts val="500"/>
+              </a:spcAft>
+              <a:defRPr sz="1100">
+                <a:latin typeface="Arial"/>
+              </a:defRPr>
+            </a:pPr>
+            <a:r>
+              <a:rPr b="1">
+                <a:solidFill>
+                  <a:srgbClr val="1E3A8A"/>
+                </a:solidFill>
+              </a:rPr>
+              <a:t>Entidades de Contenido: </a:t>
+            </a:r>
+            <a:r>
+              <a:rPr>
+                <a:solidFill>
+                  <a:srgbClr val="334155"/>
+                </a:solidFill>
+              </a:rPr>
+              <a:t>Catálogo de Medios con metadatos, peso, resolución y Checksum SHA-256.</a:t>
+            </a:r>
+          </a:p>
+          <a:p>
+            <a:pPr>
+              <a:spcAft>
+                <a:spcPts val="500"/>
+              </a:spcAft>
+              <a:defRPr sz="1100">
+                <a:latin typeface="Arial"/>
+              </a:defRPr>
+            </a:pPr>
+            <a:r>
+              <a:rPr b="1">
+                <a:solidFill>
+                  <a:srgbClr val="1E3A8A"/>
+                </a:solidFill>
+              </a:rPr>
+              <a:t>Listas y Programación: </a:t>
+            </a:r>
+            <a:r>
+              <a:rPr>
+                <a:solidFill>
+                  <a:srgbClr val="334155"/>
+                </a:solidFill>
+              </a:rPr>
+              <a:t>Playlists secuenciales asociadas a Reglas Horarias (días, horas de inicio/fin).</a:t>
+            </a:r>
+          </a:p>
+          <a:p>
+            <a:pPr>
+              <a:spcAft>
+                <a:spcPts val="500"/>
+              </a:spcAft>
+              <a:defRPr sz="1100">
+                <a:latin typeface="Arial"/>
+              </a:defRPr>
+            </a:pPr>
+            <a:r>
+              <a:rPr b="1">
+                <a:solidFill>
+                  <a:srgbClr val="1E3A8A"/>
+                </a:solidFill>
+              </a:rPr>
+              <a:t>Integridad y Transacciones: </a:t>
+            </a:r>
+            <a:r>
+              <a:rPr>
+                <a:solidFill>
+                  <a:srgbClr val="334155"/>
+                </a:solidFill>
+              </a:rPr>
+              <a:t>Normalización 3FN con llaves foráneas estrictas y operaciones ACID que previenen solapamientos.</a:t>
+            </a:r>
+          </a:p>
+          <a:p>
+            <a:pPr>
+              <a:spcAft>
+                <a:spcPts val="500"/>
+              </a:spcAft>
+              <a:defRPr sz="1100">
+                <a:latin typeface="Arial"/>
+              </a:defRPr>
+            </a:pPr>
+            <a:r>
+              <a:t>Roles y Permisos: Tabla usuarios_locaciones para restringir operadores a locaciones asignadas. Administrador con acceso global.</a:t>
             </a:r>
           </a:p>
         </p:txBody>
@@ -11186,7 +11387,7 @@
               </a:defRPr>
             </a:pPr>
             <a:r>
-              <a:t>Matriz de Riesgos y Mitigación</a:t>
+              <a:t>Frontend y Experiencia de Usuario (UI/UX)</a:t>
             </a:r>
           </a:p>
           <a:p>
@@ -11204,7 +11405,7 @@
                   <a:srgbClr val="1E3A8A"/>
                 </a:solidFill>
               </a:rPr>
-              <a:t>Riesgo 1: Pérdida de red en malls </a:t>
+              <a:t>Vistas Administrativas: </a:t>
             </a:r>
             <a:r>
               <a:rPr>
@@ -11212,7 +11413,7 @@
                   <a:srgbClr val="334155"/>
                 </a:solidFill>
               </a:rPr>
-              <a:t>Mitigación: Caché local obligatorio (SQLite/local storage) y reproducción autónoma.</a:t>
+              <a:t>Desarrolladas con Blade, HTML5/CSS3 y JavaScript responsivo.</a:t>
             </a:r>
           </a:p>
           <a:p>
@@ -11230,7 +11431,7 @@
                   <a:srgbClr val="1E3A8A"/>
                 </a:solidFill>
               </a:rPr>
-              <a:t>Riesgo 2: Formatos de video dispares </a:t>
+              <a:t>Gestor de Pautas Visual: </a:t>
             </a:r>
             <a:r>
               <a:rPr>
@@ -11238,7 +11439,7 @@
                   <a:srgbClr val="334155"/>
                 </a:solidFill>
               </a:rPr>
-              <a:t>Mitigación: Estandarización a MP4 H.264 y validación estricta de códecs al subir.</a:t>
+              <a:t>Visualización gráfica de parrillas horarias para evitar conflictos de programación.</a:t>
             </a:r>
           </a:p>
           <a:p>
@@ -11256,7 +11457,7 @@
                   <a:srgbClr val="1E3A8A"/>
                 </a:solidFill>
               </a:rPr>
-              <a:t>Riesgo 3: Falta de pantallas para pruebas </a:t>
+              <a:t>Monitoreo de Telemetría: </a:t>
             </a:r>
             <a:r>
               <a:rPr>
@@ -11264,7 +11465,7 @@
                   <a:srgbClr val="334155"/>
                 </a:solidFill>
               </a:rPr>
-              <a:t>Mitigación: Desarrollo de emulador web de pantalla que simula resolución y heartbeats.</a:t>
+              <a:t>Panel de estado de pantallas en vivo con semáforo de conectividad (Online/Offline).</a:t>
             </a:r>
           </a:p>
           <a:p>
@@ -11277,20 +11478,7 @@
               </a:defRPr>
             </a:pPr>
             <a:r>
-              <a:rPr b="1">
-                <a:solidFill>
-                  <a:srgbClr val="1E3A8A"/>
-                </a:solidFill>
-              </a:rPr>
-              <a:t>Riesgo 4: Corrupción durante descarga </a:t>
-            </a:r>
-            <a:r>
-              <a:rPr>
-                <a:solidFill>
-                  <a:srgbClr val="334155"/>
-                </a:solidFill>
-              </a:rPr>
-              <a:t>Mitigación: Validación mandatoria de hash criptográfico SHA-256 antes de reproducir.</a:t>
+              <a:t>Modificación Local sin Internet: Panel embebido en nodo NUC para conmutación manual in situ ante contingencias.</a:t>
             </a:r>
           </a:p>
         </p:txBody>
@@ -11310,7 +11498,7 @@
             <a:avLst/>
           </a:prstGeom>
           <a:solidFill>
-            <a:srgbClr val="D97706"/>
+            <a:srgbClr val="0D9488"/>
           </a:solidFill>
           <a:ln>
             <a:noFill/>
@@ -11438,7 +11626,7 @@
               </a:defRPr>
             </a:pPr>
             <a:r>
-              <a:t>Modelo de Datos Relacional (MariaDB) y Frontend</a:t>
+              <a:t>Plan de Trabajo y Carta Gantt — 18 Semanas</a:t>
             </a:r>
           </a:p>
           <a:p>
@@ -11454,7 +11642,7 @@
               </a:defRPr>
             </a:pPr>
             <a:r>
-              <a:t>Persistencia ACID, Estructura Jerárquica e Interfaz de Gestión</a:t>
+              <a:t>Ruta Crítica de 22 Actividades de Ingeniería e Hitos Evaluativos (PTY4614)</a:t>
             </a:r>
           </a:p>
         </p:txBody>
@@ -11523,7 +11711,7 @@
         <p:spPr>
           <a:xfrm>
             <a:off x="731520" y="1645920"/>
-            <a:ext cx="5212080" cy="4572000"/>
+            <a:ext cx="2468880" cy="4572000"/>
           </a:xfrm>
           <a:prstGeom prst="roundRect">
             <a:avLst/>
@@ -11567,7 +11755,7 @@
               </a:defRPr>
             </a:pPr>
             <a:r>
-              <a:t>Arquitectura de Datos (MariaDB 3FN)</a:t>
+              <a:t>Fase 1: Definición (S1-S4)</a:t>
             </a:r>
           </a:p>
           <a:p>
@@ -11580,7 +11768,20 @@
               </a:defRPr>
             </a:pPr>
             <a:r>
-              <a:t>Jerarquía de Ubicación: Locación (ej. Mall Costanera) → Sectores (ej. Patio Comidas) → Pantallas individuales.</a:t>
+              <a:rPr b="1">
+                <a:solidFill>
+                  <a:srgbClr val="1E3A8A"/>
+                </a:solidFill>
+              </a:rPr>
+              <a:t>S1-S2: </a:t>
+            </a:r>
+            <a:r>
+              <a:rPr>
+                <a:solidFill>
+                  <a:srgbClr val="334155"/>
+                </a:solidFill>
+              </a:rPr>
+              <a:t>Constitución y diagnóstico en terreno con Lumina.</a:t>
             </a:r>
           </a:p>
           <a:p>
@@ -11598,7 +11799,7 @@
                   <a:srgbClr val="1E3A8A"/>
                 </a:solidFill>
               </a:rPr>
-              <a:t>Entidades de Contenido: </a:t>
+              <a:t>S3: </a:t>
             </a:r>
             <a:r>
               <a:rPr>
@@ -11606,7 +11807,7 @@
                   <a:srgbClr val="334155"/>
                 </a:solidFill>
               </a:rPr>
-              <a:t>Catálogo de Medios con metadatos, peso, resolución y Checksum SHA-256.</a:t>
+              <a:t>Stack tecnológico y formalización de objetivos.</a:t>
             </a:r>
           </a:p>
           <a:p>
@@ -11624,7 +11825,7 @@
                   <a:srgbClr val="1E3A8A"/>
                 </a:solidFill>
               </a:rPr>
-              <a:t>Listas y Programación: </a:t>
+              <a:t>S4 [HITO 1]: </a:t>
             </a:r>
             <a:r>
               <a:rPr>
@@ -11632,46 +11833,7 @@
                   <a:srgbClr val="334155"/>
                 </a:solidFill>
               </a:rPr>
-              <a:t>Playlists secuenciales asociadas a Reglas Horarias (días, horas de inicio/fin).</a:t>
-            </a:r>
-          </a:p>
-          <a:p>
-            <a:pPr>
-              <a:spcAft>
-                <a:spcPts val="500"/>
-              </a:spcAft>
-              <a:defRPr sz="1100">
-                <a:latin typeface="Arial"/>
-              </a:defRPr>
-            </a:pPr>
-            <a:r>
-              <a:rPr b="1">
-                <a:solidFill>
-                  <a:srgbClr val="1E3A8A"/>
-                </a:solidFill>
-              </a:rPr>
-              <a:t>Integridad y Transacciones: </a:t>
-            </a:r>
-            <a:r>
-              <a:rPr>
-                <a:solidFill>
-                  <a:srgbClr val="334155"/>
-                </a:solidFill>
-              </a:rPr>
-              <a:t>Normalización 3FN con llaves foráneas estrictas y operaciones ACID que previenen solapamientos.</a:t>
-            </a:r>
-          </a:p>
-          <a:p>
-            <a:pPr>
-              <a:spcAft>
-                <a:spcPts val="500"/>
-              </a:spcAft>
-              <a:defRPr sz="1100">
-                <a:latin typeface="Arial"/>
-              </a:defRPr>
-            </a:pPr>
-            <a:r>
-              <a:t>Roles y Permisos: Tabla usuarios_locaciones para restringir operadores a locaciones asignadas. Administrador con acceso global.</a:t>
+              <a:t>Entrega Informe Fase 1 y Exposición Grupal.</a:t>
             </a:r>
           </a:p>
         </p:txBody>
@@ -11685,7 +11847,7 @@
         <p:spPr>
           <a:xfrm>
             <a:off x="777240" y="1691640"/>
-            <a:ext cx="5120640" cy="73152"/>
+            <a:ext cx="2377440" cy="73152"/>
           </a:xfrm>
           <a:prstGeom prst="rect">
             <a:avLst/>
@@ -11727,8 +11889,8 @@
         </p:nvSpPr>
         <p:spPr>
           <a:xfrm>
-            <a:off x="6217920" y="1645920"/>
-            <a:ext cx="5212080" cy="4572000"/>
+            <a:off x="3474720" y="1645920"/>
+            <a:ext cx="2468880" cy="4572000"/>
           </a:xfrm>
           <a:prstGeom prst="roundRect">
             <a:avLst/>
@@ -11772,7 +11934,7 @@
               </a:defRPr>
             </a:pPr>
             <a:r>
-              <a:t>Frontend y Experiencia de Usuario (UI/UX)</a:t>
+              <a:t>Fase 2: Core (S5-S10)</a:t>
             </a:r>
           </a:p>
           <a:p>
@@ -11790,7 +11952,7 @@
                   <a:srgbClr val="1E3A8A"/>
                 </a:solidFill>
               </a:rPr>
-              <a:t>Vistas Administrativas: </a:t>
+              <a:t>S5-S6: </a:t>
             </a:r>
             <a:r>
               <a:rPr>
@@ -11798,7 +11960,7 @@
                   <a:srgbClr val="334155"/>
                 </a:solidFill>
               </a:rPr>
-              <a:t>Desarrolladas con Blade, HTML5/CSS3 y JavaScript responsivo.</a:t>
+              <a:t>Modelado MariaDB y migraciones Laravel.</a:t>
             </a:r>
           </a:p>
           <a:p>
@@ -11816,7 +11978,7 @@
                   <a:srgbClr val="1E3A8A"/>
                 </a:solidFill>
               </a:rPr>
-              <a:t>Gestor de Pautas Visual: </a:t>
+              <a:t>S7-S8: </a:t>
             </a:r>
             <a:r>
               <a:rPr>
@@ -11824,7 +11986,7 @@
                   <a:srgbClr val="334155"/>
                 </a:solidFill>
               </a:rPr>
-              <a:t>Visualización gráfica de parrillas horarias para evitar conflictos de programación.</a:t>
+              <a:t>API RESTful, Auth JWT y carga con SHA-256.</a:t>
             </a:r>
           </a:p>
           <a:p>
@@ -11842,7 +12004,7 @@
                   <a:srgbClr val="1E3A8A"/>
                 </a:solidFill>
               </a:rPr>
-              <a:t>Monitoreo de Telemetría: </a:t>
+              <a:t>S9-S10 [HITO 2]: </a:t>
             </a:r>
             <a:r>
               <a:rPr>
@@ -11850,20 +12012,7 @@
                   <a:srgbClr val="334155"/>
                 </a:solidFill>
               </a:rPr>
-              <a:t>Panel de estado de pantallas en vivo con semáforo de conectividad (Online/Offline).</a:t>
-            </a:r>
-          </a:p>
-          <a:p>
-            <a:pPr>
-              <a:spcAft>
-                <a:spcPts val="500"/>
-              </a:spcAft>
-              <a:defRPr sz="1100">
-                <a:latin typeface="Arial"/>
-              </a:defRPr>
-            </a:pPr>
-            <a:r>
-              <a:t>Modificación Local sin Internet: Panel embebido en nodo NUC para conmutación manual in situ ante contingencias.</a:t>
+              <a:t>Playlists, UI de pautas y Demo Funcional.</a:t>
             </a:r>
           </a:p>
         </p:txBody>
@@ -11876,14 +12025,372 @@
         </p:nvSpPr>
         <p:spPr>
           <a:xfrm>
-            <a:off x="6263640" y="1691640"/>
-            <a:ext cx="5120640" cy="73152"/>
+            <a:off x="3520439" y="1691640"/>
+            <a:ext cx="2377440" cy="73152"/>
           </a:xfrm>
           <a:prstGeom prst="rect">
             <a:avLst/>
           </a:prstGeom>
           <a:solidFill>
             <a:srgbClr val="0D9488"/>
+          </a:solidFill>
+          <a:ln>
+            <a:noFill/>
+          </a:ln>
+        </p:spPr>
+        <p:style>
+          <a:lnRef idx="1">
+            <a:schemeClr val="accent1"/>
+          </a:lnRef>
+          <a:fillRef idx="3">
+            <a:schemeClr val="accent1"/>
+          </a:fillRef>
+          <a:effectRef idx="2">
+            <a:schemeClr val="accent1"/>
+          </a:effectRef>
+          <a:fontRef idx="minor">
+            <a:schemeClr val="lt1"/>
+          </a:fontRef>
+        </p:style>
+        <p:txBody>
+          <a:bodyPr rtlCol="0" anchor="ctr"/>
+          <a:lstStyle/>
+          <a:p>
+            <a:pPr algn="ctr"/>
+          </a:p>
+        </p:txBody>
+      </p:sp>
+      <p:sp>
+        <p:nvSpPr>
+          <p:cNvPr id="9" name="Rounded Rectangle 8"/>
+          <p:cNvSpPr/>
+          <p:nvPr/>
+        </p:nvSpPr>
+        <p:spPr>
+          <a:xfrm>
+            <a:off x="6217920" y="1645920"/>
+            <a:ext cx="2468880" cy="4572000"/>
+          </a:xfrm>
+          <a:prstGeom prst="roundRect">
+            <a:avLst/>
+          </a:prstGeom>
+          <a:solidFill>
+            <a:srgbClr val="F8FAFC"/>
+          </a:solidFill>
+          <a:ln w="12700">
+            <a:solidFill>
+              <a:srgbClr val="E2E8F0"/>
+            </a:solidFill>
+          </a:ln>
+        </p:spPr>
+        <p:style>
+          <a:lnRef idx="1">
+            <a:schemeClr val="accent1"/>
+          </a:lnRef>
+          <a:fillRef idx="3">
+            <a:schemeClr val="accent1"/>
+          </a:fillRef>
+          <a:effectRef idx="2">
+            <a:schemeClr val="accent1"/>
+          </a:effectRef>
+          <a:fontRef idx="minor">
+            <a:schemeClr val="lt1"/>
+          </a:fontRef>
+        </p:style>
+        <p:txBody>
+          <a:bodyPr rtlCol="0" anchor="t" wrap="square" lIns="228600" rIns="228600" tIns="201168" bIns="182880"/>
+          <a:lstStyle/>
+          <a:p>
+            <a:pPr algn="ctr">
+              <a:spcAft>
+                <a:spcPts val="800"/>
+              </a:spcAft>
+              <a:defRPr sz="1500" b="1">
+                <a:solidFill>
+                  <a:srgbClr val="1E3A8A"/>
+                </a:solidFill>
+                <a:latin typeface="Arial"/>
+              </a:defRPr>
+            </a:pPr>
+            <a:r>
+              <a:t>Fase 3: Resiliencia (S11-S15)</a:t>
+            </a:r>
+          </a:p>
+          <a:p>
+            <a:pPr>
+              <a:spcAft>
+                <a:spcPts val="500"/>
+              </a:spcAft>
+              <a:defRPr sz="1100">
+                <a:latin typeface="Arial"/>
+              </a:defRPr>
+            </a:pPr>
+            <a:r>
+              <a:rPr b="1">
+                <a:solidFill>
+                  <a:srgbClr val="1E3A8A"/>
+                </a:solidFill>
+              </a:rPr>
+              <a:t>S11-S12: </a:t>
+            </a:r>
+            <a:r>
+              <a:rPr>
+                <a:solidFill>
+                  <a:srgbClr val="334155"/>
+                </a:solidFill>
+              </a:rPr>
+              <a:t>Servidor WebSockets y Player local.</a:t>
+            </a:r>
+          </a:p>
+          <a:p>
+            <a:pPr>
+              <a:spcAft>
+                <a:spcPts val="500"/>
+              </a:spcAft>
+              <a:defRPr sz="1100">
+                <a:latin typeface="Arial"/>
+              </a:defRPr>
+            </a:pPr>
+            <a:r>
+              <a:rPr b="1">
+                <a:solidFill>
+                  <a:srgbClr val="1E3A8A"/>
+                </a:solidFill>
+              </a:rPr>
+              <a:t>S13-S14: </a:t>
+            </a:r>
+            <a:r>
+              <a:rPr>
+                <a:solidFill>
+                  <a:srgbClr val="334155"/>
+                </a:solidFill>
+              </a:rPr>
+              <a:t>Módulo Fail-Safe y panel web local.</a:t>
+            </a:r>
+          </a:p>
+          <a:p>
+            <a:pPr>
+              <a:spcAft>
+                <a:spcPts val="500"/>
+              </a:spcAft>
+              <a:defRPr sz="1100">
+                <a:latin typeface="Arial"/>
+              </a:defRPr>
+            </a:pPr>
+            <a:r>
+              <a:rPr b="1">
+                <a:solidFill>
+                  <a:srgbClr val="1E3A8A"/>
+                </a:solidFill>
+              </a:rPr>
+              <a:t>S15 [HITO 3]: </a:t>
+            </a:r>
+            <a:r>
+              <a:rPr>
+                <a:solidFill>
+                  <a:srgbClr val="334155"/>
+                </a:solidFill>
+              </a:rPr>
+              <a:t>Entrega software consolidado y manuales.</a:t>
+            </a:r>
+          </a:p>
+        </p:txBody>
+      </p:sp>
+      <p:sp>
+        <p:nvSpPr>
+          <p:cNvPr id="10" name="Rectangle 9"/>
+          <p:cNvSpPr/>
+          <p:nvPr/>
+        </p:nvSpPr>
+        <p:spPr>
+          <a:xfrm>
+            <a:off x="6263640" y="1691640"/>
+            <a:ext cx="2377440" cy="73152"/>
+          </a:xfrm>
+          <a:prstGeom prst="rect">
+            <a:avLst/>
+          </a:prstGeom>
+          <a:solidFill>
+            <a:srgbClr val="D97706"/>
+          </a:solidFill>
+          <a:ln>
+            <a:noFill/>
+          </a:ln>
+        </p:spPr>
+        <p:style>
+          <a:lnRef idx="1">
+            <a:schemeClr val="accent1"/>
+          </a:lnRef>
+          <a:fillRef idx="3">
+            <a:schemeClr val="accent1"/>
+          </a:fillRef>
+          <a:effectRef idx="2">
+            <a:schemeClr val="accent1"/>
+          </a:effectRef>
+          <a:fontRef idx="minor">
+            <a:schemeClr val="lt1"/>
+          </a:fontRef>
+        </p:style>
+        <p:txBody>
+          <a:bodyPr rtlCol="0" anchor="ctr"/>
+          <a:lstStyle/>
+          <a:p>
+            <a:pPr algn="ctr"/>
+          </a:p>
+        </p:txBody>
+      </p:sp>
+      <p:sp>
+        <p:nvSpPr>
+          <p:cNvPr id="11" name="Rounded Rectangle 10"/>
+          <p:cNvSpPr/>
+          <p:nvPr/>
+        </p:nvSpPr>
+        <p:spPr>
+          <a:xfrm>
+            <a:off x="8961120" y="1645920"/>
+            <a:ext cx="2468880" cy="4572000"/>
+          </a:xfrm>
+          <a:prstGeom prst="roundRect">
+            <a:avLst/>
+          </a:prstGeom>
+          <a:solidFill>
+            <a:srgbClr val="F8FAFC"/>
+          </a:solidFill>
+          <a:ln w="12700">
+            <a:solidFill>
+              <a:srgbClr val="E2E8F0"/>
+            </a:solidFill>
+          </a:ln>
+        </p:spPr>
+        <p:style>
+          <a:lnRef idx="1">
+            <a:schemeClr val="accent1"/>
+          </a:lnRef>
+          <a:fillRef idx="3">
+            <a:schemeClr val="accent1"/>
+          </a:fillRef>
+          <a:effectRef idx="2">
+            <a:schemeClr val="accent1"/>
+          </a:effectRef>
+          <a:fontRef idx="minor">
+            <a:schemeClr val="lt1"/>
+          </a:fontRef>
+        </p:style>
+        <p:txBody>
+          <a:bodyPr rtlCol="0" anchor="t" wrap="square" lIns="228600" rIns="228600" tIns="201168" bIns="182880"/>
+          <a:lstStyle/>
+          <a:p>
+            <a:pPr algn="ctr">
+              <a:spcAft>
+                <a:spcPts val="800"/>
+              </a:spcAft>
+              <a:defRPr sz="1500" b="1">
+                <a:solidFill>
+                  <a:srgbClr val="1E3A8A"/>
+                </a:solidFill>
+                <a:latin typeface="Arial"/>
+              </a:defRPr>
+            </a:pPr>
+            <a:r>
+              <a:t>Fase 4: Cierre (S16-S18)</a:t>
+            </a:r>
+          </a:p>
+          <a:p>
+            <a:pPr>
+              <a:spcAft>
+                <a:spcPts val="500"/>
+              </a:spcAft>
+              <a:defRPr sz="1100">
+                <a:latin typeface="Arial"/>
+              </a:defRPr>
+            </a:pPr>
+            <a:r>
+              <a:rPr b="1">
+                <a:solidFill>
+                  <a:srgbClr val="1E3A8A"/>
+                </a:solidFill>
+              </a:rPr>
+              <a:t>S16: </a:t>
+            </a:r>
+            <a:r>
+              <a:rPr>
+                <a:solidFill>
+                  <a:srgbClr val="334155"/>
+                </a:solidFill>
+              </a:rPr>
+              <a:t>Pruebas UAT en terreno con Cristóbal Manzo.</a:t>
+            </a:r>
+          </a:p>
+          <a:p>
+            <a:pPr>
+              <a:spcAft>
+                <a:spcPts val="500"/>
+              </a:spcAft>
+              <a:defRPr sz="1100">
+                <a:latin typeface="Arial"/>
+              </a:defRPr>
+            </a:pPr>
+            <a:r>
+              <a:rPr b="1">
+                <a:solidFill>
+                  <a:srgbClr val="1E3A8A"/>
+                </a:solidFill>
+              </a:rPr>
+              <a:t>S17 [HITO 4]: </a:t>
+            </a:r>
+            <a:r>
+              <a:rPr>
+                <a:solidFill>
+                  <a:srgbClr val="334155"/>
+                </a:solidFill>
+              </a:rPr>
+              <a:t>Ensayo y Defensa Presencial (Sesión 1).</a:t>
+            </a:r>
+          </a:p>
+          <a:p>
+            <a:pPr>
+              <a:spcAft>
+                <a:spcPts val="500"/>
+              </a:spcAft>
+              <a:defRPr sz="1100">
+                <a:latin typeface="Arial"/>
+              </a:defRPr>
+            </a:pPr>
+            <a:r>
+              <a:rPr b="1">
+                <a:solidFill>
+                  <a:srgbClr val="1E3A8A"/>
+                </a:solidFill>
+              </a:rPr>
+              <a:t>S18 [HITO 4]: </a:t>
+            </a:r>
+            <a:r>
+              <a:rPr>
+                <a:solidFill>
+                  <a:srgbClr val="334155"/>
+                </a:solidFill>
+              </a:rPr>
+              <a:t>Defensa Final de Titulación y Cierre de Actas.</a:t>
+            </a:r>
+          </a:p>
+        </p:txBody>
+      </p:sp>
+      <p:sp>
+        <p:nvSpPr>
+          <p:cNvPr id="12" name="Rectangle 11"/>
+          <p:cNvSpPr/>
+          <p:nvPr/>
+        </p:nvSpPr>
+        <p:spPr>
+          <a:xfrm>
+            <a:off x="9006840" y="1691640"/>
+            <a:ext cx="2377440" cy="73152"/>
+          </a:xfrm>
+          <a:prstGeom prst="rect">
+            <a:avLst/>
+          </a:prstGeom>
+          <a:solidFill>
+            <a:srgbClr val="1E3A8A"/>
           </a:solidFill>
           <a:ln>
             <a:noFill/>
@@ -11922,6 +12429,14 @@
 <file path=ppt/slides/slide9.xml><?xml version="1.0" encoding="utf-8"?>
 <p:sld xmlns:a="http://schemas.openxmlformats.org/drawingml/2006/main" xmlns:p="http://schemas.openxmlformats.org/presentationml/2006/main" xmlns:r="http://schemas.openxmlformats.org/officeDocument/2006/relationships">
   <p:cSld>
+    <p:bg>
+      <p:bgPr>
+        <a:solidFill>
+          <a:srgbClr val="FFFFFF"/>
+        </a:solidFill>
+        <a:effectLst/>
+      </p:bgPr>
+    </p:bg>
     <p:spTree>
       <p:nvGrpSpPr>
         <p:cNvPr id="1" name=""/>
@@ -11938,13 +12453,13 @@
         <p:spPr>
           <a:xfrm>
             <a:off x="731520" y="457200"/>
-            <a:ext cx="10725912" cy="45720"/>
+            <a:ext cx="10728655" cy="45720"/>
           </a:xfrm>
           <a:prstGeom prst="rect">
             <a:avLst/>
           </a:prstGeom>
           <a:solidFill>
-            <a:srgbClr val="003366"/>
+            <a:srgbClr val="2563EB"/>
           </a:solidFill>
           <a:ln>
             <a:noFill/>
@@ -11981,7 +12496,7 @@
         <p:spPr>
           <a:xfrm>
             <a:off x="731520" y="594360"/>
-            <a:ext cx="8412480" cy="822960"/>
+            <a:ext cx="8686800" cy="822960"/>
           </a:xfrm>
           <a:prstGeom prst="rect">
             <a:avLst/>
@@ -11989,32 +12504,37 @@
           <a:noFill/>
         </p:spPr>
         <p:txBody>
-          <a:bodyPr wrap="square">
+          <a:bodyPr wrap="square" lIns="0" tIns="0" rIns="0" bIns="0">
             <a:spAutoFit/>
           </a:bodyPr>
           <a:lstStyle/>
           <a:p>
             <a:pPr>
-              <a:defRPr b="1" sz="2200">
-                <a:solidFill>
-                  <a:srgbClr val="003366"/>
-                </a:solidFill>
-              </a:defRPr>
-            </a:pPr>
-            <a:r>
-              <a:t>Prototipos Visuales de Interfaz (Mockups Figma)</a:t>
-            </a:r>
-          </a:p>
-          <a:p>
-            <a:pPr>
+              <a:defRPr sz="2400" b="1">
+                <a:solidFill>
+                  <a:srgbClr val="1E3A8A"/>
+                </a:solidFill>
+                <a:latin typeface="Arial"/>
+              </a:defRPr>
+            </a:pPr>
+            <a:r>
+              <a:t>Evidencias del Proyecto y Conclusión</a:t>
+            </a:r>
+          </a:p>
+          <a:p>
+            <a:pPr>
+              <a:spcBef>
+                <a:spcPts val="200"/>
+              </a:spcBef>
               <a:defRPr sz="1300">
                 <a:solidFill>
-                  <a:srgbClr val="646464"/>
-                </a:solidFill>
-              </a:defRPr>
-            </a:pPr>
-            <a:r>
-              <a:t>Diseño UI/UX del Panel Administrativo Centralizado y Monitoreo de Pantallas</a:t>
+                  <a:srgbClr val="64748B"/>
+                </a:solidFill>
+                <a:latin typeface="Arial"/>
+              </a:defRPr>
+            </a:pPr>
+            <a:r>
+              <a:t>Acreditación Rigurosa e Integración del Perfil de Egreso</a:t>
             </a:r>
           </a:p>
         </p:txBody>
@@ -12027,18 +12547,18 @@
         </p:nvSpPr>
         <p:spPr>
           <a:xfrm>
-            <a:off x="9144000" y="640080"/>
-            <a:ext cx="2313432" cy="411480"/>
+            <a:off x="9326880" y="640080"/>
+            <a:ext cx="2133295" cy="411480"/>
           </a:xfrm>
           <a:prstGeom prst="roundRect">
             <a:avLst/>
           </a:prstGeom>
           <a:solidFill>
-            <a:srgbClr val="F0F3F6"/>
+            <a:srgbClr val="EEF2FF"/>
           </a:solidFill>
-          <a:ln>
+          <a:ln w="12700">
             <a:solidFill>
-              <a:srgbClr val="C8D2DC"/>
+              <a:srgbClr val="2563EB"/>
             </a:solidFill>
           </a:ln>
         </p:spPr>
@@ -12061,10 +12581,11 @@
           <a:lstStyle/>
           <a:p>
             <a:pPr algn="ctr">
-              <a:defRPr sz="1100" b="1">
-                <a:solidFill>
-                  <a:srgbClr val="003366"/>
-                </a:solidFill>
+              <a:defRPr sz="1050" b="1">
+                <a:solidFill>
+                  <a:srgbClr val="2563EB"/>
+                </a:solidFill>
+                <a:latin typeface="Arial"/>
               </a:defRPr>
             </a:pPr>
             <a:r>
@@ -12082,7 +12603,7 @@
         <p:spPr>
           <a:xfrm>
             <a:off x="731520" y="1645920"/>
-            <a:ext cx="3474720" cy="4389120"/>
+            <a:ext cx="5212080" cy="4572000"/>
           </a:xfrm>
           <a:prstGeom prst="roundRect">
             <a:avLst/>
@@ -12090,9 +12611,9 @@
           <a:solidFill>
             <a:srgbClr val="F8FAFC"/>
           </a:solidFill>
-          <a:ln>
+          <a:ln w="12700">
             <a:solidFill>
-              <a:srgbClr val="DAE1E9"/>
+              <a:srgbClr val="E2E8F0"/>
             </a:solidFill>
           </a:ln>
         </p:spPr>
@@ -12111,139 +12632,201 @@
           </a:fontRef>
         </p:style>
         <p:txBody>
-          <a:bodyPr rtlCol="0" anchor="ctr" wrap="square"/>
+          <a:bodyPr rtlCol="0" anchor="t" wrap="square" lIns="228600" rIns="228600" tIns="201168" bIns="182880"/>
           <a:lstStyle/>
           <a:p>
             <a:pPr algn="ctr">
-              <a:defRPr b="1" sz="1300">
-                <a:solidFill>
-                  <a:srgbClr val="003366"/>
-                </a:solidFill>
-              </a:defRPr>
-            </a:pPr>
-            <a:r>
-              <a:t>Componentes de Interfaz UI/UX</a:t>
-            </a:r>
-          </a:p>
-          <a:p>
-            <a:pPr>
-              <a:defRPr b="1" sz="1050">
-                <a:solidFill>
-                  <a:srgbClr val="141E2D"/>
-                </a:solidFill>
-              </a:defRPr>
-            </a:pPr>
-            <a:r>
-              <a:t>• 1. Monitoreo NUC en Vivo</a:t>
-            </a:r>
-          </a:p>
-          <a:p>
-            <a:pPr>
-              <a:defRPr sz="950">
-                <a:solidFill>
-                  <a:srgbClr val="5A646E"/>
-                </a:solidFill>
-              </a:defRPr>
-            </a:pPr>
-            <a:r>
-              <a:t>   Panel de pantallas con semáforo de conectividad (Online / Offline) y última comunicación.</a:t>
-            </a:r>
-          </a:p>
-          <a:p>
-            <a:pPr>
-              <a:defRPr b="1" sz="1050">
-                <a:solidFill>
-                  <a:srgbClr val="141E2D"/>
-                </a:solidFill>
-              </a:defRPr>
-            </a:pPr>
-            <a:r>
-              <a:t>• 2. Catálogo de Medios</a:t>
-            </a:r>
-          </a:p>
-          <a:p>
-            <a:pPr>
-              <a:defRPr sz="950">
-                <a:solidFill>
-                  <a:srgbClr val="5A646E"/>
-                </a:solidFill>
-              </a:defRPr>
-            </a:pPr>
-            <a:r>
-              <a:t>   Carga de videos MP4/imágenes, cálculo SHA-256 automático y metadatos de peso/resolución.</a:t>
-            </a:r>
-          </a:p>
-          <a:p>
-            <a:pPr>
-              <a:defRPr b="1" sz="1050">
-                <a:solidFill>
-                  <a:srgbClr val="141E2D"/>
-                </a:solidFill>
-              </a:defRPr>
-            </a:pPr>
-            <a:r>
-              <a:t>• 3. Parrilla de Horarios</a:t>
-            </a:r>
-          </a:p>
-          <a:p>
-            <a:pPr>
-              <a:defRPr sz="950">
-                <a:solidFill>
-                  <a:srgbClr val="5A646E"/>
-                </a:solidFill>
-              </a:defRPr>
-            </a:pPr>
-            <a:r>
-              <a:t>   Timeline visual para programar listas de reproducción por locación y sector sin solapamientos.</a:t>
-            </a:r>
-          </a:p>
-          <a:p>
-            <a:pPr>
-              <a:defRPr b="1" sz="1050">
-                <a:solidFill>
-                  <a:srgbClr val="141E2D"/>
-                </a:solidFill>
-              </a:defRPr>
-            </a:pPr>
-            <a:r>
-              <a:t>• 4. Vistas por Rol</a:t>
-            </a:r>
-          </a:p>
-          <a:p>
-            <a:pPr>
-              <a:defRPr sz="950">
-                <a:solidFill>
-                  <a:srgbClr val="5A646E"/>
-                </a:solidFill>
-              </a:defRPr>
-            </a:pPr>
-            <a:r>
-              <a:t>   Acceso global para Administrador y vistas restringidas a locaciones asignadas para Operador.</a:t>
-            </a:r>
-          </a:p>
-        </p:txBody>
-      </p:sp>
-      <p:sp>
-        <p:nvSpPr>
-          <p:cNvPr id="6" name="Rounded Rectangle 5"/>
+              <a:spcAft>
+                <a:spcPts val="800"/>
+              </a:spcAft>
+              <a:defRPr sz="1500" b="1">
+                <a:solidFill>
+                  <a:srgbClr val="1E3A8A"/>
+                </a:solidFill>
+                <a:latin typeface="Arial"/>
+              </a:defRPr>
+            </a:pPr>
+            <a:r>
+              <a:t>Evidencias Objetivas de Acreditación</a:t>
+            </a:r>
+          </a:p>
+          <a:p>
+            <a:pPr>
+              <a:spcAft>
+                <a:spcPts val="500"/>
+              </a:spcAft>
+              <a:defRPr sz="1100">
+                <a:latin typeface="Arial"/>
+              </a:defRPr>
+            </a:pPr>
+            <a:r>
+              <a:rPr b="1">
+                <a:solidFill>
+                  <a:srgbClr val="1E3A8A"/>
+                </a:solidFill>
+              </a:rPr>
+              <a:t>EVID-01 (Gestión): </a:t>
+            </a:r>
+            <a:r>
+              <a:rPr>
+                <a:solidFill>
+                  <a:srgbClr val="334155"/>
+                </a:solidFill>
+              </a:rPr>
+              <a:t>Acta de levantamiento y alcance validada por Cristóbal Manzo (Lumina).</a:t>
+            </a:r>
+          </a:p>
+          <a:p>
+            <a:pPr>
+              <a:spcAft>
+                <a:spcPts val="500"/>
+              </a:spcAft>
+              <a:defRPr sz="1100">
+                <a:latin typeface="Arial"/>
+              </a:defRPr>
+            </a:pPr>
+            <a:r>
+              <a:rPr b="1">
+                <a:solidFill>
+                  <a:srgbClr val="1E3A8A"/>
+                </a:solidFill>
+              </a:rPr>
+              <a:t>EVID-02 (Ingeniería DB): </a:t>
+            </a:r>
+            <a:r>
+              <a:rPr>
+                <a:solidFill>
+                  <a:srgbClr val="334155"/>
+                </a:solidFill>
+              </a:rPr>
+              <a:t>Diagrama E-R, diccionario de datos y migraciones MariaDB ejecutables.</a:t>
+            </a:r>
+          </a:p>
+          <a:p>
+            <a:pPr>
+              <a:spcAft>
+                <a:spcPts val="500"/>
+              </a:spcAft>
+              <a:defRPr sz="1100">
+                <a:latin typeface="Arial"/>
+              </a:defRPr>
+            </a:pPr>
+            <a:r>
+              <a:rPr b="1">
+                <a:solidFill>
+                  <a:srgbClr val="1E3A8A"/>
+                </a:solidFill>
+              </a:rPr>
+              <a:t>EVID-03 (Desarrollo): </a:t>
+            </a:r>
+            <a:r>
+              <a:rPr>
+                <a:solidFill>
+                  <a:srgbClr val="334155"/>
+                </a:solidFill>
+              </a:rPr>
+              <a:t>Repositorio GitHub con commits trazables y Pull Requests cruzados.</a:t>
+            </a:r>
+          </a:p>
+          <a:p>
+            <a:pPr>
+              <a:spcAft>
+                <a:spcPts val="500"/>
+              </a:spcAft>
+              <a:defRPr sz="1100">
+                <a:latin typeface="Arial"/>
+              </a:defRPr>
+            </a:pPr>
+            <a:r>
+              <a:rPr b="1">
+                <a:solidFill>
+                  <a:srgbClr val="1E3A8A"/>
+                </a:solidFill>
+              </a:rPr>
+              <a:t>EVID-04 (Servicios): </a:t>
+            </a:r>
+            <a:r>
+              <a:rPr>
+                <a:solidFill>
+                  <a:srgbClr val="334155"/>
+                </a:solidFill>
+              </a:rPr>
+              <a:t>Colección Postman y especificación interactiva OpenAPI / Swagger.</a:t>
+            </a:r>
+          </a:p>
+          <a:p>
+            <a:pPr>
+              <a:spcAft>
+                <a:spcPts val="500"/>
+              </a:spcAft>
+              <a:defRPr sz="1100">
+                <a:latin typeface="Arial"/>
+              </a:defRPr>
+            </a:pPr>
+            <a:r>
+              <a:rPr b="1">
+                <a:solidFill>
+                  <a:srgbClr val="1E3A8A"/>
+                </a:solidFill>
+              </a:rPr>
+              <a:t>EVID-05 (Resiliencia): </a:t>
+            </a:r>
+            <a:r>
+              <a:rPr>
+                <a:solidFill>
+                  <a:srgbClr val="334155"/>
+                </a:solidFill>
+              </a:rPr>
+              <a:t>Matriz y video de prueba de desconexión forzada de red (Fail-Safe).</a:t>
+            </a:r>
+          </a:p>
+          <a:p>
+            <a:pPr>
+              <a:spcAft>
+                <a:spcPts val="500"/>
+              </a:spcAft>
+              <a:defRPr sz="1100">
+                <a:latin typeface="Arial"/>
+              </a:defRPr>
+            </a:pPr>
+            <a:r>
+              <a:rPr b="1">
+                <a:solidFill>
+                  <a:srgbClr val="1E3A8A"/>
+                </a:solidFill>
+              </a:rPr>
+              <a:t>EVID-06 (Validación): </a:t>
+            </a:r>
+            <a:r>
+              <a:rPr>
+                <a:solidFill>
+                  <a:srgbClr val="334155"/>
+                </a:solidFill>
+              </a:rPr>
+              <a:t>Acta formal de recepción y pruebas de usuario (UAT) de Lumina Motion.</a:t>
+            </a:r>
+          </a:p>
+        </p:txBody>
+      </p:sp>
+      <p:sp>
+        <p:nvSpPr>
+          <p:cNvPr id="6" name="Rectangle 5"/>
           <p:cNvSpPr/>
           <p:nvPr/>
         </p:nvSpPr>
         <p:spPr>
           <a:xfrm>
-            <a:off x="4389120" y="1645920"/>
-            <a:ext cx="7068312" cy="4389120"/>
-          </a:xfrm>
-          <a:prstGeom prst="roundRect">
+            <a:off x="777240" y="1691640"/>
+            <a:ext cx="5120640" cy="73152"/>
+          </a:xfrm>
+          <a:prstGeom prst="rect">
             <a:avLst/>
           </a:prstGeom>
           <a:solidFill>
-            <a:srgbClr val="F0F4F8"/>
+            <a:srgbClr val="2563EB"/>
           </a:solidFill>
-          <a:ln w="25400">
-            <a:solidFill>
-              <a:srgbClr val="003366"/>
-            </a:solidFill>
+          <a:ln>
+            <a:noFill/>
           </a:ln>
         </p:spPr>
         <p:style>
@@ -12261,39 +12844,215 @@
           </a:fontRef>
         </p:style>
         <p:txBody>
-          <a:bodyPr rtlCol="0" anchor="ctr" wrap="square"/>
+          <a:bodyPr rtlCol="0" anchor="ctr"/>
+          <a:lstStyle/>
+          <a:p>
+            <a:pPr algn="ctr"/>
+          </a:p>
+        </p:txBody>
+      </p:sp>
+      <p:sp>
+        <p:nvSpPr>
+          <p:cNvPr id="7" name="Rounded Rectangle 6"/>
+          <p:cNvSpPr/>
+          <p:nvPr/>
+        </p:nvSpPr>
+        <p:spPr>
+          <a:xfrm>
+            <a:off x="6217920" y="1645920"/>
+            <a:ext cx="5212080" cy="4572000"/>
+          </a:xfrm>
+          <a:prstGeom prst="roundRect">
+            <a:avLst/>
+          </a:prstGeom>
+          <a:solidFill>
+            <a:srgbClr val="F8FAFC"/>
+          </a:solidFill>
+          <a:ln w="12700">
+            <a:solidFill>
+              <a:srgbClr val="E2E8F0"/>
+            </a:solidFill>
+          </a:ln>
+        </p:spPr>
+        <p:style>
+          <a:lnRef idx="1">
+            <a:schemeClr val="accent1"/>
+          </a:lnRef>
+          <a:fillRef idx="3">
+            <a:schemeClr val="accent1"/>
+          </a:fillRef>
+          <a:effectRef idx="2">
+            <a:schemeClr val="accent1"/>
+          </a:effectRef>
+          <a:fontRef idx="minor">
+            <a:schemeClr val="lt1"/>
+          </a:fontRef>
+        </p:style>
+        <p:txBody>
+          <a:bodyPr rtlCol="0" anchor="t" wrap="square" lIns="228600" rIns="228600" tIns="201168" bIns="182880"/>
           <a:lstStyle/>
           <a:p>
             <a:pPr algn="ctr">
-              <a:defRPr b="1" sz="1500">
-                <a:solidFill>
-                  <a:srgbClr val="003366"/>
-                </a:solidFill>
-              </a:defRPr>
-            </a:pPr>
-            <a:br/>
-            <a:br/>
-            <a:br/>
-            <a:r>
-              <a:t>🖼️ [ESPACIO RESERVADO PARA WIREFRAME / MOCKUP DE FIGMA]</a:t>
-            </a:r>
-          </a:p>
-          <a:p>
-            <a:pPr algn="ctr">
+              <a:spcAft>
+                <a:spcPts val="800"/>
+              </a:spcAft>
+              <a:defRPr sz="1500" b="1">
+                <a:solidFill>
+                  <a:srgbClr val="1E3A8A"/>
+                </a:solidFill>
+                <a:latin typeface="Arial"/>
+              </a:defRPr>
+            </a:pPr>
+            <a:r>
+              <a:t>Conclusión y Valor Agregado</a:t>
+            </a:r>
+          </a:p>
+          <a:p>
+            <a:pPr>
+              <a:spcAft>
+                <a:spcPts val="500"/>
+              </a:spcAft>
               <a:defRPr sz="1100">
-                <a:solidFill>
-                  <a:srgbClr val="6E7882"/>
-                </a:solidFill>
-              </a:defRPr>
-            </a:pPr>
-            <a:br/>
-            <a:r>
-              <a:t>Pegue o inserte aquí la captura de pantalla del prototipo de alta fidelidad diseñado en Figma.</a:t>
-            </a:r>
-            <a:br/>
-            <a:r>
-              <a:t>(Panel Web Reactivo Blade • Parrilla de Programación • Telemetría NUC en Vivo)</a:t>
-            </a:r>
+                <a:latin typeface="Arial"/>
+              </a:defRPr>
+            </a:pPr>
+            <a:r>
+              <a:rPr b="1">
+                <a:solidFill>
+                  <a:srgbClr val="1E3A8A"/>
+                </a:solidFill>
+              </a:rPr>
+              <a:t>Solución Industrial Real: </a:t>
+            </a:r>
+            <a:r>
+              <a:rPr>
+                <a:solidFill>
+                  <a:srgbClr val="334155"/>
+                </a:solidFill>
+              </a:rPr>
+              <a:t>Resuelve el dolor logístico y los costos de licenciamiento de Lumina Motion.</a:t>
+            </a:r>
+          </a:p>
+          <a:p>
+            <a:pPr>
+              <a:spcAft>
+                <a:spcPts val="500"/>
+              </a:spcAft>
+              <a:defRPr sz="1100">
+                <a:latin typeface="Arial"/>
+              </a:defRPr>
+            </a:pPr>
+            <a:r>
+              <a:rPr b="1">
+                <a:solidFill>
+                  <a:srgbClr val="1E3A8A"/>
+                </a:solidFill>
+              </a:rPr>
+              <a:t>Autonomía sin Conexión: </a:t>
+            </a:r>
+            <a:r>
+              <a:rPr>
+                <a:solidFill>
+                  <a:srgbClr val="334155"/>
+                </a:solidFill>
+              </a:rPr>
+              <a:t>Garantía de continuidad operativa ante caídas de internet en eventos masivos.</a:t>
+            </a:r>
+          </a:p>
+          <a:p>
+            <a:pPr>
+              <a:spcAft>
+                <a:spcPts val="500"/>
+              </a:spcAft>
+              <a:defRPr sz="1100">
+                <a:latin typeface="Arial"/>
+              </a:defRPr>
+            </a:pPr>
+            <a:r>
+              <a:rPr b="1">
+                <a:solidFill>
+                  <a:srgbClr val="1E3A8A"/>
+                </a:solidFill>
+              </a:rPr>
+              <a:t>Integración Formativa: </a:t>
+            </a:r>
+            <a:r>
+              <a:rPr>
+                <a:solidFill>
+                  <a:srgbClr val="334155"/>
+                </a:solidFill>
+              </a:rPr>
+              <a:t>Articulación plena de las 4 competencias clave del perfil de egreso Duoc UC: Desarrollo Fullstack, Bases de Datos, Arquitectura y Gestión Ágil.</a:t>
+            </a:r>
+          </a:p>
+          <a:p>
+            <a:pPr>
+              <a:spcAft>
+                <a:spcPts val="500"/>
+              </a:spcAft>
+              <a:defRPr sz="1100">
+                <a:latin typeface="Arial"/>
+              </a:defRPr>
+            </a:pPr>
+            <a:r>
+              <a:rPr b="1">
+                <a:solidFill>
+                  <a:srgbClr val="1E3A8A"/>
+                </a:solidFill>
+              </a:rPr>
+              <a:t>Discurso de Cierre: </a:t>
+            </a:r>
+            <a:r>
+              <a:rPr>
+                <a:solidFill>
+                  <a:srgbClr val="334155"/>
+                </a:solidFill>
+              </a:rPr>
+              <a:t>'Con ACE no solo resolvemos un problema logístico de Lumina Motion, sino que demostramos la integración transversal de las competencias de nuestro perfil de egreso en Duoc UC. Quedamos atentos a sus preguntas.'</a:t>
+            </a:r>
+          </a:p>
+        </p:txBody>
+      </p:sp>
+      <p:sp>
+        <p:nvSpPr>
+          <p:cNvPr id="8" name="Rectangle 7"/>
+          <p:cNvSpPr/>
+          <p:nvPr/>
+        </p:nvSpPr>
+        <p:spPr>
+          <a:xfrm>
+            <a:off x="6263640" y="1691640"/>
+            <a:ext cx="5120640" cy="73152"/>
+          </a:xfrm>
+          <a:prstGeom prst="rect">
+            <a:avLst/>
+          </a:prstGeom>
+          <a:solidFill>
+            <a:srgbClr val="0D9488"/>
+          </a:solidFill>
+          <a:ln>
+            <a:noFill/>
+          </a:ln>
+        </p:spPr>
+        <p:style>
+          <a:lnRef idx="1">
+            <a:schemeClr val="accent1"/>
+          </a:lnRef>
+          <a:fillRef idx="3">
+            <a:schemeClr val="accent1"/>
+          </a:fillRef>
+          <a:effectRef idx="2">
+            <a:schemeClr val="accent1"/>
+          </a:effectRef>
+          <a:fontRef idx="minor">
+            <a:schemeClr val="lt1"/>
+          </a:fontRef>
+        </p:style>
+        <p:txBody>
+          <a:bodyPr rtlCol="0" anchor="ctr"/>
+          <a:lstStyle/>
+          <a:p>
+            <a:pPr algn="ctr"/>
           </a:p>
         </p:txBody>
       </p:sp>
